--- a/docs/presentation/KSTAR_CES_발표자료_20분.pptx
+++ b/docs/presentation/KSTAR_CES_발표자료_20분.pptx
@@ -28,6 +28,7 @@
     <p:sldId id="276" r:id="rId28"/>
     <p:sldId id="277" r:id="rId29"/>
     <p:sldId id="278" r:id="rId30"/>
+    <p:sldId id="279" r:id="rId31"/>
   </p:sldIdLst>
   <p:sldSz cx="12191695" cy="6858000" type="screen4x3"/>
   <p:notesSz cx="6858000" cy="9144000"/>
@@ -530,39 +531,29 @@
           <a:p/>
           <a:p>
             <a:r>
-              <a:t>"안녕하십니까, 이승상입니다. KSTAR의 빠른 진단으로 CES 결측 구간을 채우는 연구를</a:t>
-            </a:r>
-          </a:p>
-          <a:p>
-            <a:r>
-              <a:t> 20분간 말씀드리겠습니다."</a:t>
+              <a:t>본 발표는 KSTAR의 빠른 진단으로 CES 결측 구간을 채우는 연구를 20분간 보고한다.</a:t>
             </a:r>
           </a:p>
           <a:p/>
           <a:p>
             <a:r>
-              <a:t>핵심 한 문장(여기서 미리 던지기):</a:t>
-            </a:r>
-          </a:p>
-          <a:p>
-            <a:r>
-              <a:t>  "느리고 자주 비는 CES를, 항상 측정되는 빠른 진단으로 채울 수 있는지 —</a:t>
-            </a:r>
-          </a:p>
-          <a:p>
-            <a:r>
-              <a:t>   그것도 미래까지 보는 오프라인 보간을 이길 수 있는지 통계적으로 검증했습니다."</a:t>
+              <a:t>핵심 한 문장을 먼저 제시한다: 느리고 자주 비는 CES를 항상 측정되는 빠른 진단으로 채울 수 있는지,</a:t>
+            </a:r>
+          </a:p>
+          <a:p>
+            <a:r>
+              <a:t>그리고 미래까지 읽는 오프라인 보간을 인과 모델이 이길 수 있는지를 통계적으로 검증하였다.</a:t>
             </a:r>
           </a:p>
           <a:p/>
           <a:p>
             <a:r>
-              <a:t>※ 용어: forecasting(예보)이 아니라 nowcasting(현재 시점 결측 채우기).</a:t>
-            </a:r>
-          </a:p>
-          <a:p>
-            <a:r>
-              <a:t>※ 재실험(B.1–B.5) 후 확정 프로토콜 기준 수치다. 옛 W=4 발표 수치는 전부 폐기.</a:t>
+              <a:t>용어: forecasting(예보)이 아니라 nowcasting(현재 시점의 결측 채우기)이다.</a:t>
+            </a:r>
+          </a:p>
+          <a:p>
+            <a:r>
+              <a:t>재실험(B.1–B.5)과 B.9 이후의 확정 프로토콜 수치이며, 옛 W=4 발표 수치는 전부 폐기되었다.</a:t>
             </a:r>
           </a:p>
         </p:txBody>
@@ -632,50 +623,45 @@
           <a:lstStyle/>
           <a:p>
             <a:r>
-              <a:t>⏱ 07:35–08:10  (35초)</a:t>
+              <a:t>⏱ 06:50–07:20  (30초)</a:t>
             </a:r>
           </a:p>
           <a:p/>
           <a:p>
             <a:r>
-              <a:t>"짝지은 대조군이 옛 주 모델입니다. 진단별 시간 인지 1D CNN에 양방향 GRU 이력</a:t>
-            </a:r>
-          </a:p>
-          <a:p>
-            <a:r>
-              <a:t> 인코더, 그 위에 관측 마스킹 attention pooling을 얹은 20만 파라미터 모델입니다.</a:t>
-            </a:r>
-          </a:p>
-          <a:p>
-            <a:r>
-              <a:t> attention이 해당 타겟이 실제 관측된 행에만 질량을 허용합니다 — 보간의 귀납 편향을</a:t>
-            </a:r>
-          </a:p>
-          <a:p>
-            <a:r>
-              <a:t> 파라미터 0개로 이식한 겁니다. 이 구조는 40여 회 keep/discard 통제 실험의 산물입니다.</a:t>
+              <a:t>짝지은 대조군은 옛 주 모델이다. 진단별 시간 인지 1D CNN, 양방향 GRU 이력 인코더, 그 위의 관측</a:t>
+            </a:r>
+          </a:p>
+          <a:p>
+            <a:r>
+              <a:t>마스킹 attention pooling으로 구성된 201,258 파라미터 모델이다. attention은 해당 타깃이 실제</a:t>
+            </a:r>
+          </a:p>
+          <a:p>
+            <a:r>
+              <a:t>관측된 행에만 질량을 허용하며, 보간의 귀납 편향을 파라미터 0개로 이식한 것이다. 약 40회의</a:t>
+            </a:r>
+          </a:p>
+          <a:p>
+            <a:r>
+              <a:t>keep/discard 통제 실험의 산물이다.</a:t>
             </a:r>
           </a:p>
           <a:p/>
           <a:p>
             <a:r>
-              <a:t> 지금 이 모델의 역할은 셋입니다. 백본 관문의 비교 대상, 절제 실험의 무대,</a:t>
-            </a:r>
-          </a:p>
-          <a:p>
-            <a:r>
-              <a:t> 그리고 캠페인 붕괴의 재현자입니다. 데이터 계약·held 처리·분할·채점 모집단이</a:t>
-            </a:r>
-          </a:p>
-          <a:p>
-            <a:r>
-              <a:t> 백본과 완전히 같아서 행 단위로 짝지어 비교할 수 있습니다."</a:t>
+              <a:t>현재 역할은 셋이다: 백본 관문의 비교 대상, 절제 실험의 무대, 캠페인 붕괴의 재현자이다. 데이터</a:t>
+            </a:r>
+          </a:p>
+          <a:p>
+            <a:r>
+              <a:t>계약·held 처리·분할·채점 모집단이 백본과 동일하므로 행 단위로 짝지어 비교된다.</a:t>
             </a:r>
           </a:p>
           <a:p/>
           <a:p>
             <a:r>
-              <a:t>※ 시간이 밀리면 30초로 줄이고 "옛 주 모델이 지금은 대조군"만 전달.</a:t>
+              <a:t>시간이 부족하면 ‘옛 주 모델이 현재는 대조군’이라는 사실만 전달한다.</a:t>
             </a:r>
           </a:p>
         </p:txBody>
@@ -745,77 +731,67 @@
           <a:lstStyle/>
           <a:p>
             <a:r>
-              <a:t>⏱ 08:10–09:00  (50초)  ★ 통계 질문이 나오는 구간 — 여기서 신뢰를 확보</a:t>
+              <a:t>⏱ 07:20–08:05  (45초)  ★ 통계 질문이 나오는 구간</a:t>
             </a:r>
           </a:p>
           <a:p/>
           <a:p>
             <a:r>
-              <a:t>"결과를 보여드리기 전에, 이 숫자를 믿어도 되는 이유를 말씀드립니다.</a:t>
+              <a:t>결과에 앞서 수치의 신뢰 근거를 제시한다.</a:t>
             </a:r>
           </a:p>
           <a:p/>
           <a:p>
             <a:r>
-              <a:t> 왼쪽이 TEST 동결입니다. test 방전은 아키텍처 탐색을 시작하기 전에 떼어놓고</a:t>
-            </a:r>
-          </a:p>
-          <a:p>
-            <a:r>
-              <a:t> 선택이 끝날 때까지 한 번도 열지 않았습니다. 모델 선택은 전부 val에서만 했습니다.</a:t>
-            </a:r>
-          </a:p>
-          <a:p>
-            <a:r>
-              <a:t> 그래서 헤드라인 숫자에 winner's curse가 없습니다.</a:t>
+              <a:t>왼쪽은 TEST 동결이다. test 방전은 아키텍처 탐색 전에 분리되었고 선택이 끝날 때까지 열리지</a:t>
+            </a:r>
+          </a:p>
+          <a:p>
+            <a:r>
+              <a:t>않았다. 모델 선택은 전부 val에서 이루어졌으므로 headline 수치에 winner's curse가 없다.</a:t>
             </a:r>
           </a:p>
           <a:p/>
           <a:p>
             <a:r>
-              <a:t> 오른쪽이 사전등록입니다. 결과를 보기 전에 문서로 못박은 것들입니다.</a:t>
-            </a:r>
-          </a:p>
-          <a:p>
-            <a:r>
-              <a:t> 비교 상대는 PCHIP으로 확정, 보간이 예측 못 하는 지점은 persistence로 채점하되</a:t>
-            </a:r>
-          </a:p>
-          <a:p>
-            <a:r>
-              <a:t> 폴백률을 반드시 보고, test 최소 규모, 그리고 '이겼다'는 신뢰구간이 0을 제외할 때만.</a:t>
-            </a:r>
-          </a:p>
-          <a:p>
-            <a:r>
-              <a:t> 여기에 이번 개정에서 held-free, W=2, 파일당 500, 두 모집단, TEST 채점 전 결정 규칙</a:t>
-            </a:r>
-          </a:p>
-          <a:p>
-            <a:r>
-              <a:t> 커밋이 추가됐습니다.</a:t>
+              <a:t>오른쪽은 사전등록이다. 비교 상대는 PCHIP으로 확정하고, 보간이 예측하지 못하는 지점은</a:t>
+            </a:r>
+          </a:p>
+          <a:p>
+            <a:r>
+              <a:t>persistence로 채점하되 폴백률을 보고하며, test 최소 규모를 두고, 신뢰구간이 0을 제외할 때만</a:t>
+            </a:r>
+          </a:p>
+          <a:p>
+            <a:r>
+              <a:t>‘이겼다’고 판정한다. 이번 개정에서 held-free, W=2, 파일당 500, 두 모집단, TEST 채점 전</a:t>
+            </a:r>
+          </a:p>
+          <a:p>
+            <a:r>
+              <a:t>결정 규칙 커밋이 추가되었다.</a:t>
             </a:r>
           </a:p>
           <a:p/>
           <a:p>
             <a:r>
-              <a:t> 아래가 기준선 사다리입니다. 위 세 개가 인과, 아래 세 개가 미래를 보는 오프라인입니다.</a:t>
-            </a:r>
-          </a:p>
-          <a:p>
-            <a:r>
-              <a:t> 인과 GP가 배치 가능한 최강 상대입니다."</a:t>
+              <a:t>아래는 기준선 사다리이다. 위 세 개가 인과, 아래 두 개가 미래를 읽는 오프라인이며 인과 GP가</a:t>
+            </a:r>
+          </a:p>
+          <a:p>
+            <a:r>
+              <a:t>배치 가능한 최강 상대이다.</a:t>
             </a:r>
           </a:p>
           <a:p/>
           <a:p>
             <a:r>
-              <a:t>※ 예상 질문 "왜 PCHIP인가?" → 단조성을 보존해 overshoot이 적은 보수적(=강한) 기준선이고,</a:t>
-            </a:r>
-          </a:p>
-          <a:p>
-            <a:r>
-              <a:t>   타겟 양쪽의 과거+미래를 다 본다. 즉 우리에게 불리하게 설계된 기준선.</a:t>
+              <a:t>예상 질문 ‘왜 PCHIP인가’: 단조성을 보존하여 overshoot이 적은 보수적이고 강한 기준선이며,</a:t>
+            </a:r>
+          </a:p>
+          <a:p>
+            <a:r>
+              <a:t>타깃 양쪽의 과거와 미래를 모두 읽는다. 즉 모델에 불리하게 설계된 기준선이다.</a:t>
             </a:r>
           </a:p>
         </p:txBody>
@@ -885,76 +861,66 @@
           <a:lstStyle/>
           <a:p>
             <a:r>
-              <a:t>⏱ 09:00–09:50  (50초)</a:t>
+              <a:t>⏱ 08:05–08:50  (45초)</a:t>
             </a:r>
           </a:p>
           <a:p/>
           <a:p>
             <a:r>
-              <a:t>"신뢰구간을 행이 아니라 방전 단위로 계산했습니다. 한 방전 안의 10 ms 간격 측정들은</a:t>
-            </a:r>
-          </a:p>
-          <a:p>
-            <a:r>
-              <a:t> 거의 복사본입니다. 그걸 3만 개의 독립 증거처럼 세면 확신이 과장됩니다. 그래서</a:t>
-            </a:r>
-          </a:p>
-          <a:p>
-            <a:r>
-              <a:t> 짝지은 오차를 shot으로 묶고, shot을 통째로 만 번 재추출했습니다. 우리에게 불리한</a:t>
-            </a:r>
-          </a:p>
-          <a:p>
-            <a:r>
-              <a:t> 계산이지만 '새로운 방전에서도 이길까'라는 진짜 질문에 답하는 방식입니다.</a:t>
-            </a:r>
-          </a:p>
-          <a:p>
-            <a:r>
-              <a:t> 그래서 검정력의 상한은 샘플 수가 아니라 방전 수입니다 — Tᵢ 96개, 회전 60~66개.</a:t>
+              <a:t>신뢰구간은 행이 아니라 방전 단위로 계산하였다. 한 방전 안의 10 ms 간격 측정들은 거의 복사본이므로,</a:t>
+            </a:r>
+          </a:p>
+          <a:p>
+            <a:r>
+              <a:t>이를 수만 개의 독립 증거로 세면 확신이 과장된다. 따라서 짝지은 오차를 shot으로 묶고 shot을 통째로</a:t>
+            </a:r>
+          </a:p>
+          <a:p>
+            <a:r>
+              <a:t>10,000회 재추출하였다. 모델에 불리한 계산이지만 ‘새로운 방전에서도 이기는가’에 답하는 방식이며,</a:t>
+            </a:r>
+          </a:p>
+          <a:p>
+            <a:r>
+              <a:t>검정력의 상한은 샘플 수가 아니라 방전 수(Tᵢ 96, 회전 60~66)이다.</a:t>
             </a:r>
           </a:p>
           <a:p/>
           <a:p>
             <a:r>
-              <a:t> 오른쪽 아래가 두 모집단입니다. Tᵢ 관측값의 0.53%가 3 keV를 넘는데, 이건 플라즈마가</a:t>
-            </a:r>
-          </a:p>
-          <a:p>
-            <a:r>
-              <a:t> 아니라 실패한 스펙트럼 피팅입니다. 빼면 '어려운 행을 없앴다', 두면 '스파이크가</a:t>
-            </a:r>
-          </a:p>
-          <a:p>
-            <a:r>
-              <a:t> 보간 앵커를 오염시킨다' — 어느 쪽도 비판을 피할 수 없어서 둘 다 공동 1차로 사전등록했고,</a:t>
-            </a:r>
-          </a:p>
-          <a:p>
-            <a:r>
-              <a:t> 무조건부 주장은 양쪽에서 성립할 때만 합니다.</a:t>
+              <a:t>두 모집단: Tᵢ 관측값의 0.53%가 3 keV를 넘으며 이는 플라즈마가 아니라 실패한 스펙트럼 피팅이다.</a:t>
+            </a:r>
+          </a:p>
+          <a:p>
+            <a:r>
+              <a:t>제거하면 어려운 행을 없앴다는 비판을, 유지하면 스파이크가 보간 앵커를 오염시킨다는 비판을 받으므로</a:t>
+            </a:r>
+          </a:p>
+          <a:p>
+            <a:r>
+              <a:t>둘 다 공동 1차로 사전등록하였고, 무조건부 주장은 양쪽에서 성립할 때만 한다.</a:t>
             </a:r>
           </a:p>
           <a:p/>
           <a:p>
             <a:r>
-              <a:t> 아래는 모델 선택입니다. 백본을 바꾸는 관문의 네 조건을 먼저 못박고 그다음 충족시켰고,</a:t>
-            </a:r>
-          </a:p>
-          <a:p>
-            <a:r>
-              <a:t> 그 뒤 유일한 아키텍처 후보는 4개 분할 전부 양수였는데도 유의가 1개뿐이라 승격하지</a:t>
-            </a:r>
-          </a:p>
-          <a:p>
-            <a:r>
-              <a:t> 않았습니다. val에서는 2/2 유의였다는 게, 승격 기준을 TEST에 두는 이유입니다."</a:t>
+              <a:t>모델 선택: 백본을 바꾸는 관문의 네 조건을 먼저 고정한 뒤 충족시켰고, 이후 유일한 아키텍처 후보는</a:t>
+            </a:r>
+          </a:p>
+          <a:p>
+            <a:r>
+              <a:t>4개 분할 전부 양수였음에도 유의가 1개뿐이어서 승격하지 않았다. val에서는 2/2 유의였다는 점이</a:t>
+            </a:r>
+          </a:p>
+          <a:p>
+            <a:r>
+              <a:t>승격 기준을 TEST에 두는 이유이다.</a:t>
             </a:r>
           </a:p>
           <a:p/>
           <a:p>
             <a:r>
-              <a:t>※ 시간이 밀리면 아래 밴드(모델 선택)만 한 줄로 요약하고 넘어갈 것.</a:t>
+              <a:t>시간이 부족하면 아래 밴드(모델 선택)를 한 줄로 요약한다.</a:t>
             </a:r>
           </a:p>
         </p:txBody>
@@ -1024,56 +990,41 @@
           <a:lstStyle/>
           <a:p>
             <a:r>
-              <a:t>⏱ 09:50–10:30  (40초)</a:t>
+              <a:t>⏱ 08:50–09:25  (35초)</a:t>
             </a:r>
           </a:p>
           <a:p/>
           <a:p>
             <a:r>
-              <a:t>"먼저 가장 단순한 결과입니다. RMSE 사다리이고, 낮을수록 좋습니다.</a:t>
+              <a:t>가장 단순한 결과인 RMSE 사다리이며 낮을수록 좋다.</a:t>
             </a:r>
           </a:p>
           <a:p/>
           <a:p>
             <a:r>
-              <a:t> 두 타겟 모두 백본이 맨 아래, 즉 오차가 가장 작습니다. persistence나 국소 AR 같은</a:t>
-            </a:r>
-          </a:p>
-          <a:p>
-            <a:r>
-              <a:t> 인과 기준선은 큰 마진으로 이깁니다. 그리고 배치 가능한 최강 상대인 인과 GP보다도</a:t>
-            </a:r>
-          </a:p>
-          <a:p>
-            <a:r>
-              <a:t> Tᵢ는 4%, 회전은 18% 낮습니다.</a:t>
-            </a:r>
-          </a:p>
-          <a:p>
-            <a:r>
-              <a:t> 미래까지 보는 오프라인 GP와는 153.8 대 157.8로 사실상 동률입니다 — 이게 오프라인</a:t>
-            </a:r>
-          </a:p>
-          <a:p>
-            <a:r>
-              <a:t> 주장의 상한이고, 저희는 이걸 숨기지 않고 같이 보고합니다.</a:t>
+              <a:t>두 타깃 모두 백본이 최저 오차이다. persistence나 국소 AR 같은 인과 기준선은 큰 마진으로</a:t>
+            </a:r>
+          </a:p>
+          <a:p>
+            <a:r>
+              <a:t>이기고, 배치 가능한 최강 상대인 인과 GP보다도 Tᵢ 4%, 회전 18% 낮다. 미래까지 읽는 오프라인</a:t>
+            </a:r>
+          </a:p>
+          <a:p>
+            <a:r>
+              <a:t>GP와는 153.8 대 157.8로 동률이며, 이것이 오프라인 주장의 상한이고 함께 보고한다.</a:t>
             </a:r>
           </a:p>
           <a:p/>
           <a:p>
             <a:r>
-              <a:t> 포함 모집단에서는 스파이크 때문에 Tᵢ RMSE가 두 배 이상 커지지만 순서는 그대로입니다."</a:t>
+              <a:t>포함 모집단에서는 스파이크 때문에 Tᵢ RMSE가 두 배 이상 커지지만 순서는 유지된다.</a:t>
             </a:r>
           </a:p>
           <a:p/>
           <a:p>
             <a:r>
-              <a:t>※ 다음 슬라이드로 넘기는 말: "point estimate가 앞선다고 이겼다고 말하면 안 됩니다.</a:t>
-            </a:r>
-          </a:p>
-          <a:p>
-            <a:r>
-              <a:t>   그래서 신뢰구간을 봅니다."</a:t>
+              <a:t>다음 슬라이드로의 연결: 점추정이 앞선다는 것만으로 이겼다고 하지 않으며 신뢰구간을 본다.</a:t>
             </a:r>
           </a:p>
         </p:txBody>
@@ -1143,76 +1094,56 @@
           <a:lstStyle/>
           <a:p>
             <a:r>
-              <a:t>⏱ 10:30–11:40  (70초)  ★ 헤드라인 결과</a:t>
+              <a:t>⏱ 09:25–10:30  (65초)  ★ headline 결과</a:t>
             </a:r>
           </a:p>
           <a:p/>
           <a:p>
             <a:r>
-              <a:t>"이게 헤드라인입니다. forest plot이고 가로축이 PCHIP 대비 skill입니다.</a:t>
-            </a:r>
-          </a:p>
-          <a:p>
-            <a:r>
-              <a:t> 점이 추정치, 가로 막대가 shot 군집 95% 신뢰구간입니다. 막대가 0선을 넘지 않으면</a:t>
-            </a:r>
-          </a:p>
-          <a:p>
-            <a:r>
-              <a:t> 통계적으로 유의하게 이긴 겁니다.</a:t>
+              <a:t>forest plot이며 가로축이 PCHIP 대비 skill이다. 점이 추정치, 가로 막대가 shot 군집 95%</a:t>
+            </a:r>
+          </a:p>
+          <a:p>
+            <a:r>
+              <a:t>신뢰구간이며, 막대가 0선을 넘지 않으면 통계적으로 유의하게 이긴 것이다.</a:t>
             </a:r>
           </a:p>
           <a:p/>
           <a:p>
             <a:r>
-              <a:t> 위쪽 Tᵢ를 보시면, 4개의 독립 분할 전부에서 신뢰구간이 0을 제외합니다.</a:t>
-            </a:r>
-          </a:p>
-          <a:p>
-            <a:r>
-              <a:t> 컷 모집단에서 +0.17에서 +0.26, 포함 모집단에서 +0.23에서 +0.32 — 4/4에 4/4입니다.</a:t>
-            </a:r>
-          </a:p>
-          <a:p>
-            <a:r>
-              <a:t> 데이터 처리 방식에 관계없이 성립한다는 뜻이고, 그래서 이건 무조건부 주장입니다.</a:t>
-            </a:r>
-          </a:p>
-          <a:p>
-            <a:r>
-              <a:t> 8개 셀 전부에서 인과 GP와 persistence도 이깁니다.</a:t>
+              <a:t>Tᵢ는 4개의 독립 분할 전부에서 신뢰구간이 0을 제외한다. 컷 모집단 +0.17~+0.26, 포함 모집단</a:t>
+            </a:r>
+          </a:p>
+          <a:p>
+            <a:r>
+              <a:t>+0.23~+0.32로 4/4와 4/4이다. 데이터 처리 방식에 무관하게 성립하므로 무조건부 주장이다.</a:t>
+            </a:r>
+          </a:p>
+          <a:p>
+            <a:r>
+              <a:t>8개 셀 전부에서 인과 GP와 persistence도 이긴다.</a:t>
             </a:r>
           </a:p>
           <a:p/>
           <a:p>
             <a:r>
-              <a:t> 아래쪽 회전은 다릅니다. 점추정은 8개 셀 전부 양수지만, 유의는 컷 1개, 포함 2개뿐입니다.</a:t>
-            </a:r>
-          </a:p>
-          <a:p>
-            <a:r>
-              <a:t> 4개 중 1~2개는 잡음이 만들 수 있는 수준이라 저는 이걸 '이겼다'고 쓰지 않고 동률로</a:t>
-            </a:r>
-          </a:p>
-          <a:p>
-            <a:r>
-              <a:t> 보고합니다.</a:t>
+              <a:t>회전은 다르다. 점추정은 8개 셀 전부 양수이나 유의는 컷 1개, 포함 2개뿐이다. 4개 중 1~2개는</a:t>
+            </a:r>
+          </a:p>
+          <a:p>
+            <a:r>
+              <a:t>잡음이 만들 수 있는 수준이므로 ‘이겼다’고 쓰지 않고 동률로 보고한다.</a:t>
             </a:r>
           </a:p>
           <a:p/>
           <a:p>
             <a:r>
-              <a:t> 한 가지 더 정직하게 말씀드리면, 포함 모집단 수치가 더 높아 보이는 건 모델이 더 잘해서가</a:t>
-            </a:r>
-          </a:p>
-          <a:p>
-            <a:r>
-              <a:t> 아니라 스파이크가 보간 앵커를 오염시켜 모든 arm이 좋아 보이기 때문입니다.</a:t>
-            </a:r>
-          </a:p>
-          <a:p>
-            <a:r>
-              <a:t> 그 성분을 결과 ⑥에서 분해합니다."</a:t>
+              <a:t>포함 모집단의 수치가 더 높아 보이는 것은 모델이 더 잘해서가 아니라 스파이크가 보간 앵커를</a:t>
+            </a:r>
+          </a:p>
+          <a:p>
+            <a:r>
+              <a:t>오염시켜 모든 arm이 좋아 보이기 때문이며, 그 성분은 결과 ⑥에서 분해된다.</a:t>
             </a:r>
           </a:p>
         </p:txBody>
@@ -1282,60 +1213,50 @@
           <a:lstStyle/>
           <a:p>
             <a:r>
-              <a:t>⏱ 11:40–12:30  (50초)</a:t>
+              <a:t>⏱ 10:30–11:15  (45초)</a:t>
             </a:r>
           </a:p>
           <a:p/>
           <a:p>
             <a:r>
-              <a:t>"주 모델을 왜 바꿨는지가 이 슬라이드입니다. 백본 관문입니다.</a:t>
+              <a:t>주 모델을 바꾼 근거인 백본 관문이다.</a:t>
             </a:r>
           </a:p>
           <a:p/>
           <a:p>
             <a:r>
-              <a:t> 조건 네 개를 먼저 못박았습니다 — 4개 분할 전부 부호 유지, 통합 신뢰구간이 0 제외,</a:t>
-            </a:r>
-          </a:p>
-          <a:p>
-            <a:r>
-              <a:t> 예산을 균등하게 맞춰도 부호 유지, 그리고 회전에 손해가 없을 것.</a:t>
-            </a:r>
-          </a:p>
-          <a:p>
-            <a:r>
-              <a:t> 분할 4개 × 초기화 4개, 총 16번 학습해서 각 run을 자기 분할의 윈도 대조군과 짝지었습니다.</a:t>
-            </a:r>
-          </a:p>
-          <a:p>
-            <a:r>
-              <a:t> Tᵢ는 16/16 전부 양수, 13개가 유의합니다. 통합하면 +0.081이고 신뢰구간이 +0.067에서</a:t>
-            </a:r>
-          </a:p>
-          <a:p>
-            <a:r>
-              <a:t> +0.096입니다. 학습 예산을 고정해도 4개 분할 부호가 유지되고, 회전은 유의한 열세가</a:t>
-            </a:r>
-          </a:p>
-          <a:p>
-            <a:r>
-              <a:t> 하나도 없습니다.</a:t>
+              <a:t>조건 네 개를 먼저 고정하였다: 4개 분할 전부 부호 유지, 통합 신뢰구간이 0 제외, 예산 균등화에서도</a:t>
+            </a:r>
+          </a:p>
+          <a:p>
+            <a:r>
+              <a:t>부호 유지, 회전에 손해 없음. 분할 4개 × 초기화 4개, 총 16회 학습하여 각 run을 자기 분할의 윈도</a:t>
+            </a:r>
+          </a:p>
+          <a:p>
+            <a:r>
+              <a:t>대조군과 짝지었다. Tᵢ는 16/16 양수, 13개 유의이며 통합 +0.081, 신뢰구간 [+0.067, +0.096]이다.</a:t>
+            </a:r>
+          </a:p>
+          <a:p>
+            <a:r>
+              <a:t>학습 예산을 고정해도 4개 분할 부호가 유지되고 회전의 유의한 열세는 없다.</a:t>
             </a:r>
           </a:p>
           <a:p/>
           <a:p>
             <a:r>
-              <a:t> 무엇을 산 건가. 윈도 대조군은 인과 GP와 동률(1/4)인데 시퀀스 백본은 4/4에 4/4입니다.</a:t>
-            </a:r>
-          </a:p>
-          <a:p>
-            <a:r>
-              <a:t> 세그먼트 과거 전체로의 도달거리가 최강 배치 기준선을 이기게 만든 겁니다.</a:t>
-            </a:r>
-          </a:p>
-          <a:p>
-            <a:r>
-              <a:t> 그리고 비용은 오히려 음수입니다 — 윈도 조립과 조합 증강이 없어서 학습비가 1/10입니다."</a:t>
+              <a:t>의미: 윈도 대조군은 인과 GP와 동률(1/4)인 반면 시퀀스 백본은 4/4와 4/4이다. 세그먼트 과거</a:t>
+            </a:r>
+          </a:p>
+          <a:p>
+            <a:r>
+              <a:t>전체로의 도달 범위가 최강 배치 기준선을 이기게 하였고, 학습 비용은 윈도 조립과 조합 증강이 없어</a:t>
+            </a:r>
+          </a:p>
+          <a:p>
+            <a:r>
+              <a:t>1/10이다. 그 도달 범위 중 실제로 필요한 양은 결과 ⑨에서 측정된다.</a:t>
             </a:r>
           </a:p>
         </p:txBody>
@@ -1405,80 +1326,65 @@
           <a:lstStyle/>
           <a:p>
             <a:r>
-              <a:t>⏱ 12:30–13:40  (70초)  ★ 배치 주장을 가르는 슬라이드</a:t>
+              <a:t>⏱ 11:15–12:20  (65초)  ★ 배치 주장을 가르는 슬라이드</a:t>
             </a:r>
           </a:p>
           <a:p/>
           <a:p>
             <a:r>
-              <a:t>"관측된 지점에서만 채점하면 낙관적입니다 — 결측은 하필 어려운 순간에 몰리니까요.</a:t>
-            </a:r>
-          </a:p>
-          <a:p>
-            <a:r>
-              <a:t> 그래서 결측 행의 층 분포로 채점 지점을 재가중했습니다. 왼쪽입니다.</a:t>
-            </a:r>
-          </a:p>
-          <a:p>
-            <a:r>
-              <a:t> 온라인 시스템이 실제로 경쟁하는 상대인 persistence 대비로는 두 모집단 4개 분할 전부</a:t>
-            </a:r>
-          </a:p>
-          <a:p>
-            <a:r>
-              <a:t> 살아남습니다. 오프라인 보간 대비로는 점추정은 유지되지만 컷 모집단에서 2개 분할의</a:t>
-            </a:r>
-          </a:p>
-          <a:p>
-            <a:r>
-              <a:t> 신뢰구간이 0을 지납니다 — 그래서 모집단 조건부라고 정직하게 씁니다.</a:t>
-            </a:r>
-          </a:p>
-          <a:p>
-            <a:r>
-              <a:t> 한 가지 한계는 명확히 말씀드립니다. 재가중이 도달하는 범위가 Tᵢ는 결측의 54~68%인데</a:t>
-            </a:r>
-          </a:p>
-          <a:p>
-            <a:r>
-              <a:t> 회전은 4~6%뿐입니다. 그래서 재가중 회전은 결론을 내지 않습니다.</a:t>
+              <a:t>관측된 지점에서만 채점하면 낙관적이다. 결측은 어려운 순간에 집중되기 때문이다. 따라서 결측 행의</a:t>
+            </a:r>
+          </a:p>
+          <a:p>
+            <a:r>
+              <a:t>층 분포로 채점 지점을 재가중하였다(왼쪽). 온라인 시스템이 실제로 경쟁하는 persistence 대비로는</a:t>
+            </a:r>
+          </a:p>
+          <a:p>
+            <a:r>
+              <a:t>두 모집단 4개 분할 전부 생존하였다. 오프라인 보간 대비로는 점추정은 유지되지만 컷 모집단에서</a:t>
+            </a:r>
+          </a:p>
+          <a:p>
+            <a:r>
+              <a:t>2개 분할의 신뢰구간이 0을 지나므로 모집단 조건부로 기술한다. 재가중의 도달 범위는 Tᵢ가 결측의</a:t>
+            </a:r>
+          </a:p>
+          <a:p>
+            <a:r>
+              <a:t>54~68%인 반면 회전은 4~6%뿐이므로 재가중 회전은 결론을 내지 않는다.</a:t>
             </a:r>
           </a:p>
           <a:p/>
           <a:p>
             <a:r>
-              <a:t> 오른쪽은 시간 분할입니다. 방전 번호로 잘라서 과거로 학습하고 미래를 맞힙니다.</a:t>
-            </a:r>
-          </a:p>
-          <a:p>
-            <a:r>
-              <a:t> 옛 윈도 모델은 여기서 오프라인 우위를 완전히 잃었습니다 — 컷 2/4, 포함 0/4.</a:t>
-            </a:r>
-          </a:p>
-          <a:p>
-            <a:r>
-              <a:t> 그런데 시퀀스 백본은 4/4에 4/4로 버팁니다. 원인은 추측이 아니라 측정했습니다:</a:t>
-            </a:r>
-          </a:p>
-          <a:p>
-            <a:r>
-              <a:t> 빠른 진단의 드리프트가 1.22σ인데 타겟은 0.115σ입니다. 학습 파일 전용 정규화가</a:t>
-            </a:r>
-          </a:p>
-          <a:p>
-            <a:r>
-              <a:t> 무작위 분할에선 옳지만 캠페인 이동에서 깨지는 겁니다. 백본은 정의상 shot별</a:t>
-            </a:r>
-          </a:p>
-          <a:p>
-            <a:r>
-              <a:t> 표준화를 하기 때문에 그 함정을 피합니다."</a:t>
+              <a:t>오른쪽은 시간 분할이다. 방전 번호로 잘라 과거로 학습하고 미래를 채점하였다. 옛 윈도 모델은</a:t>
+            </a:r>
+          </a:p>
+          <a:p>
+            <a:r>
+              <a:t>오프라인 우위를 완전히 잃었으나(컷 2/4, 포함 0/4) 시퀀스 백본은 4/4와 4/4로 생존하였다.</a:t>
+            </a:r>
+          </a:p>
+          <a:p>
+            <a:r>
+              <a:t>원인은 측정되었다: 빠른 진단의 드리프트가 1.22σ인 반면 타깃은 0.115σ이다. 학습 파일 전용</a:t>
+            </a:r>
+          </a:p>
+          <a:p>
+            <a:r>
+              <a:t>정규화가 무작위 분할에서는 옳지만 캠페인 이동에서 깨지며, 백본은 정의상 shot별 표준화를 하므로</a:t>
+            </a:r>
+          </a:p>
+          <a:p>
+            <a:r>
+              <a:t>이 함정을 피한다.</a:t>
             </a:r>
           </a:p>
           <a:p/>
           <a:p>
             <a:r>
-              <a:t>※ 남는 주의(먼저 말할 것): 캠페인은 한 시간 블록 위의 초기화 4개이지 분할 4개가 아니다.</a:t>
+              <a:t>주의(먼저 말할 것): 캠페인은 한 시간 블록 위의 초기화 4개이며 분할 4개가 아니다.</a:t>
             </a:r>
           </a:p>
         </p:txBody>
@@ -1548,93 +1454,88 @@
           <a:lstStyle/>
           <a:p>
             <a:r>
-              <a:t>⏱ 13:40–14:40  (60초)  ★ 과학적 발견</a:t>
+              <a:t>⏱ 12:20–13:15  (55초)  ★ 과학적 발견</a:t>
             </a:r>
           </a:p>
           <a:p/>
           <a:p>
             <a:r>
-              <a:t>"비대칭이 왜 생기는지를 절제로 확인했습니다. 평가 시점에 modality를 지우는 실험입니다.</a:t>
+              <a:t>비대칭의 원인을 절제로 확인하였다. 평가 시점에 modality를 지우는 실험이다.</a:t>
             </a:r>
           </a:p>
           <a:p/>
           <a:p>
             <a:r>
-              <a:t> 먼저 공통점. 이력을 지우면 두 타겟 모두 무너집니다 — -1에서 -4까지 갑니다.</a:t>
+              <a:t>공통점: 이력을 지우면 두 타깃 모두 무너진다(-1에서 -4까지).</a:t>
             </a:r>
           </a:p>
           <a:p/>
           <a:p>
             <a:r>
-              <a:t> 차이는 빠른 진단입니다. Tᵢ는 컷 모집단에서 빠른 채널을 0으로 만들면 보간 아래로</a:t>
-            </a:r>
-          </a:p>
-          <a:p>
-            <a:r>
-              <a:t> 떨어집니다(-0.125). 즉 보간을 이기는 마진 자체가 빠른 진단이 운반한 정보입니다.</a:t>
-            </a:r>
-          </a:p>
-          <a:p>
-            <a:r>
-              <a:t> 물리적으로도 자연스럽습니다 — ECEI의 Tₑ와 BES의 nₑ가 충돌 e–i 결합으로 Tᵢ와 연결되니까요.</a:t>
+              <a:t>차이는 빠른 진단이다. Tᵢ는 컷 모집단에서 빠른 채널을 0으로 두면 보간 아래로 떨어진다(-0.125).</a:t>
+            </a:r>
+          </a:p>
+          <a:p>
+            <a:r>
+              <a:t>즉 보간을 이기는 마진 자체가 빠른 진단이 운반한 정보이다. 물리적으로 ECEI의 Tₑ와 BES의 nₑ가</a:t>
+            </a:r>
+          </a:p>
+          <a:p>
+            <a:r>
+              <a:t>충돌 e–i 결합으로 Tᵢ와 연결된다.</a:t>
             </a:r>
           </a:p>
           <a:p/>
           <a:p>
             <a:r>
-              <a:t> 회전은 정반대입니다. 빠른 채널을 전부 0으로 만들어도 출력이 비트 단위로 동일합니다.</a:t>
-            </a:r>
-          </a:p>
-          <a:p>
-            <a:r>
-              <a:t> 8개 셀 전부에서요. 회전 정보는 100% CES 이력에서 옵니다.</a:t>
-            </a:r>
-          </a:p>
-          <a:p>
-            <a:r>
-              <a:t> 이유는 두 가지입니다. 회전을 구동하는 NBI 토크가 데이터에 없고, Mirnov는 kHz로</a:t>
-            </a:r>
-          </a:p>
-          <a:p>
-            <a:r>
-              <a:t> 진동하는 dB/dt를 100 Hz로 순간샘플해서 위상이 무작위가 됩니다 — lag-1 자기상관이</a:t>
-            </a:r>
-          </a:p>
-          <a:p>
-            <a:r>
-              <a:t> BES는 +0.568인데 Mirnov는 -0.009, 즉 이 격자 위에서는 백색잡음입니다.</a:t>
+              <a:t>회전은 정반대이다. 빠른 채널을 전부 0으로 두어도 8개 셀 전부에서 출력이 비트 단위로 동일하다.</a:t>
+            </a:r>
+          </a:p>
+          <a:p>
+            <a:r>
+              <a:t>회전 정보는 100% CES 이력에서 온다. 이유는 둘이다: 회전을 구동하는 NBI 토크가 데이터에 없고,</a:t>
+            </a:r>
+          </a:p>
+          <a:p>
+            <a:r>
+              <a:t>Mirnov는 kHz dB/dt를 100 Hz로 순간샘플하여 위상이 무작위이다(lag-1 자기상관 BES +0.568,</a:t>
+            </a:r>
+          </a:p>
+          <a:p>
+            <a:r>
+              <a:t>Mirnov -0.009).</a:t>
             </a:r>
           </a:p>
           <a:p/>
           <a:p>
             <a:r>
-              <a:t> 그리고 정직하게 하나 더: 포함 모집단에서는 이력만 쓰는 모델도 PCHIP을 +0.15~+0.23</a:t>
-            </a:r>
-          </a:p>
-          <a:p>
-            <a:r>
-              <a:t> 이깁니다. 그 마진에는 스파이크 강건성 성분이 섞여 있다는 뜻이고, 빠른 진단의 기여를</a:t>
-            </a:r>
-          </a:p>
-          <a:p>
-            <a:r>
-              <a:t> 분리해서 보려면 컷 모집단을 봐야 합니다. 그래서 두 모집단을 함께 보고합니다."</a:t>
+              <a:t>포함 모집단에서는 이력만 쓰는 모델도 PCHIP을 +0.15~+0.23 이기므로 그 마진에 스파이크 강건성</a:t>
+            </a:r>
+          </a:p>
+          <a:p>
+            <a:r>
+              <a:t>성분이 섞여 있으며, 빠른 진단의 기여를 분리하려면 컷 모집단을 보아야 한다. 두 모집단을 함께</a:t>
+            </a:r>
+          </a:p>
+          <a:p>
+            <a:r>
+              <a:t>보고하는 이유이다.</a:t>
             </a:r>
           </a:p>
           <a:p/>
           <a:p>
             <a:r>
-              <a:t>※ 질문 대비: "Tₑ가 NBI 가열을 대리하니 회전 정보도 담기지 않나?" — 검정했다.</a:t>
-            </a:r>
-          </a:p>
-          <a:p>
-            <a:r>
-              <a:t>   Tₑ~Tᵢ는 r=+0.353(p=3e-17)로 경로가 실재하지만 Tₑ~V_rot은 r=+0.024(p=0.58).</a:t>
-            </a:r>
-          </a:p>
-          <a:p>
-            <a:r>
-              <a:t>   power와 torque가 다르기 때문이다.</a:t>
+              <a:t>질문 대비: ‘Tₑ가 NBI 가열을 대리하니 회전 정보도 담기지 않는가’는 검정되었다. Tₑ~Tᵢ는</a:t>
+            </a:r>
+          </a:p>
+          <a:p>
+            <a:r>
+              <a:t>r = +0.353(p = 3e-17)로 경로가 실재하지만 Tₑ~V_rot는 r = +0.024(p = 0.58)이다. power와</a:t>
+            </a:r>
+          </a:p>
+          <a:p>
+            <a:r>
+              <a:t>torque가 다르기 때문이다.</a:t>
             </a:r>
           </a:p>
         </p:txBody>
@@ -1704,70 +1605,50 @@
           <a:lstStyle/>
           <a:p>
             <a:r>
-              <a:t>⏱ 14:40–15:30  (50초)</a:t>
+              <a:t>⏱ 13:15–14:00  (45초)</a:t>
             </a:r>
           </a:p>
           <a:p/>
           <a:p>
             <a:r>
-              <a:t>"그럼 모델을 더 키우면 되지 않느냐. 두 실험으로 닫았습니다.</a:t>
+              <a:t>모델을 더 키우면 되는가라는 질문을 두 실험으로 닫았다.</a:t>
             </a:r>
           </a:p>
           <a:p/>
           <a:p>
             <a:r>
-              <a:t> 왼쪽이 복잡도 사다리입니다. persistence에서 시작해 파라미터를 늘려갑니다.</a:t>
-            </a:r>
-          </a:p>
-          <a:p>
-            <a:r>
-              <a:t> 재미있는 건 b3k8입니다 — persistence 예측에 유계 latent 8개의 선형 보정을 더한</a:t>
-            </a:r>
-          </a:p>
-          <a:p>
-            <a:r>
-              <a:t> 2만 1천 파라미터 모델인데, 컷 모집단에서 35만 파라미터 백본과 동급입니다.</a:t>
-            </a:r>
-          </a:p>
-          <a:p>
-            <a:r>
-              <a:t> 짝지은 차이가 평균 +0.002이고 신뢰구간이 전부 0을 포함합니다.</a:t>
-            </a:r>
-          </a:p>
-          <a:p>
-            <a:r>
-              <a:t> 즉 컷 조건에서 백본의 Tᵢ skill 전부가 숫자 8개로 압축됩니다.</a:t>
-            </a:r>
-          </a:p>
-          <a:p>
-            <a:r>
-              <a:t> 그 latent이 뭘 담고 있는지도 probe로 확인했습니다 — 직전 Tᵢ와 ECEI의 Tₑ입니다.</a:t>
-            </a:r>
-          </a:p>
-          <a:p>
-            <a:r>
-              <a:t> 다만 포함 모집단에서는 -0.194로 백본에 집니다. 유계 보정으로는 스파이크 앵커를</a:t>
-            </a:r>
-          </a:p>
-          <a:p>
-            <a:r>
-              <a:t> 못 살리기 때문입니다. 1%도 안 되는 행이 모든 arm SSE의 70~83%를 차지합니다.</a:t>
+              <a:t>왼쪽은 복잡도 사다리이다. b3k8은 persistence 예측에 유계 latent 8개의 선형 보정을 더한</a:t>
+            </a:r>
+          </a:p>
+          <a:p>
+            <a:r>
+              <a:t>21,498 파라미터 모델인데, 컷 모집단에서 357k 백본과 동급이다(짝지은 차이 평균 +0.002, 신뢰구간</a:t>
+            </a:r>
+          </a:p>
+          <a:p>
+            <a:r>
+              <a:t>전부 0 포함). 즉 컷 조건에서 백본의 Tᵢ skill 전부가 숫자 8개로 압축된다. probe 결과 latent은</a:t>
+            </a:r>
+          </a:p>
+          <a:p>
+            <a:r>
+              <a:t>직전 Tᵢ와 ECEI의 Tₑ를 담는다. 포함 모집단에서는 -0.194로 백본에 지는데, 유계 보정으로는</a:t>
+            </a:r>
+          </a:p>
+          <a:p>
+            <a:r>
+              <a:t>스파이크 앵커를 살리지 못하기 때문이다(1% 미만의 행이 모든 arm SSE의 70~83%).</a:t>
             </a:r>
           </a:p>
           <a:p/>
           <a:p>
             <a:r>
-              <a:t> 오른쪽이 크기 축입니다. Tᵢ 인코더 폭을 24에서 260까지, 파라미터로 3만 4천에서</a:t>
-            </a:r>
-          </a:p>
-          <a:p>
-            <a:r>
-              <a:t> 87만 9천까지 26배를 키웠는데 skill이 +0.230에서 +0.236 사이에서 평평합니다.</a:t>
-            </a:r>
-          </a:p>
-          <a:p>
-            <a:r>
-              <a:t> 남은 분산은 모델 크기가 아니라 분할 분산입니다. 크기 축은 닫혔습니다."</a:t>
+              <a:t>오른쪽은 크기 축이다. Tᵢ 인코더 폭을 24에서 260까지(34k에서 879k 파라미터, 26배) 키워도</a:t>
+            </a:r>
+          </a:p>
+          <a:p>
+            <a:r>
+              <a:t>skill이 +0.230에서 +0.236 사이에서 평평하다. 남은 분산은 모델 크기가 아니라 분할 분산이다.</a:t>
             </a:r>
           </a:p>
         </p:txBody>
@@ -1837,61 +1718,51 @@
           <a:lstStyle/>
           <a:p>
             <a:r>
-              <a:t>⏱ 15:30–16:15  (45초)</a:t>
+              <a:t>⏱ 14:00–14:40  (40초)</a:t>
             </a:r>
           </a:p>
           <a:p/>
           <a:p>
             <a:r>
-              <a:t>"그럼 모델은 어디서 이득을 버는가. peak 분석입니다.</a:t>
+              <a:t>모델이 이득을 얻는 위치를 peak 분석으로 확인하였다.</a:t>
             </a:r>
           </a:p>
           <a:p/>
           <a:p>
             <a:r>
-              <a:t> 여기서 peak은 예측값이 아니라 입력 기준으로 정의합니다 — 타겟 행을 제외한 이웃에서</a:t>
-            </a:r>
-          </a:p>
-          <a:p>
-            <a:r>
-              <a:t> 국소 활동도가 높은 구간입니다. 정답을 엿보지 않는 보수적인 정의입니다.</a:t>
+              <a:t>peak는 예측값이 아니라 입력 기준으로 정의한다: 타깃 행을 제외한 이웃에서 국소 활동도가 높은</a:t>
+            </a:r>
+          </a:p>
+          <a:p>
+            <a:r>
+              <a:t>구간이며, 정답을 읽지 않는 보수적 정의이다.</a:t>
             </a:r>
           </a:p>
           <a:p/>
           <a:p>
             <a:r>
-              <a:t> Tᵢ는 peak 구간에서 컷 +0.45~+0.61, 포함 +0.62~+0.72로 8개 셀 전부 PASS입니다.</a:t>
-            </a:r>
-          </a:p>
-          <a:p>
-            <a:r>
-              <a:t> 본류에서는 +0.09~+0.20으로 훨씬 작습니다.</a:t>
-            </a:r>
-          </a:p>
-          <a:p>
-            <a:r>
-              <a:t> 회전은 더 극적입니다. 전역으로는 동률인데 peak 구간에서는 +0.54에서 +0.79이고</a:t>
-            </a:r>
-          </a:p>
-          <a:p>
-            <a:r>
-              <a:t> persistence 대비로는 8/8 PASS입니다. 본류는 사실상 0입니다.</a:t>
+              <a:t>Tᵢ는 peak 구간에서 컷 +0.45~+0.61, 포함 +0.62~+0.72로 8개 셀 전부 PASS이며 본류에서는</a:t>
+            </a:r>
+          </a:p>
+          <a:p>
+            <a:r>
+              <a:t>+0.09~+0.20이다. 회전은 전역 동률이지만 peak 구간에서 +0.54~+0.79이고 persistence 대비</a:t>
+            </a:r>
+          </a:p>
+          <a:p>
+            <a:r>
+              <a:t>8/8 PASS이며 본류는 0에 가깝다.</a:t>
             </a:r>
           </a:p>
           <a:p/>
           <a:p>
             <a:r>
-              <a:t> 해석은 명확합니다. 매끄러운 본류에서는 보간이 이미 거의 최적이라 이길 여지가 없습니다.</a:t>
-            </a:r>
-          </a:p>
-          <a:p>
-            <a:r>
-              <a:t> 반대로 급변 구간에서는 보간이 구조적으로 실패하고, 거기서 빠른 진단이 값어치를 합니다.</a:t>
-            </a:r>
-          </a:p>
-          <a:p>
-            <a:r>
-              <a:t> 즉 회전의 열세도 전역적인 게 아니라 지역적입니다."</a:t>
+              <a:t>해석: 매끄러운 본류에서는 보간이 이미 거의 최적이라 이길 여지가 없고, 급변 구간에서는 보간이</a:t>
+            </a:r>
+          </a:p>
+          <a:p>
+            <a:r>
+              <a:t>구조적으로 실패하여 빠른 진단이 가치를 갖는다. 회전의 열세도 전역적이 아니라 지역적이다.</a:t>
             </a:r>
           </a:p>
         </p:txBody>
@@ -1961,60 +1832,55 @@
           <a:lstStyle/>
           <a:p>
             <a:r>
-              <a:t>⏱ 00:30–01:20  (50초)</a:t>
+              <a:t>⏱ 00:30–01:15  (45초)</a:t>
             </a:r>
           </a:p>
           <a:p/>
           <a:p>
             <a:r>
-              <a:t>이 슬라이드가 발표 전체의 요약입니다. 결론을 먼저 다 말하고 들어갑니다.</a:t>
+              <a:t>이 슬라이드가 발표 전체의 요약이며, 결론을 먼저 제시한 뒤 근거로 들어간다.</a:t>
             </a:r>
           </a:p>
           <a:p/>
           <a:p>
             <a:r>
-              <a:t>"결론부터 말씀드리면 세 가지입니다.</a:t>
-            </a:r>
-          </a:p>
-          <a:p>
-            <a:r>
-              <a:t> (1) 빠른 진단은 이온온도 정보를 실제로 운반합니다. 과거만 보는 저희 모델이,</a:t>
-            </a:r>
-          </a:p>
-          <a:p>
-            <a:r>
-              <a:t>     미래까지 다 보는 오프라인 보간을 Tᵢ에서 유의하게 이겼습니다. 데이터 처리</a:t>
-            </a:r>
-          </a:p>
-          <a:p>
-            <a:r>
-              <a:t>     방식을 둘로 나눠 검증했는데(스파이크 컷/포함), 양쪽 4개 분할 전부 통과입니다.</a:t>
-            </a:r>
-          </a:p>
-          <a:p>
-            <a:r>
-              <a:t> (2) 회전 속도는 전역적으로 동률입니다. 실패가 아니라 물리적으로 예측된 비대칭이고,</a:t>
-            </a:r>
-          </a:p>
-          <a:p>
-            <a:r>
-              <a:t>     저는 이걸 이 연구의 과학적 발견으로 봅니다.</a:t>
-            </a:r>
-          </a:p>
-          <a:p>
-            <a:r>
-              <a:t> (3) 그리고 성능 상한을 정하는 건 모델이 아니라 데이터입니다. 2만 파라미터 모델이</a:t>
-            </a:r>
-          </a:p>
-          <a:p>
-            <a:r>
-              <a:t>     35만 파라미터 백본과 같고, 폭을 26배 키워도 평평합니다."</a:t>
+              <a:t>첫째, 빠른 진단은 이온온도 정보를 실제로 운반한다. 과거만 읽는 모델이 미래까지 읽는 오프라인</a:t>
+            </a:r>
+          </a:p>
+          <a:p>
+            <a:r>
+              <a:t>보간을 Tᵢ에서 유의하게 능가하였고, 데이터 처리 방식을 둘로 나눈 검증(스파이크 컷/포함)에서</a:t>
+            </a:r>
+          </a:p>
+          <a:p>
+            <a:r>
+              <a:t>양쪽 4개 분할 전부 통과하였다.</a:t>
+            </a:r>
+          </a:p>
+          <a:p>
+            <a:r>
+              <a:t>둘째, 회전 속도는 전역적으로 동률이다. 이는 실패가 아니라 물리적으로 예측된 비대칭이며,</a:t>
+            </a:r>
+          </a:p>
+          <a:p>
+            <a:r>
+              <a:t>승패 방전 분석이 그 메커니즘(구동 변수의 부재)을 지목한다.</a:t>
+            </a:r>
+          </a:p>
+          <a:p>
+            <a:r>
+              <a:t>셋째, 약 50 ms의 연속 문맥이 우위를 전형적으로 만들고, 아키텍처는 비용으로 정해지며,</a:t>
+            </a:r>
+          </a:p>
+          <a:p>
+            <a:r>
+              <a:t>성능 상한은 모델이 아니라 데이터에 있다.</a:t>
             </a:r>
           </a:p>
           <a:p/>
           <a:p>
             <a:r>
-              <a:t>※ 시간이 밀리면 이 슬라이드를 30초로 줄이고 뒤에서 회수.</a:t>
+              <a:t>시간이 부족하면 이 슬라이드를 30초로 줄이고 결론에서 회수한다.</a:t>
             </a:r>
           </a:p>
         </p:txBody>
@@ -2084,61 +1950,56 @@
           <a:lstStyle/>
           <a:p>
             <a:r>
-              <a:t>⏱ 16:15–16:55  (40초)</a:t>
+              <a:t>⏱ 14:40–15:15  (35초)</a:t>
             </a:r>
           </a:p>
           <a:p/>
           <a:p>
             <a:r>
-              <a:t>"통계만 보면 감이 안 오니 실제 held-out TEST shot 하나를 보여드리겠습니다. #31815입니다.</a:t>
+              <a:t>held-out TEST shot #31815의 사례이다.</a:t>
             </a:r>
           </a:p>
           <a:p/>
           <a:p>
             <a:r>
-              <a:t> 위가 이온온도입니다. 검은 점이 실측, 파란 선이 모델, 회색이 PCHIP입니다.</a:t>
-            </a:r>
-          </a:p>
-          <a:p>
-            <a:r>
-              <a:t> 빨간 점선은 BES가 급락한 시점인데, 빠른 진단의 급락이 CES crash와 정렬되어 있습니다 —</a:t>
-            </a:r>
-          </a:p>
-          <a:p>
-            <a:r>
-              <a:t> 빠른 진단이 급변을 먼저 봅니다. PCHIP은 스파이크마다 overshoot합니다. 미래까지</a:t>
-            </a:r>
-          </a:p>
-          <a:p>
-            <a:r>
-              <a:t> 다 보고도 그렇습니다.</a:t>
-            </a:r>
-          </a:p>
-          <a:p>
-            <a:r>
-              <a:t> 이 shot에서 Tᵢ RMSE는 199.2 대 262.3, skill로 +0.42입니다. 실측점 395개 기준입니다.</a:t>
-            </a:r>
-          </a:p>
-          <a:p>
-            <a:r>
-              <a:t> 회전도 이 shot에서는 +0.21로 이깁니다. 관측이 끊기면 이력만으로 완만히 감쇠합니다.</a:t>
+              <a:t>위가 이온온도이다. 검은 점이 실측, 파란 선이 모델, 회색이 PCHIP이다. 빨간 점선은 BES가</a:t>
+            </a:r>
+          </a:p>
+          <a:p>
+            <a:r>
+              <a:t>급락한 시점이며 CES crash와 정렬되어 있다. 빠른 진단이 급변을 먼저 관측한다. PCHIP은 미래까지</a:t>
+            </a:r>
+          </a:p>
+          <a:p>
+            <a:r>
+              <a:t>읽고도 스파이크마다 overshoot한다. 이 shot에서 Tᵢ RMSE는 199.2 대 262.3으로 skill +0.42이며</a:t>
+            </a:r>
+          </a:p>
+          <a:p>
+            <a:r>
+              <a:t>실측점 395개 기준이다. 회전도 이 shot에서는 +0.21로 이기며, 관측이 끊기면 이력만으로 완만히</a:t>
+            </a:r>
+          </a:p>
+          <a:p>
+            <a:r>
+              <a:t>감쇠한다.</a:t>
             </a:r>
           </a:p>
           <a:p/>
           <a:p>
             <a:r>
-              <a:t> 다만 정직하게 말씀드리면 이런 shot이 전부는 아닙니다. 우위는 고르게 퍼져 있는 게</a:t>
-            </a:r>
-          </a:p>
-          <a:p>
-            <a:r>
-              <a:t> 아니라 간극과 급변 구간에 집중되어 있습니다 — 앞의 peak 분석과 정확히 같은 그림입니다."</a:t>
+              <a:t>이런 shot이 전부는 아니다. 우위는 고르게 퍼져 있지 않고 간극과 급변 구간에 집중되며, 앞의 peak</a:t>
+            </a:r>
+          </a:p>
+          <a:p>
+            <a:r>
+              <a:t>분석과 같은 그림이다. 어떤 방전에서 이기는가는 결과 ⑨에서 정량화된다.</a:t>
             </a:r>
           </a:p>
           <a:p/>
           <a:p>
             <a:r>
-              <a:t>※ 시간이 밀리면 이 슬라이드는 건너뛰어도 논지는 성립한다.</a:t>
+              <a:t>시간이 부족하면 이 슬라이드는 생략해도 논지가 성립한다.</a:t>
             </a:r>
           </a:p>
         </p:txBody>
@@ -2208,72 +2069,77 @@
           <a:lstStyle/>
           <a:p>
             <a:r>
-              <a:t>⏱ 16:55–18:10  (75초)</a:t>
+              <a:t>⏱ 15:15–16:45  (90초)  ★ 2026-08-16 이후 추가된 결과</a:t>
             </a:r>
           </a:p>
           <a:p/>
           <a:p>
             <a:r>
-              <a:t>"정직한 결론 네 가지입니다.</a:t>
+              <a:t>백본이 세그먼트 전체를 읽는 것이 정당한가라는 질문에서 출발하여 세 축을 측정하였다.</a:t>
             </a:r>
           </a:p>
           <a:p/>
           <a:p>
             <a:r>
-              <a:t> 하나. Tᵢ는 미래를 쓰는 보간을 두 모집단 모두에서 유의하게 능가합니다. 4개 독립 분할</a:t>
-            </a:r>
-          </a:p>
-          <a:p>
-            <a:r>
-              <a:t> 전부이고, 배치 가능한 최강 인과 방법인 인과 GP는 8개 셀 전부에서 이깁니다.</a:t>
-            </a:r>
-          </a:p>
-          <a:p>
-            <a:r>
-              <a:t> 상한도 같이 보고합니다 — 최강 오프라인 평활기와는 동률입니다.</a:t>
+              <a:t>문맥. seq_v2를 2·3·4·5·6·7·10·15·31·63 스텝의 도달 범위에서 각각 학습하고 채점하였다.</a:t>
+            </a:r>
+          </a:p>
+          <a:p>
+            <a:r>
+              <a:t>사전등록 규칙(전체 대비 결손 0.02 미만, 유의 결손 1/4 이하)은 50 ms를 반환한다. 301개 방전을</a:t>
+            </a:r>
+          </a:p>
+          <a:p>
+            <a:r>
+              <a:t>통합하면 모델은 20 ms에서도 인과 GP를 이기지만 승리 방전 비율은 0.52이며, 70 ms에서 0.66으로</a:t>
+            </a:r>
+          </a:p>
+          <a:p>
+            <a:r>
+              <a:t>평평해진다. 즉 문맥이 사는 것은 평균이 아니라 전형성이다. 동결 백본의 상태를 절단한 첫 사다리의</a:t>
+            </a:r>
+          </a:p>
+          <a:p>
+            <a:r>
+              <a:t>결손 중 87%는 학습되지 않은 cold start였다.</a:t>
             </a:r>
           </a:p>
           <a:p/>
           <a:p>
             <a:r>
-              <a:t> 둘. 배치 주장이 이제 두 스트레스를 다 견딥니다. 실제 결측 지점으로 재가중해도 인과</a:t>
-            </a:r>
-          </a:p>
-          <a:p>
-            <a:r>
-              <a:t> 방법 대비 8/8, 캠페인 경계를 넘어서도 4/4에 4/4입니다. 대체된 윈도 대조군은 여기서</a:t>
-            </a:r>
-          </a:p>
-          <a:p>
-            <a:r>
-              <a:t> 오프라인 우위를 완전히 잃었고, 그 차이의 원인을 드리프트로 측정했습니다.</a:t>
-            </a:r>
-          </a:p>
-          <a:p>
-            <a:r>
-              <a:t> 이전 발표에서 '캠페인 분할에서 우위가 사라진다'고 말씀드렸던 부분이 이번에 해결됐습니다.</a:t>
+              <a:t>계열. 같은 문맥에서 순환·확장 합성곱·attention은 0.023 이내로 동률이므로 skill로는 구분되지</a:t>
+            </a:r>
+          </a:p>
+          <a:p>
+            <a:r>
+              <a:t>않는다. 지연은 파라미터가 아니라 디스패치 연산자 수에 비례하며(연산자당 2~3 µs), 순환은 도달</a:t>
+            </a:r>
+          </a:p>
+          <a:p>
+            <a:r>
+              <a:t>범위에 O(1), 합성곱은 O(log R), attention은 상수가 4.3배이다. 10 ms 예산은 구속 조건이 아니다.</a:t>
             </a:r>
           </a:p>
           <a:p/>
           <a:p>
             <a:r>
-              <a:t> 셋. 회전은 전역 동률입니다. 다만 15 ms 넘는 간극과 peak 층에서는 두 모집단 모두</a:t>
-            </a:r>
-          </a:p>
-          <a:p>
-            <a:r>
-              <a:t> 이깁니다. skill이 없는 게 아니라 천이 구간에만 있는 겁니다.</a:t>
+              <a:t>승패 방전. Tᵢ는 방전의 70%에서 이기고 V_rot는 48%에서 이긴다. 승패를 예측하는 유일한</a:t>
+            </a:r>
+          </a:p>
+          <a:p>
+            <a:r>
+              <a:t>변수는 방전 내 타깃의 산포이며, 조용한 방전에서는 GP가 이미 최적이다. 변동이 큰 방전에서도</a:t>
+            </a:r>
+          </a:p>
+          <a:p>
+            <a:r>
+              <a:t>V_rot는 55%만 이기므로, 잔차는 회전의 구동 변수가 데이터에 없다는 결론과 일치한다.</a:t>
             </a:r>
           </a:p>
           <a:p/>
           <a:p>
             <a:r>
-              <a:t> 넷. 상한은 추정기가 아니라 정보입니다. 2만 1천 파라미터가 컷에서 백본과 같고 폭은</a:t>
-            </a:r>
-          </a:p>
-          <a:p>
-            <a:r>
-              <a:t> 평평합니다. 그래서 다음 단계는 더 큰 모델이 아니라 데이터입니다."</a:t>
+              <a:t>질문 대비: 1 ms 판정은 5세션 p99 산포 21.84배로 인해 사전등록 규칙이 보류하였다.</a:t>
             </a:r>
           </a:p>
         </p:txBody>
@@ -2343,70 +2209,78 @@
           <a:lstStyle/>
           <a:p>
             <a:r>
-              <a:t>⏱ 18:10–19:00  (50초)</a:t>
+              <a:t>⏱ 16:45–17:55  (70초)</a:t>
             </a:r>
           </a:p>
           <a:p/>
           <a:p>
             <a:r>
-              <a:t>"한계를 분명히 말씀드립니다. 가장 큰 제약은 검정력입니다 — test 방전이 Tᵢ 96개,</a:t>
-            </a:r>
-          </a:p>
-          <a:p>
-            <a:r>
-              <a:t> 회전은 60~66개뿐이고, 이게 모든 유의성 판정을 구속합니다. 채점은 관측 지점에서</a:t>
-            </a:r>
-          </a:p>
-          <a:p>
-            <a:r>
-              <a:t> 하므로 낙관적 상한이고, 재가중이 닿는 범위도 Tᵢ 54~68%, 회전은 4~6%뿐입니다.</a:t>
-            </a:r>
-          </a:p>
-          <a:p>
-            <a:r>
-              <a:t> 오프라인 주장의 상한도 명시합니다 — 가장 강한 오프라인 평활기인 GP와는 동률입니다.</a:t>
+              <a:t>결론은 다섯 가지이다.</a:t>
             </a:r>
           </a:p>
           <a:p/>
           <a:p>
             <a:r>
-              <a:t> 향후는 전부 데이터 쪽입니다. 저희 원칙이 '음성 결과는 그것을 뒤집을 측정을 지목할</a:t>
-            </a:r>
-          </a:p>
-          <a:p>
-            <a:r>
-              <a:t> 때만 결론이 된다'인데, 셋을 지목했습니다. 하나, CES 피팅 품질 메타데이터를 받으면</a:t>
-            </a:r>
-          </a:p>
-          <a:p>
-            <a:r>
-              <a:t> 값 컷을 품질 컷으로 바꿔 두 모집단을 하나로 합칠 수 있습니다. 둘, 원본 kHz Mirnov에서</a:t>
-            </a:r>
-          </a:p>
-          <a:p>
-            <a:r>
-              <a:t> 모드 회전 주파수를 뽑는 것 — 회전의 최상위 레버입니다. 셋, NBI 토크 채널입니다.</a:t>
-            </a:r>
-          </a:p>
-          <a:p>
-            <a:r>
-              <a:t> 모델링이 아니라 데이터 획득 과제이고, 아카이브 데이터로 검정할 수 있습니다.</a:t>
-            </a:r>
-          </a:p>
-          <a:p>
-            <a:r>
-              <a:t> 모델 크기 축은 이미 닫혔습니다."</a:t>
+              <a:t>하나. Tᵢ는 미래를 읽는 보간을 두 모집단 모두에서 유의하게 능가하였다. 4개 독립 분할 전부이며,</a:t>
+            </a:r>
+          </a:p>
+          <a:p>
+            <a:r>
+              <a:t>배치 가능한 최강 인과 방법인 인과 GP는 8개 셀 전부에서 이겼다. 상한도 함께 보고한다: 최강</a:t>
+            </a:r>
+          </a:p>
+          <a:p>
+            <a:r>
+              <a:t>오프라인 평활기와는 동률이다.</a:t>
             </a:r>
           </a:p>
           <a:p/>
           <a:p>
             <a:r>
-              <a:t>※ 질문 대비: Mirnov 파생 특징 재가공(적분·|MC|·이동 RMS)은 이미 시도했고 개선이 없었다.</a:t>
-            </a:r>
-          </a:p>
-          <a:p>
-            <a:r>
-              <a:t>   이미 잃은 정보는 하류에서 복구되지 않는다 — 그래서 전처리(원본 kHz)로 올라가야 한다.</a:t>
+              <a:t>둘. 배치 주장은 두 스트레스를 모두 견뎠다. 실제 결측 지점으로 재가중해도 인과 방법 대비 8/8,</a:t>
+            </a:r>
+          </a:p>
+          <a:p>
+            <a:r>
+              <a:t>캠페인 경계를 넘어서도 4/4와 4/4이다. 대체된 윈도 대조군은 오프라인 우위를 잃었고 그 원인은</a:t>
+            </a:r>
+          </a:p>
+          <a:p>
+            <a:r>
+              <a:t>드리프트로 측정되었다.</a:t>
+            </a:r>
+          </a:p>
+          <a:p/>
+          <a:p>
+            <a:r>
+              <a:t>셋. 약 50 ms의 연속 인과 문맥이 우위를 전형적으로 만들며, 세 계열은 같은 문맥에서 동률이므로</a:t>
+            </a:r>
+          </a:p>
+          <a:p>
+            <a:r>
+              <a:t>아키텍처는 비용(연산자 수)으로 선택한다.</a:t>
+            </a:r>
+          </a:p>
+          <a:p/>
+          <a:p>
+            <a:r>
+              <a:t>넷. 회전은 전역 동률이며, 우위는 회전이 실제로 변하는 방전에 집중된다. 이는 검정력 문제가 아니라</a:t>
+            </a:r>
+          </a:p>
+          <a:p>
+            <a:r>
+              <a:t>구동 변수의 부재이다.</a:t>
+            </a:r>
+          </a:p>
+          <a:p/>
+          <a:p>
+            <a:r>
+              <a:t>다섯. 상한은 추정기가 아니라 정보에 있다. 21,498 파라미터가 컷에서 백본과 같고 폭은 평평하며</a:t>
+            </a:r>
+          </a:p>
+          <a:p>
+            <a:r>
+              <a:t>1,808 파라미터 합성곱도 인과 GP를 4/4로 이긴다. 따라서 다음 단계는 더 큰 모델이 아니라 데이터이다.</a:t>
             </a:r>
           </a:p>
         </p:txBody>
@@ -2476,33 +2350,161 @@
           <a:lstStyle/>
           <a:p>
             <a:r>
-              <a:t>⏱ 19:00–19:30  (30초) + Q&amp;A</a:t>
+              <a:t>⏱ 17:55–18:50  (55초)</a:t>
             </a:r>
           </a:p>
           <a:p/>
           <a:p>
             <a:r>
-              <a:t>"정리하면, 항상 있는 빠른 진단으로 자주 비는 CES를 채우는 엄격히 인과적인 가상 센서를</a:t>
-            </a:r>
-          </a:p>
-          <a:p>
-            <a:r>
-              <a:t> 만들었고, 미래까지 보는 보간이라는 일부러 어려운 기준선으로 검증했습니다.</a:t>
-            </a:r>
-          </a:p>
-          <a:p>
-            <a:r>
-              <a:t> 이온온도는 두 모집단 모두에서 유의하게 이겼고 두 스트레스도 견뎠습니다. 회전은</a:t>
-            </a:r>
-          </a:p>
-          <a:p>
-            <a:r>
-              <a:t> 전역 동률이며 그 이유가 물리로 설명됩니다. 감사합니다."</a:t>
+              <a:t>한계를 먼저 명시한다. 가장 큰 제약은 검정력이며, test 방전이 Tᵢ 96개, 회전 60~66개로 모든</a:t>
+            </a:r>
+          </a:p>
+          <a:p>
+            <a:r>
+              <a:t>유의성 판정을 구속한다. 채점은 관측 지점에서 이루어지므로 낙관적 상한이고, 재가중이 닿는 범위도</a:t>
+            </a:r>
+          </a:p>
+          <a:p>
+            <a:r>
+              <a:t>Tᵢ 54~68%, 회전 4~6%뿐이다. 오프라인 주장의 상한도 명시한다: 가장 강한 오프라인 평활기인</a:t>
+            </a:r>
+          </a:p>
+          <a:p>
+            <a:r>
+              <a:t>GP와는 동률이다. 통합 재채점은 방법의 기대 skill을 추정하며 단일 체크포인트의 배치 주장이 아니다.</a:t>
             </a:r>
           </a:p>
           <a:p/>
           <a:p>
             <a:r>
+              <a:t>향후 과제는 전부 데이터 쪽이다. 원칙은 ‘음성 결과는 그것을 뒤집을 측정을 지목할 때만 결론이</a:t>
+            </a:r>
+          </a:p>
+          <a:p>
+            <a:r>
+              <a:t>된다’이며 셋을 지목하였다. CES 피팅 품질 메타데이터를 받으면 값 컷을 품질 컷으로 바꿔 두 모집단을</a:t>
+            </a:r>
+          </a:p>
+          <a:p>
+            <a:r>
+              <a:t>하나로 합칠 수 있다. 원본 kHz Mirnov에서 모드 회전 주파수를 뽑는 것이 회전의 최상위 레버이며,</a:t>
+            </a:r>
+          </a:p>
+          <a:p>
+            <a:r>
+              <a:t>그 검정의 무대인 B.6 shot 집합은 동결되어 있고 예측(변동 방전에서 먼저 개선)도 기록되어 있다.</a:t>
+            </a:r>
+          </a:p>
+          <a:p>
+            <a:r>
+              <a:t>NBI 토크 채널은 모델링이 아니라 데이터 획득 과제이다. 크기·문맥·계열 축은 이미 닫혔다.</a:t>
+            </a:r>
+          </a:p>
+          <a:p/>
+          <a:p>
+            <a:r>
+              <a:t>질문 대비: Mirnov 파생 특징 재가공(적분·|MC|·이동 RMS)은 이미 시도되어 개선이 없었다.</a:t>
+            </a:r>
+          </a:p>
+          <a:p>
+            <a:r>
+              <a:t>이미 잃은 정보는 하류에서 복구되지 않으므로 전처리(원본 kHz)로 올라가야 한다.</a:t>
+            </a:r>
+          </a:p>
+        </p:txBody>
+      </p:sp>
+      <p:sp>
+        <p:nvSpPr>
+          <p:cNvPr id="4" name="Slide Number Placeholder 3"/>
+          <p:cNvSpPr>
+            <a:spLocks noGrp="1"/>
+          </p:cNvSpPr>
+          <p:nvPr>
+            <p:ph type="sldNum" idx="5" sz="quarter"/>
+          </p:nvPr>
+        </p:nvSpPr>
+        <p:spPr/>
+      </p:sp>
+    </p:spTree>
+  </p:cSld>
+  <p:clrMapOvr>
+    <a:masterClrMapping/>
+  </p:clrMapOvr>
+</p:notes>
+</file>
+
+<file path=ppt/notesSlides/notesSlide24.xml><?xml version="1.0" encoding="utf-8"?>
+<p:notes xmlns:a="http://schemas.openxmlformats.org/drawingml/2006/main" xmlns:p="http://schemas.openxmlformats.org/presentationml/2006/main" xmlns:r="http://schemas.openxmlformats.org/officeDocument/2006/relationships">
+  <p:cSld>
+    <p:spTree>
+      <p:nvGrpSpPr>
+        <p:cNvPr id="1" name=""/>
+        <p:cNvGrpSpPr/>
+        <p:nvPr/>
+      </p:nvGrpSpPr>
+      <p:grpSpPr>
+        <a:xfrm>
+          <a:off x="0" y="0"/>
+          <a:ext cx="0" cy="0"/>
+          <a:chOff x="0" y="0"/>
+          <a:chExt cx="0" cy="0"/>
+        </a:xfrm>
+      </p:grpSpPr>
+      <p:sp>
+        <p:nvSpPr>
+          <p:cNvPr id="2" name="Slide Image Placeholder 1"/>
+          <p:cNvSpPr>
+            <a:spLocks noGrp="1"/>
+          </p:cNvSpPr>
+          <p:nvPr>
+            <p:ph type="sldImg" idx="2"/>
+          </p:nvPr>
+        </p:nvSpPr>
+        <p:spPr/>
+      </p:sp>
+      <p:sp>
+        <p:nvSpPr>
+          <p:cNvPr id="3" name="Notes Placeholder 2"/>
+          <p:cNvSpPr>
+            <a:spLocks noGrp="1"/>
+          </p:cNvSpPr>
+          <p:nvPr>
+            <p:ph type="body" idx="3" sz="quarter"/>
+          </p:nvPr>
+        </p:nvSpPr>
+        <p:spPr/>
+        <p:txBody>
+          <a:bodyPr/>
+          <a:lstStyle/>
+          <a:p>
+            <a:r>
+              <a:t>⏱ 18:50–19:20  (30초) + Q&amp;A</a:t>
+            </a:r>
+          </a:p>
+          <a:p/>
+          <a:p>
+            <a:r>
+              <a:t>요약: 항상 존재하는 빠른 진단으로 자주 비는 CES를 채우는 엄격히 인과적인 가상 센서를 구축하였고,</a:t>
+            </a:r>
+          </a:p>
+          <a:p>
+            <a:r>
+              <a:t>미래까지 읽는 보간이라는 의도적으로 어려운 기준선으로 검증하였다. 이온온도는 두 모집단 모두에서</a:t>
+            </a:r>
+          </a:p>
+          <a:p>
+            <a:r>
+              <a:t>유의하게 이겼고 두 스트레스를 견뎠으며, 약 50 ms의 문맥이 우위를 전형적으로 만든다. 회전은 전역</a:t>
+            </a:r>
+          </a:p>
+          <a:p>
+            <a:r>
+              <a:t>동률이며 그 이유가 물리와 승패 방전 분석으로 설명된다.</a:t>
+            </a:r>
+          </a:p>
+          <a:p/>
+          <a:p>
+            <a:r>
               <a:t>── 예상 질문 대비 ──────────────────────────────</a:t>
             </a:r>
           </a:p>
@@ -2513,103 +2515,119 @@
           </a:p>
           <a:p>
             <a:r>
-              <a:t> → 미래를 예보하는 게 아니라 이미 지나간 시점의 빈 값을 채우는 문제. 오프라인 물리 분석용.</a:t>
+              <a:t> → 미래를 예보하는 것이 아니라 이미 지난 시점의 빈 값을 채우는 문제이며, 오프라인 물리 분석용이다.</a:t>
             </a:r>
           </a:p>
           <a:p/>
           <a:p>
             <a:r>
-              <a:t>Q. 진짜 결측 구간에서도 이만큼 잘하나?</a:t>
-            </a:r>
-          </a:p>
-          <a:p>
-            <a:r>
-              <a:t> → 단정하지 않는다. MNAR이므로 관측점 성능은 낙관적 상한. 결측 분포로 재가중하면</a:t>
-            </a:r>
-          </a:p>
-          <a:p>
-            <a:r>
-              <a:t>    인과 대비는 8/8 생존, 오프라인 대비는 모집단 조건부(컷 2/4·포함 4/4).</a:t>
+              <a:t>Q. 진짜 결측 구간에서도 이만큼 복원되는가?</a:t>
+            </a:r>
+          </a:p>
+          <a:p>
+            <a:r>
+              <a:t> → 단정하지 않는다. MNAR이므로 관측점 성능은 낙관적 상한이며, 결측 분포로 재가중하면 인과 대비는</a:t>
+            </a:r>
+          </a:p>
+          <a:p>
+            <a:r>
+              <a:t>    8/8 생존, 오프라인 대비는 모집단 조건부(컷 2/4·포함 4/4)이다.</a:t>
             </a:r>
           </a:p>
           <a:p/>
           <a:p>
             <a:r>
-              <a:t>Q. 보간이 미래를 보는데 이기는 게 가능한가?</a:t>
-            </a:r>
-          </a:p>
-          <a:p>
-            <a:r>
-              <a:t> → 가능하고 그게 논지의 핵심. 빠른 진단이 시간 보간으로 얻을 수 없는 정보를 운반하기 때문.</a:t>
-            </a:r>
-          </a:p>
-          <a:p>
-            <a:r>
-              <a:t>    특히 보간이 구조적으로 실패하는 급변 구간에서 이긴다.</a:t>
+              <a:t>Q. 보간이 미래를 읽는데 이기는 것이 가능한가?</a:t>
+            </a:r>
+          </a:p>
+          <a:p>
+            <a:r>
+              <a:t> → 가능하며 그것이 논지의 핵심이다. 빠른 진단이 시간 보간으로 얻을 수 없는 정보를 운반하며,</a:t>
+            </a:r>
+          </a:p>
+          <a:p>
+            <a:r>
+              <a:t>    보간이 구조적으로 실패하는 급변 구간에서 이긴다.</a:t>
             </a:r>
           </a:p>
           <a:p/>
           <a:p>
             <a:r>
-              <a:t>Q. 모델 크기/과적합은?</a:t>
-            </a:r>
-          </a:p>
-          <a:p>
-            <a:r>
-              <a:t> → 백본 357,570 파라미터. 폭 34k→879k 스윕이 평평하고 21k 모델이 컷에서 동급이므로</a:t>
-            </a:r>
-          </a:p>
-          <a:p>
-            <a:r>
-              <a:t>    문제는 capacity가 아니라 정보량이다.</a:t>
+              <a:t>Q. 왜 LSTM인가? 합성곱이나 attention이 더 낫지 않은가?</a:t>
+            </a:r>
+          </a:p>
+          <a:p>
+            <a:r>
+              <a:t> → 같은 문맥에서 세 계열은 0.023 이내로 동률이다(B.9). 선택은 비용으로 하며, 순환은 도달 범위에</a:t>
+            </a:r>
+          </a:p>
+          <a:p>
+            <a:r>
+              <a:t>    O(1), 합성곱은 O(log R), attention은 상수가 4.3배이다. 10k 파라미터 아래에서는 합성곱이 낫다.</a:t>
             </a:r>
           </a:p>
           <a:p/>
           <a:p>
             <a:r>
+              <a:t>Q. 얼마나 긴 문맥이 필요한가?</a:t>
+            </a:r>
+          </a:p>
+          <a:p>
+            <a:r>
+              <a:t> → 약 50 ms에서 포화한다. 20 ms에서도 인과 GP를 이기지만 승리 방전 비율이 0.52이며 70 ms에서</a:t>
+            </a:r>
+          </a:p>
+          <a:p>
+            <a:r>
+              <a:t>    0.66으로 평평해진다. 무한 문맥은 필요하지 않다.</a:t>
+            </a:r>
+          </a:p>
+          <a:p/>
+          <a:p>
+            <a:r>
               <a:t>Q. V_rot을 살리려면?</a:t>
             </a:r>
           </a:p>
           <a:p>
             <a:r>
-              <a:t> → NBI 토크 채널 확보가 1순위, 원본 kHz Mirnov(모드 회전 주파수)가 그다음.</a:t>
-            </a:r>
-          </a:p>
-          <a:p>
-            <a:r>
-              <a:t>    Mirnov 파생 특징 재가공은 이미 음성으로 확인됐다.</a:t>
+              <a:t> → NBI 토크 채널 확보가 1순위, 원본 kHz Mirnov(모드 회전 주파수)가 그다음이다. B.6 shot 집합이</a:t>
+            </a:r>
+          </a:p>
+          <a:p>
+            <a:r>
+              <a:t>    동결되어 있고, 변동 방전에서 먼저 개선되어야 한다는 예측이 기록되어 있다.</a:t>
             </a:r>
           </a:p>
           <a:p/>
           <a:p>
             <a:r>
-              <a:t>Q. 실시간에 쓸 수 있나?</a:t>
-            </a:r>
-          </a:p>
-          <a:p>
-            <a:r>
-              <a:t> → 상태 유지 1-step 추론이 CPU 중앙값 1.05 ms / p99 1.61 ms로 10 ms 예산의 16%.</a:t>
-            </a:r>
-          </a:p>
-          <a:p>
-            <a:r>
-              <a:t>    conformal 예측구간도 32/32 셀에서 두 기준선을 이긴다.</a:t>
+              <a:t>Q. 실시간에 쓸 수 있는가?</a:t>
+            </a:r>
+          </a:p>
+          <a:p>
+            <a:r>
+              <a:t> → 상태 유지 1-step이 CPU 유휴 세션에서 중앙값 1.05 ms / p99 1.61 ms이며, 10 ms 예산은 어느</a:t>
+            </a:r>
+          </a:p>
+          <a:p>
+            <a:r>
+              <a:t>    arm에도 구속 조건이 아니다. 절댓값은 기계 종속이므로 연산자 수와 순서를 주장한다.</a:t>
             </a:r>
           </a:p>
           <a:p/>
           <a:p>
             <a:r>
-              <a:t>Q. seed에 따라 흔들리지 않나?</a:t>
-            </a:r>
-          </a:p>
-          <a:p>
-            <a:r>
-              <a:t> → Tᵢ는 4개 독립 분할 × 두 모집단 전부 PASS로 강건. V_rot은 분할에 따라 크게 요동하며,</a:t>
-            </a:r>
-          </a:p>
-          <a:p>
-            <a:r>
-              <a:t>    그것 자체가 "현 규모에서 V_rot 단일 수치는 측정 불가"라는 근거다.</a:t>
+              <a:t>Q. seed에 따라 흔들리지 않는가?</a:t>
+            </a:r>
+          </a:p>
+          <a:p>
+            <a:r>
+              <a:t> → Tᵢ는 4개 독립 분할 × 두 모집단 전부 PASS로 강건하다. V_rot은 방전 단위 승률이 0.48로 소수</a:t>
+            </a:r>
+          </a:p>
+          <a:p>
+            <a:r>
+              <a:t>    방전에 집중되며, 이것이 ‘현 규모에서 V_rot 단일 수치는 shot-general이 아니다’라는 근거이다.</a:t>
             </a:r>
           </a:p>
         </p:txBody>
@@ -2679,80 +2697,65 @@
           <a:lstStyle/>
           <a:p>
             <a:r>
-              <a:t>⏱ 01:20–02:20  (60초)</a:t>
+              <a:t>⏱ 01:15–02:10  (55초)</a:t>
             </a:r>
           </a:p>
           <a:p/>
           <a:p>
             <a:r>
-              <a:t>"CES는 이온온도와 토로이달 회전이라는, pedestal 물리에서 가장 중요한 두 양을 줍니다.</a:t>
-            </a:r>
-          </a:p>
-          <a:p>
-            <a:r>
-              <a:t> 그런데 충분한 신호대잡음비를 얻으려면 광자를 오래 모아야 해서 느리고, 자주 빕니다.</a:t>
-            </a:r>
-          </a:p>
-          <a:p>
-            <a:r>
-              <a:t> 같은 10 ms 격자에서 Tᵢ는 8.2%, 회전은 23.9%가 값 자체가 비어 있습니다.</a:t>
-            </a:r>
-          </a:p>
-          <a:p>
-            <a:r>
-              <a:t> 회전은 여기서 끝이 아닙니다. 값이 채워진 행 중에서도 54%가 직전 값을 그대로 복사한</a:t>
-            </a:r>
-          </a:p>
-          <a:p>
-            <a:r>
-              <a:t> held 값입니다 — 진짜 측정이 아닙니다. NaN과 held를 합치면 회전은 전체 행의 65%가</a:t>
-            </a:r>
-          </a:p>
-          <a:p>
-            <a:r>
-              <a:t> 실질적으로 정보가 없습니다. Tᵢ의 held는 22만 6천 행 중 단 1행, 사실상 0%입니다.</a:t>
-            </a:r>
-          </a:p>
-          <a:p>
-            <a:r>
-              <a:t> 그리고 두 타겟은 서로 독립적으로 빕니다 — 한쪽만 관측된 행이 많다는 뜻입니다.</a:t>
+              <a:t>CES는 이온온도와 토로이달 회전이라는 페데스탈 물리의 두 핵심량을 제공한다. 그러나 충분한</a:t>
+            </a:r>
+          </a:p>
+          <a:p>
+            <a:r>
+              <a:t>신호대잡음비를 얻기 위해 광자를 오래 적분해야 하므로 느리고 자주 결측된다. 같은 10 ms 격자에서</a:t>
+            </a:r>
+          </a:p>
+          <a:p>
+            <a:r>
+              <a:t>Tᵢ는 8.2%, 회전은 23.9%가 값 자체가 비어 있다. 회전은 여기에 더해, 값이 채워진 행 중 54%가</a:t>
+            </a:r>
+          </a:p>
+          <a:p>
+            <a:r>
+              <a:t>직전 값을 복사한 held 값이며 독립 측정이 아니다. NaN과 held를 합치면 회전은 전체 행의 65%가</a:t>
+            </a:r>
+          </a:p>
+          <a:p>
+            <a:r>
+              <a:t>실질적으로 정보가 없다. Tᵢ의 held는 226,991행 중 1행으로 사실상 0%이다. 두 타깃은 서로</a:t>
+            </a:r>
+          </a:p>
+          <a:p>
+            <a:r>
+              <a:t>독립적으로 결측된다.</a:t>
             </a:r>
           </a:p>
           <a:p/>
           <a:p>
             <a:r>
-              <a:t> 반대로 BES, ECEI, Mirnov 같은 빠른 진단은 같은 격자에서 100% 다 있습니다.</a:t>
-            </a:r>
-          </a:p>
-          <a:p>
-            <a:r>
-              <a:t> 그래서 질문은 자연스럽습니다: 항상 있는 것으로 자주 비는 것을 채울 수 있는가.</a:t>
-            </a:r>
-          </a:p>
-          <a:p>
-            <a:r>
-              <a:t> 정확히는, CES 자신의 시간 보간이 복원할 수 없는 정보를 회복할 수 있는가입니다."</a:t>
+              <a:t>반면 BES, ECEI, Mirnov 같은 빠른 진단은 같은 격자에서 100% 측정된다. 따라서 연구 질문은</a:t>
+            </a:r>
+          </a:p>
+          <a:p>
+            <a:r>
+              <a:t>항상 존재하는 입력으로 자주 비는 타깃을 채울 수 있는가, 정확히는 CES 자신의 시간 보간이</a:t>
+            </a:r>
+          </a:p>
+          <a:p>
+            <a:r>
+              <a:t>복원할 수 없는 정보를 회복할 수 있는가이다.</a:t>
             </a:r>
           </a:p>
           <a:p/>
           <a:p>
             <a:r>
-              <a:t>물리적 연결고리 (질문 대비):</a:t>
-            </a:r>
-          </a:p>
-          <a:p>
-            <a:r>
-              <a:t>  · ECEI(Tₑ) + BES(nₑ) → 충돌 e–i 결합을 통해 Tᵢ와 물리적으로 연결</a:t>
-            </a:r>
-          </a:p>
-          <a:p>
-            <a:r>
-              <a:t>  · 회전은 주로 NBI 토크가 구동 → 그 토크가 데이터에 없음 = 근본적 정보 부재</a:t>
-            </a:r>
-          </a:p>
-          <a:p>
-            <a:r>
-              <a:t>※ 결측이 무작위가 아니라는 점(MNAR)은 여기서 한 번 심어두고, 결과 ④에서 정량화한다.</a:t>
+              <a:t>물리적 연결(질문 대비): ECEI(Tₑ)와 BES(nₑ)는 충돌 e–i 결합을 통해 Tᵢ와 연결된다. 회전은</a:t>
+            </a:r>
+          </a:p>
+          <a:p>
+            <a:r>
+              <a:t>주로 NBI 토크가 구동하며 그 토크가 데이터에 없다. MNAR은 결과 ④에서 정량화된다.</a:t>
             </a:r>
           </a:p>
         </p:txBody>
@@ -2822,66 +2825,51 @@
           <a:lstStyle/>
           <a:p>
             <a:r>
-              <a:t>⏱ 02:20–03:00  (40초)</a:t>
+              <a:t>⏱ 02:10–02:45  (35초)</a:t>
             </a:r>
           </a:p>
           <a:p/>
           <a:p>
             <a:r>
-              <a:t>"결측을 퍼센트가 아니라 전수 집계로 보여드립니다. 641 shot, 24만 7천 행 전부입니다.</a:t>
+              <a:t>결측을 비율이 아니라 전수 집계로 제시한다(641 shot, 247,207행 전부).</a:t>
             </a:r>
           </a:p>
           <a:p/>
           <a:p>
             <a:r>
-              <a:t> 위 두 줄이 핵심입니다. 값이 비어 있는 NaN은 Tᵢ 8.2%, 회전 23.9%입니다.</a:t>
-            </a:r>
-          </a:p>
-          <a:p>
-            <a:r>
-              <a:t> 그런데 그 아래, 직전 관측값과 비트 단위로 똑같은 held 행이 회전은 41.1%입니다.</a:t>
-            </a:r>
-          </a:p>
-          <a:p>
-            <a:r>
-              <a:t> 심하면 1,214행이 연속으로 같은 값입니다. 회전 진단의 실제 측정 주기가 행 주기보다</a:t>
-            </a:r>
-          </a:p>
-          <a:p>
-            <a:r>
-              <a:t> 느려서 값이 carry-forward된 겁니다 — 독립적인 측정이 아닙니다.</a:t>
-            </a:r>
-          </a:p>
-          <a:p>
-            <a:r>
-              <a:t> 둘을 합치면 회전은 65%가 실질 무정보이고, 진짜 정보가 있는 행은 35%뿐입니다.</a:t>
-            </a:r>
-          </a:p>
-          <a:p>
-            <a:r>
-              <a:t> Tᵢ는 held가 22만 6,991행 중 1행이라 사실상 무관합니다.</a:t>
+              <a:t>위 두 줄이 핵심이다. 값이 비어 있는 NaN은 Tᵢ 8.2%, 회전 23.9%이다. 그 아래, 직전 관측값과</a:t>
+            </a:r>
+          </a:p>
+          <a:p>
+            <a:r>
+              <a:t>비트 단위로 동일한 held 행이 회전에서 41.1%이며 최대 1,214행이 연속으로 같은 값이다. 회전 진단의</a:t>
+            </a:r>
+          </a:p>
+          <a:p>
+            <a:r>
+              <a:t>실제 측정 주기가 행 주기보다 느려 값이 carry-forward된 것이며 독립 측정이 아니다. 둘을 합치면</a:t>
+            </a:r>
+          </a:p>
+          <a:p>
+            <a:r>
+              <a:t>회전은 65%가 실질 무정보이고 실제 정보가 있는 행은 35%이다. Tᵢ는 held가 226,991행 중 1행이다.</a:t>
             </a:r>
           </a:p>
           <a:p/>
           <a:p>
             <a:r>
-              <a:t> 왜 중요하냐면, held 행은 persistence나 보간이 오차 거의 0으로 맞히는 '공짜 정답'입니다.</a:t>
-            </a:r>
-          </a:p>
-          <a:p>
-            <a:r>
-              <a:t> 그래서 확정 프로토콜에서는 학습 타겟에서도, 이력 입력에서도, 정규화 통계에서도,</a:t>
-            </a:r>
-          </a:p>
-          <a:p>
-            <a:r>
-              <a:t> 모든 기준선의 보간 앵커에서도 전부 뺐습니다. 진짜 측정만 채점합니다."</a:t>
+              <a:t>held 행은 persistence나 보간이 오차 0에 가깝게 맞히는 행이므로, 확정 프로토콜에서는 학습 타깃,</a:t>
+            </a:r>
+          </a:p>
+          <a:p>
+            <a:r>
+              <a:t>이력 입력, 정규화 통계, 모든 기준선의 보간 앵커에서 전부 제거하고 실제 측정만 채점하였다.</a:t>
             </a:r>
           </a:p>
           <a:p/>
           <a:p>
             <a:r>
-              <a:t>※ 이 슬라이드는 신뢰를 크게 얻는 지점 — 방어적으로 말하지 말고 "찾아서 고쳤다"는 톤으로.</a:t>
+              <a:t>이 슬라이드는 데이터 감사의 신뢰를 확보하는 지점이다. 발견하여 고쳤다는 사실을 명확히 전달한다.</a:t>
             </a:r>
           </a:p>
         </p:txBody>
@@ -2951,65 +2939,55 @@
           <a:lstStyle/>
           <a:p>
             <a:r>
-              <a:t>⏱ 03:00–03:45  (45초)</a:t>
+              <a:t>⏱ 02:45–03:25  (40초)</a:t>
             </a:r>
           </a:p>
           <a:p/>
           <a:p>
             <a:r>
-              <a:t>"두 번째 감사입니다. 관측된 Tᵢ의 p99가 2,089 eV인데 최댓값은 14,984 eV입니다.</a:t>
-            </a:r>
-          </a:p>
-          <a:p>
-            <a:r>
-              <a:t> 이 먼 꼬리는 플라즈마가 아니라 실패한 스펙트럼 피팅입니다. 3 keV를 넘는 행이</a:t>
-            </a:r>
-          </a:p>
-          <a:p>
-            <a:r>
-              <a:t> 1,197행, 0.53%인데, 85%가 단일 행이고 정점이 이웃 평균의 13배입니다.</a:t>
-            </a:r>
-          </a:p>
-          <a:p>
-            <a:r>
-              <a:t> 어떤 방법으로도 예측할 수 없고, 보간의 앵커를 오염시킵니다.</a:t>
+              <a:t>두 번째 감사이다. 관측 Tᵢ의 p99가 2,089 eV인 반면 최댓값은 14,984 eV이다. 이 먼 꼬리는</a:t>
+            </a:r>
+          </a:p>
+          <a:p>
+            <a:r>
+              <a:t>플라즈마가 아니라 실패한 스펙트럼 피팅이다. 3 keV를 넘는 행은 1,197행(0.53%)이며 85%가 단일</a:t>
+            </a:r>
+          </a:p>
+          <a:p>
+            <a:r>
+              <a:t>행이고 정점이 이웃 평균의 13배이다. 어떤 방법으로도 예측되지 않으며 보간의 앵커를 오염시킨다.</a:t>
             </a:r>
           </a:p>
           <a:p/>
           <a:p>
             <a:r>
-              <a:t> 여기서 정직한 문제가 생깁니다. 빼면 '어려운 행을 없앴다'는 비판을 받고,</a:t>
-            </a:r>
-          </a:p>
-          <a:p>
-            <a:r>
-              <a:t> 두면 스파이크 앵커가 오프라인 기준선에 핸디캡을 줍니다. 어느 쪽도 안전하지 않습니다.</a:t>
-            </a:r>
-          </a:p>
-          <a:p>
-            <a:r>
-              <a:t> 그래서 두 대응을 모두 공동 1차 모집단으로 사전등록했습니다 — 컷과 포함.</a:t>
-            </a:r>
-          </a:p>
-          <a:p>
-            <a:r>
-              <a:t> 규칙은 하나입니다: 무조건부 주장은 두 모집단 모두에서 성립할 때만 한다.</a:t>
-            </a:r>
-          </a:p>
-          <a:p>
-            <a:r>
-              <a:t> 문턱이 자의적이라는 지적도 검사했는데, 2.5·3·4 keV 전부 결과가 같습니다."</a:t>
+              <a:t>제거하면 어려운 행을 없앴다는 비판을 받고, 유지하면 스파이크 앵커가 오프라인 기준선에 핸디캡을</a:t>
+            </a:r>
+          </a:p>
+          <a:p>
+            <a:r>
+              <a:t>준다. 어느 쪽도 안전하지 않으므로 두 대응을 모두 공동 1차 모집단(컷과 포함)으로 사전등록하였다.</a:t>
+            </a:r>
+          </a:p>
+          <a:p>
+            <a:r>
+              <a:t>규칙은 하나이다: 무조건부 주장은 두 모집단 모두에서 성립할 때만 한다. 문턱 민감도도 검사하였으며</a:t>
+            </a:r>
+          </a:p>
+          <a:p>
+            <a:r>
+              <a:t>2.5·3·4 keV에서 결과가 같았다.</a:t>
             </a:r>
           </a:p>
           <a:p/>
           <a:p>
             <a:r>
-              <a:t>※ 질문 대비: 값 컷은 일방향 프록시다 — 하향 dip 4,965행은 손대지 않았고, 상향 이상치의</a:t>
-            </a:r>
-          </a:p>
-          <a:p>
-            <a:r>
-              <a:t>   19%만 제거된다. 회전 스파이크는 컷하지 않고 SSE 비중을 병기한다.</a:t>
+              <a:t>질문 대비: 값 컷은 일방향 프록시이다. 하향 dip 4,965행은 손대지 않았고 상향 이상치의 19%만</a:t>
+            </a:r>
+          </a:p>
+          <a:p>
+            <a:r>
+              <a:t>제거된다. 회전 스파이크는 컷하지 않고 SSE 비중을 병기한다.</a:t>
             </a:r>
           </a:p>
         </p:txBody>
@@ -3079,82 +3057,66 @@
           <a:lstStyle/>
           <a:p>
             <a:r>
-              <a:t>⏱ 03:45–05:00  (75초)  ★ 이 발표에서 가장 중요한 슬라이드</a:t>
+              <a:t>⏱ 03:25–04:30  (65초)  ★ 이 발표에서 가장 중요한 슬라이드</a:t>
             </a:r>
           </a:p>
           <a:p/>
           <a:p>
             <a:r>
-              <a:t>"평가 기준선을 어떻게 잡았는지가 이 연구의 핵심입니다.</a:t>
+              <a:t>평가 기준선의 설정이 이 연구의 핵심이다. 흔한 방식은 persistence(직전 값 유지)와의 비교이나</a:t>
+            </a:r>
+          </a:p>
+          <a:p>
+            <a:r>
+              <a:t>이는 너무 쉬운 상대이므로, 의도적으로 훨씬 어려운 상대인 CES-only 오프라인 보간(선형·PCHIP·</a:t>
+            </a:r>
+          </a:p>
+          <a:p>
+            <a:r>
+              <a:t>국소 AR·GP)을 선택하였다.</a:t>
             </a:r>
           </a:p>
           <a:p/>
           <a:p>
             <a:r>
-              <a:t> 흔한 방식은 persistence, 즉 직전 값 유지와 비교하는 겁니다. 그건 너무 쉽습니다.</a:t>
-            </a:r>
-          </a:p>
-          <a:p>
-            <a:r>
-              <a:t> 그래서 일부러 훨씬 어려운 상대를 골랐습니다 — CES만 쓰는 오프라인 보간,</a:t>
-            </a:r>
-          </a:p>
-          <a:p>
-            <a:r>
-              <a:t> 선형·PCHIP·국소 AR·GP입니다.</a:t>
+              <a:t>정보 비대칭에 주목한다. 오른쪽의 보간은 맞히려는 시점의 과거와 미래 CES를 모두 읽는다. 반면</a:t>
+            </a:r>
+          </a:p>
+          <a:p>
+            <a:r>
+              <a:t>본 모델은 그 시점까지의 빠른 진단과 세그먼트 과거 이력만 읽고 미래는 전혀 읽지 않는다. 엄격히</a:t>
+            </a:r>
+          </a:p>
+          <a:p>
+            <a:r>
+              <a:t>인과적이다. 따라서 미래를 읽는 보간을 과거만 읽는 모델이 이긴다면, 빠른 진단이 시간 보간으로는</a:t>
+            </a:r>
+          </a:p>
+          <a:p>
+            <a:r>
+              <a:t>얻을 수 없는 CES 정보를 실제로 운반한다는 강한 증거가 된다.</a:t>
             </a:r>
           </a:p>
           <a:p/>
           <a:p>
             <a:r>
-              <a:t> 여기서 정보 비대칭을 보십시오. 오른쪽 보간은 맞히려는 시점의 과거와 미래 CES를</a:t>
-            </a:r>
-          </a:p>
-          <a:p>
-            <a:r>
-              <a:t> 모두 씁니다. 반면 저희 모델은 그 시점까지의 빠른 진단과 세그먼트 과거 이력만 쓰고</a:t>
-            </a:r>
-          </a:p>
-          <a:p>
-            <a:r>
-              <a:t> 미래는 전혀 보지 않습니다. 엄격히 causal입니다.</a:t>
-            </a:r>
-          </a:p>
-          <a:p>
-            <a:r>
-              <a:t> 그래서 미래를 보는 보간을 과거만 보는 모델이 이긴다면, 그건 운이 아니라 빠른 진단이</a:t>
-            </a:r>
-          </a:p>
-          <a:p>
-            <a:r>
-              <a:t> 시간 보간으로는 얻을 수 없는 CES 정보를 실제로 운반한다는 강력한 증거가 됩니다.</a:t>
+              <a:t>이번 개정에서 팔을 하나 더 넣었다. 인과 GP는 같은 GP를 과거 이웃 16개로 제한한 것이며, 실제로</a:t>
+            </a:r>
+          </a:p>
+          <a:p>
+            <a:r>
+              <a:t>배치할 수 있는 방법 중 가장 강한 경쟁자이다. ‘배치 가능한 모든 인과 방법을 이긴다’는 주장은</a:t>
+            </a:r>
+          </a:p>
+          <a:p>
+            <a:r>
+              <a:t>persistence가 아니라 이 인과 GP로 판정한다.</a:t>
             </a:r>
           </a:p>
           <a:p/>
           <a:p>
             <a:r>
-              <a:t> 이번 개정에서 팔을 하나 더 넣었습니다 — 인과 GP입니다. 같은 GP를 과거 이웃 16개로만</a:t>
-            </a:r>
-          </a:p>
-          <a:p>
-            <a:r>
-              <a:t> 제한한 건데, 실제로 배치할 수 있는 방법 중 가장 강한 경쟁자입니다. persistence는</a:t>
-            </a:r>
-          </a:p>
-          <a:p>
-            <a:r>
-              <a:t> 이기기 쉬우니까, '배치 가능한 모든 인과 방법을 이긴다'는 주장을 persistence가 아니라</a:t>
-            </a:r>
-          </a:p>
-          <a:p>
-            <a:r>
-              <a:t> 이 인과 GP로 판정합니다."</a:t>
-            </a:r>
-          </a:p>
-          <a:p/>
-          <a:p>
-            <a:r>
-              <a:t>※ 청중이 "왜 굳이 불리하게?"라고 생각할 수 있으니 마지막 두 문장을 강조.</a:t>
+              <a:t>청중이 ‘왜 굳이 불리하게 설계하는가’를 물을 수 있으므로 마지막 두 문장을 강조한다.</a:t>
             </a:r>
           </a:p>
         </p:txBody>
@@ -3224,85 +3186,60 @@
           <a:lstStyle/>
           <a:p>
             <a:r>
-              <a:t>⏱ 05:00–05:50  (50초)</a:t>
+              <a:t>⏱ 04:30–05:15  (45초)</a:t>
             </a:r>
           </a:p>
           <a:p/>
           <a:p>
             <a:r>
-              <a:t>"데이터는 641개 방전, 10 ms 격자로 24만 7천 행입니다. 파일 하나는 대개 3초짜리</a:t>
-            </a:r>
-          </a:p>
-          <a:p>
-            <a:r>
-              <a:t> 측정 세그먼트 하나이고, 모델도 보간도 그 경계를 넘지 않습니다 — 정보 조건을</a:t>
-            </a:r>
-          </a:p>
-          <a:p>
-            <a:r>
-              <a:t> 양쪽에 똑같이 맞춘 겁니다.</a:t>
+              <a:t>데이터는 641개 방전, 10 ms 격자의 247,207행이다. 파일 하나는 대개 3초 길이의 측정 세그먼트</a:t>
+            </a:r>
+          </a:p>
+          <a:p>
+            <a:r>
+              <a:t>하나이며, 모델도 보간도 그 경계를 넘지 않아 정보 조건이 양쪽에 동일하게 맞추어졌다.</a:t>
             </a:r>
           </a:p>
           <a:p/>
           <a:p>
             <a:r>
-              <a:t> 데이터 계약은 네 가지입니다.</a:t>
-            </a:r>
-          </a:p>
-          <a:p>
-            <a:r>
-              <a:t> 첫째, 가짜 라벨을 만들지 않았습니다. 결측을 보간으로 메워 학습에 쓰면</a:t>
-            </a:r>
-          </a:p>
-          <a:p>
-            <a:r>
-              <a:t> '보간을 이기는가'라는 질문 자체가 무의미해집니다.</a:t>
-            </a:r>
-          </a:p>
-          <a:p>
-            <a:r>
-              <a:t> 둘째, 두 타겟이 독립적으로 비기 때문에 손실을 타겟별로 마스킹했습니다.</a:t>
-            </a:r>
-          </a:p>
-          <a:p>
-            <a:r>
-              <a:t> 이걸 안 하면 한쪽만 관측된 행 — 라벨의 약 28% — 을 통째로 버리게 됩니다.</a:t>
-            </a:r>
-          </a:p>
-          <a:p>
-            <a:r>
-              <a:t> 셋째, 누수를 세 곳에서 막았습니다. 행이 아니라 shot 파일 단위 분할, 학습 파일</a:t>
-            </a:r>
-          </a:p>
-          <a:p>
-            <a:r>
-              <a:t> 전용 정규화, 그리고 맞히려는 시점의 값과 관측 플래그를 입력에서 완전히 지우는 것.</a:t>
-            </a:r>
-          </a:p>
-          <a:p>
-            <a:r>
-              <a:t> 넷째, held 값을 전부 뺐습니다. 지도 타겟에서도, 이력 입력에서도, 정규화 통계에서도,</a:t>
-            </a:r>
-          </a:p>
-          <a:p>
-            <a:r>
-              <a:t> 그리고 모든 기준선의 보간 앵커에서도요. 대가가 있습니다 — 회전의 채점 행 40~44%는</a:t>
-            </a:r>
-          </a:p>
-          <a:p>
-            <a:r>
-              <a:t> 미래 이웃이 없어서 보간이 persistence로 후퇴합니다. 그 폴백률까지 사전등록으로</a:t>
-            </a:r>
-          </a:p>
-          <a:p>
-            <a:r>
-              <a:t> 보고하게 해뒀습니다."</a:t>
+              <a:t>데이터 계약은 네 가지이다. 첫째, 가짜 라벨을 만들지 않았다. 결측을 보간으로 메워 학습에 쓰면</a:t>
+            </a:r>
+          </a:p>
+          <a:p>
+            <a:r>
+              <a:t>‘보간을 이기는가’라는 질문 자체가 무의미해진다. 둘째, 두 타깃이 독립적으로 결측되므로 손실을</a:t>
+            </a:r>
+          </a:p>
+          <a:p>
+            <a:r>
+              <a:t>타깃별로 마스킹하였다. 이를 하지 않으면 한쪽만 관측된 행(라벨의 약 28%)이 버려진다. 셋째,</a:t>
+            </a:r>
+          </a:p>
+          <a:p>
+            <a:r>
+              <a:t>누수를 세 곳에서 막았다: shot 파일 단위 분할, 학습 파일 전용 정규화, 타깃 시점의 값과 관측</a:t>
+            </a:r>
+          </a:p>
+          <a:p>
+            <a:r>
+              <a:t>플래그의 완전 마스킹이다. 넷째, held 값을 지도 타깃·이력 입력·정규화 통계·모든 기준선의</a:t>
+            </a:r>
+          </a:p>
+          <a:p>
+            <a:r>
+              <a:t>보간 앵커에서 전부 제거하였다. 그 대가로 회전 채점 행의 40~44%에서 보간이 persistence로</a:t>
+            </a:r>
+          </a:p>
+          <a:p>
+            <a:r>
+              <a:t>후퇴하며, 이 폴백률은 사전등록에 따라 보고된다.</a:t>
             </a:r>
           </a:p>
           <a:p/>
           <a:p>
             <a:r>
-              <a:t>※ 질문 대비: TEST는 아키텍처 탐색 시작 전에 예약했고 선택 중엔 열지 않았다.</a:t>
+              <a:t>질문 대비: TEST는 아키텍처 탐색 전에 예약되었고 선택 중에는 열리지 않았다.</a:t>
             </a:r>
           </a:p>
         </p:txBody>
@@ -3372,56 +3309,56 @@
           <a:lstStyle/>
           <a:p>
             <a:r>
-              <a:t>⏱ 05:50–06:35  (45초)</a:t>
+              <a:t>⏱ 05:15–05:55  (40초)</a:t>
             </a:r>
           </a:p>
           <a:p/>
           <a:p>
             <a:r>
-              <a:t>"학습 예제를 만드는 방식이 두 가지입니다. 이 대조가 결과 ③의 핵심입니다.</a:t>
+              <a:t>학습 예제를 만드는 방식은 두 가지이며, 이 대조가 결과 ③의 핵심이다.</a:t>
             </a:r>
           </a:p>
           <a:p/>
           <a:p>
             <a:r>
-              <a:t> 하나는 윈도 프레이밍입니다. 맞히려는 시점 앞 두 행을 잘라서 텐서로 만듭니다.</a:t>
-            </a:r>
-          </a:p>
-          <a:p>
-            <a:r>
-              <a:t> 이게 옛 주 모델의 방식이고 지금은 대조군입니다.</a:t>
-            </a:r>
-          </a:p>
-          <a:p>
-            <a:r>
-              <a:t> 다른 하나는 전체 격자 시퀀스입니다. 세그먼트 안에서 입력이 온전한 행은 라벨이</a:t>
-            </a:r>
-          </a:p>
-          <a:p>
-            <a:r>
-              <a:t> 없어도 전부 맥락으로 유지하고, 희소성은 loss 마스킹으로 처리합니다.</a:t>
+              <a:t>윈도 프레이밍은 맞히려는 시점 앞 두 행을 잘라 텐서로 만든다. 옛 주 모델의 방식이며 현재는</a:t>
+            </a:r>
+          </a:p>
+          <a:p>
+            <a:r>
+              <a:t>대조군이다. 전체격자 시퀀스는 세그먼트 안에서 입력이 온전한 행을 라벨 유무와 무관하게 전부</a:t>
+            </a:r>
+          </a:p>
+          <a:p>
+            <a:r>
+              <a:t>맥락으로 유지하고, 희소성은 loss 마스킹으로 처리한다.</a:t>
             </a:r>
           </a:p>
           <a:p/>
           <a:p>
             <a:r>
-              <a:t> 결정적 차이는 도달거리입니다. 윈도는 과거 관측 W-1개만 보고, 시퀀스는 세그먼트</a:t>
-            </a:r>
-          </a:p>
-          <a:p>
-            <a:r>
-              <a:t> 전체를 봅니다. 그리고 시퀀스에서는 W가 더 이상 하이퍼파라미터가 아닙니다."</a:t>
+              <a:t>결정적 차이는 도달 범위이다. 윈도는 과거 관측 W-1개만 읽고 시퀀스는 세그먼트 전체를 읽는다.</a:t>
+            </a:r>
+          </a:p>
+          <a:p>
+            <a:r>
+              <a:t>시퀀스에서는 W가 더 이상 하이퍼파라미터가 아니다. 이 도달 범위가 실제로 얼마나 필요한지는</a:t>
+            </a:r>
+          </a:p>
+          <a:p>
+            <a:r>
+              <a:t>결과 ⑨에서 측정된다.</a:t>
             </a:r>
           </a:p>
           <a:p/>
           <a:p>
             <a:r>
-              <a:t>※ 질문 대비: 윈도의 시간 특징 4채널(lookback·간격·각 log1p)은 불규칙한 관측 간격을</a:t>
-            </a:r>
-          </a:p>
-          <a:p>
-            <a:r>
-              <a:t>   명시적으로 노출하기 위한 것. 과거 값의 신뢰도는 10 ms 전인지 200 ms 전인지에 달렸다.</a:t>
+              <a:t>질문 대비: 윈도의 시간 특징 4채널(lookback·간격·각 log1p)은 불규칙한 관측 간격을 명시적으로</a:t>
+            </a:r>
+          </a:p>
+          <a:p>
+            <a:r>
+              <a:t>노출하기 위한 것이다. 과거 값의 신뢰도는 10 ms 전인지 200 ms 전인지에 의존한다.</a:t>
             </a:r>
           </a:p>
         </p:txBody>
@@ -3491,71 +3428,61 @@
           <a:lstStyle/>
           <a:p>
             <a:r>
-              <a:t>⏱ 06:35–07:35  (60초)</a:t>
+              <a:t>⏱ 05:55–06:50  (55초)</a:t>
             </a:r>
           </a:p>
           <a:p/>
           <a:p>
             <a:r>
-              <a:t>"주 모델입니다. 22채널 격자 시퀀스 위에 독립적인 인과 LSTM 두 개를 얹었습니다.</a:t>
+              <a:t>주 모델은 22채널 격자 시퀀스 위의 독립적인 인과 LSTM 두 개이다.</a:t>
             </a:r>
           </a:p>
           <a:p/>
           <a:p>
             <a:r>
-              <a:t> 위쪽 Tᵢ 분기는 2층 160으로 전체 상태를 다 읽습니다 — 빠른 진단, 두 타겟의 이월값,</a:t>
-            </a:r>
-          </a:p>
-          <a:p>
-            <a:r>
-              <a:t> 신선도, 시간 간격까지요.</a:t>
-            </a:r>
-          </a:p>
-          <a:p>
-            <a:r>
-              <a:t> 아래쪽 V_rot 분기는 1층 64이고, 빠른 진단이 아닌 7채널만 읽습니다.</a:t>
-            </a:r>
-          </a:p>
-          <a:p>
-            <a:r>
-              <a:t> 여기가 중요합니다. 라우팅을 head가 아니라 인코더에서 했습니다. 순환 상태를 공유하면</a:t>
-            </a:r>
-          </a:p>
-          <a:p>
-            <a:r>
-              <a:t> head를 어떻게 배선해도 빠른 진단 정보가 회전 쪽으로 샙니다. 분기 자체를 분리했기</a:t>
-            </a:r>
-          </a:p>
-          <a:p>
-            <a:r>
-              <a:t> 때문에, 빠른 채널 15개를 전부 섭동해도 회전 출력이 비트 단위로 동일합니다.</a:t>
-            </a:r>
-          </a:p>
-          <a:p>
-            <a:r>
-              <a:t> 이게 뒤에서 나오는 비대칭 결론을 구조적으로 보증합니다.</a:t>
+              <a:t>Tᵢ 분기는 2층 160으로 전체 상태(빠른 진단, 두 타깃의 이월값, 신선도, 시간 간격)를 읽는다.</a:t>
+            </a:r>
+          </a:p>
+          <a:p>
+            <a:r>
+              <a:t>V_rot 분기는 1층 64이며 빠른 진단이 아닌 7채널만 읽는다. 라우팅을 head가 아니라 인코더에서</a:t>
+            </a:r>
+          </a:p>
+          <a:p>
+            <a:r>
+              <a:t>하였다. 순환 상태를 공유하면 head를 어떻게 배선해도 빠른 진단 정보가 회전 쪽으로 누출된다.</a:t>
+            </a:r>
+          </a:p>
+          <a:p>
+            <a:r>
+              <a:t>분기 자체를 분리하였으므로 빠른 채널 15개를 전부 섭동해도 회전 출력이 비트 단위로 동일하며,</a:t>
+            </a:r>
+          </a:p>
+          <a:p>
+            <a:r>
+              <a:t>이것이 뒤의 비대칭 결론을 구조적으로 보증한다.</a:t>
             </a:r>
           </a:p>
           <a:p/>
           <a:p>
             <a:r>
-              <a:t> 희소성은 loss가 처리합니다 — 세그먼트의 라벨 있는 모든 행에 대한 타겟별 masked MSE.</a:t>
-            </a:r>
-          </a:p>
-          <a:p>
-            <a:r>
-              <a:t> 전체 35만 7천 파라미터이고, 학습은 AdamW에 조기 종료로 14~25 에폭에서 끝납니다."</a:t>
+              <a:t>희소성은 loss가 처리한다(세그먼트의 라벨 있는 모든 행에 대한 타깃별 masked MSE). 전체</a:t>
+            </a:r>
+          </a:p>
+          <a:p>
+            <a:r>
+              <a:t>357,570 파라미터이며 AdamW와 조기 종료로 14~25 에폭에서 학습이 끝난다.</a:t>
             </a:r>
           </a:p>
           <a:p/>
           <a:p>
             <a:r>
-              <a:t>※ 질문 대비: 라벨 없는 행을 왜 남기나? → 빠른 진단은 그 행에서도 조밀하게 관측된다.</a:t>
-            </a:r>
-          </a:p>
-          <a:p>
-            <a:r>
-              <a:t>   버리면 인과 문맥이 끊긴다.</a:t>
+              <a:t>질문 대비: 라벨 없는 행을 남기는 이유는 빠른 진단이 그 행에서도 조밀하게 관측되기 때문이며,</a:t>
+            </a:r>
+          </a:p>
+          <a:p>
+            <a:r>
+              <a:t>버리면 인과 문맥이 끊긴다.</a:t>
             </a:r>
           </a:p>
         </p:txBody>
@@ -6889,7 +6816,7 @@
                 </a:solidFill>
                 <a:latin typeface="Malgun Gothic"/>
               </a:rPr>
-              <a:t>빠른 진단(BES · ECEI · Mirnov)과 과거 CES 이력만으로 </a:t>
+              <a:t>본 연구는 빠른 진단(BES · ECEI · Mirnov)과 과거 CES 이력만으로 </a:t>
             </a:r>
             <a:r>
               <a:rPr sz="1600" b="1" i="0">
@@ -6898,7 +6825,7 @@
                 </a:solidFill>
                 <a:latin typeface="Malgun Gothic"/>
               </a:rPr>
-              <a:t>이온온도 Tᵢ · 토로이달 회전 V_rot</a:t>
+              <a:t>이온온도 Tᵢ와 토로이달 회전 V_rot</a:t>
             </a:r>
             <a:r>
               <a:rPr sz="1600" b="0" i="0">
@@ -6907,7 +6834,7 @@
                 </a:solidFill>
                 <a:latin typeface="Malgun Gothic"/>
               </a:rPr>
-              <a:t>를 복원하고,</a:t>
+              <a:t>를 복원하는 인과 모델을 제안하고,</a:t>
             </a:r>
           </a:p>
           <a:p>
@@ -6929,7 +6856,7 @@
                 </a:solidFill>
                 <a:latin typeface="Malgun Gothic"/>
               </a:rPr>
-              <a:t>미래까지 보는 오프라인 보간과 배치 가능한 최강 기준선(인과 GP)을 상대로 통계적으로 검증</a:t>
+              <a:t>미래를 읽는 오프라인 보간과 배치 가능한 최강 기준선(인과 GP)을 상대로 사전등록 프로토콜 아래 검증하였다.</a:t>
             </a:r>
           </a:p>
         </p:txBody>
@@ -6996,7 +6923,7 @@
                 </a:solidFill>
                 <a:latin typeface="Malgun Gothic"/>
               </a:rPr>
-              <a:t>서울대학교 · 원자핵공학  |  확정 프로토콜: W=2 · held-free · 두 모집단 공동 1차 · 백본 seq_v2 (357,570 파라미터)</a:t>
+              <a:t>서울대학교 · 원자핵공학  |  확정 프로토콜: W=2 · held-free · 두 모집단 공동 1차 · 백본 seq_v2 (357,570 파라미터) · 2026-08-27</a:t>
             </a:r>
           </a:p>
         </p:txBody>
@@ -7213,7 +7140,7 @@
           <a:noFill/>
         </p:spPr>
         <p:txBody>
-          <a:bodyPr wrap="square" anchor="t" lIns="25400" rIns="25400" tIns="12700" bIns="12700">
+          <a:bodyPr wrap="square" anchor="ctr" lIns="25400" rIns="25400" tIns="12700" bIns="12700">
             <a:spAutoFit/>
           </a:bodyPr>
           <a:lstStyle/>
@@ -7236,7 +7163,7 @@
                 </a:solidFill>
                 <a:latin typeface="Malgun Gothic"/>
               </a:rPr>
-              <a:t>짝지은 대조군: W=2 윈도 모델 (관측 마스킹 attention pooling)</a:t>
+              <a:t>짝지은 대조군: W=2 윈도 모델(관측 마스킹 attention pooling)</a:t>
             </a:r>
           </a:p>
         </p:txBody>
@@ -7572,7 +7499,7 @@
                 </a:solidFill>
                 <a:latin typeface="Malgun Gothic"/>
               </a:rPr>
-              <a:t>●  옛 주 모델 (201,258 파라미터)</a:t>
+              <a:t>●  옛 주 모델이며 201,258 파라미터이다.</a:t>
             </a:r>
           </a:p>
           <a:p>
@@ -7594,7 +7521,7 @@
                 </a:solidFill>
                 <a:latin typeface="Malgun Gothic"/>
               </a:rPr>
-              <a:t>–  모달리티별 time-aware 1-D CNN</a:t>
+              <a:t>–  모달리티별 time-aware 1-D CNN을 쓴다.</a:t>
             </a:r>
           </a:p>
           <a:p>
@@ -7616,7 +7543,7 @@
                 </a:solidFill>
                 <a:latin typeface="Malgun Gothic"/>
               </a:rPr>
-              <a:t>–  이력은 양방향 GRU(64)</a:t>
+              <a:t>–  이력은 양방향 GRU(64)로 부호화한다.</a:t>
             </a:r>
           </a:p>
           <a:p>
@@ -7638,7 +7565,7 @@
                 </a:solidFill>
                 <a:latin typeface="Malgun Gothic"/>
               </a:rPr>
-              <a:t>●  관측 마스킹 attention pooling</a:t>
+              <a:t>●  관측 마스킹 attention pooling을 쓴다.</a:t>
             </a:r>
           </a:p>
           <a:p>
@@ -7660,7 +7587,7 @@
                 </a:solidFill>
                 <a:latin typeface="Malgun Gothic"/>
               </a:rPr>
-              <a:t>–  해당 타겟이 실제 관측된 행에만 질량 허용</a:t>
+              <a:t>–  해당 타깃이 실제 관측된 행에만 질량을 허용한다.</a:t>
             </a:r>
           </a:p>
           <a:p>
@@ -7682,7 +7609,7 @@
                 </a:solidFill>
                 <a:latin typeface="Malgun Gothic"/>
               </a:rPr>
-              <a:t>–  보간의 귀납 편향을 파라미터 0으로 이식</a:t>
+              <a:t>–  보간의 귀납 편향을 파라미터 0개로 이식한다.</a:t>
             </a:r>
           </a:p>
           <a:p>
@@ -7704,7 +7631,7 @@
                 </a:solidFill>
                 <a:latin typeface="Malgun Gothic"/>
               </a:rPr>
-              <a:t>●  모든 것이 백본과 동일하게 고정</a:t>
+              <a:t>●  나머지는 백본과 동일하게 고정하였다.</a:t>
             </a:r>
           </a:p>
           <a:p>
@@ -7726,7 +7653,7 @@
                 </a:solidFill>
                 <a:latin typeface="Malgun Gothic"/>
               </a:rPr>
-              <a:t>–  데이터 계약 · held 처리 · 분할 · 채점 모집단</a:t>
+              <a:t>–  데이터 계약·held 처리·분할·채점 모집단이 같다.</a:t>
             </a:r>
           </a:p>
           <a:p>
@@ -7748,7 +7675,7 @@
                 </a:solidFill>
                 <a:latin typeface="Malgun Gothic"/>
               </a:rPr>
-              <a:t>–  → 두 모델 비교는 행 단위로 paired</a:t>
+              <a:t>–  따라서 두 모델은 행 단위로 paired 비교된다.</a:t>
             </a:r>
           </a:p>
         </p:txBody>
@@ -7802,7 +7729,7 @@
                 </a:solidFill>
                 <a:latin typeface="Malgun Gothic"/>
               </a:rPr>
-              <a:t>Tᵢ head = 빠른진단+시간+이력 / V_rot head = 이력+시간. 이 구조는 ~40회 keep/discard 통제 실험의 결과이며, 지금은 (i) 백본 관문의 비교 대상, (ii) 절제 실험의 무대, (iii) 캠페인 붕괴의 재현자로 남는다.</a:t>
+              <a:t>Tᵢ head는 빠른진단+시간+이력을, V_rot head는 이력+시간을 읽는다. 이 구조는 약 40회의 keep/discard 통제 실험의 결과이며, 현재는 (i) 백본 관문의 비교 대상, (ii) 절제 실험의 무대, (iii) 캠페인 붕괴의 재현자로 쓰인다.</a:t>
             </a:r>
           </a:p>
         </p:txBody>
@@ -8019,7 +7946,7 @@
           <a:noFill/>
         </p:spPr>
         <p:txBody>
-          <a:bodyPr wrap="square" anchor="t" lIns="25400" rIns="25400" tIns="12700" bIns="12700">
+          <a:bodyPr wrap="square" anchor="ctr" lIns="25400" rIns="25400" tIns="12700" bIns="12700">
             <a:spAutoFit/>
           </a:bodyPr>
           <a:lstStyle/>
@@ -8042,7 +7969,7 @@
                 </a:solidFill>
                 <a:latin typeface="Malgun Gothic"/>
               </a:rPr>
-              <a:t>선택 편향 없는 3-way split + 사전등록</a:t>
+              <a:t>선택 편향 없는 3-way split과 사전등록</a:t>
             </a:r>
           </a:p>
         </p:txBody>
@@ -8354,7 +8281,7 @@
                 </a:solidFill>
                 <a:latin typeface="Malgun Gothic"/>
               </a:rPr>
-              <a:t>TEST는 아키텍처 탐색 시작 전 예약, 선택 중 절대 안 봄</a:t>
+              <a:t>TEST는 아키텍처 탐색 전에 예약되었고 선택 중에는 열리지 않았다.</a:t>
             </a:r>
           </a:p>
           <a:p>
@@ -8376,7 +8303,7 @@
                 </a:solidFill>
                 <a:latin typeface="Malgun Gothic"/>
               </a:rPr>
-              <a:t>모델 선택은 val에서만 → 헤드라인에 winner's curse 없음</a:t>
+              <a:t>모델 선택은 val에서만 이루어져 headline에 winner's curse가 없다.</a:t>
             </a:r>
           </a:p>
           <a:p>
@@ -8398,7 +8325,7 @@
                 </a:solidFill>
                 <a:latin typeface="Malgun Gothic"/>
               </a:rPr>
-              <a:t>전 arm이 동일한 (file, row) 집합 · 동일 마스크로 채점</a:t>
+              <a:t>전 arm이 동일한 (file, row) 집합과 마스크로 채점된다.</a:t>
             </a:r>
           </a:p>
           <a:p>
@@ -8420,7 +8347,7 @@
                 </a:solidFill>
                 <a:latin typeface="Malgun Gothic"/>
               </a:rPr>
-              <a:t>짝지은 비교 전에 모집단 키가 bit-identical임을 검증</a:t>
+              <a:t>짝지은 비교 전에 모집단 키가 bit-identical임을 검증한다.</a:t>
             </a:r>
           </a:p>
           <a:p>
@@ -8442,7 +8369,7 @@
                 </a:solidFill>
                 <a:latin typeface="Malgun Gothic"/>
               </a:rPr>
-              <a:t>보간은 타겟 자신의 값을 제외하고 이웃만 읽음(누수 없음)</a:t>
+              <a:t>보간은 타깃 자신의 값을 제외하고 이웃만 읽는다.</a:t>
             </a:r>
           </a:p>
         </p:txBody>
@@ -8620,7 +8547,7 @@
                 </a:solidFill>
                 <a:latin typeface="Malgun Gothic"/>
               </a:rPr>
-              <a:t>PR1 헤드라인 기준선 = PCHIP (사다리 전체도 함께 보고)</a:t>
+              <a:t>PR1: headline 기준선은 PCHIP이며 사다리 전체를 함께 보고한다.</a:t>
             </a:r>
           </a:p>
           <a:p>
@@ -8642,7 +8569,7 @@
                 </a:solidFill>
                 <a:latin typeface="Malgun Gothic"/>
               </a:rPr>
-              <a:t>PR2 보간은 모든 채점 지점에서 예측, 폴백률 보고 의무</a:t>
+              <a:t>PR2: 보간은 모든 채점 지점에서 예측하고 폴백률을 보고한다.</a:t>
             </a:r>
           </a:p>
           <a:p>
@@ -8664,7 +8591,7 @@
                 </a:solidFill>
                 <a:latin typeface="Malgun Gothic"/>
               </a:rPr>
-              <a:t>PR3 TEST 하한 ≥15 방전 · ≥3,000 Tᵢ 샘플 (충족)</a:t>
+              <a:t>PR3: TEST 하한은 15 방전·3,000 Tᵢ 샘플 이상이다(충족).</a:t>
             </a:r>
           </a:p>
           <a:p>
@@ -8686,7 +8613,7 @@
                 </a:solidFill>
                 <a:latin typeface="Malgun Gothic"/>
               </a:rPr>
-              <a:t>PR4 shot 군집 bootstrap 95% CI가 0을 제외 = PASS</a:t>
+              <a:t>PR4: shot 군집 bootstrap 95% CI가 0을 제외하면 PASS이다.</a:t>
             </a:r>
           </a:p>
           <a:p>
@@ -8730,7 +8657,7 @@
                 </a:solidFill>
                 <a:latin typeface="Malgun Gothic"/>
               </a:rPr>
-              <a:t>     TEST 채점 전 모델 결정 규칙 커밋 · 문턱 민감도</a:t>
+              <a:t>TEST 채점 전 결정 규칙 커밋 · 문턱 민감도이다.</a:t>
             </a:r>
           </a:p>
         </p:txBody>
@@ -9624,7 +9551,7 @@
                 </a:solidFill>
                 <a:latin typeface="Malgun Gothic"/>
               </a:rPr>
-              <a:t>타겟 양쪽의 과거 + 미래 CES 이웃</a:t>
+              <a:t>타깃 양쪽의 과거 + 미래 CES 이웃</a:t>
             </a:r>
           </a:p>
         </p:txBody>
@@ -9937,7 +9864,7 @@
                 </a:solidFill>
                 <a:latin typeface="Malgun Gothic"/>
               </a:rPr>
-              <a:t>* PR1 헤드라인. </a:t>
+              <a:t>* PR1 headline. </a:t>
             </a:r>
             <a:r>
               <a:rPr sz="1150" b="0" i="0">
@@ -9946,7 +9873,7 @@
                 </a:solidFill>
                 <a:latin typeface="Malgun Gothic"/>
               </a:rPr>
-              <a:t>보간·모델 모두 세그먼트 경계를 넘지 않고, 경계 밖 이웃이 필요하면 보간은 persistence 값을 대신 예측한다(모집단 축소 없음).</a:t>
+              <a:t>보간과 모델 모두 세그먼트 경계를 넘지 않으며, 경계 밖 이웃이 필요하면 보간은 persistence 값을 대신 예측한다(모집단 축소 없음).</a:t>
             </a:r>
           </a:p>
         </p:txBody>
@@ -10163,7 +10090,7 @@
           <a:noFill/>
         </p:spPr>
         <p:txBody>
-          <a:bodyPr wrap="square" anchor="t" lIns="25400" rIns="25400" tIns="12700" bIns="12700">
+          <a:bodyPr wrap="square" anchor="ctr" lIns="25400" rIns="25400" tIns="12700" bIns="12700">
             <a:spAutoFit/>
           </a:bodyPr>
           <a:lstStyle/>
@@ -10365,7 +10292,7 @@
                 </a:solidFill>
                 <a:latin typeface="Malgun Gothic"/>
               </a:rPr>
-              <a:t>●  한 방전 안의 인접 CES 행은 강하게 상관됨</a:t>
+              <a:t>●  한 방전 안의 인접 CES 행은 강하게 상관된다.</a:t>
             </a:r>
           </a:p>
           <a:p>
@@ -10387,7 +10314,7 @@
                 </a:solidFill>
                 <a:latin typeface="Malgun Gothic"/>
               </a:rPr>
-              <a:t>–  개별 샘플을 독립으로 보면 불확실성을 크게 과소평가</a:t>
+              <a:t>–  개별 샘플을 독립으로 보면 불확실성이 크게 과소평가된다.</a:t>
             </a:r>
           </a:p>
           <a:p>
@@ -10409,7 +10336,7 @@
                 </a:solidFill>
                 <a:latin typeface="Malgun Gothic"/>
               </a:rPr>
-              <a:t>●  PR4 검정: 샘플별 짝지은 오차 (SE_model - SE_pchip)를</a:t>
+              <a:t>●  PR4 검정은 샘플별 짝지은 오차 (SE_model - SE_pchip)를</a:t>
             </a:r>
           </a:p>
           <a:p>
@@ -10431,7 +10358,7 @@
                 </a:solidFill>
                 <a:latin typeface="Malgun Gothic"/>
               </a:rPr>
-              <a:t>–  shot 단위로 묶고 shot 전체를 복원추출 (B = 10,000)</a:t>
+              <a:t>–  shot 단위로 묶고 shot 전체를 복원추출한다(B = 10,000).</a:t>
             </a:r>
           </a:p>
           <a:p>
@@ -10453,7 +10380,7 @@
                 </a:solidFill>
                 <a:latin typeface="Malgun Gothic"/>
               </a:rPr>
-              <a:t>●  95% CI가 0을 제외하면 PASS</a:t>
+              <a:t>●  95% CI가 0을 제외하면 PASS이다.</a:t>
             </a:r>
           </a:p>
           <a:p>
@@ -10475,7 +10402,7 @@
                 </a:solidFill>
                 <a:latin typeface="Malgun Gothic"/>
               </a:rPr>
-              <a:t>–  → '새로운 방전에서도 이길까'에 답하는 CI</a:t>
+              <a:t>–  이 CI는 ‘새로운 방전에서도 이기는가’에 답한다.</a:t>
             </a:r>
           </a:p>
           <a:p>
@@ -10497,7 +10424,7 @@
                 </a:solidFill>
                 <a:latin typeface="Malgun Gothic"/>
               </a:rPr>
-              <a:t>●  유효 표본 = 방전 수 (Tᵢ ≈96 · V_rot 60–66) = 검정력 상한</a:t>
+              <a:t>●  유효 표본은 방전 수(Tᵢ ≈96 · V_rot 60–66)이며 검정력의 상한이다.</a:t>
             </a:r>
           </a:p>
           <a:p>
@@ -10519,7 +10446,7 @@
                 </a:solidFill>
                 <a:latin typeface="Malgun Gothic"/>
               </a:rPr>
-              <a:t>●  모델 대 모델 비교도 같은 행 위에서 같은 paired bootstrap</a:t>
+              <a:t>●  모델 대 모델 비교도 같은 행 위에서 같은 paired bootstrap으로 한다.</a:t>
             </a:r>
           </a:p>
         </p:txBody>
@@ -10652,7 +10579,7 @@
                 </a:solidFill>
                 <a:latin typeface="Malgun Gothic"/>
               </a:rPr>
-              <a:t>&gt; 0 모델 우수 · = 0 동률. 오차는 물리 단위로 역정규화해 타겟별로 계산.</a:t>
+              <a:t>0보다 크면 모델이 우수하고 0이면 동률이다. 오차는 물리 단위로 역정규화하여 타깃별로 계산한다.</a:t>
             </a:r>
           </a:p>
         </p:txBody>
@@ -10763,7 +10690,7 @@
                 </a:solidFill>
                 <a:latin typeface="Malgun Gothic"/>
               </a:rPr>
-              <a:t>컷 = Tᵢ &gt; 3 keV(피팅 실패)를 결측 처리 · 포함 = 컷 없음. 전 arm에 동일 적용.</a:t>
+              <a:t>컷은 Tᵢ &gt; 3 keV(피팅 실패)를 결측 처리한 모집단, 포함은 컷 없음이다. 전 arm에 동일 적용한다.</a:t>
             </a:r>
           </a:p>
           <a:p>
@@ -10874,7 +10801,7 @@
                 </a:solidFill>
                 <a:latin typeface="Malgun Gothic"/>
               </a:rPr>
-              <a:t>모델 선택 프로토콜 — 규칙을 수치보다 먼저 적는다</a:t>
+              <a:t>모델 선택 프로토콜 — 규칙을 수치보다 먼저 기록하였다</a:t>
             </a:r>
           </a:p>
         </p:txBody>
@@ -10919,7 +10846,7 @@
                 </a:solidFill>
                 <a:latin typeface="Malgun Gothic"/>
               </a:rPr>
-              <a:t>●  백본 관문: 4조건(4 분할 부호 유지 · 통합 CI 0 제외 · 예산 균등화 · V_rot 손실 없음)을 먼저 고정하고 그다음 충족</a:t>
+              <a:t>●  백본 관문은 4조건(4 분할 부호 유지 · 통합 CI 0 제외 · 예산 균등화 · V_rot 손실 없음)을 먼저 고정하고 그다음 충족 여부를 판정하였다.</a:t>
             </a:r>
           </a:p>
           <a:p>
@@ -10941,7 +10868,7 @@
                 </a:solidFill>
                 <a:latin typeface="Malgun Gothic"/>
               </a:rPr>
-              <a:t>●  유일한 아키텍처 후보(seq_v2 + 관측마스킹 인과 attention): 4/4 양수(+0.009/+0.013/+0.033/+0.020)지만 유의 1/4 → 미승격</a:t>
+              <a:t>●  유일한 아키텍처 후보(seq_v2 + 관측마스킹 인과 attention)는 4/4 양수(+0.009/+0.013/+0.033/+0.020)였으나 유의 1/4로 승격되지 않았다.</a:t>
             </a:r>
           </a:p>
           <a:p>
@@ -10963,7 +10890,7 @@
                 </a:solidFill>
                 <a:latin typeface="Malgun Gothic"/>
               </a:rPr>
-              <a:t>–  val에선 2/2 유의였다 — 승격 bar를 TEST에 두는 이유. 스윕 위에서 백본을 재선정하는 것은 구성상 금지.</a:t>
+              <a:t>–  val에서는 2/2 유의였으며, 이것이 승격 bar를 TEST에 두는 이유이다. 스윕 위에서 백본을 재선정하는 것은 구성상 금지된다.</a:t>
             </a:r>
           </a:p>
           <a:p>
@@ -10985,7 +10912,7 @@
                 </a:solidFill>
                 <a:latin typeface="Malgun Gothic"/>
               </a:rPr>
-              <a:t>●  사다리 칸·폭 스윕의 판정 규칙도 TEST 채점 전에 문서화 — TEST는 결정마다 단 한 번만 채점된다</a:t>
+              <a:t>●  사다리 칸·폭 스윕의 판정 규칙도 TEST 채점 전에 문서화되었고, TEST는 결정마다 한 번만 채점되었다.</a:t>
             </a:r>
           </a:p>
         </p:txBody>
@@ -11202,7 +11129,7 @@
           <a:noFill/>
         </p:spPr>
         <p:txBody>
-          <a:bodyPr wrap="square" anchor="t" lIns="25400" rIns="25400" tIns="12700" bIns="12700">
+          <a:bodyPr wrap="square" anchor="ctr" lIns="25400" rIns="25400" tIns="12700" bIns="12700">
             <a:spAutoFit/>
           </a:bodyPr>
           <a:lstStyle/>
@@ -11225,7 +11152,7 @@
                 </a:solidFill>
                 <a:latin typeface="Malgun Gothic"/>
               </a:rPr>
-              <a:t>인과 기준선을 압도하고, 오프라인 평활기와 동률</a:t>
+              <a:t>백본은 인과 기준선을 압도하고 오프라인 평활기와 동률이다</a:t>
             </a:r>
           </a:p>
         </p:txBody>
@@ -11472,7 +11399,7 @@
                 </a:solidFill>
                 <a:latin typeface="Malgun Gothic"/>
               </a:rPr>
-              <a:t>백본이 두 타겟 모두에서 최저 RMSE. </a:t>
+              <a:t>백본이 두 타깃 모두에서 최저 RMSE를 기록하였다. </a:t>
             </a:r>
             <a:r>
               <a:rPr sz="1300" b="0" i="0">
@@ -11481,7 +11408,7 @@
                 </a:solidFill>
                 <a:latin typeface="Malgun Gothic"/>
               </a:rPr>
-              <a:t>인과 GP보다 Tᵢ 4% · V_rot 18% 낮고, 미래를 쓰는 오프라인 GP(153.8)와는 동률(157.8)이다.</a:t>
+              <a:t>인과 GP보다 Tᵢ 4%, V_rot 18% 낮고, 미래를 읽는 오프라인 GP(153.8)와는 동률(157.8)이다.</a:t>
             </a:r>
           </a:p>
           <a:p>
@@ -11512,7 +11439,7 @@
                 </a:solidFill>
                 <a:latin typeface="Malgun Gothic"/>
               </a:rPr>
-              <a:t>seq_v2 363.0 / 23.7 · PCHIP 412.4 / 30.2 · 인과 GP 394.6 / 28.8 · persistence 478.0 / 33.4 — 스파이크가 Tᵢ RMSE를 두 배 이상 키우지만 순서는 불변.</a:t>
+              <a:t>seq_v2 363.0 / 23.7, PCHIP 412.4 / 30.2, 인과 GP 394.6 / 28.8, persistence 478.0 / 33.4이다. 스파이크가 Tᵢ RMSE를 두 배 이상 키우지만 순서는 바뀌지 않았다.</a:t>
             </a:r>
           </a:p>
         </p:txBody>
@@ -11729,7 +11656,7 @@
           <a:noFill/>
         </p:spPr>
         <p:txBody>
-          <a:bodyPr wrap="square" anchor="t" lIns="25400" rIns="25400" tIns="12700" bIns="12700">
+          <a:bodyPr wrap="square" anchor="ctr" lIns="25400" rIns="25400" tIns="12700" bIns="12700">
             <a:spAutoFit/>
           </a:bodyPr>
           <a:lstStyle/>
@@ -11752,7 +11679,7 @@
                 </a:solidFill>
                 <a:latin typeface="Malgun Gothic"/>
               </a:rPr>
-              <a:t>헤드라인 — Tᵢ는 두 모집단 모두에서 4/4</a:t>
+              <a:t>Headline: Tᵢ는 두 모집단 모두에서 4/4를 기록하였다</a:t>
             </a:r>
           </a:p>
         </p:txBody>
@@ -12088,7 +12015,7 @@
                 </a:solidFill>
                 <a:latin typeface="Malgun Gothic"/>
               </a:rPr>
-              <a:t>컷 +0.174 / +0.248 / +0.257 / +0.264 (평균 +0.236) · 4/4</a:t>
+              <a:t>컷 +0.174 / +0.248 / +0.257 / +0.264(평균 +0.236)로 4/4이다.</a:t>
             </a:r>
           </a:p>
           <a:p>
@@ -12110,7 +12037,7 @@
                 </a:solidFill>
                 <a:latin typeface="Malgun Gothic"/>
               </a:rPr>
-              <a:t>포함 +0.225 / +0.238 / +0.292 / +0.316 (평균 +0.268) · 4/4</a:t>
+              <a:t>포함 +0.225 / +0.238 / +0.292 / +0.316(평균 +0.268)로 4/4이다.</a:t>
             </a:r>
           </a:p>
           <a:p>
@@ -12132,7 +12059,7 @@
                 </a:solidFill>
                 <a:latin typeface="Malgun Gothic"/>
               </a:rPr>
-              <a:t>8개 셀 전부 인과 GP(+0.08~+0.17)·persistence(+0.36~+0.46)도 승</a:t>
+              <a:t>8개 셀 전부에서 인과 GP(+0.08~+0.17)와 persistence(+0.36~+0.46)도 이겼다.</a:t>
             </a:r>
           </a:p>
           <a:p>
@@ -12154,7 +12081,7 @@
                 </a:solidFill>
                 <a:latin typeface="Malgun Gothic"/>
               </a:rPr>
-              <a:t>오프라인 GP와는 동률(-0.05~+0.11, 1/8 유의) — 상한을 명시</a:t>
+              <a:t>오프라인 GP와는 동률(-0.05~+0.11, 1/8 유의)이며 이를 상한으로 명시한다.</a:t>
             </a:r>
           </a:p>
         </p:txBody>
@@ -12332,7 +12259,7 @@
                 </a:solidFill>
                 <a:latin typeface="Malgun Gothic"/>
               </a:rPr>
-              <a:t>점추정은 8/8 양수지만 PR4는 컷 1/4 · 포함 2/4 (잡음 수준)</a:t>
+              <a:t>점추정은 8/8 양수이나 PR4는 컷 1/4, 포함 2/4로 잡음 수준이다.</a:t>
             </a:r>
           </a:p>
           <a:p>
@@ -12354,7 +12281,7 @@
                 </a:solidFill>
                 <a:latin typeface="Malgun Gothic"/>
               </a:rPr>
-              <a:t>vs persistence 3/4 양쪽(+0.30~+0.50) · vs 인과 GP 2/4</a:t>
+              <a:t>persistence 대비 3/4 양쪽(+0.30~+0.50), 인과 GP 대비 2/4이다.</a:t>
             </a:r>
           </a:p>
           <a:p>
@@ -12376,7 +12303,7 @@
                 </a:solidFill>
                 <a:latin typeface="Malgun Gothic"/>
               </a:rPr>
-              <a:t>포함 수치가 높은 이유: 스파이크가 보간 앵커를 오염시켜</a:t>
+              <a:t>포함 수치가 높은 것은 스파이크가 보간 앵커를 오염시켜</a:t>
             </a:r>
           </a:p>
           <a:p>
@@ -12398,7 +12325,7 @@
                 </a:solidFill>
                 <a:latin typeface="Malgun Gothic"/>
               </a:rPr>
-              <a:t>  모든 arm이 PCHIP 대비 더 좋아 보인다 → 결과 ⑥에서 분해</a:t>
+              <a:t>모든 arm이 PCHIP 대비 좋아 보이기 때문이며 결과 ⑥에서 분해한다.</a:t>
             </a:r>
           </a:p>
         </p:txBody>
@@ -12615,7 +12542,7 @@
           <a:noFill/>
         </p:spPr>
         <p:txBody>
-          <a:bodyPr wrap="square" anchor="t" lIns="25400" rIns="25400" tIns="12700" bIns="12700">
+          <a:bodyPr wrap="square" anchor="ctr" lIns="25400" rIns="25400" tIns="12700" bIns="12700">
             <a:spAutoFit/>
           </a:bodyPr>
           <a:lstStyle/>
@@ -12638,7 +12565,7 @@
                 </a:solidFill>
                 <a:latin typeface="Malgun Gothic"/>
               </a:rPr>
-              <a:t>전체격자 프레이밍 vs 윈도 대조군 — 백본 관문 (B.1)</a:t>
+              <a:t>백본 관문(B.1): 전체격자 프레이밍은 윈도 대조군을 16/16에서 이겼다</a:t>
             </a:r>
           </a:p>
         </p:txBody>
@@ -12974,7 +12901,7 @@
                 </a:solidFill>
                 <a:latin typeface="Malgun Gothic"/>
               </a:rPr>
-              <a:t>●  Tᵢ 16/16 양수 · 13/16 유의</a:t>
+              <a:t>●  Tᵢ는 16/16 양수, 13/16 유의였다.</a:t>
             </a:r>
           </a:p>
           <a:p>
@@ -12996,7 +12923,7 @@
                 </a:solidFill>
                 <a:latin typeface="Malgun Gothic"/>
               </a:rPr>
-              <a:t>●  분할별 초기화 평균</a:t>
+              <a:t>●  분할별 초기화 평균은 다음과 같다.</a:t>
             </a:r>
           </a:p>
           <a:p>
@@ -13040,7 +12967,7 @@
                 </a:solidFill>
                 <a:latin typeface="Malgun Gothic"/>
               </a:rPr>
-              <a:t>●  pooled +0.081</a:t>
+              <a:t>●  pooled 추정치는 +0.081이다.</a:t>
             </a:r>
           </a:p>
           <a:p>
@@ -13062,7 +12989,7 @@
                 </a:solidFill>
                 <a:latin typeface="Malgun Gothic"/>
               </a:rPr>
-              <a:t>–  run 군집 CI [+0.067, +0.096]</a:t>
+              <a:t>–  run 군집 CI는 [+0.067, +0.096]이다.</a:t>
             </a:r>
           </a:p>
           <a:p>
@@ -13084,7 +13011,7 @@
                 </a:solidFill>
                 <a:latin typeface="Malgun Gothic"/>
               </a:rPr>
-              <a:t>●  예산 균등화에서도 4/4 부호 유지</a:t>
+              <a:t>●  예산 균등화에서도 4/4 부호가 유지되었다.</a:t>
             </a:r>
           </a:p>
           <a:p>
@@ -13128,7 +13055,7 @@
                 </a:solidFill>
                 <a:latin typeface="Malgun Gothic"/>
               </a:rPr>
-              <a:t>●  V_rot 유의 열세 0/16 (우세 8/16)</a:t>
+              <a:t>●  V_rot 유의 열세는 0/16이었다(우세 8/16).</a:t>
             </a:r>
           </a:p>
         </p:txBody>
@@ -13217,7 +13144,7 @@
                 </a:solidFill>
                 <a:latin typeface="Malgun Gothic"/>
               </a:rPr>
-              <a:t>확증 4 분할에서 같은 비교(seq - 윈도): </a:t>
+              <a:t>확증 4 분할의 같은 비교(seq - 윈도): </a:t>
             </a:r>
             <a:r>
               <a:rPr sz="1250" b="0" i="0">
@@ -13226,7 +13153,7 @@
                 </a:solidFill>
                 <a:latin typeface="Malgun Gothic"/>
               </a:rPr>
-              <a:t>컷 +0.130 / +0.058 / +0.062 / +0.044, 포함 +0.053 / +0.024 / +0.047 / +0.029 (8/8 양수, 각 2/4 유의).</a:t>
+              <a:t>컷 +0.130 / +0.058 / +0.062 / +0.044, 포함 +0.053 / +0.024 / +0.047 / +0.029으로 8/8 양수(각 2/4 유의)였다.</a:t>
             </a:r>
           </a:p>
           <a:p>
@@ -13248,7 +13175,7 @@
                 </a:solidFill>
                 <a:latin typeface="Malgun Gothic"/>
               </a:rPr>
-              <a:t>무엇을 사는가: </a:t>
+              <a:t>의미: </a:t>
             </a:r>
             <a:r>
               <a:rPr sz="1250" b="0" i="0">
@@ -13257,7 +13184,7 @@
                 </a:solidFill>
                 <a:latin typeface="Malgun Gothic"/>
               </a:rPr>
-              <a:t>윈도 대조군은 인과 GP와 동률(1/4)이지만 시퀀스 백본은 4/4+4/4 — 세그먼트 과거 전체로의 도달거리가 최강 배치 기준선을 이기게 한다. 비용은 음수다(윈도 조립·조합 증강이 없어 학습비 1/10).</a:t>
+              <a:t>윈도 대조군은 인과 GP와 동률(1/4)이나 시퀀스 백본은 4/4+4/4이다. 세그먼트 과거 전체로의 도달 범위가 최강 배치 기준선을 이기게 하며, 윈도 조립과 조합 증강이 없어 학습 비용은 1/10이다.</a:t>
             </a:r>
           </a:p>
         </p:txBody>
@@ -13474,7 +13401,7 @@
           <a:noFill/>
         </p:spPr>
         <p:txBody>
-          <a:bodyPr wrap="square" anchor="t" lIns="25400" rIns="25400" tIns="12700" bIns="12700">
+          <a:bodyPr wrap="square" anchor="ctr" lIns="25400" rIns="25400" tIns="12700" bIns="12700">
             <a:spAutoFit/>
           </a:bodyPr>
           <a:lstStyle/>
@@ -13491,13 +13418,13 @@
               </a:spcAft>
             </a:pPr>
             <a:r>
-              <a:rPr sz="2700" b="1" i="0">
+              <a:rPr sz="2300" b="1" i="0">
                 <a:solidFill>
                   <a:srgbClr val="13335F"/>
                 </a:solidFill>
                 <a:latin typeface="Malgun Gothic"/>
               </a:rPr>
-              <a:t>스트레스 2종 — 실제 결측점 재가중(MNAR)과 캠페인(시간) 분할</a:t>
+              <a:t>스트레스 2종: 실제 결측점 재가중(MNAR)과 캠페인(시간) 분할을 모두 생존하였다</a:t>
             </a:r>
           </a:p>
         </p:txBody>
@@ -13676,7 +13603,7 @@
                 </a:solidFill>
                 <a:latin typeface="Malgun Gothic"/>
               </a:rPr>
-              <a:t>관측점 skill은 낙관적 상한이고, 무작위 분할은 시간 이동을 검사하지 않는다. 배치 주장을 가르는 두 스트레스를 사전에 정해두고 통과 여부를 본다.</a:t>
+              <a:t>관측점 skill은 낙관적 상한이고 무작위 분할은 시간 이동을 검사하지 않는다. 배치 주장을 가르는 두 스트레스를 사전에 정해 두고 통과 여부를 측정하였다.</a:t>
             </a:r>
           </a:p>
         </p:txBody>
@@ -13854,7 +13781,7 @@
                 </a:solidFill>
                 <a:latin typeface="Malgun Gothic"/>
               </a:rPr>
-              <a:t>층 = Δt(15/25/45 ms) × 입력만의 활동 flag,</a:t>
+              <a:t>층은 Δt(15/25/45 ms) × 입력만의 활동 flag이며,</a:t>
             </a:r>
           </a:p>
           <a:p>
@@ -13876,7 +13803,7 @@
                 </a:solidFill>
                 <a:latin typeface="Malgun Gothic"/>
               </a:rPr>
-              <a:t>  결측 행의 층 분포로 채점 지점을 재가중</a:t>
+              <a:t>결측 행의 층 분포로 채점 지점을 재가중하였다.</a:t>
             </a:r>
           </a:p>
           <a:p>
@@ -13898,7 +13825,7 @@
                 </a:solidFill>
                 <a:latin typeface="Malgun Gothic"/>
               </a:rPr>
-              <a:t>도달: 결측 Tᵢ의 54–68%가 in-domain · V_rot은 4–6%</a:t>
+              <a:t>도달: 결측 Tᵢ의 54–68%가 in-domain이고 V_rot은 4–6%이다.</a:t>
             </a:r>
           </a:p>
           <a:p>
@@ -13920,7 +13847,7 @@
                 </a:solidFill>
                 <a:latin typeface="Malgun Gothic"/>
               </a:rPr>
-              <a:t>  → 재가중 V_rot은 결론 없음(결측 질량의 1/20)</a:t>
+              <a:t>따라서 재가중 V_rot은 결론을 내지 않는다(결측 질량의 1/20).</a:t>
             </a:r>
           </a:p>
           <a:p>
@@ -13942,7 +13869,7 @@
                 </a:solidFill>
                 <a:latin typeface="Malgun Gothic"/>
               </a:rPr>
-              <a:t>Tᵢ vs persistence: 컷 4/4 · 포함 4/4 (+0.28~+0.44)</a:t>
+              <a:t>Tᵢ vs persistence: 컷 4/4 · 포함 4/4 (+0.28~+0.44)이다.</a:t>
             </a:r>
           </a:p>
           <a:p>
@@ -13964,7 +13891,7 @@
                 </a:solidFill>
                 <a:latin typeface="Malgun Gothic"/>
               </a:rPr>
-              <a:t>Tᵢ vs PCHIP: 컷 2/4 · 포함 4/4 (점추정 +0.14~+0.28)</a:t>
+              <a:t>Tᵢ vs PCHIP: 컷 2/4 · 포함 4/4 (점추정 +0.14~+0.28)이다.</a:t>
             </a:r>
           </a:p>
         </p:txBody>
@@ -14097,7 +14024,7 @@
                 </a:solidFill>
                 <a:latin typeface="Malgun Gothic"/>
               </a:rPr>
-              <a:t>② 캠페인(시간) 분할 — shot 번호로 자름</a:t>
+              <a:t>② 캠페인(시간) 분할 — shot 번호로 자른다</a:t>
             </a:r>
           </a:p>
         </p:txBody>
@@ -14164,7 +14091,7 @@
                 </a:solidFill>
                 <a:latin typeface="Malgun Gothic"/>
               </a:rPr>
-              <a:t>  test 97 (32312–32751) · 초기화 seed 4개</a:t>
+              <a:t>test 97 (32312–32751)이며 초기화 seed 4개이다.</a:t>
             </a:r>
           </a:p>
           <a:p>
@@ -14186,7 +14113,7 @@
                 </a:solidFill>
                 <a:latin typeface="Malgun Gothic"/>
               </a:rPr>
-              <a:t>윈도 대조군: 컷 2/4 · 포함 0/4 · 인과 GP 0/4 (붕괴)</a:t>
+              <a:t>윈도 대조군은 컷 2/4 · 포함 0/4 · 인과 GP 0/4로 붕괴하였다.</a:t>
             </a:r>
           </a:p>
           <a:p>
@@ -14208,7 +14135,7 @@
                 </a:solidFill>
                 <a:latin typeface="Malgun Gothic"/>
               </a:rPr>
-              <a:t>seq_v2 컷 +0.187/+0.174/+0.181/+0.177 → 4/4</a:t>
+              <a:t>seq_v2 컷은 +0.187/+0.174/+0.181/+0.177로 4/4이다.</a:t>
             </a:r>
           </a:p>
           <a:p>
@@ -14230,7 +14157,7 @@
                 </a:solidFill>
                 <a:latin typeface="Malgun Gothic"/>
               </a:rPr>
-              <a:t>seq_v2 포함 +0.173/+0.202/+0.198/+0.184 → 4/4</a:t>
+              <a:t>seq_v2 포함은 +0.173/+0.202/+0.198/+0.184로 4/4이다.</a:t>
             </a:r>
           </a:p>
           <a:p>
@@ -14252,7 +14179,7 @@
                 </a:solidFill>
                 <a:latin typeface="Malgun Gothic"/>
               </a:rPr>
-              <a:t>원인은 측정: 드리프트 BES 1.22σ·ECEI 0.53σ vs 타겟 0.115σ</a:t>
+              <a:t>원인은 측정되었다: 드리프트 BES 1.22σ·ECEI 0.53σ vs 타깃 0.115σ.</a:t>
             </a:r>
           </a:p>
         </p:txBody>
@@ -15283,7 +15210,7 @@
           <a:noFill/>
         </p:spPr>
         <p:txBody>
-          <a:bodyPr wrap="square" anchor="t" lIns="25400" rIns="25400" tIns="12700" bIns="12700">
+          <a:bodyPr wrap="square" anchor="ctr" lIns="25400" rIns="25400" tIns="12700" bIns="12700">
             <a:spAutoFit/>
           </a:bodyPr>
           <a:lstStyle/>
@@ -15306,7 +15233,7 @@
                 </a:solidFill>
                 <a:latin typeface="Malgun Gothic"/>
               </a:rPr>
-              <a:t>Tᵢ ↔ V_rot 정보 비대칭 — 본 연구의 과학적 발견</a:t>
+              <a:t>Tᵢ ↔ V_rot 정보 비대칭이 절제 실험으로 확인되었다</a:t>
             </a:r>
           </a:p>
         </p:txBody>
@@ -15553,7 +15480,7 @@
                 </a:solidFill>
                 <a:latin typeface="Malgun Gothic"/>
               </a:rPr>
-              <a:t>무엇을 지우면 무엇이 사라지나</a:t>
+              <a:t>무엇을 지우면 무엇이 사라지는가</a:t>
             </a:r>
           </a:p>
         </p:txBody>
@@ -15598,7 +15525,7 @@
                 </a:solidFill>
                 <a:latin typeface="Malgun Gothic"/>
               </a:rPr>
-              <a:t>●  이력은 두 타겟 모두 필수</a:t>
+              <a:t>●  이력은 두 타깃 모두에 필수적이다.</a:t>
             </a:r>
           </a:p>
           <a:p>
@@ -15620,7 +15547,7 @@
                 </a:solidFill>
                 <a:latin typeface="Malgun Gothic"/>
               </a:rPr>
-              <a:t>–  no_history: Tᵢ -2.11 / -1.16, V_rot -2.89 / -3.51</a:t>
+              <a:t>–  no_history: Tᵢ -2.11 / -1.16, V_rot -2.89 / -3.51이다.</a:t>
             </a:r>
           </a:p>
           <a:p>
@@ -15642,7 +15569,7 @@
                 </a:solidFill>
                 <a:latin typeface="Malgun Gothic"/>
               </a:rPr>
-              <a:t>●  Tᵢ: 컷 모집단의 마진은 빠른 진단 정보</a:t>
+              <a:t>●  Tᵢ: 컷 모집단의 마진은 빠른 진단 정보이다.</a:t>
             </a:r>
           </a:p>
           <a:p>
@@ -15664,7 +15591,7 @@
                 </a:solidFill>
                 <a:latin typeface="Malgun Gothic"/>
               </a:rPr>
-              <a:t>–  no_fast -0.125 (paired 4/4 유의 감소)</a:t>
+              <a:t>–  no_fast는 -0.125(paired 4/4 유의 감소)이다.</a:t>
             </a:r>
           </a:p>
           <a:p>
@@ -15686,7 +15613,7 @@
                 </a:solidFill>
                 <a:latin typeface="Malgun Gothic"/>
               </a:rPr>
-              <a:t>–  물리 채널 = 충돌 e–i 결합 (ECEI Tₑ · BES nₑ)</a:t>
+              <a:t>–  물리 채널은 충돌 e–i 결합(ECEI Tₑ · BES nₑ)이다.</a:t>
             </a:r>
           </a:p>
           <a:p>
@@ -15708,7 +15635,7 @@
                 </a:solidFill>
                 <a:latin typeface="Malgun Gothic"/>
               </a:rPr>
-              <a:t>●  포함 모집단엔 스파이크-강건성 성분이 섞임</a:t>
+              <a:t>●  포함 모집단에는 스파이크 강건성 성분이 섞인다.</a:t>
             </a:r>
           </a:p>
           <a:p>
@@ -15730,7 +15657,7 @@
                 </a:solidFill>
                 <a:latin typeface="Malgun Gothic"/>
               </a:rPr>
-              <a:t>–  이력-전용도 PCHIP를 +0.15~+0.23 이김</a:t>
+              <a:t>–  이력 전용도 PCHIP를 +0.15~+0.23 이겼다.</a:t>
             </a:r>
           </a:p>
           <a:p>
@@ -15752,7 +15679,7 @@
                 </a:solidFill>
                 <a:latin typeface="Malgun Gothic"/>
               </a:rPr>
-              <a:t>–  빠른 채널이 더하는 건 0.03–0.09</a:t>
+              <a:t>–  빠른 채널이 더하는 몫은 0.03–0.09이다.</a:t>
             </a:r>
           </a:p>
           <a:p>
@@ -15774,7 +15701,7 @@
                 </a:solidFill>
                 <a:latin typeface="Malgun Gothic"/>
               </a:rPr>
-              <a:t>●  V_rot: 정보는 전부 CES 이력</a:t>
+              <a:t>●  V_rot: 정보는 전부 CES 이력에서 온다.</a:t>
             </a:r>
           </a:p>
           <a:p>
@@ -15796,7 +15723,7 @@
                 </a:solidFill>
                 <a:latin typeface="Malgun Gothic"/>
               </a:rPr>
-              <a:t>–  빠른 채널 0으로 만들면 출력 bit-identical (8/8)</a:t>
+              <a:t>–  빠른 채널을 0으로 두면 출력이 bit-identical이다(8/8).</a:t>
             </a:r>
           </a:p>
           <a:p>
@@ -15818,7 +15745,7 @@
                 </a:solidFill>
                 <a:latin typeface="Malgun Gothic"/>
               </a:rPr>
-              <a:t>–  NBI 토크 미관측 + Mirnov 100 Hz 앨리어싱</a:t>
+              <a:t>–  NBI 토크 미관측과 Mirnov 100 Hz 앨리어싱이 원인이다.</a:t>
             </a:r>
           </a:p>
           <a:p>
@@ -15840,7 +15767,7 @@
                 </a:solidFill>
                 <a:latin typeface="Malgun Gothic"/>
               </a:rPr>
-              <a:t>●  V_rot의 비-승리는 실패가 아니라 발견</a:t>
+              <a:t>●  V_rot의 비-승리는 실패가 아니라 발견이다.</a:t>
             </a:r>
           </a:p>
         </p:txBody>
@@ -16057,7 +15984,7 @@
           <a:noFill/>
         </p:spPr>
         <p:txBody>
-          <a:bodyPr wrap="square" anchor="t" lIns="25400" rIns="25400" tIns="12700" bIns="12700">
+          <a:bodyPr wrap="square" anchor="ctr" lIns="25400" rIns="25400" tIns="12700" bIns="12700">
             <a:spAutoFit/>
           </a:bodyPr>
           <a:lstStyle/>
@@ -16080,7 +16007,7 @@
                 </a:solidFill>
                 <a:latin typeface="Malgun Gothic"/>
               </a:rPr>
-              <a:t>복잡도 사다리와 크기 축 — 상한은 추정기가 아니라 정보</a:t>
+              <a:t>복잡도 사다리와 크기 축: 상한은 추정기가 아니라 정보에 있다</a:t>
             </a:r>
           </a:p>
         </p:txBody>
@@ -17091,7 +17018,7 @@
                 </a:solidFill>
                 <a:latin typeface="Malgun Gothic"/>
               </a:rPr>
-              <a:t>b3 - anchor: 컷 +0.35~+0.42 · 포함 +0.29~+0.34 (양쪽 4/4 유의)</a:t>
+              <a:t>b3 - anchor는 컷 +0.35~+0.42, 포함 +0.29~+0.34로 양쪽 4/4 유의이다.</a:t>
             </a:r>
           </a:p>
         </p:txBody>
@@ -17224,7 +17151,7 @@
                 </a:solidFill>
                 <a:latin typeface="Malgun Gothic"/>
               </a:rPr>
-              <a:t>컷: 백본의 Tᵢ skill 전부가 유계 수 8개 + persistence로 압축</a:t>
+              <a:t>컷: 백본의 Tᵢ skill 전부가 유계 수 8개와 persistence로 압축된다</a:t>
             </a:r>
           </a:p>
         </p:txBody>
@@ -17269,7 +17196,7 @@
                 </a:solidFill>
                 <a:latin typeface="Malgun Gothic"/>
               </a:rPr>
-              <a:t>b3 - seq_v2 평균 +0.002 (CI 전부 0 포함) · PR4 4/4 · 인과 GP 4/4</a:t>
+              <a:t>b3 - seq_v2 평균 +0.002(CI 전부 0 포함), PR4 4/4, 인과 GP 4/4이다.</a:t>
             </a:r>
           </a:p>
           <a:p>
@@ -17291,7 +17218,7 @@
                 </a:solidFill>
                 <a:latin typeface="Malgun Gothic"/>
               </a:rPr>
-              <a:t>probe: latent은 직전 Tᵢ(R² 0.47–0.75)와 ECEI Tₑ(0.31–0.48)를</a:t>
+              <a:t>probe 결과 latent은 직전 Tᵢ(R² 0.47–0.75)와 ECEI Tₑ(0.31–0.48)를</a:t>
             </a:r>
           </a:p>
           <a:p>
@@ -17313,7 +17240,7 @@
                 </a:solidFill>
                 <a:latin typeface="Malgun Gothic"/>
               </a:rPr>
-              <a:t>  분산 부호화 · 보정은 예측 분산의 25–39%</a:t>
+              <a:t>분산 부호화하며 보정은 예측 분산의 25–39%이다.</a:t>
             </a:r>
           </a:p>
           <a:p>
@@ -17335,7 +17262,7 @@
                 </a:solidFill>
                 <a:latin typeface="Malgun Gothic"/>
               </a:rPr>
-              <a:t>포함에선 -0.194 (4/4 유의): 유계 보정으로는 스파이크 앵커를</a:t>
+              <a:t>포함에서는 -0.194(4/4 유의)이다. 유계 보정으로는 스파이크 앵커를</a:t>
             </a:r>
           </a:p>
           <a:p>
@@ -17357,7 +17284,7 @@
                 </a:solidFill>
                 <a:latin typeface="Malgun Gothic"/>
               </a:rPr>
-              <a:t>  못 살린다 — ≈1% 행이 모든 arm SSE의 70–83%</a:t>
+              <a:t>살리지 못하며, ≈1% 행이 모든 arm SSE의 70–83%를 차지한다.</a:t>
             </a:r>
           </a:p>
         </p:txBody>
@@ -17490,7 +17417,7 @@
                 </a:solidFill>
                 <a:latin typeface="Malgun Gothic"/>
               </a:rPr>
-              <a:t>크기는 무효 — 크기 축을 닫는다</a:t>
+              <a:t>크기 축은 닫혔다</a:t>
             </a:r>
           </a:p>
         </p:txBody>
@@ -17535,7 +17462,7 @@
                 </a:solidFill>
                 <a:latin typeface="Malgun Gothic"/>
               </a:rPr>
-              <a:t>Tᵢ 인코더 폭 24 / 40 / 80 / 160 / 260</a:t>
+              <a:t>Tᵢ 인코더 폭 24 / 40 / 80 / 160 / 260은</a:t>
             </a:r>
           </a:p>
           <a:p>
@@ -17557,7 +17484,7 @@
                 </a:solidFill>
                 <a:latin typeface="Malgun Gothic"/>
               </a:rPr>
-              <a:t>  = 34k / 49k / 114k / 358k / 879k 파라미터</a:t>
+              <a:t>34k / 49k / 114k / 358k / 879k 파라미터에 해당한다.</a:t>
             </a:r>
           </a:p>
           <a:p>
@@ -17579,7 +17506,7 @@
                 </a:solidFill>
                 <a:latin typeface="Malgun Gothic"/>
               </a:rPr>
-              <a:t>skill +0.230 / +0.236 / +0.235 / +0.236 / +0.230 (컷)</a:t>
+              <a:t>skill은 +0.230 / +0.236 / +0.235 / +0.236 / +0.230(컷)이다.</a:t>
             </a:r>
           </a:p>
           <a:p>
@@ -17601,7 +17528,7 @@
                 </a:solidFill>
                 <a:latin typeface="Malgun Gothic"/>
               </a:rPr>
-              <a:t>160 대비 ±0.008 · 최대 폭 유의 우세 1/4 · V_rot 불변</a:t>
+              <a:t>160 대비 ±0.008이며 최대 폭의 유의 우세는 1/4, V_rot는 불변이다.</a:t>
             </a:r>
           </a:p>
           <a:p>
@@ -17623,7 +17550,7 @@
                 </a:solidFill>
                 <a:latin typeface="Malgun Gothic"/>
               </a:rPr>
-              <a:t>→ 남은 분산은 모델 크기가 아니라 분할 분산이다</a:t>
+              <a:t>따라서 남은 분산은 모델 크기가 아니라 분할 분산이다.</a:t>
             </a:r>
           </a:p>
         </p:txBody>
@@ -17840,7 +17767,7 @@
           <a:noFill/>
         </p:spPr>
         <p:txBody>
-          <a:bodyPr wrap="square" anchor="t" lIns="25400" rIns="25400" tIns="12700" bIns="12700">
+          <a:bodyPr wrap="square" anchor="ctr" lIns="25400" rIns="25400" tIns="12700" bIns="12700">
             <a:spAutoFit/>
           </a:bodyPr>
           <a:lstStyle/>
@@ -18110,7 +18037,7 @@
                 </a:solidFill>
                 <a:latin typeface="Malgun Gothic"/>
               </a:rPr>
-              <a:t>어디서 가치를 버는가</a:t>
+              <a:t>가치가 발생하는 위치</a:t>
             </a:r>
           </a:p>
         </p:txBody>
@@ -18155,7 +18082,7 @@
                 </a:solidFill>
                 <a:latin typeface="Malgun Gothic"/>
               </a:rPr>
-              <a:t>●  peak = 입력 기반 고-국소활동 이웃</a:t>
+              <a:t>●  peak는 입력 기반 고-국소활동 이웃으로 정의한다.</a:t>
             </a:r>
           </a:p>
           <a:p>
@@ -18177,7 +18104,7 @@
                 </a:solidFill>
                 <a:latin typeface="Malgun Gothic"/>
               </a:rPr>
-              <a:t>–  타겟 행 자체는 제외 — 보수적 영역 프록시</a:t>
+              <a:t>–  타깃 행 자체는 제외한 보수적 영역 프록시이다.</a:t>
             </a:r>
           </a:p>
           <a:p>
@@ -18199,7 +18126,7 @@
                 </a:solidFill>
                 <a:latin typeface="Malgun Gothic"/>
               </a:rPr>
-              <a:t>●  Tᵢ peak: 컷 +0.45~+0.61 · 포함 +0.62~+0.72</a:t>
+              <a:t>●  Tᵢ peak는 컷 +0.45~+0.61, 포함 +0.62~+0.72이다.</a:t>
             </a:r>
           </a:p>
           <a:p>
@@ -18221,7 +18148,7 @@
                 </a:solidFill>
                 <a:latin typeface="Malgun Gothic"/>
               </a:rPr>
-              <a:t>–  8/8 셀 PASS — 무조건부</a:t>
+              <a:t>–  8/8 셀 PASS로 무조건부이다.</a:t>
             </a:r>
           </a:p>
           <a:p>
@@ -18243,7 +18170,7 @@
                 </a:solidFill>
                 <a:latin typeface="Malgun Gothic"/>
               </a:rPr>
-              <a:t>–  Tᵢ 본류: +0.09~+0.20(컷 4/4) · +0.06~+0.19(포함 2/4)</a:t>
+              <a:t>–  Tᵢ 본류는 +0.09~+0.20(컷 4/4), +0.06~+0.19(포함 2/4)이다.</a:t>
             </a:r>
           </a:p>
           <a:p>
@@ -18265,7 +18192,7 @@
                 </a:solidFill>
                 <a:latin typeface="Malgun Gothic"/>
               </a:rPr>
-              <a:t>●  V_rot peak: +0.54~+0.79 (8/8 양수, PASS 각 2/4)</a:t>
+              <a:t>●  V_rot peak는 +0.54~+0.79(8/8 양수, PASS 각 2/4)이다.</a:t>
             </a:r>
           </a:p>
           <a:p>
@@ -18287,7 +18214,7 @@
                 </a:solidFill>
                 <a:latin typeface="Malgun Gothic"/>
               </a:rPr>
-              <a:t>–  persistence 대비는 +0.75~+0.86, 8/8 PASS</a:t>
+              <a:t>–  persistence 대비는 +0.75~+0.86으로 8/8 PASS이다.</a:t>
             </a:r>
           </a:p>
           <a:p>
@@ -18309,7 +18236,7 @@
                 </a:solidFill>
                 <a:latin typeface="Malgun Gothic"/>
               </a:rPr>
-              <a:t>–  본류는 ≈0 (-0.07~+0.15, 0/8)</a:t>
+              <a:t>–  본류는 ≈0(-0.07~+0.15, 0/8)이다.</a:t>
             </a:r>
           </a:p>
           <a:p>
@@ -18331,7 +18258,7 @@
                 </a:solidFill>
                 <a:latin typeface="Malgun Gothic"/>
               </a:rPr>
-              <a:t>●  보간은 매끄러운 본류에서 이미 최적</a:t>
+              <a:t>●  보간은 매끄러운 본류에서 이미 최적에 가깝다.</a:t>
             </a:r>
           </a:p>
           <a:p>
@@ -18353,7 +18280,7 @@
                 </a:solidFill>
                 <a:latin typeface="Malgun Gothic"/>
               </a:rPr>
-              <a:t>–  비대칭은 전역이 아니라 지역적이다</a:t>
+              <a:t>–  따라서 비대칭은 전역이 아니라 지역적이다.</a:t>
             </a:r>
           </a:p>
         </p:txBody>
@@ -18570,7 +18497,7 @@
           <a:noFill/>
         </p:spPr>
         <p:txBody>
-          <a:bodyPr wrap="square" anchor="t" lIns="25400" rIns="25400" tIns="12700" bIns="12700">
+          <a:bodyPr wrap="square" anchor="ctr" lIns="25400" rIns="25400" tIns="12700" bIns="12700">
             <a:spAutoFit/>
           </a:bodyPr>
           <a:lstStyle/>
@@ -18593,7 +18520,7 @@
                 </a:solidFill>
                 <a:latin typeface="Malgun Gothic"/>
               </a:rPr>
-              <a:t>결론부터 — 세 문장</a:t>
+              <a:t>결론을 먼저 제시한다 — 세 문장</a:t>
             </a:r>
           </a:p>
         </p:txBody>
@@ -18740,8 +18667,8 @@
         </p:nvSpPr>
         <p:spPr>
           <a:xfrm>
-            <a:off x="548640" y="1417320"/>
-            <a:ext cx="11155680" cy="1481328"/>
+            <a:off x="548640" y="1371600"/>
+            <a:ext cx="11155680" cy="1517904"/>
           </a:xfrm>
           <a:prstGeom prst="roundRect">
             <a:avLst/>
@@ -18784,7 +18711,7 @@
         </p:nvSpPr>
         <p:spPr>
           <a:xfrm>
-            <a:off x="658368" y="1691640"/>
+            <a:off x="658368" y="1673352"/>
             <a:ext cx="822960" cy="822960"/>
           </a:xfrm>
           <a:prstGeom prst="roundRect">
@@ -18828,7 +18755,7 @@
         </p:nvSpPr>
         <p:spPr>
           <a:xfrm>
-            <a:off x="658368" y="1691640"/>
+            <a:off x="658368" y="1673352"/>
             <a:ext cx="822960" cy="822960"/>
           </a:xfrm>
           <a:prstGeom prst="rect">
@@ -18873,7 +18800,7 @@
         </p:nvSpPr>
         <p:spPr>
           <a:xfrm>
-            <a:off x="1664208" y="1563624"/>
+            <a:off x="1664208" y="1499616"/>
             <a:ext cx="9875520" cy="411480"/>
           </a:xfrm>
           <a:prstGeom prst="rect">
@@ -18899,7 +18826,7 @@
               </a:spcAft>
             </a:pPr>
             <a:r>
-              <a:rPr sz="1700" b="1" i="0">
+              <a:rPr sz="1650" b="1" i="0">
                 <a:solidFill>
                   <a:srgbClr val="13335F"/>
                 </a:solidFill>
@@ -18918,8 +18845,8 @@
         </p:nvSpPr>
         <p:spPr>
           <a:xfrm>
-            <a:off x="1664208" y="1984248"/>
-            <a:ext cx="9875520" cy="868680"/>
+            <a:off x="1664208" y="1920240"/>
+            <a:ext cx="9875520" cy="914400"/>
           </a:xfrm>
           <a:prstGeom prst="rect">
             <a:avLst/>
@@ -18944,13 +18871,13 @@
               </a:spcAft>
             </a:pPr>
             <a:r>
-              <a:rPr sz="1200" b="0" i="0">
+              <a:rPr sz="1150" b="0" i="0">
                 <a:solidFill>
                   <a:srgbClr val="222B35"/>
                 </a:solidFill>
                 <a:latin typeface="Malgun Gothic"/>
               </a:rPr>
-              <a:t>과거만 보는 인과 모델이, 미래까지 보는 오프라인 보간(PCHIP)을 Tᵢ에서 유의하게 능가</a:t>
+              <a:t>과거만 읽는 인과 모델이 미래까지 읽는 오프라인 보간(PCHIP)을 Tᵢ에서 유의하게 능가하였다.</a:t>
             </a:r>
           </a:p>
           <a:p>
@@ -18966,13 +18893,13 @@
               </a:spcAft>
             </a:pPr>
             <a:r>
-              <a:rPr sz="1200" b="0" i="0">
+              <a:rPr sz="1150" b="0" i="0">
                 <a:solidFill>
                   <a:srgbClr val="222B35"/>
                 </a:solidFill>
                 <a:latin typeface="Malgun Gothic"/>
               </a:rPr>
-              <a:t>컷 +0.17~+0.26 · 포함 +0.23~+0.32 — 두 모집단 × 4개 독립 분할 전부 PASS (4/4 + 4/4)</a:t>
+              <a:t>컷 +0.17~+0.26, 포함 +0.23~+0.32로 두 모집단 × 4개 독립 분할 전부 PASS(4/4 + 4/4)였다.</a:t>
             </a:r>
           </a:p>
           <a:p>
@@ -18988,13 +18915,13 @@
               </a:spcAft>
             </a:pPr>
             <a:r>
-              <a:rPr sz="1200" b="0" i="0">
+              <a:rPr sz="1150" b="0" i="0">
                 <a:solidFill>
                   <a:srgbClr val="222B35"/>
                 </a:solidFill>
                 <a:latin typeface="Malgun Gothic"/>
               </a:rPr>
-              <a:t>배치 가능한 최강 인과 기준선(인과 GP)도 8개 셀 전부에서 이긴다</a:t>
+              <a:t>배치 가능한 최강 인과 기준선(인과 GP)도 8개 셀 전부에서 이겼고, 두 스트레스를 생존하였다.</a:t>
             </a:r>
           </a:p>
         </p:txBody>
@@ -19007,8 +18934,8 @@
         </p:nvSpPr>
         <p:spPr>
           <a:xfrm>
-            <a:off x="548640" y="3017520"/>
-            <a:ext cx="11155680" cy="1481328"/>
+            <a:off x="548640" y="2999232"/>
+            <a:ext cx="11155680" cy="1517904"/>
           </a:xfrm>
           <a:prstGeom prst="roundRect">
             <a:avLst/>
@@ -19051,7 +18978,7 @@
         </p:nvSpPr>
         <p:spPr>
           <a:xfrm>
-            <a:off x="658368" y="3291839"/>
+            <a:off x="658368" y="3300984"/>
             <a:ext cx="822960" cy="822960"/>
           </a:xfrm>
           <a:prstGeom prst="roundRect">
@@ -19095,7 +19022,7 @@
         </p:nvSpPr>
         <p:spPr>
           <a:xfrm>
-            <a:off x="658368" y="3291839"/>
+            <a:off x="658368" y="3300984"/>
             <a:ext cx="822960" cy="822960"/>
           </a:xfrm>
           <a:prstGeom prst="rect">
@@ -19140,7 +19067,7 @@
         </p:nvSpPr>
         <p:spPr>
           <a:xfrm>
-            <a:off x="1664208" y="3163824"/>
+            <a:off x="1664208" y="3127248"/>
             <a:ext cx="9875520" cy="411480"/>
           </a:xfrm>
           <a:prstGeom prst="rect">
@@ -19166,13 +19093,13 @@
               </a:spcAft>
             </a:pPr>
             <a:r>
-              <a:rPr sz="1700" b="1" i="0">
+              <a:rPr sz="1650" b="1" i="0">
                 <a:solidFill>
                   <a:srgbClr val="13335F"/>
                 </a:solidFill>
                 <a:latin typeface="Malgun Gothic"/>
               </a:rPr>
-              <a:t>V_rot는 전역 동률 — 물리로 예측된 비대칭</a:t>
+              <a:t>V_rot는 전역 동률이며, 그 원인은 물리적으로 설명된다</a:t>
             </a:r>
           </a:p>
         </p:txBody>
@@ -19185,8 +19112,8 @@
         </p:nvSpPr>
         <p:spPr>
           <a:xfrm>
-            <a:off x="1664208" y="3584448"/>
-            <a:ext cx="9875520" cy="868680"/>
+            <a:off x="1664208" y="3547872"/>
+            <a:ext cx="9875520" cy="914400"/>
           </a:xfrm>
           <a:prstGeom prst="rect">
             <a:avLst/>
@@ -19211,13 +19138,13 @@
               </a:spcAft>
             </a:pPr>
             <a:r>
-              <a:rPr sz="1200" b="0" i="0">
+              <a:rPr sz="1150" b="0" i="0">
                 <a:solidFill>
                   <a:srgbClr val="222B35"/>
                 </a:solidFill>
                 <a:latin typeface="Malgun Gothic"/>
               </a:rPr>
-              <a:t>PR4 통과는 컷 1/4 · 포함 2/4(잡음 수준) → 회전 승리를 주장하지 않는다</a:t>
+              <a:t>PR4 통과는 컷 1/4, 포함 2/4로 잡음 수준이므로 회전의 승리를 주장하지 않는다.</a:t>
             </a:r>
           </a:p>
           <a:p>
@@ -19233,13 +19160,13 @@
               </a:spcAft>
             </a:pPr>
             <a:r>
-              <a:rPr sz="1200" b="0" i="0">
+              <a:rPr sz="1150" b="0" i="0">
                 <a:solidFill>
                   <a:srgbClr val="222B35"/>
                 </a:solidFill>
                 <a:latin typeface="Malgun Gothic"/>
               </a:rPr>
-              <a:t>빠른 채널을 전부 0으로 만들어도 출력이 bit-identical — 회전 정보가 애초에 없다</a:t>
+              <a:t>빠른 채널을 전부 0으로 두어도 출력이 bit-identical이므로 회전 정보는 입력에 없다.</a:t>
             </a:r>
           </a:p>
           <a:p>
@@ -19255,13 +19182,13 @@
               </a:spcAft>
             </a:pPr>
             <a:r>
-              <a:rPr sz="1200" b="0" i="0">
+              <a:rPr sz="1150" b="0" i="0">
                 <a:solidFill>
                   <a:srgbClr val="222B35"/>
                 </a:solidFill>
                 <a:latin typeface="Malgun Gothic"/>
               </a:rPr>
-              <a:t>원인: 회전을 구동하는 NBI 토크 미관측 + Mirnov kHz 신호의 100 Hz 앨리어싱</a:t>
+              <a:t>우위는 회전이 실제로 변하는 방전에 집중되며(승률 34% → 55%), 구동 변수 NBI 토크가 미관측이다.</a:t>
             </a:r>
           </a:p>
         </p:txBody>
@@ -19274,8 +19201,8 @@
         </p:nvSpPr>
         <p:spPr>
           <a:xfrm>
-            <a:off x="548640" y="4617720"/>
-            <a:ext cx="11155680" cy="1481328"/>
+            <a:off x="548640" y="4626864"/>
+            <a:ext cx="11155680" cy="1517904"/>
           </a:xfrm>
           <a:prstGeom prst="roundRect">
             <a:avLst/>
@@ -19318,7 +19245,7 @@
         </p:nvSpPr>
         <p:spPr>
           <a:xfrm>
-            <a:off x="658368" y="4892040"/>
+            <a:off x="658368" y="4928616"/>
             <a:ext cx="822960" cy="822960"/>
           </a:xfrm>
           <a:prstGeom prst="roundRect">
@@ -19362,7 +19289,7 @@
         </p:nvSpPr>
         <p:spPr>
           <a:xfrm>
-            <a:off x="658368" y="4892040"/>
+            <a:off x="658368" y="4928616"/>
             <a:ext cx="822960" cy="822960"/>
           </a:xfrm>
           <a:prstGeom prst="rect">
@@ -19407,7 +19334,7 @@
         </p:nvSpPr>
         <p:spPr>
           <a:xfrm>
-            <a:off x="1664208" y="4764024"/>
+            <a:off x="1664208" y="4754880"/>
             <a:ext cx="9875520" cy="411480"/>
           </a:xfrm>
           <a:prstGeom prst="rect">
@@ -19433,13 +19360,13 @@
               </a:spcAft>
             </a:pPr>
             <a:r>
-              <a:rPr sz="1700" b="1" i="0">
+              <a:rPr sz="1650" b="1" i="0">
                 <a:solidFill>
                   <a:srgbClr val="13335F"/>
                 </a:solidFill>
                 <a:latin typeface="Malgun Gothic"/>
               </a:rPr>
-              <a:t>상한은 추정기가 아니라 정보다</a:t>
+              <a:t>문맥이 우위를 전형적으로 만들고, 비용이 아키텍처를 정하며, 상한은 정보에 있다</a:t>
             </a:r>
           </a:p>
         </p:txBody>
@@ -19452,8 +19379,8 @@
         </p:nvSpPr>
         <p:spPr>
           <a:xfrm>
-            <a:off x="1664208" y="5184648"/>
-            <a:ext cx="9875520" cy="868680"/>
+            <a:off x="1664208" y="5175504"/>
+            <a:ext cx="9875520" cy="914400"/>
           </a:xfrm>
           <a:prstGeom prst="rect">
             <a:avLst/>
@@ -19478,13 +19405,13 @@
               </a:spcAft>
             </a:pPr>
             <a:r>
-              <a:rPr sz="1200" b="0" i="0">
+              <a:rPr sz="1150" b="0" i="0">
                 <a:solidFill>
                   <a:srgbClr val="222B35"/>
                 </a:solidFill>
                 <a:latin typeface="Malgun Gothic"/>
               </a:rPr>
-              <a:t>우위는 고변동(peak)·간극 구간에 집중 (Tᵢ peak +0.45~+0.72, 8/8 PASS)</a:t>
+              <a:t>연속 인과 문맥 약 50 ms에서 skill이 포화하고 승리 방전 비율이 0.52에서 0.66으로 올랐다.</a:t>
             </a:r>
           </a:p>
           <a:p>
@@ -19500,13 +19427,13 @@
               </a:spcAft>
             </a:pPr>
             <a:r>
-              <a:rPr sz="1200" b="0" i="0">
+              <a:rPr sz="1150" b="0" i="0">
                 <a:solidFill>
                   <a:srgbClr val="222B35"/>
                 </a:solidFill>
                 <a:latin typeface="Malgun Gothic"/>
               </a:rPr>
-              <a:t>21,498 파라미터 모델이 컷에서 백본과 동급(+0.002), 폭 34k→879k는 평평</a:t>
+              <a:t>순환·확장 합성곱·attention은 같은 문맥에서 0.023 이내로 동률이므로 비용(연산자 수)으로 선택한다.</a:t>
             </a:r>
           </a:p>
           <a:p>
@@ -19522,13 +19449,13 @@
               </a:spcAft>
             </a:pPr>
             <a:r>
-              <a:rPr sz="1200" b="0" i="0">
+              <a:rPr sz="1150" b="0" i="0">
                 <a:solidFill>
                   <a:srgbClr val="222B35"/>
                 </a:solidFill>
                 <a:latin typeface="Malgun Gothic"/>
               </a:rPr>
-              <a:t>→ 남은 레버는 모델 크기가 아니라 데이터 (피팅 메타 · kHz Mirnov · NBI 토크)</a:t>
+              <a:t>21,498 파라미터 모델이 백본과 동급(컷)이고 폭 26배 스윕이 평평하므로, 남은 레버는 데이터이다.</a:t>
             </a:r>
           </a:p>
         </p:txBody>
@@ -19745,7 +19672,7 @@
           <a:noFill/>
         </p:spPr>
         <p:txBody>
-          <a:bodyPr wrap="square" anchor="t" lIns="25400" rIns="25400" tIns="12700" bIns="12700">
+          <a:bodyPr wrap="square" anchor="ctr" lIns="25400" rIns="25400" tIns="12700" bIns="12700">
             <a:spAutoFit/>
           </a:bodyPr>
           <a:lstStyle/>
@@ -19768,7 +19695,7 @@
                 </a:solidFill>
                 <a:latin typeface="Malgun Gothic"/>
               </a:rPr>
-              <a:t>급변 구간을 눈으로 — held-out TEST shot #31815</a:t>
+              <a:t>급변 구간의 사례: held-out TEST shot #31815</a:t>
             </a:r>
           </a:p>
         </p:txBody>
@@ -20015,7 +19942,7 @@
                 </a:solidFill>
                 <a:latin typeface="Malgun Gothic"/>
               </a:rPr>
-              <a:t>한 shot에서 실제로 벌어지는 일</a:t>
+              <a:t>한 shot에서 관찰되는 현상</a:t>
             </a:r>
           </a:p>
         </p:txBody>
@@ -20060,7 +19987,7 @@
                 </a:solidFill>
                 <a:latin typeface="Malgun Gothic"/>
               </a:rPr>
-              <a:t>●  빠른 진단이 급변을 먼저 본다</a:t>
+              <a:t>●  빠른 진단이 급변을 먼저 관측한다.</a:t>
             </a:r>
           </a:p>
           <a:p>
@@ -20082,7 +20009,7 @@
                 </a:solidFill>
                 <a:latin typeface="Malgun Gothic"/>
               </a:rPr>
-              <a:t>–  BES 급락(빨간 점선)이 CES crash와 정렬</a:t>
+              <a:t>–  BES 급락(빨간 점선)이 CES crash와 정렬된다.</a:t>
             </a:r>
           </a:p>
           <a:p>
@@ -20104,7 +20031,7 @@
                 </a:solidFill>
                 <a:latin typeface="Malgun Gothic"/>
               </a:rPr>
-              <a:t>●  PCHIP는 스파이크마다 overshoot</a:t>
+              <a:t>●  PCHIP는 스파이크마다 overshoot한다.</a:t>
             </a:r>
           </a:p>
           <a:p>
@@ -20126,7 +20053,7 @@
                 </a:solidFill>
                 <a:latin typeface="Malgun Gothic"/>
               </a:rPr>
-              <a:t>–  과거+미래를 다 보는 오프라인 보간인데도</a:t>
+              <a:t>–  과거와 미래를 모두 읽는 오프라인 보간임에도 그러하다.</a:t>
             </a:r>
           </a:p>
           <a:p>
@@ -20148,7 +20075,7 @@
                 </a:solidFill>
                 <a:latin typeface="Malgun Gothic"/>
               </a:rPr>
-              <a:t>●  모델은 세그먼트 과거 + 빠른 진단만 쓰는 causal</a:t>
+              <a:t>●  모델은 세그먼트 과거와 빠른 진단만 쓰는 인과 모델이다.</a:t>
             </a:r>
           </a:p>
           <a:p>
@@ -20170,7 +20097,7 @@
                 </a:solidFill>
                 <a:latin typeface="Malgun Gothic"/>
               </a:rPr>
-              <a:t>●  Tᵢ: RMSE 199.2 vs PCHIP 262.3 → skill +0.42</a:t>
+              <a:t>●  Tᵢ RMSE는 199.2로 PCHIP 262.3보다 낮고 skill은 +0.42이다.</a:t>
             </a:r>
           </a:p>
           <a:p>
@@ -20192,7 +20119,7 @@
                 </a:solidFill>
                 <a:latin typeface="Malgun Gothic"/>
               </a:rPr>
-              <a:t>–  n = 395 실측점 (genuine, 컷 후)</a:t>
+              <a:t>–  n = 395 실측점(genuine, 컷 후)이다.</a:t>
             </a:r>
           </a:p>
           <a:p>
@@ -20214,7 +20141,7 @@
                 </a:solidFill>
                 <a:latin typeface="Malgun Gothic"/>
               </a:rPr>
-              <a:t>●  V_rot: 17.3 vs 19.5 → skill +0.21 (n = 149)</a:t>
+              <a:t>●  V_rot는 17.3 vs 19.5로 skill +0.21이다(n = 149).</a:t>
             </a:r>
           </a:p>
           <a:p>
@@ -20236,7 +20163,7 @@
                 </a:solidFill>
                 <a:latin typeface="Malgun Gothic"/>
               </a:rPr>
-              <a:t>–  V_rot 관측이 끊기면 이력만으로 완만히 감쇠</a:t>
+              <a:t>–  V_rot 관측이 끊기면 이력만으로 완만히 감쇠한다.</a:t>
             </a:r>
           </a:p>
           <a:p>
@@ -20258,7 +20185,7 @@
                 </a:solidFill>
                 <a:latin typeface="Malgun Gothic"/>
               </a:rPr>
-              <a:t>●  우위는 gap·peak에 집중 (결과 ⑦과 일관)</a:t>
+              <a:t>●  우위는 gap·peak에 집중되며 결과 ⑦과 일관된다.</a:t>
             </a:r>
           </a:p>
         </p:txBody>
@@ -20384,7 +20311,7 @@
             <a:avLst/>
           </a:prstGeom>
           <a:solidFill>
-            <a:srgbClr val="13335F"/>
+            <a:srgbClr val="1B9E8A"/>
           </a:solidFill>
           <a:ln>
             <a:noFill/>
@@ -20449,11 +20376,11 @@
             <a:r>
               <a:rPr sz="1300" b="1" i="0">
                 <a:solidFill>
-                  <a:srgbClr val="13335F"/>
-                </a:solidFill>
-                <a:latin typeface="Malgun Gothic"/>
-              </a:rPr>
-              <a:t>6. 결론</a:t>
+                  <a:srgbClr val="1B9E8A"/>
+                </a:solidFill>
+                <a:latin typeface="Malgun Gothic"/>
+              </a:rPr>
+              <a:t>5. 결과 ⑨</a:t>
             </a:r>
           </a:p>
         </p:txBody>
@@ -20475,7 +20402,7 @@
           <a:noFill/>
         </p:spPr>
         <p:txBody>
-          <a:bodyPr wrap="square" anchor="t" lIns="25400" rIns="25400" tIns="12700" bIns="12700">
+          <a:bodyPr wrap="square" anchor="ctr" lIns="25400" rIns="25400" tIns="12700" bIns="12700">
             <a:spAutoFit/>
           </a:bodyPr>
           <a:lstStyle/>
@@ -20492,13 +20419,13 @@
               </a:spcAft>
             </a:pPr>
             <a:r>
-              <a:rPr sz="2700" b="1" i="0">
+              <a:rPr sz="2100" b="1" i="0">
                 <a:solidFill>
                   <a:srgbClr val="13335F"/>
                 </a:solidFill>
                 <a:latin typeface="Malgun Gothic"/>
               </a:rPr>
-              <a:t>정직한 결론 (4가지)</a:t>
+              <a:t>문맥·구조·비용: 약 50 ms의 문맥이 우위를 전형적으로 만들고, 계열은 비용으로 정한다</a:t>
             </a:r>
           </a:p>
         </p:txBody>
@@ -20637,16 +20564,40 @@
           </a:p>
         </p:txBody>
       </p:sp>
-      <p:sp>
-        <p:nvSpPr>
-          <p:cNvPr id="10" name="Rounded Rectangle 9"/>
+      <p:pic>
+        <p:nvPicPr>
+          <p:cNvPr id="10" name="Picture 9" descr="fig_context_family_ladder.png"/>
+          <p:cNvPicPr>
+            <a:picLocks noChangeAspect="1"/>
+          </p:cNvPicPr>
+          <p:nvPr/>
+        </p:nvPicPr>
+        <p:blipFill>
+          <a:blip r:embed="rId2"/>
+          <a:stretch>
+            <a:fillRect/>
+          </a:stretch>
+        </p:blipFill>
+        <p:spPr>
+          <a:xfrm>
+            <a:off x="411480" y="1375793"/>
+            <a:ext cx="5669280" cy="4618477"/>
+          </a:xfrm>
+          <a:prstGeom prst="rect">
+            <a:avLst/>
+          </a:prstGeom>
+        </p:spPr>
+      </p:pic>
+      <p:sp>
+        <p:nvSpPr>
+          <p:cNvPr id="11" name="Rounded Rectangle 10"/>
           <p:cNvSpPr/>
           <p:nvPr/>
         </p:nvSpPr>
         <p:spPr>
           <a:xfrm>
-            <a:off x="548640" y="1417320"/>
-            <a:ext cx="11155680" cy="1078992"/>
+            <a:off x="6217920" y="1261872"/>
+            <a:ext cx="5486400" cy="1627632"/>
           </a:xfrm>
           <a:prstGeom prst="roundRect">
             <a:avLst/>
@@ -20683,20 +20634,20 @@
       </p:sp>
       <p:sp>
         <p:nvSpPr>
-          <p:cNvPr id="11" name="Rounded Rectangle 10"/>
+          <p:cNvPr id="12" name="Rectangle 11"/>
           <p:cNvSpPr/>
           <p:nvPr/>
         </p:nvSpPr>
         <p:spPr>
           <a:xfrm>
-            <a:off x="658368" y="1572768"/>
-            <a:ext cx="768096" cy="768096"/>
-          </a:xfrm>
-          <a:prstGeom prst="roundRect">
+            <a:off x="6217920" y="1261872"/>
+            <a:ext cx="91440" cy="1627632"/>
+          </a:xfrm>
+          <a:prstGeom prst="rect">
             <a:avLst/>
           </a:prstGeom>
           <a:solidFill>
-            <a:srgbClr val="2B6CB0"/>
+            <a:srgbClr val="1B9E8A"/>
           </a:solidFill>
           <a:ln>
             <a:noFill/>
@@ -20727,59 +20678,14 @@
       </p:sp>
       <p:sp>
         <p:nvSpPr>
-          <p:cNvPr id="12" name="TextBox 11"/>
-          <p:cNvSpPr txBox="1"/>
-          <p:nvPr/>
-        </p:nvSpPr>
-        <p:spPr>
-          <a:xfrm>
-            <a:off x="658368" y="1572768"/>
-            <a:ext cx="768096" cy="768096"/>
-          </a:xfrm>
-          <a:prstGeom prst="rect">
-            <a:avLst/>
-          </a:prstGeom>
-          <a:noFill/>
-        </p:spPr>
-        <p:txBody>
-          <a:bodyPr wrap="square" anchor="ctr" lIns="25400" rIns="25400" tIns="12700" bIns="12700">
-            <a:spAutoFit/>
-          </a:bodyPr>
-          <a:lstStyle/>
-          <a:p>
-            <a:pPr algn="ctr">
-              <a:lnSpc>
-                <a:spcPct val="106000"/>
-              </a:lnSpc>
-              <a:spcBef>
-                <a:spcPts val="0"/>
-              </a:spcBef>
-              <a:spcAft>
-                <a:spcPts val="400"/>
-              </a:spcAft>
-            </a:pPr>
-            <a:r>
-              <a:rPr sz="2600" b="1" i="0">
-                <a:solidFill>
-                  <a:srgbClr val="FFFFFF"/>
-                </a:solidFill>
-                <a:latin typeface="Malgun Gothic"/>
-              </a:rPr>
-              <a:t>1</a:t>
-            </a:r>
-          </a:p>
-        </p:txBody>
-      </p:sp>
-      <p:sp>
-        <p:nvSpPr>
           <p:cNvPr id="13" name="TextBox 12"/>
           <p:cNvSpPr txBox="1"/>
           <p:nvPr/>
         </p:nvSpPr>
         <p:spPr>
           <a:xfrm>
-            <a:off x="1600200" y="1517904"/>
-            <a:ext cx="9966960" cy="384048"/>
+            <a:off x="6455664" y="1371600"/>
+            <a:ext cx="5120640" cy="365760"/>
           </a:xfrm>
           <a:prstGeom prst="rect">
             <a:avLst/>
@@ -20804,13 +20710,13 @@
               </a:spcAft>
             </a:pPr>
             <a:r>
-              <a:rPr sz="1550" b="1" i="0">
-                <a:solidFill>
-                  <a:srgbClr val="13335F"/>
-                </a:solidFill>
-                <a:latin typeface="Malgun Gothic"/>
-              </a:rPr>
-              <a:t>Tᵢ: 미래를 쓰는 보간을 두 모집단 모두에서 유의하게 능가</a:t>
+              <a:rPr sz="1250" b="1" i="0">
+                <a:solidFill>
+                  <a:srgbClr val="1B9E8A"/>
+                </a:solidFill>
+                <a:latin typeface="Malgun Gothic"/>
+              </a:rPr>
+              <a:t>① 문맥 — 포화 50 ms, 문맥이 사는 것은 전형성</a:t>
             </a:r>
           </a:p>
         </p:txBody>
@@ -20823,8 +20729,8 @@
         </p:nvSpPr>
         <p:spPr>
           <a:xfrm>
-            <a:off x="1600200" y="1901952"/>
-            <a:ext cx="9966960" cy="566928"/>
+            <a:off x="6455664" y="1773936"/>
+            <a:ext cx="5102352" cy="987552"/>
           </a:xfrm>
           <a:prstGeom prst="rect">
             <a:avLst/>
@@ -20839,23 +20745,89 @@
           <a:p>
             <a:pPr algn="l">
               <a:lnSpc>
-                <a:spcPct val="108000"/>
-              </a:lnSpc>
-              <a:spcBef>
-                <a:spcPts val="0"/>
-              </a:spcBef>
-              <a:spcAft>
-                <a:spcPts val="400"/>
-              </a:spcAft>
-            </a:pPr>
-            <a:r>
-              <a:rPr sz="1150" b="0" i="0">
+                <a:spcPct val="110000"/>
+              </a:lnSpc>
+              <a:spcBef>
+                <a:spcPts val="0"/>
+              </a:spcBef>
+              <a:spcAft>
+                <a:spcPts val="300"/>
+              </a:spcAft>
+            </a:pPr>
+            <a:r>
+              <a:rPr sz="1050" b="0" i="0">
                 <a:solidFill>
                   <a:srgbClr val="222B35"/>
                 </a:solidFill>
                 <a:latin typeface="Malgun Gothic"/>
               </a:rPr>
-              <a:t>skill_vs_pchip 컷 +0.17~+0.26 · 포함 +0.23~+0.32, 4개 독립 분할 전부 shot 군집 95% CI가 0 제외(4/4+4/4). 인과 GP는 8/8 셀에서 이기고, 최강 오프라인 평활기(GP)와는 동률 — 상한도 함께 보고한다.</a:t>
+              <a:t>각 도달 범위에서 학습한 seq_v2의 전체 대비 결손은 50 ms부터 0.02 아래이다.</a:t>
+            </a:r>
+          </a:p>
+          <a:p>
+            <a:pPr algn="l">
+              <a:lnSpc>
+                <a:spcPct val="110000"/>
+              </a:lnSpc>
+              <a:spcBef>
+                <a:spcPts val="0"/>
+              </a:spcBef>
+              <a:spcAft>
+                <a:spcPts val="300"/>
+              </a:spcAft>
+            </a:pPr>
+            <a:r>
+              <a:rPr sz="1050" b="0" i="0">
+                <a:solidFill>
+                  <a:srgbClr val="222B35"/>
+                </a:solidFill>
+                <a:latin typeface="Malgun Gothic"/>
+              </a:rPr>
+              <a:t>301 방전 통합에서 20 ms도 인과 GP를 이기나(+0.057) 승률은 0.52이며,</a:t>
+            </a:r>
+          </a:p>
+          <a:p>
+            <a:pPr algn="l">
+              <a:lnSpc>
+                <a:spcPct val="110000"/>
+              </a:lnSpc>
+              <a:spcBef>
+                <a:spcPts val="0"/>
+              </a:spcBef>
+              <a:spcAft>
+                <a:spcPts val="300"/>
+              </a:spcAft>
+            </a:pPr>
+            <a:r>
+              <a:rPr sz="1050" b="0" i="0">
+                <a:solidFill>
+                  <a:srgbClr val="222B35"/>
+                </a:solidFill>
+                <a:latin typeface="Malgun Gothic"/>
+              </a:rPr>
+              <a:t>70 ms에서 0.66으로 평평해진다. 문맥 10배당 skill은 +0.050이다.</a:t>
+            </a:r>
+          </a:p>
+          <a:p>
+            <a:pPr algn="l">
+              <a:lnSpc>
+                <a:spcPct val="110000"/>
+              </a:lnSpc>
+              <a:spcBef>
+                <a:spcPts val="0"/>
+              </a:spcBef>
+              <a:spcAft>
+                <a:spcPts val="300"/>
+              </a:spcAft>
+            </a:pPr>
+            <a:r>
+              <a:rPr sz="1050" b="0" i="0">
+                <a:solidFill>
+                  <a:srgbClr val="222B35"/>
+                </a:solidFill>
+                <a:latin typeface="Malgun Gothic"/>
+              </a:rPr>
+              <a:t>절단 사다리 결손의 87%는 cold start였다.</a:t>
             </a:r>
           </a:p>
         </p:txBody>
@@ -20868,8 +20840,8 @@
         </p:nvSpPr>
         <p:spPr>
           <a:xfrm>
-            <a:off x="548640" y="2624328"/>
-            <a:ext cx="11155680" cy="1078992"/>
+            <a:off x="6217920" y="2962656"/>
+            <a:ext cx="5486400" cy="1627632"/>
           </a:xfrm>
           <a:prstGeom prst="roundRect">
             <a:avLst/>
@@ -20906,20 +20878,20 @@
       </p:sp>
       <p:sp>
         <p:nvSpPr>
-          <p:cNvPr id="16" name="Rounded Rectangle 15"/>
+          <p:cNvPr id="16" name="Rectangle 15"/>
           <p:cNvSpPr/>
           <p:nvPr/>
         </p:nvSpPr>
         <p:spPr>
           <a:xfrm>
-            <a:off x="658368" y="2779776"/>
-            <a:ext cx="768096" cy="768096"/>
-          </a:xfrm>
-          <a:prstGeom prst="roundRect">
+            <a:off x="6217920" y="2962656"/>
+            <a:ext cx="91440" cy="1627632"/>
+          </a:xfrm>
+          <a:prstGeom prst="rect">
             <a:avLst/>
           </a:prstGeom>
           <a:solidFill>
-            <a:srgbClr val="2E9E5B"/>
+            <a:srgbClr val="13335F"/>
           </a:solidFill>
           <a:ln>
             <a:noFill/>
@@ -20956,53 +20928,8 @@
         </p:nvSpPr>
         <p:spPr>
           <a:xfrm>
-            <a:off x="658368" y="2779776"/>
-            <a:ext cx="768096" cy="768096"/>
-          </a:xfrm>
-          <a:prstGeom prst="rect">
-            <a:avLst/>
-          </a:prstGeom>
-          <a:noFill/>
-        </p:spPr>
-        <p:txBody>
-          <a:bodyPr wrap="square" anchor="ctr" lIns="25400" rIns="25400" tIns="12700" bIns="12700">
-            <a:spAutoFit/>
-          </a:bodyPr>
-          <a:lstStyle/>
-          <a:p>
-            <a:pPr algn="ctr">
-              <a:lnSpc>
-                <a:spcPct val="106000"/>
-              </a:lnSpc>
-              <a:spcBef>
-                <a:spcPts val="0"/>
-              </a:spcBef>
-              <a:spcAft>
-                <a:spcPts val="400"/>
-              </a:spcAft>
-            </a:pPr>
-            <a:r>
-              <a:rPr sz="2600" b="1" i="0">
-                <a:solidFill>
-                  <a:srgbClr val="FFFFFF"/>
-                </a:solidFill>
-                <a:latin typeface="Malgun Gothic"/>
-              </a:rPr>
-              <a:t>2</a:t>
-            </a:r>
-          </a:p>
-        </p:txBody>
-      </p:sp>
-      <p:sp>
-        <p:nvSpPr>
-          <p:cNvPr id="18" name="TextBox 17"/>
-          <p:cNvSpPr txBox="1"/>
-          <p:nvPr/>
-        </p:nvSpPr>
-        <p:spPr>
-          <a:xfrm>
-            <a:off x="1600200" y="2724912"/>
-            <a:ext cx="9966960" cy="384048"/>
+            <a:off x="6455664" y="3072384"/>
+            <a:ext cx="5120640" cy="365760"/>
           </a:xfrm>
           <a:prstGeom prst="rect">
             <a:avLst/>
@@ -21027,27 +20954,27 @@
               </a:spcAft>
             </a:pPr>
             <a:r>
-              <a:rPr sz="1550" b="1" i="0">
+              <a:rPr sz="1250" b="1" i="0">
                 <a:solidFill>
                   <a:srgbClr val="13335F"/>
                 </a:solidFill>
                 <a:latin typeface="Malgun Gothic"/>
               </a:rPr>
-              <a:t>배치 주장이 이제 두 스트레스를 모두 견딘다</a:t>
-            </a:r>
-          </a:p>
-        </p:txBody>
-      </p:sp>
-      <p:sp>
-        <p:nvSpPr>
-          <p:cNvPr id="19" name="TextBox 18"/>
+              <a:t>② 계열 — 같은 문맥에서 동률, 비용은 연산자 수</a:t>
+            </a:r>
+          </a:p>
+        </p:txBody>
+      </p:sp>
+      <p:sp>
+        <p:nvSpPr>
+          <p:cNvPr id="18" name="TextBox 17"/>
           <p:cNvSpPr txBox="1"/>
           <p:nvPr/>
         </p:nvSpPr>
         <p:spPr>
           <a:xfrm>
-            <a:off x="1600200" y="3108960"/>
-            <a:ext cx="9966960" cy="566928"/>
+            <a:off x="6455664" y="3474720"/>
+            <a:ext cx="5102352" cy="987552"/>
           </a:xfrm>
           <a:prstGeom prst="rect">
             <a:avLst/>
@@ -21062,37 +20989,103 @@
           <a:p>
             <a:pPr algn="l">
               <a:lnSpc>
-                <a:spcPct val="108000"/>
-              </a:lnSpc>
-              <a:spcBef>
-                <a:spcPts val="0"/>
-              </a:spcBef>
-              <a:spcAft>
-                <a:spcPts val="400"/>
-              </a:spcAft>
-            </a:pPr>
-            <a:r>
-              <a:rPr sz="1150" b="0" i="0">
+                <a:spcPct val="110000"/>
+              </a:lnSpc>
+              <a:spcBef>
+                <a:spcPts val="0"/>
+              </a:spcBef>
+              <a:spcAft>
+                <a:spcPts val="300"/>
+              </a:spcAft>
+            </a:pPr>
+            <a:r>
+              <a:rPr sz="1050" b="0" i="0">
                 <a:solidFill>
                   <a:srgbClr val="222B35"/>
                 </a:solidFill>
                 <a:latin typeface="Malgun Gothic"/>
               </a:rPr>
-              <a:t>실제 결측 in-domain 시점에서 인과 방법 대비 8/8 생존, 캠페인 경계 너머 PCHIP·인과 GP 대비 4/4+4/4. 대체된 윈도 대조군은 오프라인 우위를 완전히 잃었고(2/4·0/4) 그 차이는 측정됐다(빠른 진단 5–11× 드리프트).</a:t>
-            </a:r>
-          </a:p>
-        </p:txBody>
-      </p:sp>
-      <p:sp>
-        <p:nvSpPr>
-          <p:cNvPr id="20" name="Rounded Rectangle 19"/>
+              <a:t>순환·확장 합성곱·attention은 같은 문맥의 LSTM과 0.023 이내로 동률이다.</a:t>
+            </a:r>
+          </a:p>
+          <a:p>
+            <a:pPr algn="l">
+              <a:lnSpc>
+                <a:spcPct val="110000"/>
+              </a:lnSpc>
+              <a:spcBef>
+                <a:spcPts val="0"/>
+              </a:spcBef>
+              <a:spcAft>
+                <a:spcPts val="300"/>
+              </a:spcAft>
+            </a:pPr>
+            <a:r>
+              <a:rPr sz="1050" b="0" i="0">
+                <a:solidFill>
+                  <a:srgbClr val="222B35"/>
+                </a:solidFill>
+                <a:latin typeface="Malgun Gothic"/>
+              </a:rPr>
+              <a:t>지연은 t ≈ N_ops × 2–3 µs이다. 순환 111 ops(O(1)), 합성곱 +48 ops/층,</a:t>
+            </a:r>
+          </a:p>
+          <a:p>
+            <a:pPr algn="l">
+              <a:lnSpc>
+                <a:spcPct val="110000"/>
+              </a:lnSpc>
+              <a:spcBef>
+                <a:spcPts val="0"/>
+              </a:spcBef>
+              <a:spcAft>
+                <a:spcPts val="300"/>
+              </a:spcAft>
+            </a:pPr>
+            <a:r>
+              <a:rPr sz="1050" b="0" i="0">
+                <a:solidFill>
+                  <a:srgbClr val="222B35"/>
+                </a:solidFill>
+                <a:latin typeface="Malgun Gothic"/>
+              </a:rPr>
+              <a:t>attention 473 ops이다. 10 ms 예산은 어느 arm에도 구속 조건이 아니다.</a:t>
+            </a:r>
+          </a:p>
+          <a:p>
+            <a:pPr algn="l">
+              <a:lnSpc>
+                <a:spcPct val="110000"/>
+              </a:lnSpc>
+              <a:spcBef>
+                <a:spcPts val="0"/>
+              </a:spcBef>
+              <a:spcAft>
+                <a:spcPts val="300"/>
+              </a:spcAft>
+            </a:pPr>
+            <a:r>
+              <a:rPr sz="1050" b="0" i="0">
+                <a:solidFill>
+                  <a:srgbClr val="222B35"/>
+                </a:solidFill>
+                <a:latin typeface="Malgun Gothic"/>
+              </a:rPr>
+              <a:t>1,808 파라미터 tcn2k도 인과 GP를 4/4로 이긴다.</a:t>
+            </a:r>
+          </a:p>
+        </p:txBody>
+      </p:sp>
+      <p:sp>
+        <p:nvSpPr>
+          <p:cNvPr id="19" name="Rounded Rectangle 18"/>
           <p:cNvSpPr/>
           <p:nvPr/>
         </p:nvSpPr>
         <p:spPr>
           <a:xfrm>
-            <a:off x="548640" y="3831336"/>
-            <a:ext cx="11155680" cy="1078992"/>
+            <a:off x="6217920" y="4663440"/>
+            <a:ext cx="5486400" cy="1627632"/>
           </a:xfrm>
           <a:prstGeom prst="roundRect">
             <a:avLst/>
@@ -21129,239 +21122,16 @@
       </p:sp>
       <p:sp>
         <p:nvSpPr>
-          <p:cNvPr id="21" name="Rounded Rectangle 20"/>
+          <p:cNvPr id="20" name="Rectangle 19"/>
           <p:cNvSpPr/>
           <p:nvPr/>
         </p:nvSpPr>
         <p:spPr>
           <a:xfrm>
-            <a:off x="658368" y="3986784"/>
-            <a:ext cx="768096" cy="768096"/>
-          </a:xfrm>
-          <a:prstGeom prst="roundRect">
-            <a:avLst/>
-          </a:prstGeom>
-          <a:solidFill>
-            <a:srgbClr val="5B6670"/>
-          </a:solidFill>
-          <a:ln>
-            <a:noFill/>
-          </a:ln>
-          <a:effectLst/>
-        </p:spPr>
-        <p:style>
-          <a:lnRef idx="1">
-            <a:schemeClr val="accent1"/>
-          </a:lnRef>
-          <a:fillRef idx="3">
-            <a:schemeClr val="accent1"/>
-          </a:fillRef>
-          <a:effectRef idx="2">
-            <a:schemeClr val="accent1"/>
-          </a:effectRef>
-          <a:fontRef idx="minor">
-            <a:schemeClr val="lt1"/>
-          </a:fontRef>
-        </p:style>
-        <p:txBody>
-          <a:bodyPr rtlCol="0" anchor="ctr"/>
-          <a:lstStyle/>
-          <a:p>
-            <a:pPr algn="ctr"/>
-          </a:p>
-        </p:txBody>
-      </p:sp>
-      <p:sp>
-        <p:nvSpPr>
-          <p:cNvPr id="22" name="TextBox 21"/>
-          <p:cNvSpPr txBox="1"/>
-          <p:nvPr/>
-        </p:nvSpPr>
-        <p:spPr>
-          <a:xfrm>
-            <a:off x="658368" y="3986784"/>
-            <a:ext cx="768096" cy="768096"/>
-          </a:xfrm>
-          <a:prstGeom prst="rect">
-            <a:avLst/>
-          </a:prstGeom>
-          <a:noFill/>
-        </p:spPr>
-        <p:txBody>
-          <a:bodyPr wrap="square" anchor="ctr" lIns="25400" rIns="25400" tIns="12700" bIns="12700">
-            <a:spAutoFit/>
-          </a:bodyPr>
-          <a:lstStyle/>
-          <a:p>
-            <a:pPr algn="ctr">
-              <a:lnSpc>
-                <a:spcPct val="106000"/>
-              </a:lnSpc>
-              <a:spcBef>
-                <a:spcPts val="0"/>
-              </a:spcBef>
-              <a:spcAft>
-                <a:spcPts val="400"/>
-              </a:spcAft>
-            </a:pPr>
-            <a:r>
-              <a:rPr sz="2600" b="1" i="0">
-                <a:solidFill>
-                  <a:srgbClr val="FFFFFF"/>
-                </a:solidFill>
-                <a:latin typeface="Malgun Gothic"/>
-              </a:rPr>
-              <a:t>3</a:t>
-            </a:r>
-          </a:p>
-        </p:txBody>
-      </p:sp>
-      <p:sp>
-        <p:nvSpPr>
-          <p:cNvPr id="23" name="TextBox 22"/>
-          <p:cNvSpPr txBox="1"/>
-          <p:nvPr/>
-        </p:nvSpPr>
-        <p:spPr>
-          <a:xfrm>
-            <a:off x="1600200" y="3931920"/>
-            <a:ext cx="9966960" cy="384048"/>
-          </a:xfrm>
-          <a:prstGeom prst="rect">
-            <a:avLst/>
-          </a:prstGeom>
-          <a:noFill/>
-        </p:spPr>
-        <p:txBody>
-          <a:bodyPr wrap="square" anchor="t" lIns="25400" rIns="25400" tIns="12700" bIns="12700">
-            <a:spAutoFit/>
-          </a:bodyPr>
-          <a:lstStyle/>
-          <a:p>
-            <a:pPr algn="l">
-              <a:lnSpc>
-                <a:spcPct val="106000"/>
-              </a:lnSpc>
-              <a:spcBef>
-                <a:spcPts val="0"/>
-              </a:spcBef>
-              <a:spcAft>
-                <a:spcPts val="400"/>
-              </a:spcAft>
-            </a:pPr>
-            <a:r>
-              <a:rPr sz="1550" b="1" i="0">
-                <a:solidFill>
-                  <a:srgbClr val="13335F"/>
-                </a:solidFill>
-                <a:latin typeface="Malgun Gothic"/>
-              </a:rPr>
-              <a:t>V_rot: 전역 동률 — skill은 천이 구간에만 있다</a:t>
-            </a:r>
-          </a:p>
-        </p:txBody>
-      </p:sp>
-      <p:sp>
-        <p:nvSpPr>
-          <p:cNvPr id="24" name="TextBox 23"/>
-          <p:cNvSpPr txBox="1"/>
-          <p:nvPr/>
-        </p:nvSpPr>
-        <p:spPr>
-          <a:xfrm>
-            <a:off x="1600200" y="4315968"/>
-            <a:ext cx="9966960" cy="566928"/>
-          </a:xfrm>
-          <a:prstGeom prst="rect">
-            <a:avLst/>
-          </a:prstGeom>
-          <a:noFill/>
-        </p:spPr>
-        <p:txBody>
-          <a:bodyPr wrap="square" anchor="t" lIns="25400" rIns="25400" tIns="12700" bIns="12700">
-            <a:spAutoFit/>
-          </a:bodyPr>
-          <a:lstStyle/>
-          <a:p>
-            <a:pPr algn="l">
-              <a:lnSpc>
-                <a:spcPct val="108000"/>
-              </a:lnSpc>
-              <a:spcBef>
-                <a:spcPts val="0"/>
-              </a:spcBef>
-              <a:spcAft>
-                <a:spcPts val="400"/>
-              </a:spcAft>
-            </a:pPr>
-            <a:r>
-              <a:rPr sz="1150" b="0" i="0">
-                <a:solidFill>
-                  <a:srgbClr val="222B35"/>
-                </a:solidFill>
-                <a:latin typeface="Malgun Gothic"/>
-              </a:rPr>
-              <a:t>PCHIP 대비 1/4·2/4(잡음 수준)이지만 &gt;15 ms 간극과 peak 층에서는 두 모집단 모두 이긴다. 빠른 채널을 0으로 해도 출력이 bit-identical — Tᵢ↔V_rot 정보 비대칭은 물리로 예측되고 절제로 확인됐다.</a:t>
-            </a:r>
-          </a:p>
-        </p:txBody>
-      </p:sp>
-      <p:sp>
-        <p:nvSpPr>
-          <p:cNvPr id="25" name="Rounded Rectangle 24"/>
-          <p:cNvSpPr/>
-          <p:nvPr/>
-        </p:nvSpPr>
-        <p:spPr>
-          <a:xfrm>
-            <a:off x="548640" y="5038344"/>
-            <a:ext cx="11155680" cy="1078992"/>
-          </a:xfrm>
-          <a:prstGeom prst="roundRect">
-            <a:avLst/>
-          </a:prstGeom>
-          <a:solidFill>
-            <a:srgbClr val="F4F7FA"/>
-          </a:solidFill>
-          <a:ln>
-            <a:noFill/>
-          </a:ln>
-          <a:effectLst/>
-        </p:spPr>
-        <p:style>
-          <a:lnRef idx="1">
-            <a:schemeClr val="accent1"/>
-          </a:lnRef>
-          <a:fillRef idx="3">
-            <a:schemeClr val="accent1"/>
-          </a:fillRef>
-          <a:effectRef idx="2">
-            <a:schemeClr val="accent1"/>
-          </a:effectRef>
-          <a:fontRef idx="minor">
-            <a:schemeClr val="lt1"/>
-          </a:fontRef>
-        </p:style>
-        <p:txBody>
-          <a:bodyPr rtlCol="0" anchor="ctr"/>
-          <a:lstStyle/>
-          <a:p>
-            <a:pPr algn="ctr"/>
-          </a:p>
-        </p:txBody>
-      </p:sp>
-      <p:sp>
-        <p:nvSpPr>
-          <p:cNvPr id="26" name="Rounded Rectangle 25"/>
-          <p:cNvSpPr/>
-          <p:nvPr/>
-        </p:nvSpPr>
-        <p:spPr>
-          <a:xfrm>
-            <a:off x="658368" y="5193792"/>
-            <a:ext cx="768096" cy="768096"/>
-          </a:xfrm>
-          <a:prstGeom prst="roundRect">
+            <a:off x="6217920" y="4663440"/>
+            <a:ext cx="91440" cy="1627632"/>
+          </a:xfrm>
+          <a:prstGeom prst="rect">
             <a:avLst/>
           </a:prstGeom>
           <a:solidFill>
@@ -21396,59 +21166,14 @@
       </p:sp>
       <p:sp>
         <p:nvSpPr>
-          <p:cNvPr id="27" name="TextBox 26"/>
+          <p:cNvPr id="21" name="TextBox 20"/>
           <p:cNvSpPr txBox="1"/>
           <p:nvPr/>
         </p:nvSpPr>
         <p:spPr>
           <a:xfrm>
-            <a:off x="658368" y="5193792"/>
-            <a:ext cx="768096" cy="768096"/>
-          </a:xfrm>
-          <a:prstGeom prst="rect">
-            <a:avLst/>
-          </a:prstGeom>
-          <a:noFill/>
-        </p:spPr>
-        <p:txBody>
-          <a:bodyPr wrap="square" anchor="ctr" lIns="25400" rIns="25400" tIns="12700" bIns="12700">
-            <a:spAutoFit/>
-          </a:bodyPr>
-          <a:lstStyle/>
-          <a:p>
-            <a:pPr algn="ctr">
-              <a:lnSpc>
-                <a:spcPct val="106000"/>
-              </a:lnSpc>
-              <a:spcBef>
-                <a:spcPts val="0"/>
-              </a:spcBef>
-              <a:spcAft>
-                <a:spcPts val="400"/>
-              </a:spcAft>
-            </a:pPr>
-            <a:r>
-              <a:rPr sz="2600" b="1" i="0">
-                <a:solidFill>
-                  <a:srgbClr val="FFFFFF"/>
-                </a:solidFill>
-                <a:latin typeface="Malgun Gothic"/>
-              </a:rPr>
-              <a:t>4</a:t>
-            </a:r>
-          </a:p>
-        </p:txBody>
-      </p:sp>
-      <p:sp>
-        <p:nvSpPr>
-          <p:cNvPr id="28" name="TextBox 27"/>
-          <p:cNvSpPr txBox="1"/>
-          <p:nvPr/>
-        </p:nvSpPr>
-        <p:spPr>
-          <a:xfrm>
-            <a:off x="1600200" y="5138928"/>
-            <a:ext cx="9966960" cy="384048"/>
+            <a:off x="6455664" y="4773168"/>
+            <a:ext cx="5120640" cy="365760"/>
           </a:xfrm>
           <a:prstGeom prst="rect">
             <a:avLst/>
@@ -21473,27 +21198,27 @@
               </a:spcAft>
             </a:pPr>
             <a:r>
-              <a:rPr sz="1550" b="1" i="0">
-                <a:solidFill>
-                  <a:srgbClr val="13335F"/>
-                </a:solidFill>
-                <a:latin typeface="Malgun Gothic"/>
-              </a:rPr>
-              <a:t>상한은 추정기가 아니라 정보 — 남은 레버는 데이터다</a:t>
-            </a:r>
-          </a:p>
-        </p:txBody>
-      </p:sp>
-      <p:sp>
-        <p:nvSpPr>
-          <p:cNvPr id="29" name="TextBox 28"/>
+              <a:rPr sz="1250" b="1" i="0">
+                <a:solidFill>
+                  <a:srgbClr val="E8743B"/>
+                </a:solidFill>
+                <a:latin typeface="Malgun Gothic"/>
+              </a:rPr>
+              <a:t>③ 승패 방전 — 타깃이 움직이는 방전에서 이긴다</a:t>
+            </a:r>
+          </a:p>
+        </p:txBody>
+      </p:sp>
+      <p:sp>
+        <p:nvSpPr>
+          <p:cNvPr id="22" name="TextBox 21"/>
           <p:cNvSpPr txBox="1"/>
           <p:nvPr/>
         </p:nvSpPr>
         <p:spPr>
           <a:xfrm>
-            <a:off x="1600200" y="5522976"/>
-            <a:ext cx="9966960" cy="566928"/>
+            <a:off x="6455664" y="5175504"/>
+            <a:ext cx="5102352" cy="987552"/>
           </a:xfrm>
           <a:prstGeom prst="rect">
             <a:avLst/>
@@ -21508,23 +21233,89 @@
           <a:p>
             <a:pPr algn="l">
               <a:lnSpc>
-                <a:spcPct val="108000"/>
-              </a:lnSpc>
-              <a:spcBef>
-                <a:spcPts val="0"/>
-              </a:spcBef>
-              <a:spcAft>
-                <a:spcPts val="400"/>
-              </a:spcAft>
-            </a:pPr>
-            <a:r>
-              <a:rPr sz="1150" b="0" i="0">
+                <a:spcPct val="110000"/>
+              </a:lnSpc>
+              <a:spcBef>
+                <a:spcPts val="0"/>
+              </a:spcBef>
+              <a:spcAft>
+                <a:spcPts val="300"/>
+              </a:spcAft>
+            </a:pPr>
+            <a:r>
+              <a:rPr sz="1050" b="0" i="0">
                 <a:solidFill>
                   <a:srgbClr val="222B35"/>
                 </a:solidFill>
                 <a:latin typeface="Malgun Gothic"/>
               </a:rPr>
-              <a:t>21,498 파라미터 b3k8이 컷에서 백본과 동급(+0.002)이고 폭 34k→879k는 평평(±0.01) → 크기 축은 닫혔다. 남은 셋: CES 피팅 품질 메타데이터 · 원본 kHz Mirnov · NBI 토크 채널.</a:t>
+              <a:t>방전 단위 승률은 Tᵢ 0.695, V_rot 0.481이며, V_rot는 상위 5개 방전을 빼면</a:t>
+            </a:r>
+          </a:p>
+          <a:p>
+            <a:pPr algn="l">
+              <a:lnSpc>
+                <a:spcPct val="110000"/>
+              </a:lnSpc>
+              <a:spcBef>
+                <a:spcPts val="0"/>
+              </a:spcBef>
+              <a:spcAft>
+                <a:spcPts val="300"/>
+              </a:spcAft>
+            </a:pPr>
+            <a:r>
+              <a:rPr sz="1050" b="0" i="0">
+                <a:solidFill>
+                  <a:srgbClr val="222B35"/>
+                </a:solidFill>
+                <a:latin typeface="Malgun Gothic"/>
+              </a:rPr>
+              <a:t>4 분할 전부 0 이하이다. 11개 공변량 중 ‘방전 내 타깃 산포’만 승패를 예측하였다</a:t>
+            </a:r>
+          </a:p>
+          <a:p>
+            <a:pPr algn="l">
+              <a:lnSpc>
+                <a:spcPct val="110000"/>
+              </a:lnSpc>
+              <a:spcBef>
+                <a:spcPts val="0"/>
+              </a:spcBef>
+              <a:spcAft>
+                <a:spcPts val="300"/>
+              </a:spcAft>
+            </a:pPr>
+            <a:r>
+              <a:rPr sz="1050" b="0" i="0">
+                <a:solidFill>
+                  <a:srgbClr val="222B35"/>
+                </a:solidFill>
+                <a:latin typeface="Malgun Gothic"/>
+              </a:rPr>
+              <a:t>(Tᵢ ρ +0.401, V_rot +0.281). 변동 큰 3분위에서도 Tᵢ 85%, V_rot 55%이며,</a:t>
+            </a:r>
+          </a:p>
+          <a:p>
+            <a:pPr algn="l">
+              <a:lnSpc>
+                <a:spcPct val="110000"/>
+              </a:lnSpc>
+              <a:spcBef>
+                <a:spcPts val="0"/>
+              </a:spcBef>
+              <a:spcAft>
+                <a:spcPts val="300"/>
+              </a:spcAft>
+            </a:pPr>
+            <a:r>
+              <a:rPr sz="1050" b="0" i="0">
+                <a:solidFill>
+                  <a:srgbClr val="222B35"/>
+                </a:solidFill>
+                <a:latin typeface="Malgun Gothic"/>
+              </a:rPr>
+              <a:t>잔차는 구동 변수(NBI 토크)의 부재를 가리킨다.</a:t>
             </a:r>
           </a:p>
         </p:txBody>
@@ -21719,7 +21510,7 @@
                 </a:solidFill>
                 <a:latin typeface="Malgun Gothic"/>
               </a:rPr>
-              <a:t>7. 한계 &amp; 향후</a:t>
+              <a:t>6. 결론</a:t>
             </a:r>
           </a:p>
         </p:txBody>
@@ -21741,7 +21532,7 @@
           <a:noFill/>
         </p:spPr>
         <p:txBody>
-          <a:bodyPr wrap="square" anchor="t" lIns="25400" rIns="25400" tIns="12700" bIns="12700">
+          <a:bodyPr wrap="square" anchor="ctr" lIns="25400" rIns="25400" tIns="12700" bIns="12700">
             <a:spAutoFit/>
           </a:bodyPr>
           <a:lstStyle/>
@@ -21764,7 +21555,7 @@
                 </a:solidFill>
                 <a:latin typeface="Malgun Gothic"/>
               </a:rPr>
-              <a:t>무엇을 인정하고, 다음에 무엇을 하는가</a:t>
+              <a:t>결론 (5가지)</a:t>
             </a:r>
           </a:p>
         </p:txBody>
@@ -21911,8 +21702,8 @@
         </p:nvSpPr>
         <p:spPr>
           <a:xfrm>
-            <a:off x="502920" y="1371600"/>
-            <a:ext cx="5486400" cy="3566160"/>
+            <a:off x="548640" y="1325880"/>
+            <a:ext cx="11155680" cy="932688"/>
           </a:xfrm>
           <a:prstGeom prst="roundRect">
             <a:avLst/>
@@ -21949,20 +21740,20 @@
       </p:sp>
       <p:sp>
         <p:nvSpPr>
-          <p:cNvPr id="11" name="Rectangle 10"/>
+          <p:cNvPr id="11" name="Rounded Rectangle 10"/>
           <p:cNvSpPr/>
           <p:nvPr/>
         </p:nvSpPr>
         <p:spPr>
           <a:xfrm>
-            <a:off x="502920" y="1371600"/>
-            <a:ext cx="109728" cy="3566160"/>
-          </a:xfrm>
-          <a:prstGeom prst="rect">
+            <a:off x="658368" y="1453895"/>
+            <a:ext cx="676656" cy="676656"/>
+          </a:xfrm>
+          <a:prstGeom prst="roundRect">
             <a:avLst/>
           </a:prstGeom>
           <a:solidFill>
-            <a:srgbClr val="C0392B"/>
+            <a:srgbClr val="2B6CB0"/>
           </a:solidFill>
           <a:ln>
             <a:noFill/>
@@ -21999,8 +21790,53 @@
         </p:nvSpPr>
         <p:spPr>
           <a:xfrm>
-            <a:off x="731520" y="1481328"/>
-            <a:ext cx="5029200" cy="411480"/>
+            <a:off x="658368" y="1453895"/>
+            <a:ext cx="676656" cy="676656"/>
+          </a:xfrm>
+          <a:prstGeom prst="rect">
+            <a:avLst/>
+          </a:prstGeom>
+          <a:noFill/>
+        </p:spPr>
+        <p:txBody>
+          <a:bodyPr wrap="square" anchor="ctr" lIns="25400" rIns="25400" tIns="12700" bIns="12700">
+            <a:spAutoFit/>
+          </a:bodyPr>
+          <a:lstStyle/>
+          <a:p>
+            <a:pPr algn="ctr">
+              <a:lnSpc>
+                <a:spcPct val="106000"/>
+              </a:lnSpc>
+              <a:spcBef>
+                <a:spcPts val="0"/>
+              </a:spcBef>
+              <a:spcAft>
+                <a:spcPts val="400"/>
+              </a:spcAft>
+            </a:pPr>
+            <a:r>
+              <a:rPr sz="2400" b="1" i="0">
+                <a:solidFill>
+                  <a:srgbClr val="FFFFFF"/>
+                </a:solidFill>
+                <a:latin typeface="Malgun Gothic"/>
+              </a:rPr>
+              <a:t>1</a:t>
+            </a:r>
+          </a:p>
+        </p:txBody>
+      </p:sp>
+      <p:sp>
+        <p:nvSpPr>
+          <p:cNvPr id="13" name="TextBox 12"/>
+          <p:cNvSpPr txBox="1"/>
+          <p:nvPr/>
+        </p:nvSpPr>
+        <p:spPr>
+          <a:xfrm>
+            <a:off x="1508760" y="1389888"/>
+            <a:ext cx="10058400" cy="347472"/>
           </a:xfrm>
           <a:prstGeom prst="rect">
             <a:avLst/>
@@ -22025,27 +21861,27 @@
               </a:spcAft>
             </a:pPr>
             <a:r>
-              <a:rPr sz="1500" b="1" i="0">
-                <a:solidFill>
-                  <a:srgbClr val="C0392B"/>
-                </a:solidFill>
-                <a:latin typeface="Malgun Gothic"/>
-              </a:rPr>
-              <a:t>한계 — 논문이 먼저 인정하는 것</a:t>
-            </a:r>
-          </a:p>
-        </p:txBody>
-      </p:sp>
-      <p:sp>
-        <p:nvSpPr>
-          <p:cNvPr id="13" name="TextBox 12"/>
+              <a:rPr sz="1400" b="1" i="0">
+                <a:solidFill>
+                  <a:srgbClr val="13335F"/>
+                </a:solidFill>
+                <a:latin typeface="Malgun Gothic"/>
+              </a:rPr>
+              <a:t>Tᵢ는 미래를 읽는 보간을 두 모집단 모두에서 유의하게 능가하였다</a:t>
+            </a:r>
+          </a:p>
+        </p:txBody>
+      </p:sp>
+      <p:sp>
+        <p:nvSpPr>
+          <p:cNvPr id="14" name="TextBox 13"/>
           <p:cNvSpPr txBox="1"/>
           <p:nvPr/>
         </p:nvSpPr>
         <p:spPr>
           <a:xfrm>
-            <a:off x="731520" y="1938528"/>
-            <a:ext cx="5074920" cy="2834640"/>
+            <a:off x="1508760" y="1728216"/>
+            <a:ext cx="10058400" cy="512064"/>
           </a:xfrm>
           <a:prstGeom prst="rect">
             <a:avLst/>
@@ -22060,213 +21896,37 @@
           <a:p>
             <a:pPr algn="l">
               <a:lnSpc>
-                <a:spcPct val="108000"/>
-              </a:lnSpc>
-              <a:spcBef>
-                <a:spcPts val="0"/>
-              </a:spcBef>
-              <a:spcAft>
-                <a:spcPts val="700"/>
-              </a:spcAft>
-            </a:pPr>
-            <a:r>
-              <a:rPr sz="1200" b="1" i="0">
-                <a:solidFill>
-                  <a:srgbClr val="13335F"/>
-                </a:solidFill>
-                <a:latin typeface="Malgun Gothic"/>
-              </a:rPr>
-              <a:t>●  검정력: test 방전 96(Tᵢ) / 60–66(V_rot)이 모든 유의성의 구속조건</a:t>
-            </a:r>
-          </a:p>
-          <a:p>
-            <a:pPr algn="l" lvl="1">
-              <a:lnSpc>
-                <a:spcPct val="108000"/>
-              </a:lnSpc>
-              <a:spcBef>
-                <a:spcPts val="0"/>
-              </a:spcBef>
-              <a:spcAft>
-                <a:spcPts val="700"/>
-              </a:spcAft>
-            </a:pPr>
-            <a:r>
-              <a:rPr sz="1000" b="0" i="0">
+                <a:spcPct val="106000"/>
+              </a:lnSpc>
+              <a:spcBef>
+                <a:spcPts val="0"/>
+              </a:spcBef>
+              <a:spcAft>
+                <a:spcPts val="400"/>
+              </a:spcAft>
+            </a:pPr>
+            <a:r>
+              <a:rPr sz="1050" b="0" i="0">
                 <a:solidFill>
                   <a:srgbClr val="222B35"/>
                 </a:solidFill>
                 <a:latin typeface="Malgun Gothic"/>
               </a:rPr>
-              <a:t>–  포함 모집단에선 ≈1% 행이 SSE의 70–83%를 담는다</a:t>
-            </a:r>
-          </a:p>
-          <a:p>
-            <a:pPr algn="l">
-              <a:lnSpc>
-                <a:spcPct val="108000"/>
-              </a:lnSpc>
-              <a:spcBef>
-                <a:spcPts val="0"/>
-              </a:spcBef>
-              <a:spcAft>
-                <a:spcPts val="700"/>
-              </a:spcAft>
-            </a:pPr>
-            <a:r>
-              <a:rPr sz="1200" b="1" i="0">
-                <a:solidFill>
-                  <a:srgbClr val="13335F"/>
-                </a:solidFill>
-                <a:latin typeface="Malgun Gothic"/>
-              </a:rPr>
-              <a:t>●  MNAR 낙관: 재가중 도달은 Tᵢ 54–68% · V_rot 4–6%뿐</a:t>
-            </a:r>
-          </a:p>
-          <a:p>
-            <a:pPr algn="l">
-              <a:lnSpc>
-                <a:spcPct val="108000"/>
-              </a:lnSpc>
-              <a:spcBef>
-                <a:spcPts val="0"/>
-              </a:spcBef>
-              <a:spcAft>
-                <a:spcPts val="700"/>
-              </a:spcAft>
-            </a:pPr>
-            <a:r>
-              <a:rPr sz="1200" b="1" i="0">
-                <a:solidFill>
-                  <a:srgbClr val="13335F"/>
-                </a:solidFill>
-                <a:latin typeface="Malgun Gothic"/>
-              </a:rPr>
-              <a:t>●  오프라인 주장의 상한은 GP 동률 (1/8 유의)</a:t>
-            </a:r>
-          </a:p>
-          <a:p>
-            <a:pPr algn="l">
-              <a:lnSpc>
-                <a:spcPct val="108000"/>
-              </a:lnSpc>
-              <a:spcBef>
-                <a:spcPts val="0"/>
-              </a:spcBef>
-              <a:spcAft>
-                <a:spcPts val="700"/>
-              </a:spcAft>
-            </a:pPr>
-            <a:r>
-              <a:rPr sz="1200" b="1" i="0">
-                <a:solidFill>
-                  <a:srgbClr val="13335F"/>
-                </a:solidFill>
-                <a:latin typeface="Malgun Gothic"/>
-              </a:rPr>
-              <a:t>●  값 컷은 일방향 프록시 — V_rot 스파이크는 남는다</a:t>
-            </a:r>
-          </a:p>
-          <a:p>
-            <a:pPr algn="l">
-              <a:lnSpc>
-                <a:spcPct val="108000"/>
-              </a:lnSpc>
-              <a:spcBef>
-                <a:spcPts val="0"/>
-              </a:spcBef>
-              <a:spcAft>
-                <a:spcPts val="700"/>
-              </a:spcAft>
-            </a:pPr>
-            <a:r>
-              <a:rPr sz="1200" b="1" i="0">
-                <a:solidFill>
-                  <a:srgbClr val="13335F"/>
-                </a:solidFill>
-                <a:latin typeface="Malgun Gothic"/>
-              </a:rPr>
-              <a:t>●  캠페인은 한 시간 블록 위 초기화 4개 · 컷 run 2/4 상한 종료</a:t>
-            </a:r>
-          </a:p>
-          <a:p>
-            <a:pPr algn="l">
-              <a:lnSpc>
-                <a:spcPct val="108000"/>
-              </a:lnSpc>
-              <a:spcBef>
-                <a:spcPts val="0"/>
-              </a:spcBef>
-              <a:spcAft>
-                <a:spcPts val="700"/>
-              </a:spcAft>
-            </a:pPr>
-            <a:r>
-              <a:rPr sz="1200" b="1" i="0">
-                <a:solidFill>
-                  <a:srgbClr val="13335F"/>
-                </a:solidFill>
-                <a:latin typeface="Malgun Gothic"/>
-              </a:rPr>
-              <a:t>●  conformal은 marginal coverage · 지연은 네트워크만 측정</a:t>
-            </a:r>
-          </a:p>
-          <a:p>
-            <a:pPr algn="l" lvl="1">
-              <a:lnSpc>
-                <a:spcPct val="108000"/>
-              </a:lnSpc>
-              <a:spcBef>
-                <a:spcPts val="0"/>
-              </a:spcBef>
-              <a:spcAft>
-                <a:spcPts val="700"/>
-              </a:spcAft>
-            </a:pPr>
-            <a:r>
-              <a:rPr sz="1000" b="0" i="0">
-                <a:solidFill>
-                  <a:srgbClr val="222B35"/>
-                </a:solidFill>
-                <a:latin typeface="Malgun Gothic"/>
-              </a:rPr>
-              <a:t>–  단일 장치 · 두 순환 계열 · 지표 비대칭</a:t>
-            </a:r>
-          </a:p>
-          <a:p>
-            <a:pPr algn="l">
-              <a:lnSpc>
-                <a:spcPct val="108000"/>
-              </a:lnSpc>
-              <a:spcBef>
-                <a:spcPts val="0"/>
-              </a:spcBef>
-              <a:spcAft>
-                <a:spcPts val="700"/>
-              </a:spcAft>
-            </a:pPr>
-            <a:r>
-              <a:rPr sz="1200" b="1" i="0">
-                <a:solidFill>
-                  <a:srgbClr val="13335F"/>
-                </a:solidFill>
-                <a:latin typeface="Malgun Gothic"/>
-              </a:rPr>
-              <a:t>●  범위: 페데스탈 상단 프레이밍 — 이벤트-위상 분석은 후속</a:t>
-            </a:r>
-          </a:p>
-        </p:txBody>
-      </p:sp>
-      <p:sp>
-        <p:nvSpPr>
-          <p:cNvPr id="14" name="Rounded Rectangle 13"/>
+              <a:t>skill_vs_pchip 컷 +0.17~+0.26, 포함 +0.23~+0.32로 4개 독립 분할 전부 shot 군집 95% CI가 0을 제외하였다(4/4+4/4). 인과 GP는 8/8 셀에서 이겼고, 최강 오프라인 평활기(GP)와는 동률이며 이를 상한으로 보고한다.</a:t>
+            </a:r>
+          </a:p>
+        </p:txBody>
+      </p:sp>
+      <p:sp>
+        <p:nvSpPr>
+          <p:cNvPr id="15" name="Rounded Rectangle 14"/>
           <p:cNvSpPr/>
           <p:nvPr/>
         </p:nvSpPr>
         <p:spPr>
           <a:xfrm>
-            <a:off x="6217920" y="1371600"/>
-            <a:ext cx="5486400" cy="3566160"/>
+            <a:off x="548640" y="2331720"/>
+            <a:ext cx="11155680" cy="932688"/>
           </a:xfrm>
           <a:prstGeom prst="roundRect">
             <a:avLst/>
@@ -22303,16 +21963,239 @@
       </p:sp>
       <p:sp>
         <p:nvSpPr>
-          <p:cNvPr id="15" name="Rectangle 14"/>
+          <p:cNvPr id="16" name="Rounded Rectangle 15"/>
           <p:cNvSpPr/>
           <p:nvPr/>
         </p:nvSpPr>
         <p:spPr>
           <a:xfrm>
-            <a:off x="6217920" y="1371600"/>
-            <a:ext cx="109728" cy="3566160"/>
-          </a:xfrm>
-          <a:prstGeom prst="rect">
+            <a:off x="658368" y="2459736"/>
+            <a:ext cx="676656" cy="676656"/>
+          </a:xfrm>
+          <a:prstGeom prst="roundRect">
+            <a:avLst/>
+          </a:prstGeom>
+          <a:solidFill>
+            <a:srgbClr val="2E9E5B"/>
+          </a:solidFill>
+          <a:ln>
+            <a:noFill/>
+          </a:ln>
+          <a:effectLst/>
+        </p:spPr>
+        <p:style>
+          <a:lnRef idx="1">
+            <a:schemeClr val="accent1"/>
+          </a:lnRef>
+          <a:fillRef idx="3">
+            <a:schemeClr val="accent1"/>
+          </a:fillRef>
+          <a:effectRef idx="2">
+            <a:schemeClr val="accent1"/>
+          </a:effectRef>
+          <a:fontRef idx="minor">
+            <a:schemeClr val="lt1"/>
+          </a:fontRef>
+        </p:style>
+        <p:txBody>
+          <a:bodyPr rtlCol="0" anchor="ctr"/>
+          <a:lstStyle/>
+          <a:p>
+            <a:pPr algn="ctr"/>
+          </a:p>
+        </p:txBody>
+      </p:sp>
+      <p:sp>
+        <p:nvSpPr>
+          <p:cNvPr id="17" name="TextBox 16"/>
+          <p:cNvSpPr txBox="1"/>
+          <p:nvPr/>
+        </p:nvSpPr>
+        <p:spPr>
+          <a:xfrm>
+            <a:off x="658368" y="2459736"/>
+            <a:ext cx="676656" cy="676656"/>
+          </a:xfrm>
+          <a:prstGeom prst="rect">
+            <a:avLst/>
+          </a:prstGeom>
+          <a:noFill/>
+        </p:spPr>
+        <p:txBody>
+          <a:bodyPr wrap="square" anchor="ctr" lIns="25400" rIns="25400" tIns="12700" bIns="12700">
+            <a:spAutoFit/>
+          </a:bodyPr>
+          <a:lstStyle/>
+          <a:p>
+            <a:pPr algn="ctr">
+              <a:lnSpc>
+                <a:spcPct val="106000"/>
+              </a:lnSpc>
+              <a:spcBef>
+                <a:spcPts val="0"/>
+              </a:spcBef>
+              <a:spcAft>
+                <a:spcPts val="400"/>
+              </a:spcAft>
+            </a:pPr>
+            <a:r>
+              <a:rPr sz="2400" b="1" i="0">
+                <a:solidFill>
+                  <a:srgbClr val="FFFFFF"/>
+                </a:solidFill>
+                <a:latin typeface="Malgun Gothic"/>
+              </a:rPr>
+              <a:t>2</a:t>
+            </a:r>
+          </a:p>
+        </p:txBody>
+      </p:sp>
+      <p:sp>
+        <p:nvSpPr>
+          <p:cNvPr id="18" name="TextBox 17"/>
+          <p:cNvSpPr txBox="1"/>
+          <p:nvPr/>
+        </p:nvSpPr>
+        <p:spPr>
+          <a:xfrm>
+            <a:off x="1508760" y="2395727"/>
+            <a:ext cx="10058400" cy="347472"/>
+          </a:xfrm>
+          <a:prstGeom prst="rect">
+            <a:avLst/>
+          </a:prstGeom>
+          <a:noFill/>
+        </p:spPr>
+        <p:txBody>
+          <a:bodyPr wrap="square" anchor="t" lIns="25400" rIns="25400" tIns="12700" bIns="12700">
+            <a:spAutoFit/>
+          </a:bodyPr>
+          <a:lstStyle/>
+          <a:p>
+            <a:pPr algn="l">
+              <a:lnSpc>
+                <a:spcPct val="106000"/>
+              </a:lnSpc>
+              <a:spcBef>
+                <a:spcPts val="0"/>
+              </a:spcBef>
+              <a:spcAft>
+                <a:spcPts val="400"/>
+              </a:spcAft>
+            </a:pPr>
+            <a:r>
+              <a:rPr sz="1400" b="1" i="0">
+                <a:solidFill>
+                  <a:srgbClr val="13335F"/>
+                </a:solidFill>
+                <a:latin typeface="Malgun Gothic"/>
+              </a:rPr>
+              <a:t>배치 주장은 두 스트레스를 견뎠다</a:t>
+            </a:r>
+          </a:p>
+        </p:txBody>
+      </p:sp>
+      <p:sp>
+        <p:nvSpPr>
+          <p:cNvPr id="19" name="TextBox 18"/>
+          <p:cNvSpPr txBox="1"/>
+          <p:nvPr/>
+        </p:nvSpPr>
+        <p:spPr>
+          <a:xfrm>
+            <a:off x="1508760" y="2734056"/>
+            <a:ext cx="10058400" cy="512064"/>
+          </a:xfrm>
+          <a:prstGeom prst="rect">
+            <a:avLst/>
+          </a:prstGeom>
+          <a:noFill/>
+        </p:spPr>
+        <p:txBody>
+          <a:bodyPr wrap="square" anchor="t" lIns="25400" rIns="25400" tIns="12700" bIns="12700">
+            <a:spAutoFit/>
+          </a:bodyPr>
+          <a:lstStyle/>
+          <a:p>
+            <a:pPr algn="l">
+              <a:lnSpc>
+                <a:spcPct val="106000"/>
+              </a:lnSpc>
+              <a:spcBef>
+                <a:spcPts val="0"/>
+              </a:spcBef>
+              <a:spcAft>
+                <a:spcPts val="400"/>
+              </a:spcAft>
+            </a:pPr>
+            <a:r>
+              <a:rPr sz="1050" b="0" i="0">
+                <a:solidFill>
+                  <a:srgbClr val="222B35"/>
+                </a:solidFill>
+                <a:latin typeface="Malgun Gothic"/>
+              </a:rPr>
+              <a:t>실제 결측 in-domain 시점에서 인과 방법 대비 8/8 생존, 캠페인 경계 너머 PCHIP·인과 GP 대비 4/4+4/4이다. 대체된 윈도 대조군은 오프라인 우위를 잃었고(2/4·0/4) 그 원인은 드리프트로 측정되었다.</a:t>
+            </a:r>
+          </a:p>
+        </p:txBody>
+      </p:sp>
+      <p:sp>
+        <p:nvSpPr>
+          <p:cNvPr id="20" name="Rounded Rectangle 19"/>
+          <p:cNvSpPr/>
+          <p:nvPr/>
+        </p:nvSpPr>
+        <p:spPr>
+          <a:xfrm>
+            <a:off x="548640" y="3337560"/>
+            <a:ext cx="11155680" cy="932688"/>
+          </a:xfrm>
+          <a:prstGeom prst="roundRect">
+            <a:avLst/>
+          </a:prstGeom>
+          <a:solidFill>
+            <a:srgbClr val="F4F7FA"/>
+          </a:solidFill>
+          <a:ln>
+            <a:noFill/>
+          </a:ln>
+          <a:effectLst/>
+        </p:spPr>
+        <p:style>
+          <a:lnRef idx="1">
+            <a:schemeClr val="accent1"/>
+          </a:lnRef>
+          <a:fillRef idx="3">
+            <a:schemeClr val="accent1"/>
+          </a:fillRef>
+          <a:effectRef idx="2">
+            <a:schemeClr val="accent1"/>
+          </a:effectRef>
+          <a:fontRef idx="minor">
+            <a:schemeClr val="lt1"/>
+          </a:fontRef>
+        </p:style>
+        <p:txBody>
+          <a:bodyPr rtlCol="0" anchor="ctr"/>
+          <a:lstStyle/>
+          <a:p>
+            <a:pPr algn="ctr"/>
+          </a:p>
+        </p:txBody>
+      </p:sp>
+      <p:sp>
+        <p:nvSpPr>
+          <p:cNvPr id="21" name="Rounded Rectangle 20"/>
+          <p:cNvSpPr/>
+          <p:nvPr/>
+        </p:nvSpPr>
+        <p:spPr>
+          <a:xfrm>
+            <a:off x="658368" y="3465576"/>
+            <a:ext cx="676656" cy="676656"/>
+          </a:xfrm>
+          <a:prstGeom prst="roundRect">
             <a:avLst/>
           </a:prstGeom>
           <a:solidFill>
@@ -22347,14 +22230,59 @@
       </p:sp>
       <p:sp>
         <p:nvSpPr>
-          <p:cNvPr id="16" name="TextBox 15"/>
+          <p:cNvPr id="22" name="TextBox 21"/>
           <p:cNvSpPr txBox="1"/>
           <p:nvPr/>
         </p:nvSpPr>
         <p:spPr>
           <a:xfrm>
-            <a:off x="6446520" y="1481328"/>
-            <a:ext cx="5029200" cy="411480"/>
+            <a:off x="658368" y="3465576"/>
+            <a:ext cx="676656" cy="676656"/>
+          </a:xfrm>
+          <a:prstGeom prst="rect">
+            <a:avLst/>
+          </a:prstGeom>
+          <a:noFill/>
+        </p:spPr>
+        <p:txBody>
+          <a:bodyPr wrap="square" anchor="ctr" lIns="25400" rIns="25400" tIns="12700" bIns="12700">
+            <a:spAutoFit/>
+          </a:bodyPr>
+          <a:lstStyle/>
+          <a:p>
+            <a:pPr algn="ctr">
+              <a:lnSpc>
+                <a:spcPct val="106000"/>
+              </a:lnSpc>
+              <a:spcBef>
+                <a:spcPts val="0"/>
+              </a:spcBef>
+              <a:spcAft>
+                <a:spcPts val="400"/>
+              </a:spcAft>
+            </a:pPr>
+            <a:r>
+              <a:rPr sz="2400" b="1" i="0">
+                <a:solidFill>
+                  <a:srgbClr val="FFFFFF"/>
+                </a:solidFill>
+                <a:latin typeface="Malgun Gothic"/>
+              </a:rPr>
+              <a:t>3</a:t>
+            </a:r>
+          </a:p>
+        </p:txBody>
+      </p:sp>
+      <p:sp>
+        <p:nvSpPr>
+          <p:cNvPr id="23" name="TextBox 22"/>
+          <p:cNvSpPr txBox="1"/>
+          <p:nvPr/>
+        </p:nvSpPr>
+        <p:spPr>
+          <a:xfrm>
+            <a:off x="1508760" y="3401568"/>
+            <a:ext cx="10058400" cy="347472"/>
           </a:xfrm>
           <a:prstGeom prst="rect">
             <a:avLst/>
@@ -22379,27 +22307,27 @@
               </a:spcAft>
             </a:pPr>
             <a:r>
-              <a:rPr sz="1500" b="1" i="0">
-                <a:solidFill>
-                  <a:srgbClr val="1B9E8A"/>
-                </a:solidFill>
-                <a:latin typeface="Malgun Gothic"/>
-              </a:rPr>
-              <a:t>향후 — 남은 레버는 전부 데이터다</a:t>
-            </a:r>
-          </a:p>
-        </p:txBody>
-      </p:sp>
-      <p:sp>
-        <p:nvSpPr>
-          <p:cNvPr id="17" name="TextBox 16"/>
+              <a:rPr sz="1400" b="1" i="0">
+                <a:solidFill>
+                  <a:srgbClr val="13335F"/>
+                </a:solidFill>
+                <a:latin typeface="Malgun Gothic"/>
+              </a:rPr>
+              <a:t>약 50 ms의 연속 인과 문맥이 우위를 전형적으로 만들며, 어떻게 넘느냐는 비용을 정한다</a:t>
+            </a:r>
+          </a:p>
+        </p:txBody>
+      </p:sp>
+      <p:sp>
+        <p:nvSpPr>
+          <p:cNvPr id="24" name="TextBox 23"/>
           <p:cNvSpPr txBox="1"/>
           <p:nvPr/>
         </p:nvSpPr>
         <p:spPr>
           <a:xfrm>
-            <a:off x="6446520" y="1938528"/>
-            <a:ext cx="5074920" cy="2834640"/>
+            <a:off x="1508760" y="3739896"/>
+            <a:ext cx="10058400" cy="512064"/>
           </a:xfrm>
           <a:prstGeom prst="rect">
             <a:avLst/>
@@ -22414,241 +22342,43 @@
           <a:p>
             <a:pPr algn="l">
               <a:lnSpc>
-                <a:spcPct val="108000"/>
-              </a:lnSpc>
-              <a:spcBef>
-                <a:spcPts val="0"/>
-              </a:spcBef>
-              <a:spcAft>
-                <a:spcPts val="700"/>
-              </a:spcAft>
-            </a:pPr>
-            <a:r>
-              <a:rPr sz="1200" b="1" i="0">
-                <a:solidFill>
-                  <a:srgbClr val="13335F"/>
-                </a:solidFill>
-                <a:latin typeface="Malgun Gothic"/>
-              </a:rPr>
-              <a:t>●  음성 결과는 그것을 뒤집을 측정을 지목할 때만 결론이 된다</a:t>
-            </a:r>
-          </a:p>
-          <a:p>
-            <a:pPr algn="l">
-              <a:lnSpc>
-                <a:spcPct val="108000"/>
-              </a:lnSpc>
-              <a:spcBef>
-                <a:spcPts val="0"/>
-              </a:spcBef>
-              <a:spcAft>
-                <a:spcPts val="700"/>
-              </a:spcAft>
-            </a:pPr>
-            <a:r>
-              <a:rPr sz="1200" b="1" i="0">
-                <a:solidFill>
-                  <a:srgbClr val="E8743B"/>
-                </a:solidFill>
-                <a:latin typeface="Malgun Gothic"/>
-              </a:rPr>
-              <a:t>●  ① CES 피팅 품질 메타데이터 (χ² · 신호 수준)</a:t>
-            </a:r>
-          </a:p>
-          <a:p>
-            <a:pPr algn="l" lvl="1">
-              <a:lnSpc>
-                <a:spcPct val="108000"/>
-              </a:lnSpc>
-              <a:spcBef>
-                <a:spcPts val="0"/>
-              </a:spcBef>
-              <a:spcAft>
-                <a:spcPts val="700"/>
-              </a:spcAft>
-            </a:pPr>
-            <a:r>
-              <a:rPr sz="1000" b="0" i="0">
+                <a:spcPct val="106000"/>
+              </a:lnSpc>
+              <a:spcBef>
+                <a:spcPts val="0"/>
+              </a:spcBef>
+              <a:spcAft>
+                <a:spcPts val="400"/>
+              </a:spcAft>
+            </a:pPr>
+            <a:r>
+              <a:rPr sz="1050" b="0" i="0">
                 <a:solidFill>
                   <a:srgbClr val="222B35"/>
                 </a:solidFill>
                 <a:latin typeface="Malgun Gothic"/>
               </a:rPr>
-              <a:t>–  값 컷을 품질 컷으로 대체하면 두 모집단이 하나로 합쳐진다</a:t>
-            </a:r>
-          </a:p>
-          <a:p>
-            <a:pPr algn="l">
-              <a:lnSpc>
-                <a:spcPct val="108000"/>
-              </a:lnSpc>
-              <a:spcBef>
-                <a:spcPts val="0"/>
-              </a:spcBef>
-              <a:spcAft>
-                <a:spcPts val="700"/>
-              </a:spcAft>
-            </a:pPr>
-            <a:r>
-              <a:rPr sz="1200" b="1" i="0">
-                <a:solidFill>
-                  <a:srgbClr val="E8743B"/>
-                </a:solidFill>
-                <a:latin typeface="Malgun Gothic"/>
-              </a:rPr>
-              <a:t>●  ② 원본 kHz Mirnov 특징 — V_rot 최상위 레버</a:t>
-            </a:r>
-          </a:p>
-          <a:p>
-            <a:pPr algn="l" lvl="1">
-              <a:lnSpc>
-                <a:spcPct val="108000"/>
-              </a:lnSpc>
-              <a:spcBef>
-                <a:spcPts val="0"/>
-              </a:spcBef>
-              <a:spcAft>
-                <a:spcPts val="700"/>
-              </a:spcAft>
-            </a:pPr>
-            <a:r>
-              <a:rPr sz="1000" b="0" i="0">
-                <a:solidFill>
-                  <a:srgbClr val="222B35"/>
-                </a:solidFill>
-                <a:latin typeface="Malgun Gothic"/>
-              </a:rPr>
-              <a:t>–  윈도 RMS · 대역 파워 · 모드 수 · 모드 회전 주파수</a:t>
-            </a:r>
-          </a:p>
-          <a:p>
-            <a:pPr algn="l" lvl="1">
-              <a:lnSpc>
-                <a:spcPct val="108000"/>
-              </a:lnSpc>
-              <a:spcBef>
-                <a:spcPts val="0"/>
-              </a:spcBef>
-              <a:spcAft>
-                <a:spcPts val="700"/>
-              </a:spcAft>
-            </a:pPr>
-            <a:r>
-              <a:rPr sz="1000" b="0" i="0">
-                <a:solidFill>
-                  <a:srgbClr val="222B35"/>
-                </a:solidFill>
-                <a:latin typeface="Malgun Gothic"/>
-              </a:rPr>
-              <a:t>–  lag-1 자기상관 BES +0.568 / ECEI +0.572 vs Mirnov -0.009</a:t>
-            </a:r>
-          </a:p>
-          <a:p>
-            <a:pPr algn="l" lvl="1">
-              <a:lnSpc>
-                <a:spcPct val="108000"/>
-              </a:lnSpc>
-              <a:spcBef>
-                <a:spcPts val="0"/>
-              </a:spcBef>
-              <a:spcAft>
-                <a:spcPts val="700"/>
-              </a:spcAft>
-            </a:pPr>
-            <a:r>
-              <a:rPr sz="1000" b="0" i="0">
-                <a:solidFill>
-                  <a:srgbClr val="222B35"/>
-                </a:solidFill>
-                <a:latin typeface="Malgun Gothic"/>
-              </a:rPr>
-              <a:t>–  아카이브 데이터로 검정 가능 (파일럿→확대 사전등록)</a:t>
-            </a:r>
-          </a:p>
-          <a:p>
-            <a:pPr algn="l">
-              <a:lnSpc>
-                <a:spcPct val="108000"/>
-              </a:lnSpc>
-              <a:spcBef>
-                <a:spcPts val="0"/>
-              </a:spcBef>
-              <a:spcAft>
-                <a:spcPts val="700"/>
-              </a:spcAft>
-            </a:pPr>
-            <a:r>
-              <a:rPr sz="1200" b="1" i="0">
-                <a:solidFill>
-                  <a:srgbClr val="E8743B"/>
-                </a:solidFill>
-                <a:latin typeface="Malgun Gothic"/>
-              </a:rPr>
-              <a:t>●  ③ NBI 토크 채널 확보 — 회전의 원인 변수</a:t>
-            </a:r>
-          </a:p>
-          <a:p>
-            <a:pPr algn="l" lvl="1">
-              <a:lnSpc>
-                <a:spcPct val="108000"/>
-              </a:lnSpc>
-              <a:spcBef>
-                <a:spcPts val="0"/>
-              </a:spcBef>
-              <a:spcAft>
-                <a:spcPts val="700"/>
-              </a:spcAft>
-            </a:pPr>
-            <a:r>
-              <a:rPr sz="1000" b="0" i="0">
-                <a:solidFill>
-                  <a:srgbClr val="222B35"/>
-                </a:solidFill>
-                <a:latin typeface="Malgun Gothic"/>
-              </a:rPr>
-              <a:t>–  Tₑ~Tᵢ r = +0.353 vs Tₑ~V_rot r = +0.024 → power ≠ torque</a:t>
-            </a:r>
-          </a:p>
-          <a:p>
-            <a:pPr algn="l">
-              <a:lnSpc>
-                <a:spcPct val="108000"/>
-              </a:lnSpc>
-              <a:spcBef>
-                <a:spcPts val="0"/>
-              </a:spcBef>
-              <a:spcAft>
-                <a:spcPts val="700"/>
-              </a:spcAft>
-            </a:pPr>
-            <a:r>
-              <a:rPr sz="1200" b="1" i="0">
-                <a:solidFill>
-                  <a:srgbClr val="5B6670"/>
-                </a:solidFill>
-                <a:latin typeface="Malgun Gothic"/>
-              </a:rPr>
-              <a:t>●  크기 축은 닫혔다: 21k = 백본(컷) · 폭 26× 평평</a:t>
-            </a:r>
-          </a:p>
-        </p:txBody>
-      </p:sp>
-      <p:sp>
-        <p:nvSpPr>
-          <p:cNvPr id="18" name="Rounded Rectangle 17"/>
+              <a:t>20 ms에서도 인과 GP를 이기지만 승리 방전 비율은 0.52이며 50–70 ms에서 0.66으로 평평해진다. 세 계열은 같은 문맥에서 0.023 이내로 동률이므로 아키텍처는 비용(연산자 수: 순환 O(1), 합성곱 O(log R), attention 4.3배 상수)으로 선택한다.</a:t>
+            </a:r>
+          </a:p>
+        </p:txBody>
+      </p:sp>
+      <p:sp>
+        <p:nvSpPr>
+          <p:cNvPr id="25" name="Rounded Rectangle 24"/>
           <p:cNvSpPr/>
           <p:nvPr/>
         </p:nvSpPr>
         <p:spPr>
           <a:xfrm>
-            <a:off x="502920" y="5084064"/>
-            <a:ext cx="11201400" cy="859536"/>
+            <a:off x="548640" y="4343400"/>
+            <a:ext cx="11155680" cy="932688"/>
           </a:xfrm>
           <a:prstGeom prst="roundRect">
             <a:avLst/>
           </a:prstGeom>
           <a:solidFill>
-            <a:srgbClr val="13335F"/>
+            <a:srgbClr val="F4F7FA"/>
           </a:solidFill>
           <a:ln>
             <a:noFill/>
@@ -22679,14 +22409,103 @@
       </p:sp>
       <p:sp>
         <p:nvSpPr>
-          <p:cNvPr id="19" name="TextBox 18"/>
+          <p:cNvPr id="26" name="Rounded Rectangle 25"/>
+          <p:cNvSpPr/>
+          <p:nvPr/>
+        </p:nvSpPr>
+        <p:spPr>
+          <a:xfrm>
+            <a:off x="658368" y="4471416"/>
+            <a:ext cx="676656" cy="676656"/>
+          </a:xfrm>
+          <a:prstGeom prst="roundRect">
+            <a:avLst/>
+          </a:prstGeom>
+          <a:solidFill>
+            <a:srgbClr val="5B6670"/>
+          </a:solidFill>
+          <a:ln>
+            <a:noFill/>
+          </a:ln>
+          <a:effectLst/>
+        </p:spPr>
+        <p:style>
+          <a:lnRef idx="1">
+            <a:schemeClr val="accent1"/>
+          </a:lnRef>
+          <a:fillRef idx="3">
+            <a:schemeClr val="accent1"/>
+          </a:fillRef>
+          <a:effectRef idx="2">
+            <a:schemeClr val="accent1"/>
+          </a:effectRef>
+          <a:fontRef idx="minor">
+            <a:schemeClr val="lt1"/>
+          </a:fontRef>
+        </p:style>
+        <p:txBody>
+          <a:bodyPr rtlCol="0" anchor="ctr"/>
+          <a:lstStyle/>
+          <a:p>
+            <a:pPr algn="ctr"/>
+          </a:p>
+        </p:txBody>
+      </p:sp>
+      <p:sp>
+        <p:nvSpPr>
+          <p:cNvPr id="27" name="TextBox 26"/>
           <p:cNvSpPr txBox="1"/>
           <p:nvPr/>
         </p:nvSpPr>
         <p:spPr>
           <a:xfrm>
-            <a:off x="777240" y="5166360"/>
-            <a:ext cx="10698480" cy="749808"/>
+            <a:off x="658368" y="4471416"/>
+            <a:ext cx="676656" cy="676656"/>
+          </a:xfrm>
+          <a:prstGeom prst="rect">
+            <a:avLst/>
+          </a:prstGeom>
+          <a:noFill/>
+        </p:spPr>
+        <p:txBody>
+          <a:bodyPr wrap="square" anchor="ctr" lIns="25400" rIns="25400" tIns="12700" bIns="12700">
+            <a:spAutoFit/>
+          </a:bodyPr>
+          <a:lstStyle/>
+          <a:p>
+            <a:pPr algn="ctr">
+              <a:lnSpc>
+                <a:spcPct val="106000"/>
+              </a:lnSpc>
+              <a:spcBef>
+                <a:spcPts val="0"/>
+              </a:spcBef>
+              <a:spcAft>
+                <a:spcPts val="400"/>
+              </a:spcAft>
+            </a:pPr>
+            <a:r>
+              <a:rPr sz="2400" b="1" i="0">
+                <a:solidFill>
+                  <a:srgbClr val="FFFFFF"/>
+                </a:solidFill>
+                <a:latin typeface="Malgun Gothic"/>
+              </a:rPr>
+              <a:t>4</a:t>
+            </a:r>
+          </a:p>
+        </p:txBody>
+      </p:sp>
+      <p:sp>
+        <p:nvSpPr>
+          <p:cNvPr id="28" name="TextBox 27"/>
+          <p:cNvSpPr txBox="1"/>
+          <p:nvPr/>
+        </p:nvSpPr>
+        <p:spPr>
+          <a:xfrm>
+            <a:off x="1508760" y="4407408"/>
+            <a:ext cx="10058400" cy="347472"/>
           </a:xfrm>
           <a:prstGeom prst="rect">
             <a:avLst/>
@@ -22701,45 +22520,291 @@
           <a:p>
             <a:pPr algn="l">
               <a:lnSpc>
-                <a:spcPct val="114000"/>
-              </a:lnSpc>
-              <a:spcBef>
-                <a:spcPts val="0"/>
-              </a:spcBef>
-              <a:spcAft>
-                <a:spcPts val="200"/>
-              </a:spcAft>
-            </a:pPr>
-            <a:r>
-              <a:rPr sz="1250" b="1" i="0">
-                <a:solidFill>
-                  <a:srgbClr val="E8743B"/>
-                </a:solidFill>
-                <a:latin typeface="Malgun Gothic"/>
-              </a:rPr>
-              <a:t>결정 기록 (2026-08-16)</a:t>
-            </a:r>
-          </a:p>
-          <a:p>
-            <a:pPr algn="l">
-              <a:lnSpc>
-                <a:spcPct val="114000"/>
-              </a:lnSpc>
-              <a:spcBef>
-                <a:spcPts val="0"/>
-              </a:spcBef>
-              <a:spcAft>
-                <a:spcPts val="200"/>
-              </a:spcAft>
-            </a:pPr>
-            <a:r>
-              <a:rPr sz="1250" b="0" i="0">
+                <a:spcPct val="106000"/>
+              </a:lnSpc>
+              <a:spcBef>
+                <a:spcPts val="0"/>
+              </a:spcBef>
+              <a:spcAft>
+                <a:spcPts val="400"/>
+              </a:spcAft>
+            </a:pPr>
+            <a:r>
+              <a:rPr sz="1400" b="1" i="0">
+                <a:solidFill>
+                  <a:srgbClr val="13335F"/>
+                </a:solidFill>
+                <a:latin typeface="Malgun Gothic"/>
+              </a:rPr>
+              <a:t>V_rot는 전역 동률이며, 우위는 회전이 실제로 변하는 방전에 집중된다</a:t>
+            </a:r>
+          </a:p>
+        </p:txBody>
+      </p:sp>
+      <p:sp>
+        <p:nvSpPr>
+          <p:cNvPr id="29" name="TextBox 28"/>
+          <p:cNvSpPr txBox="1"/>
+          <p:nvPr/>
+        </p:nvSpPr>
+        <p:spPr>
+          <a:xfrm>
+            <a:off x="1508760" y="4745736"/>
+            <a:ext cx="10058400" cy="512064"/>
+          </a:xfrm>
+          <a:prstGeom prst="rect">
+            <a:avLst/>
+          </a:prstGeom>
+          <a:noFill/>
+        </p:spPr>
+        <p:txBody>
+          <a:bodyPr wrap="square" anchor="t" lIns="25400" rIns="25400" tIns="12700" bIns="12700">
+            <a:spAutoFit/>
+          </a:bodyPr>
+          <a:lstStyle/>
+          <a:p>
+            <a:pPr algn="l">
+              <a:lnSpc>
+                <a:spcPct val="106000"/>
+              </a:lnSpc>
+              <a:spcBef>
+                <a:spcPts val="0"/>
+              </a:spcBef>
+              <a:spcAft>
+                <a:spcPts val="400"/>
+              </a:spcAft>
+            </a:pPr>
+            <a:r>
+              <a:rPr sz="1050" b="0" i="0">
+                <a:solidFill>
+                  <a:srgbClr val="222B35"/>
+                </a:solidFill>
+                <a:latin typeface="Malgun Gothic"/>
+              </a:rPr>
+              <a:t>PCHIP 대비 1/4·2/4이나 &gt; 15 ms 간극과 peak 층에서는 이겼다. 빠른 채널을 0으로 두어도 출력이 동일하고, 승률은 조용한 방전 34%·변동 방전 55%로 구동 변수(NBI 토크)의 부재를 가리킨다. 검정력 문제가 아니다.</a:t>
+            </a:r>
+          </a:p>
+        </p:txBody>
+      </p:sp>
+      <p:sp>
+        <p:nvSpPr>
+          <p:cNvPr id="30" name="Rounded Rectangle 29"/>
+          <p:cNvSpPr/>
+          <p:nvPr/>
+        </p:nvSpPr>
+        <p:spPr>
+          <a:xfrm>
+            <a:off x="548640" y="5349240"/>
+            <a:ext cx="11155680" cy="932688"/>
+          </a:xfrm>
+          <a:prstGeom prst="roundRect">
+            <a:avLst/>
+          </a:prstGeom>
+          <a:solidFill>
+            <a:srgbClr val="F4F7FA"/>
+          </a:solidFill>
+          <a:ln>
+            <a:noFill/>
+          </a:ln>
+          <a:effectLst/>
+        </p:spPr>
+        <p:style>
+          <a:lnRef idx="1">
+            <a:schemeClr val="accent1"/>
+          </a:lnRef>
+          <a:fillRef idx="3">
+            <a:schemeClr val="accent1"/>
+          </a:fillRef>
+          <a:effectRef idx="2">
+            <a:schemeClr val="accent1"/>
+          </a:effectRef>
+          <a:fontRef idx="minor">
+            <a:schemeClr val="lt1"/>
+          </a:fontRef>
+        </p:style>
+        <p:txBody>
+          <a:bodyPr rtlCol="0" anchor="ctr"/>
+          <a:lstStyle/>
+          <a:p>
+            <a:pPr algn="ctr"/>
+          </a:p>
+        </p:txBody>
+      </p:sp>
+      <p:sp>
+        <p:nvSpPr>
+          <p:cNvPr id="31" name="Rounded Rectangle 30"/>
+          <p:cNvSpPr/>
+          <p:nvPr/>
+        </p:nvSpPr>
+        <p:spPr>
+          <a:xfrm>
+            <a:off x="658368" y="5477255"/>
+            <a:ext cx="676656" cy="676656"/>
+          </a:xfrm>
+          <a:prstGeom prst="roundRect">
+            <a:avLst/>
+          </a:prstGeom>
+          <a:solidFill>
+            <a:srgbClr val="E8743B"/>
+          </a:solidFill>
+          <a:ln>
+            <a:noFill/>
+          </a:ln>
+          <a:effectLst/>
+        </p:spPr>
+        <p:style>
+          <a:lnRef idx="1">
+            <a:schemeClr val="accent1"/>
+          </a:lnRef>
+          <a:fillRef idx="3">
+            <a:schemeClr val="accent1"/>
+          </a:fillRef>
+          <a:effectRef idx="2">
+            <a:schemeClr val="accent1"/>
+          </a:effectRef>
+          <a:fontRef idx="minor">
+            <a:schemeClr val="lt1"/>
+          </a:fontRef>
+        </p:style>
+        <p:txBody>
+          <a:bodyPr rtlCol="0" anchor="ctr"/>
+          <a:lstStyle/>
+          <a:p>
+            <a:pPr algn="ctr"/>
+          </a:p>
+        </p:txBody>
+      </p:sp>
+      <p:sp>
+        <p:nvSpPr>
+          <p:cNvPr id="32" name="TextBox 31"/>
+          <p:cNvSpPr txBox="1"/>
+          <p:nvPr/>
+        </p:nvSpPr>
+        <p:spPr>
+          <a:xfrm>
+            <a:off x="658368" y="5477255"/>
+            <a:ext cx="676656" cy="676656"/>
+          </a:xfrm>
+          <a:prstGeom prst="rect">
+            <a:avLst/>
+          </a:prstGeom>
+          <a:noFill/>
+        </p:spPr>
+        <p:txBody>
+          <a:bodyPr wrap="square" anchor="ctr" lIns="25400" rIns="25400" tIns="12700" bIns="12700">
+            <a:spAutoFit/>
+          </a:bodyPr>
+          <a:lstStyle/>
+          <a:p>
+            <a:pPr algn="ctr">
+              <a:lnSpc>
+                <a:spcPct val="106000"/>
+              </a:lnSpc>
+              <a:spcBef>
+                <a:spcPts val="0"/>
+              </a:spcBef>
+              <a:spcAft>
+                <a:spcPts val="400"/>
+              </a:spcAft>
+            </a:pPr>
+            <a:r>
+              <a:rPr sz="2400" b="1" i="0">
                 <a:solidFill>
                   <a:srgbClr val="FFFFFF"/>
                 </a:solidFill>
                 <a:latin typeface="Malgun Gothic"/>
               </a:rPr>
-              <a:t>① 두 모집단 공동 1차 유지 ② V_rot 프로토콜 불변(재학습 없음, anchored 비교엔 SSE 비중 병기) ③ B.6 kHz Mirnov 미도착 — 대기.</a:t>
+              <a:t>5</a:t>
+            </a:r>
+          </a:p>
+        </p:txBody>
+      </p:sp>
+      <p:sp>
+        <p:nvSpPr>
+          <p:cNvPr id="33" name="TextBox 32"/>
+          <p:cNvSpPr txBox="1"/>
+          <p:nvPr/>
+        </p:nvSpPr>
+        <p:spPr>
+          <a:xfrm>
+            <a:off x="1508760" y="5413248"/>
+            <a:ext cx="10058400" cy="347472"/>
+          </a:xfrm>
+          <a:prstGeom prst="rect">
+            <a:avLst/>
+          </a:prstGeom>
+          <a:noFill/>
+        </p:spPr>
+        <p:txBody>
+          <a:bodyPr wrap="square" anchor="t" lIns="25400" rIns="25400" tIns="12700" bIns="12700">
+            <a:spAutoFit/>
+          </a:bodyPr>
+          <a:lstStyle/>
+          <a:p>
+            <a:pPr algn="l">
+              <a:lnSpc>
+                <a:spcPct val="106000"/>
+              </a:lnSpc>
+              <a:spcBef>
+                <a:spcPts val="0"/>
+              </a:spcBef>
+              <a:spcAft>
+                <a:spcPts val="400"/>
+              </a:spcAft>
+            </a:pPr>
+            <a:r>
+              <a:rPr sz="1400" b="1" i="0">
+                <a:solidFill>
+                  <a:srgbClr val="13335F"/>
+                </a:solidFill>
+                <a:latin typeface="Malgun Gothic"/>
+              </a:rPr>
+              <a:t>상한은 추정기가 아니라 정보에 있으며, 남은 레버는 데이터이다</a:t>
+            </a:r>
+          </a:p>
+        </p:txBody>
+      </p:sp>
+      <p:sp>
+        <p:nvSpPr>
+          <p:cNvPr id="34" name="TextBox 33"/>
+          <p:cNvSpPr txBox="1"/>
+          <p:nvPr/>
+        </p:nvSpPr>
+        <p:spPr>
+          <a:xfrm>
+            <a:off x="1508760" y="5751576"/>
+            <a:ext cx="10058400" cy="512064"/>
+          </a:xfrm>
+          <a:prstGeom prst="rect">
+            <a:avLst/>
+          </a:prstGeom>
+          <a:noFill/>
+        </p:spPr>
+        <p:txBody>
+          <a:bodyPr wrap="square" anchor="t" lIns="25400" rIns="25400" tIns="12700" bIns="12700">
+            <a:spAutoFit/>
+          </a:bodyPr>
+          <a:lstStyle/>
+          <a:p>
+            <a:pPr algn="l">
+              <a:lnSpc>
+                <a:spcPct val="106000"/>
+              </a:lnSpc>
+              <a:spcBef>
+                <a:spcPts val="0"/>
+              </a:spcBef>
+              <a:spcAft>
+                <a:spcPts val="400"/>
+              </a:spcAft>
+            </a:pPr>
+            <a:r>
+              <a:rPr sz="1050" b="0" i="0">
+                <a:solidFill>
+                  <a:srgbClr val="222B35"/>
+                </a:solidFill>
+                <a:latin typeface="Malgun Gothic"/>
+              </a:rPr>
+              <a:t>21,498 파라미터 b3k8이 컷에서 백본과 동급(+0.002)이고 폭 34k→879k는 평평하며, 1,808 파라미터 tcn2k도 인과 GP를 4/4로 이긴다. 남은 셋은 CES 피팅 품질 메타데이터, 원본 kHz Mirnov, NBI 토크 채널이다.</a:t>
             </a:r>
           </a:p>
         </p:txBody>
@@ -22815,7 +22880,51 @@
         <p:spPr>
           <a:xfrm>
             <a:off x="0" y="0"/>
-            <a:ext cx="12191695" cy="6858000"/>
+            <a:ext cx="12191695" cy="1170432"/>
+          </a:xfrm>
+          <a:prstGeom prst="rect">
+            <a:avLst/>
+          </a:prstGeom>
+          <a:solidFill>
+            <a:srgbClr val="FFFFFF"/>
+          </a:solidFill>
+          <a:ln>
+            <a:noFill/>
+          </a:ln>
+          <a:effectLst/>
+        </p:spPr>
+        <p:style>
+          <a:lnRef idx="1">
+            <a:schemeClr val="accent1"/>
+          </a:lnRef>
+          <a:fillRef idx="3">
+            <a:schemeClr val="accent1"/>
+          </a:fillRef>
+          <a:effectRef idx="2">
+            <a:schemeClr val="accent1"/>
+          </a:effectRef>
+          <a:fontRef idx="minor">
+            <a:schemeClr val="lt1"/>
+          </a:fontRef>
+        </p:style>
+        <p:txBody>
+          <a:bodyPr rtlCol="0" anchor="ctr"/>
+          <a:lstStyle/>
+          <a:p>
+            <a:pPr algn="ctr"/>
+          </a:p>
+        </p:txBody>
+      </p:sp>
+      <p:sp>
+        <p:nvSpPr>
+          <p:cNvPr id="4" name="Rectangle 3"/>
+          <p:cNvSpPr/>
+          <p:nvPr/>
+        </p:nvSpPr>
+        <p:spPr>
+          <a:xfrm>
+            <a:off x="0" y="0"/>
+            <a:ext cx="201168" cy="1170432"/>
           </a:xfrm>
           <a:prstGeom prst="rect">
             <a:avLst/>
@@ -22852,6 +22961,1155 @@
       </p:sp>
       <p:sp>
         <p:nvSpPr>
+          <p:cNvPr id="5" name="TextBox 4"/>
+          <p:cNvSpPr txBox="1"/>
+          <p:nvPr/>
+        </p:nvSpPr>
+        <p:spPr>
+          <a:xfrm>
+            <a:off x="502920" y="182880"/>
+            <a:ext cx="11247120" cy="310896"/>
+          </a:xfrm>
+          <a:prstGeom prst="rect">
+            <a:avLst/>
+          </a:prstGeom>
+          <a:noFill/>
+        </p:spPr>
+        <p:txBody>
+          <a:bodyPr wrap="square" anchor="t" lIns="25400" rIns="25400" tIns="12700" bIns="12700">
+            <a:spAutoFit/>
+          </a:bodyPr>
+          <a:lstStyle/>
+          <a:p>
+            <a:pPr algn="l">
+              <a:lnSpc>
+                <a:spcPct val="106000"/>
+              </a:lnSpc>
+              <a:spcBef>
+                <a:spcPts val="0"/>
+              </a:spcBef>
+              <a:spcAft>
+                <a:spcPts val="400"/>
+              </a:spcAft>
+            </a:pPr>
+            <a:r>
+              <a:rPr sz="1300" b="1" i="0">
+                <a:solidFill>
+                  <a:srgbClr val="13335F"/>
+                </a:solidFill>
+                <a:latin typeface="Malgun Gothic"/>
+              </a:rPr>
+              <a:t>7. 한계 &amp; 향후</a:t>
+            </a:r>
+          </a:p>
+        </p:txBody>
+      </p:sp>
+      <p:sp>
+        <p:nvSpPr>
+          <p:cNvPr id="6" name="TextBox 5"/>
+          <p:cNvSpPr txBox="1"/>
+          <p:nvPr/>
+        </p:nvSpPr>
+        <p:spPr>
+          <a:xfrm>
+            <a:off x="475488" y="457200"/>
+            <a:ext cx="11338560" cy="658368"/>
+          </a:xfrm>
+          <a:prstGeom prst="rect">
+            <a:avLst/>
+          </a:prstGeom>
+          <a:noFill/>
+        </p:spPr>
+        <p:txBody>
+          <a:bodyPr wrap="square" anchor="ctr" lIns="25400" rIns="25400" tIns="12700" bIns="12700">
+            <a:spAutoFit/>
+          </a:bodyPr>
+          <a:lstStyle/>
+          <a:p>
+            <a:pPr algn="l">
+              <a:lnSpc>
+                <a:spcPct val="106000"/>
+              </a:lnSpc>
+              <a:spcBef>
+                <a:spcPts val="0"/>
+              </a:spcBef>
+              <a:spcAft>
+                <a:spcPts val="400"/>
+              </a:spcAft>
+            </a:pPr>
+            <a:r>
+              <a:rPr sz="2700" b="1" i="0">
+                <a:solidFill>
+                  <a:srgbClr val="13335F"/>
+                </a:solidFill>
+                <a:latin typeface="Malgun Gothic"/>
+              </a:rPr>
+              <a:t>무엇을 인정하고, 다음에 무엇을 측정하는가</a:t>
+            </a:r>
+          </a:p>
+        </p:txBody>
+      </p:sp>
+      <p:sp>
+        <p:nvSpPr>
+          <p:cNvPr id="7" name="Rectangle 6"/>
+          <p:cNvSpPr/>
+          <p:nvPr/>
+        </p:nvSpPr>
+        <p:spPr>
+          <a:xfrm>
+            <a:off x="502920" y="1078992"/>
+            <a:ext cx="11201400" cy="25400"/>
+          </a:xfrm>
+          <a:prstGeom prst="rect">
+            <a:avLst/>
+          </a:prstGeom>
+          <a:solidFill>
+            <a:srgbClr val="E8ECF1"/>
+          </a:solidFill>
+          <a:ln>
+            <a:noFill/>
+          </a:ln>
+          <a:effectLst/>
+        </p:spPr>
+        <p:style>
+          <a:lnRef idx="1">
+            <a:schemeClr val="accent1"/>
+          </a:lnRef>
+          <a:fillRef idx="3">
+            <a:schemeClr val="accent1"/>
+          </a:fillRef>
+          <a:effectRef idx="2">
+            <a:schemeClr val="accent1"/>
+          </a:effectRef>
+          <a:fontRef idx="minor">
+            <a:schemeClr val="lt1"/>
+          </a:fontRef>
+        </p:style>
+        <p:txBody>
+          <a:bodyPr rtlCol="0" anchor="ctr"/>
+          <a:lstStyle/>
+          <a:p>
+            <a:pPr algn="ctr"/>
+          </a:p>
+        </p:txBody>
+      </p:sp>
+      <p:sp>
+        <p:nvSpPr>
+          <p:cNvPr id="8" name="TextBox 7"/>
+          <p:cNvSpPr txBox="1"/>
+          <p:nvPr/>
+        </p:nvSpPr>
+        <p:spPr>
+          <a:xfrm>
+            <a:off x="502920" y="6455664"/>
+            <a:ext cx="7315200" cy="274320"/>
+          </a:xfrm>
+          <a:prstGeom prst="rect">
+            <a:avLst/>
+          </a:prstGeom>
+          <a:noFill/>
+        </p:spPr>
+        <p:txBody>
+          <a:bodyPr wrap="square" anchor="t" lIns="25400" rIns="25400" tIns="12700" bIns="12700">
+            <a:spAutoFit/>
+          </a:bodyPr>
+          <a:lstStyle/>
+          <a:p>
+            <a:pPr algn="l">
+              <a:lnSpc>
+                <a:spcPct val="106000"/>
+              </a:lnSpc>
+              <a:spcBef>
+                <a:spcPts val="0"/>
+              </a:spcBef>
+              <a:spcAft>
+                <a:spcPts val="400"/>
+              </a:spcAft>
+            </a:pPr>
+            <a:r>
+              <a:rPr sz="900" b="0" i="0">
+                <a:solidFill>
+                  <a:srgbClr val="9AA5B1"/>
+                </a:solidFill>
+                <a:latin typeface="Malgun Gothic"/>
+              </a:rPr>
+              <a:t>KSTAR CES Nowcasting — 다중진단 기반 CES 결측 구간 예측</a:t>
+            </a:r>
+          </a:p>
+        </p:txBody>
+      </p:sp>
+      <p:sp>
+        <p:nvSpPr>
+          <p:cNvPr id="9" name="TextBox 8"/>
+          <p:cNvSpPr txBox="1"/>
+          <p:nvPr/>
+        </p:nvSpPr>
+        <p:spPr>
+          <a:xfrm>
+            <a:off x="10607040" y="6455664"/>
+            <a:ext cx="1097280" cy="274320"/>
+          </a:xfrm>
+          <a:prstGeom prst="rect">
+            <a:avLst/>
+          </a:prstGeom>
+          <a:noFill/>
+        </p:spPr>
+        <p:txBody>
+          <a:bodyPr wrap="square" anchor="t" lIns="25400" rIns="25400" tIns="12700" bIns="12700">
+            <a:spAutoFit/>
+          </a:bodyPr>
+          <a:lstStyle/>
+          <a:p>
+            <a:pPr algn="r">
+              <a:lnSpc>
+                <a:spcPct val="106000"/>
+              </a:lnSpc>
+              <a:spcBef>
+                <a:spcPts val="0"/>
+              </a:spcBef>
+              <a:spcAft>
+                <a:spcPts val="400"/>
+              </a:spcAft>
+            </a:pPr>
+            <a:r>
+              <a:rPr sz="1000" b="0" i="0">
+                <a:solidFill>
+                  <a:srgbClr val="9AA5B1"/>
+                </a:solidFill>
+                <a:latin typeface="Malgun Gothic"/>
+              </a:rPr>
+              <a:t>22</a:t>
+            </a:r>
+          </a:p>
+        </p:txBody>
+      </p:sp>
+      <p:sp>
+        <p:nvSpPr>
+          <p:cNvPr id="10" name="Rounded Rectangle 9"/>
+          <p:cNvSpPr/>
+          <p:nvPr/>
+        </p:nvSpPr>
+        <p:spPr>
+          <a:xfrm>
+            <a:off x="502920" y="1371600"/>
+            <a:ext cx="5486400" cy="3566160"/>
+          </a:xfrm>
+          <a:prstGeom prst="roundRect">
+            <a:avLst/>
+          </a:prstGeom>
+          <a:solidFill>
+            <a:srgbClr val="F4F7FA"/>
+          </a:solidFill>
+          <a:ln>
+            <a:noFill/>
+          </a:ln>
+          <a:effectLst/>
+        </p:spPr>
+        <p:style>
+          <a:lnRef idx="1">
+            <a:schemeClr val="accent1"/>
+          </a:lnRef>
+          <a:fillRef idx="3">
+            <a:schemeClr val="accent1"/>
+          </a:fillRef>
+          <a:effectRef idx="2">
+            <a:schemeClr val="accent1"/>
+          </a:effectRef>
+          <a:fontRef idx="minor">
+            <a:schemeClr val="lt1"/>
+          </a:fontRef>
+        </p:style>
+        <p:txBody>
+          <a:bodyPr rtlCol="0" anchor="ctr"/>
+          <a:lstStyle/>
+          <a:p>
+            <a:pPr algn="ctr"/>
+          </a:p>
+        </p:txBody>
+      </p:sp>
+      <p:sp>
+        <p:nvSpPr>
+          <p:cNvPr id="11" name="Rectangle 10"/>
+          <p:cNvSpPr/>
+          <p:nvPr/>
+        </p:nvSpPr>
+        <p:spPr>
+          <a:xfrm>
+            <a:off x="502920" y="1371600"/>
+            <a:ext cx="109728" cy="3566160"/>
+          </a:xfrm>
+          <a:prstGeom prst="rect">
+            <a:avLst/>
+          </a:prstGeom>
+          <a:solidFill>
+            <a:srgbClr val="C0392B"/>
+          </a:solidFill>
+          <a:ln>
+            <a:noFill/>
+          </a:ln>
+          <a:effectLst/>
+        </p:spPr>
+        <p:style>
+          <a:lnRef idx="1">
+            <a:schemeClr val="accent1"/>
+          </a:lnRef>
+          <a:fillRef idx="3">
+            <a:schemeClr val="accent1"/>
+          </a:fillRef>
+          <a:effectRef idx="2">
+            <a:schemeClr val="accent1"/>
+          </a:effectRef>
+          <a:fontRef idx="minor">
+            <a:schemeClr val="lt1"/>
+          </a:fontRef>
+        </p:style>
+        <p:txBody>
+          <a:bodyPr rtlCol="0" anchor="ctr"/>
+          <a:lstStyle/>
+          <a:p>
+            <a:pPr algn="ctr"/>
+          </a:p>
+        </p:txBody>
+      </p:sp>
+      <p:sp>
+        <p:nvSpPr>
+          <p:cNvPr id="12" name="TextBox 11"/>
+          <p:cNvSpPr txBox="1"/>
+          <p:nvPr/>
+        </p:nvSpPr>
+        <p:spPr>
+          <a:xfrm>
+            <a:off x="731520" y="1481328"/>
+            <a:ext cx="5029200" cy="411480"/>
+          </a:xfrm>
+          <a:prstGeom prst="rect">
+            <a:avLst/>
+          </a:prstGeom>
+          <a:noFill/>
+        </p:spPr>
+        <p:txBody>
+          <a:bodyPr wrap="square" anchor="t" lIns="25400" rIns="25400" tIns="12700" bIns="12700">
+            <a:spAutoFit/>
+          </a:bodyPr>
+          <a:lstStyle/>
+          <a:p>
+            <a:pPr algn="l">
+              <a:lnSpc>
+                <a:spcPct val="106000"/>
+              </a:lnSpc>
+              <a:spcBef>
+                <a:spcPts val="0"/>
+              </a:spcBef>
+              <a:spcAft>
+                <a:spcPts val="400"/>
+              </a:spcAft>
+            </a:pPr>
+            <a:r>
+              <a:rPr sz="1500" b="1" i="0">
+                <a:solidFill>
+                  <a:srgbClr val="C0392B"/>
+                </a:solidFill>
+                <a:latin typeface="Malgun Gothic"/>
+              </a:rPr>
+              <a:t>한계 — 논문이 먼저 인정하는 것</a:t>
+            </a:r>
+          </a:p>
+        </p:txBody>
+      </p:sp>
+      <p:sp>
+        <p:nvSpPr>
+          <p:cNvPr id="13" name="TextBox 12"/>
+          <p:cNvSpPr txBox="1"/>
+          <p:nvPr/>
+        </p:nvSpPr>
+        <p:spPr>
+          <a:xfrm>
+            <a:off x="731520" y="1938528"/>
+            <a:ext cx="5074920" cy="2834640"/>
+          </a:xfrm>
+          <a:prstGeom prst="rect">
+            <a:avLst/>
+          </a:prstGeom>
+          <a:noFill/>
+        </p:spPr>
+        <p:txBody>
+          <a:bodyPr wrap="square" anchor="t" lIns="25400" rIns="25400" tIns="12700" bIns="12700">
+            <a:spAutoFit/>
+          </a:bodyPr>
+          <a:lstStyle/>
+          <a:p>
+            <a:pPr algn="l">
+              <a:lnSpc>
+                <a:spcPct val="108000"/>
+              </a:lnSpc>
+              <a:spcBef>
+                <a:spcPts val="0"/>
+              </a:spcBef>
+              <a:spcAft>
+                <a:spcPts val="500"/>
+              </a:spcAft>
+            </a:pPr>
+            <a:r>
+              <a:rPr sz="1150" b="1" i="0">
+                <a:solidFill>
+                  <a:srgbClr val="13335F"/>
+                </a:solidFill>
+                <a:latin typeface="Malgun Gothic"/>
+              </a:rPr>
+              <a:t>●  검정력: test 방전 96(Tᵢ) / 60–66(V_rot)이 유의성의 구속조건이다.</a:t>
+            </a:r>
+          </a:p>
+          <a:p>
+            <a:pPr algn="l" lvl="1">
+              <a:lnSpc>
+                <a:spcPct val="108000"/>
+              </a:lnSpc>
+              <a:spcBef>
+                <a:spcPts val="0"/>
+              </a:spcBef>
+              <a:spcAft>
+                <a:spcPts val="500"/>
+              </a:spcAft>
+            </a:pPr>
+            <a:r>
+              <a:rPr sz="950" b="0" i="0">
+                <a:solidFill>
+                  <a:srgbClr val="222B35"/>
+                </a:solidFill>
+                <a:latin typeface="Malgun Gothic"/>
+              </a:rPr>
+              <a:t>–  포함 모집단에서는 ≈1% 행이 SSE의 70–83%를 차지한다.</a:t>
+            </a:r>
+          </a:p>
+          <a:p>
+            <a:pPr algn="l">
+              <a:lnSpc>
+                <a:spcPct val="108000"/>
+              </a:lnSpc>
+              <a:spcBef>
+                <a:spcPts val="0"/>
+              </a:spcBef>
+              <a:spcAft>
+                <a:spcPts val="500"/>
+              </a:spcAft>
+            </a:pPr>
+            <a:r>
+              <a:rPr sz="1150" b="1" i="0">
+                <a:solidFill>
+                  <a:srgbClr val="13335F"/>
+                </a:solidFill>
+                <a:latin typeface="Malgun Gothic"/>
+              </a:rPr>
+              <a:t>●  MNAR 낙관: 재가중 도달은 Tᵢ 54–68%, V_rot 4–6%에 그친다.</a:t>
+            </a:r>
+          </a:p>
+          <a:p>
+            <a:pPr algn="l">
+              <a:lnSpc>
+                <a:spcPct val="108000"/>
+              </a:lnSpc>
+              <a:spcBef>
+                <a:spcPts val="0"/>
+              </a:spcBef>
+              <a:spcAft>
+                <a:spcPts val="500"/>
+              </a:spcAft>
+            </a:pPr>
+            <a:r>
+              <a:rPr sz="1150" b="1" i="0">
+                <a:solidFill>
+                  <a:srgbClr val="13335F"/>
+                </a:solidFill>
+                <a:latin typeface="Malgun Gothic"/>
+              </a:rPr>
+              <a:t>●  오프라인 주장의 상한은 GP 동률(1/8 유의)이다.</a:t>
+            </a:r>
+          </a:p>
+          <a:p>
+            <a:pPr algn="l">
+              <a:lnSpc>
+                <a:spcPct val="108000"/>
+              </a:lnSpc>
+              <a:spcBef>
+                <a:spcPts val="0"/>
+              </a:spcBef>
+              <a:spcAft>
+                <a:spcPts val="500"/>
+              </a:spcAft>
+            </a:pPr>
+            <a:r>
+              <a:rPr sz="1150" b="1" i="0">
+                <a:solidFill>
+                  <a:srgbClr val="13335F"/>
+                </a:solidFill>
+                <a:latin typeface="Malgun Gothic"/>
+              </a:rPr>
+              <a:t>●  값 컷은 일방향 프록시이며 V_rot 스파이크는 남는다.</a:t>
+            </a:r>
+          </a:p>
+          <a:p>
+            <a:pPr algn="l">
+              <a:lnSpc>
+                <a:spcPct val="108000"/>
+              </a:lnSpc>
+              <a:spcBef>
+                <a:spcPts val="0"/>
+              </a:spcBef>
+              <a:spcAft>
+                <a:spcPts val="500"/>
+              </a:spcAft>
+            </a:pPr>
+            <a:r>
+              <a:rPr sz="1150" b="1" i="0">
+                <a:solidFill>
+                  <a:srgbClr val="13335F"/>
+                </a:solidFill>
+                <a:latin typeface="Malgun Gothic"/>
+              </a:rPr>
+              <a:t>●  캠페인은 한 시간 블록 위 초기화 4개이며 컷 run 2/4가 상한 종료였다.</a:t>
+            </a:r>
+          </a:p>
+          <a:p>
+            <a:pPr algn="l">
+              <a:lnSpc>
+                <a:spcPct val="108000"/>
+              </a:lnSpc>
+              <a:spcBef>
+                <a:spcPts val="0"/>
+              </a:spcBef>
+              <a:spcAft>
+                <a:spcPts val="500"/>
+              </a:spcAft>
+            </a:pPr>
+            <a:r>
+              <a:rPr sz="1150" b="1" i="0">
+                <a:solidFill>
+                  <a:srgbClr val="13335F"/>
+                </a:solidFill>
+                <a:latin typeface="Malgun Gothic"/>
+              </a:rPr>
+              <a:t>●  통합 재채점은 방법의 기대 skill이며 단일 체크포인트의 주장이 아니다.</a:t>
+            </a:r>
+          </a:p>
+          <a:p>
+            <a:pPr algn="l">
+              <a:lnSpc>
+                <a:spcPct val="108000"/>
+              </a:lnSpc>
+              <a:spcBef>
+                <a:spcPts val="0"/>
+              </a:spcBef>
+              <a:spcAft>
+                <a:spcPts val="500"/>
+              </a:spcAft>
+            </a:pPr>
+            <a:r>
+              <a:rPr sz="1150" b="1" i="0">
+                <a:solidFill>
+                  <a:srgbClr val="13335F"/>
+                </a:solidFill>
+                <a:latin typeface="Malgun Gothic"/>
+              </a:rPr>
+              <a:t>●  지연 절댓값은 기계 종속이며 1 ms 판정은 보류되었다.</a:t>
+            </a:r>
+          </a:p>
+          <a:p>
+            <a:pPr algn="l" lvl="1">
+              <a:lnSpc>
+                <a:spcPct val="108000"/>
+              </a:lnSpc>
+              <a:spcBef>
+                <a:spcPts val="0"/>
+              </a:spcBef>
+              <a:spcAft>
+                <a:spcPts val="500"/>
+              </a:spcAft>
+            </a:pPr>
+            <a:r>
+              <a:rPr sz="950" b="0" i="0">
+                <a:solidFill>
+                  <a:srgbClr val="222B35"/>
+                </a:solidFill>
+                <a:latin typeface="Malgun Gothic"/>
+              </a:rPr>
+              <a:t>–  단일 장치 · conformal은 marginal · 승패 공변량 분석은 탐색적이다.</a:t>
+            </a:r>
+          </a:p>
+        </p:txBody>
+      </p:sp>
+      <p:sp>
+        <p:nvSpPr>
+          <p:cNvPr id="14" name="Rounded Rectangle 13"/>
+          <p:cNvSpPr/>
+          <p:nvPr/>
+        </p:nvSpPr>
+        <p:spPr>
+          <a:xfrm>
+            <a:off x="6217920" y="1371600"/>
+            <a:ext cx="5486400" cy="3566160"/>
+          </a:xfrm>
+          <a:prstGeom prst="roundRect">
+            <a:avLst/>
+          </a:prstGeom>
+          <a:solidFill>
+            <a:srgbClr val="F4F7FA"/>
+          </a:solidFill>
+          <a:ln>
+            <a:noFill/>
+          </a:ln>
+          <a:effectLst/>
+        </p:spPr>
+        <p:style>
+          <a:lnRef idx="1">
+            <a:schemeClr val="accent1"/>
+          </a:lnRef>
+          <a:fillRef idx="3">
+            <a:schemeClr val="accent1"/>
+          </a:fillRef>
+          <a:effectRef idx="2">
+            <a:schemeClr val="accent1"/>
+          </a:effectRef>
+          <a:fontRef idx="minor">
+            <a:schemeClr val="lt1"/>
+          </a:fontRef>
+        </p:style>
+        <p:txBody>
+          <a:bodyPr rtlCol="0" anchor="ctr"/>
+          <a:lstStyle/>
+          <a:p>
+            <a:pPr algn="ctr"/>
+          </a:p>
+        </p:txBody>
+      </p:sp>
+      <p:sp>
+        <p:nvSpPr>
+          <p:cNvPr id="15" name="Rectangle 14"/>
+          <p:cNvSpPr/>
+          <p:nvPr/>
+        </p:nvSpPr>
+        <p:spPr>
+          <a:xfrm>
+            <a:off x="6217920" y="1371600"/>
+            <a:ext cx="109728" cy="3566160"/>
+          </a:xfrm>
+          <a:prstGeom prst="rect">
+            <a:avLst/>
+          </a:prstGeom>
+          <a:solidFill>
+            <a:srgbClr val="1B9E8A"/>
+          </a:solidFill>
+          <a:ln>
+            <a:noFill/>
+          </a:ln>
+          <a:effectLst/>
+        </p:spPr>
+        <p:style>
+          <a:lnRef idx="1">
+            <a:schemeClr val="accent1"/>
+          </a:lnRef>
+          <a:fillRef idx="3">
+            <a:schemeClr val="accent1"/>
+          </a:fillRef>
+          <a:effectRef idx="2">
+            <a:schemeClr val="accent1"/>
+          </a:effectRef>
+          <a:fontRef idx="minor">
+            <a:schemeClr val="lt1"/>
+          </a:fontRef>
+        </p:style>
+        <p:txBody>
+          <a:bodyPr rtlCol="0" anchor="ctr"/>
+          <a:lstStyle/>
+          <a:p>
+            <a:pPr algn="ctr"/>
+          </a:p>
+        </p:txBody>
+      </p:sp>
+      <p:sp>
+        <p:nvSpPr>
+          <p:cNvPr id="16" name="TextBox 15"/>
+          <p:cNvSpPr txBox="1"/>
+          <p:nvPr/>
+        </p:nvSpPr>
+        <p:spPr>
+          <a:xfrm>
+            <a:off x="6446520" y="1481328"/>
+            <a:ext cx="5029200" cy="411480"/>
+          </a:xfrm>
+          <a:prstGeom prst="rect">
+            <a:avLst/>
+          </a:prstGeom>
+          <a:noFill/>
+        </p:spPr>
+        <p:txBody>
+          <a:bodyPr wrap="square" anchor="t" lIns="25400" rIns="25400" tIns="12700" bIns="12700">
+            <a:spAutoFit/>
+          </a:bodyPr>
+          <a:lstStyle/>
+          <a:p>
+            <a:pPr algn="l">
+              <a:lnSpc>
+                <a:spcPct val="106000"/>
+              </a:lnSpc>
+              <a:spcBef>
+                <a:spcPts val="0"/>
+              </a:spcBef>
+              <a:spcAft>
+                <a:spcPts val="400"/>
+              </a:spcAft>
+            </a:pPr>
+            <a:r>
+              <a:rPr sz="1500" b="1" i="0">
+                <a:solidFill>
+                  <a:srgbClr val="1B9E8A"/>
+                </a:solidFill>
+                <a:latin typeface="Malgun Gothic"/>
+              </a:rPr>
+              <a:t>향후 — 남은 레버는 전부 데이터이다</a:t>
+            </a:r>
+          </a:p>
+        </p:txBody>
+      </p:sp>
+      <p:sp>
+        <p:nvSpPr>
+          <p:cNvPr id="17" name="TextBox 16"/>
+          <p:cNvSpPr txBox="1"/>
+          <p:nvPr/>
+        </p:nvSpPr>
+        <p:spPr>
+          <a:xfrm>
+            <a:off x="6446520" y="1938528"/>
+            <a:ext cx="5074920" cy="2834640"/>
+          </a:xfrm>
+          <a:prstGeom prst="rect">
+            <a:avLst/>
+          </a:prstGeom>
+          <a:noFill/>
+        </p:spPr>
+        <p:txBody>
+          <a:bodyPr wrap="square" anchor="t" lIns="25400" rIns="25400" tIns="12700" bIns="12700">
+            <a:spAutoFit/>
+          </a:bodyPr>
+          <a:lstStyle/>
+          <a:p>
+            <a:pPr algn="l">
+              <a:lnSpc>
+                <a:spcPct val="108000"/>
+              </a:lnSpc>
+              <a:spcBef>
+                <a:spcPts val="0"/>
+              </a:spcBef>
+              <a:spcAft>
+                <a:spcPts val="600"/>
+              </a:spcAft>
+            </a:pPr>
+            <a:r>
+              <a:rPr sz="1200" b="1" i="0">
+                <a:solidFill>
+                  <a:srgbClr val="13335F"/>
+                </a:solidFill>
+                <a:latin typeface="Malgun Gothic"/>
+              </a:rPr>
+              <a:t>●  음성 결과는 그것을 뒤집을 측정을 지목할 때만 결론으로 인정한다.</a:t>
+            </a:r>
+          </a:p>
+          <a:p>
+            <a:pPr algn="l">
+              <a:lnSpc>
+                <a:spcPct val="108000"/>
+              </a:lnSpc>
+              <a:spcBef>
+                <a:spcPts val="0"/>
+              </a:spcBef>
+              <a:spcAft>
+                <a:spcPts val="600"/>
+              </a:spcAft>
+            </a:pPr>
+            <a:r>
+              <a:rPr sz="1200" b="1" i="0">
+                <a:solidFill>
+                  <a:srgbClr val="E8743B"/>
+                </a:solidFill>
+                <a:latin typeface="Malgun Gothic"/>
+              </a:rPr>
+              <a:t>●  ① CES 피팅 품질 메타데이터(χ² · 신호 수준)를 확보한다.</a:t>
+            </a:r>
+          </a:p>
+          <a:p>
+            <a:pPr algn="l" lvl="1">
+              <a:lnSpc>
+                <a:spcPct val="108000"/>
+              </a:lnSpc>
+              <a:spcBef>
+                <a:spcPts val="0"/>
+              </a:spcBef>
+              <a:spcAft>
+                <a:spcPts val="600"/>
+              </a:spcAft>
+            </a:pPr>
+            <a:r>
+              <a:rPr sz="1000" b="0" i="0">
+                <a:solidFill>
+                  <a:srgbClr val="222B35"/>
+                </a:solidFill>
+                <a:latin typeface="Malgun Gothic"/>
+              </a:rPr>
+              <a:t>–  값 컷을 품질 컷으로 대체하면 두 모집단이 하나로 합쳐진다.</a:t>
+            </a:r>
+          </a:p>
+          <a:p>
+            <a:pPr algn="l">
+              <a:lnSpc>
+                <a:spcPct val="108000"/>
+              </a:lnSpc>
+              <a:spcBef>
+                <a:spcPts val="0"/>
+              </a:spcBef>
+              <a:spcAft>
+                <a:spcPts val="600"/>
+              </a:spcAft>
+            </a:pPr>
+            <a:r>
+              <a:rPr sz="1200" b="1" i="0">
+                <a:solidFill>
+                  <a:srgbClr val="E8743B"/>
+                </a:solidFill>
+                <a:latin typeface="Malgun Gothic"/>
+              </a:rPr>
+              <a:t>●  ② 원본 kHz Mirnov 특징을 계산한다(V_rot 최상위 레버).</a:t>
+            </a:r>
+          </a:p>
+          <a:p>
+            <a:pPr algn="l" lvl="1">
+              <a:lnSpc>
+                <a:spcPct val="108000"/>
+              </a:lnSpc>
+              <a:spcBef>
+                <a:spcPts val="0"/>
+              </a:spcBef>
+              <a:spcAft>
+                <a:spcPts val="600"/>
+              </a:spcAft>
+            </a:pPr>
+            <a:r>
+              <a:rPr sz="1000" b="0" i="0">
+                <a:solidFill>
+                  <a:srgbClr val="222B35"/>
+                </a:solidFill>
+                <a:latin typeface="Malgun Gothic"/>
+              </a:rPr>
+              <a:t>–  B.6 shot 집합(test 4 · pool 6 · companion 2)이 동결되어 있다.</a:t>
+            </a:r>
+          </a:p>
+          <a:p>
+            <a:pPr algn="l" lvl="1">
+              <a:lnSpc>
+                <a:spcPct val="108000"/>
+              </a:lnSpc>
+              <a:spcBef>
+                <a:spcPts val="0"/>
+              </a:spcBef>
+              <a:spcAft>
+                <a:spcPts val="600"/>
+              </a:spcAft>
+            </a:pPr>
+            <a:r>
+              <a:rPr sz="1000" b="0" i="0">
+                <a:solidFill>
+                  <a:srgbClr val="222B35"/>
+                </a:solidFill>
+                <a:latin typeface="Malgun Gothic"/>
+              </a:rPr>
+              <a:t>–  예측: 변동 3분위의 V_rot 승률이 먼저 올라야 메커니즘이 맞다.</a:t>
+            </a:r>
+          </a:p>
+          <a:p>
+            <a:pPr algn="l">
+              <a:lnSpc>
+                <a:spcPct val="108000"/>
+              </a:lnSpc>
+              <a:spcBef>
+                <a:spcPts val="0"/>
+              </a:spcBef>
+              <a:spcAft>
+                <a:spcPts val="600"/>
+              </a:spcAft>
+            </a:pPr>
+            <a:r>
+              <a:rPr sz="1200" b="1" i="0">
+                <a:solidFill>
+                  <a:srgbClr val="E8743B"/>
+                </a:solidFill>
+                <a:latin typeface="Malgun Gothic"/>
+              </a:rPr>
+              <a:t>●  ③ NBI 토크 채널을 확보한다(회전의 원인 변수).</a:t>
+            </a:r>
+          </a:p>
+          <a:p>
+            <a:pPr algn="l" lvl="1">
+              <a:lnSpc>
+                <a:spcPct val="108000"/>
+              </a:lnSpc>
+              <a:spcBef>
+                <a:spcPts val="0"/>
+              </a:spcBef>
+              <a:spcAft>
+                <a:spcPts val="600"/>
+              </a:spcAft>
+            </a:pPr>
+            <a:r>
+              <a:rPr sz="1000" b="0" i="0">
+                <a:solidFill>
+                  <a:srgbClr val="222B35"/>
+                </a:solidFill>
+                <a:latin typeface="Malgun Gothic"/>
+              </a:rPr>
+              <a:t>–  Tₑ~Tᵢ r = +0.353 vs Tₑ~V_rot r = +0.024이므로 power ≠ torque이다.</a:t>
+            </a:r>
+          </a:p>
+          <a:p>
+            <a:pPr algn="l">
+              <a:lnSpc>
+                <a:spcPct val="108000"/>
+              </a:lnSpc>
+              <a:spcBef>
+                <a:spcPts val="0"/>
+              </a:spcBef>
+              <a:spcAft>
+                <a:spcPts val="600"/>
+              </a:spcAft>
+            </a:pPr>
+            <a:r>
+              <a:rPr sz="1200" b="1" i="0">
+                <a:solidFill>
+                  <a:srgbClr val="5B6670"/>
+                </a:solidFill>
+                <a:latin typeface="Malgun Gothic"/>
+              </a:rPr>
+              <a:t>●  크기·문맥·계열 축은 닫혔다: 21k = 백본(컷), 폭 26배 평평, 계열 동률.</a:t>
+            </a:r>
+          </a:p>
+        </p:txBody>
+      </p:sp>
+      <p:sp>
+        <p:nvSpPr>
+          <p:cNvPr id="18" name="Rounded Rectangle 17"/>
+          <p:cNvSpPr/>
+          <p:nvPr/>
+        </p:nvSpPr>
+        <p:spPr>
+          <a:xfrm>
+            <a:off x="502920" y="5084064"/>
+            <a:ext cx="11201400" cy="859536"/>
+          </a:xfrm>
+          <a:prstGeom prst="roundRect">
+            <a:avLst/>
+          </a:prstGeom>
+          <a:solidFill>
+            <a:srgbClr val="13335F"/>
+          </a:solidFill>
+          <a:ln>
+            <a:noFill/>
+          </a:ln>
+          <a:effectLst/>
+        </p:spPr>
+        <p:style>
+          <a:lnRef idx="1">
+            <a:schemeClr val="accent1"/>
+          </a:lnRef>
+          <a:fillRef idx="3">
+            <a:schemeClr val="accent1"/>
+          </a:fillRef>
+          <a:effectRef idx="2">
+            <a:schemeClr val="accent1"/>
+          </a:effectRef>
+          <a:fontRef idx="minor">
+            <a:schemeClr val="lt1"/>
+          </a:fontRef>
+        </p:style>
+        <p:txBody>
+          <a:bodyPr rtlCol="0" anchor="ctr"/>
+          <a:lstStyle/>
+          <a:p>
+            <a:pPr algn="ctr"/>
+          </a:p>
+        </p:txBody>
+      </p:sp>
+      <p:sp>
+        <p:nvSpPr>
+          <p:cNvPr id="19" name="TextBox 18"/>
+          <p:cNvSpPr txBox="1"/>
+          <p:nvPr/>
+        </p:nvSpPr>
+        <p:spPr>
+          <a:xfrm>
+            <a:off x="777240" y="5166360"/>
+            <a:ext cx="10698480" cy="749808"/>
+          </a:xfrm>
+          <a:prstGeom prst="rect">
+            <a:avLst/>
+          </a:prstGeom>
+          <a:noFill/>
+        </p:spPr>
+        <p:txBody>
+          <a:bodyPr wrap="square" anchor="t" lIns="25400" rIns="25400" tIns="12700" bIns="12700">
+            <a:spAutoFit/>
+          </a:bodyPr>
+          <a:lstStyle/>
+          <a:p>
+            <a:pPr algn="l">
+              <a:lnSpc>
+                <a:spcPct val="114000"/>
+              </a:lnSpc>
+              <a:spcBef>
+                <a:spcPts val="0"/>
+              </a:spcBef>
+              <a:spcAft>
+                <a:spcPts val="200"/>
+              </a:spcAft>
+            </a:pPr>
+            <a:r>
+              <a:rPr sz="1250" b="1" i="0">
+                <a:solidFill>
+                  <a:srgbClr val="E8743B"/>
+                </a:solidFill>
+                <a:latin typeface="Malgun Gothic"/>
+              </a:rPr>
+              <a:t>결정 기록 (2026-08-16 · 08-21 · 08-24)</a:t>
+            </a:r>
+          </a:p>
+          <a:p>
+            <a:pPr algn="l">
+              <a:lnSpc>
+                <a:spcPct val="114000"/>
+              </a:lnSpc>
+              <a:spcBef>
+                <a:spcPts val="0"/>
+              </a:spcBef>
+              <a:spcAft>
+                <a:spcPts val="200"/>
+              </a:spcAft>
+            </a:pPr>
+            <a:r>
+              <a:rPr sz="1250" b="0" i="0">
+                <a:solidFill>
+                  <a:srgbClr val="FFFFFF"/>
+                </a:solidFill>
+                <a:latin typeface="Malgun Gothic"/>
+              </a:rPr>
+              <a:t>① 두 모집단 공동 1차 유지 ② V_rot 프로토콜 불변(재학습 없음, anchored 비교엔 SSE 비중 병기) ③ B.6 μs shot 집합 동결(test 4 / pool 6 / companion 2) ④ 양자 가지는 하드웨어 검증 후 음성으로 종결.</a:t>
+            </a:r>
+          </a:p>
+        </p:txBody>
+      </p:sp>
+    </p:spTree>
+  </p:cSld>
+  <p:clrMapOvr>
+    <a:masterClrMapping/>
+  </p:clrMapOvr>
+</p:sld>
+</file>
+
+<file path=ppt/slides/slide24.xml><?xml version="1.0" encoding="utf-8"?>
+<p:sld xmlns:a="http://schemas.openxmlformats.org/drawingml/2006/main" xmlns:p="http://schemas.openxmlformats.org/presentationml/2006/main" xmlns:r="http://schemas.openxmlformats.org/officeDocument/2006/relationships">
+  <p:cSld>
+    <p:spTree>
+      <p:nvGrpSpPr>
+        <p:cNvPr id="1" name=""/>
+        <p:cNvGrpSpPr/>
+        <p:nvPr/>
+      </p:nvGrpSpPr>
+      <p:grpSpPr/>
+      <p:sp>
+        <p:nvSpPr>
+          <p:cNvPr id="2" name="Rectangle 1"/>
+          <p:cNvSpPr/>
+          <p:nvPr/>
+        </p:nvSpPr>
+        <p:spPr>
+          <a:xfrm>
+            <a:off x="0" y="0"/>
+            <a:ext cx="12191695" cy="6858000"/>
+          </a:xfrm>
+          <a:prstGeom prst="rect">
+            <a:avLst/>
+          </a:prstGeom>
+          <a:solidFill>
+            <a:srgbClr val="FFFFFF"/>
+          </a:solidFill>
+          <a:ln>
+            <a:noFill/>
+          </a:ln>
+          <a:effectLst/>
+        </p:spPr>
+        <p:style>
+          <a:lnRef idx="1">
+            <a:schemeClr val="accent1"/>
+          </a:lnRef>
+          <a:fillRef idx="3">
+            <a:schemeClr val="accent1"/>
+          </a:fillRef>
+          <a:effectRef idx="2">
+            <a:schemeClr val="accent1"/>
+          </a:effectRef>
+          <a:fontRef idx="minor">
+            <a:schemeClr val="lt1"/>
+          </a:fontRef>
+        </p:style>
+        <p:txBody>
+          <a:bodyPr rtlCol="0" anchor="ctr"/>
+          <a:lstStyle/>
+          <a:p>
+            <a:pPr algn="ctr"/>
+          </a:p>
+        </p:txBody>
+      </p:sp>
+      <p:sp>
+        <p:nvSpPr>
+          <p:cNvPr id="3" name="Rectangle 2"/>
+          <p:cNvSpPr/>
+          <p:nvPr/>
+        </p:nvSpPr>
+        <p:spPr>
+          <a:xfrm>
+            <a:off x="0" y="0"/>
+            <a:ext cx="12191695" cy="6858000"/>
+          </a:xfrm>
+          <a:prstGeom prst="rect">
+            <a:avLst/>
+          </a:prstGeom>
+          <a:solidFill>
+            <a:srgbClr val="13335F"/>
+          </a:solidFill>
+          <a:ln>
+            <a:noFill/>
+          </a:ln>
+          <a:effectLst/>
+        </p:spPr>
+        <p:style>
+          <a:lnRef idx="1">
+            <a:schemeClr val="accent1"/>
+          </a:lnRef>
+          <a:fillRef idx="3">
+            <a:schemeClr val="accent1"/>
+          </a:fillRef>
+          <a:effectRef idx="2">
+            <a:schemeClr val="accent1"/>
+          </a:effectRef>
+          <a:fontRef idx="minor">
+            <a:schemeClr val="lt1"/>
+          </a:fontRef>
+        </p:style>
+        <p:txBody>
+          <a:bodyPr rtlCol="0" anchor="ctr"/>
+          <a:lstStyle/>
+          <a:p>
+            <a:pPr algn="ctr"/>
+          </a:p>
+        </p:txBody>
+      </p:sp>
+      <p:sp>
+        <p:nvSpPr>
           <p:cNvPr id="4" name="Rectangle 3"/>
           <p:cNvSpPr/>
           <p:nvPr/>
@@ -22934,7 +24192,7 @@
                 </a:solidFill>
                 <a:latin typeface="Malgun Gothic"/>
               </a:rPr>
-              <a:t>한 장 요약 — Key Takeaways</a:t>
+              <a:t>요약</a:t>
             </a:r>
           </a:p>
         </p:txBody>
@@ -23017,13 +24275,13 @@
               </a:spcAft>
             </a:pPr>
             <a:r>
-              <a:rPr sz="1500" b="0" i="0">
+              <a:rPr sz="1450" b="0" i="0">
                 <a:solidFill>
                   <a:srgbClr val="FFFFFF"/>
                 </a:solidFill>
                 <a:latin typeface="Malgun Gothic"/>
               </a:rPr>
-              <a:t>항상 있는 빠른 진단으로 자주 비는 CES를 채우는, 엄격히 인과적인 가상 센서</a:t>
+              <a:t>항상 존재하는 빠른 진단으로 자주 비는 CES를 채우는, 엄격히 인과적인 가상 센서를 구축하였다.</a:t>
             </a:r>
           </a:p>
         </p:txBody>
@@ -23106,13 +24364,13 @@
               </a:spcAft>
             </a:pPr>
             <a:r>
-              <a:rPr sz="1500" b="0" i="0">
+              <a:rPr sz="1450" b="0" i="0">
                 <a:solidFill>
                   <a:srgbClr val="FFFFFF"/>
                 </a:solidFill>
                 <a:latin typeface="Malgun Gothic"/>
               </a:rPr>
-              <a:t>Tᵢ는 미래를 쓰는 PCHIP를 두 모집단 4/4+4/4로 능가 (+0.17~+0.32), 인과 GP는 8/8</a:t>
+              <a:t>Tᵢ는 미래를 읽는 PCHIP를 두 모집단 4/4+4/4로 능가하였고(+0.17~+0.32), 인과 GP는 8/8에서 이겼다.</a:t>
             </a:r>
           </a:p>
         </p:txBody>
@@ -23195,13 +24453,13 @@
               </a:spcAft>
             </a:pPr>
             <a:r>
-              <a:rPr sz="1500" b="0" i="0">
+              <a:rPr sz="1450" b="0" i="0">
                 <a:solidFill>
                   <a:srgbClr val="FFFFFF"/>
                 </a:solidFill>
                 <a:latin typeface="Malgun Gothic"/>
               </a:rPr>
-              <a:t>두 스트레스 생존: 결측 재가중 인과 대비 8/8 · 캠페인 분할 4/4+4/4 (윈도 대조군은 붕괴)</a:t>
+              <a:t>결측 재가중 인과 대비 8/8과 캠페인 분할 4/4+4/4의 두 스트레스를 생존하였다(윈도 대조군은 붕괴).</a:t>
             </a:r>
           </a:p>
         </p:txBody>
@@ -23284,13 +24542,13 @@
               </a:spcAft>
             </a:pPr>
             <a:r>
-              <a:rPr sz="1500" b="0" i="0">
+              <a:rPr sz="1450" b="0" i="0">
                 <a:solidFill>
                   <a:srgbClr val="FFFFFF"/>
                 </a:solidFill>
                 <a:latin typeface="Malgun Gothic"/>
               </a:rPr>
-              <a:t>V_rot는 전역 동률 — 빠른 진단에 회전 정보가 없다는 Tᵢ↔V_rot 비대칭 (발견)</a:t>
+              <a:t>연속 문맥 약 50 ms에서 skill이 포화하며 승리 방전 비율이 0.52→0.66으로 올랐고, 세 계열은 동률이었다.</a:t>
             </a:r>
           </a:p>
         </p:txBody>
@@ -23373,13 +24631,13 @@
               </a:spcAft>
             </a:pPr>
             <a:r>
-              <a:rPr sz="1500" b="0" i="0">
+              <a:rPr sz="1450" b="0" i="0">
                 <a:solidFill>
                   <a:srgbClr val="FFFFFF"/>
                 </a:solidFill>
                 <a:latin typeface="Malgun Gothic"/>
               </a:rPr>
-              <a:t>가치는 peak·간극에 집중 · CPU 1-step p99 1.61 ms · conformal 32/32 셀 우위</a:t>
+              <a:t>V_rot는 전역 동률이며 우위는 회전이 변하는 방전에 집중되었다. 구동 변수의 부재가 원인이다.</a:t>
             </a:r>
           </a:p>
         </p:txBody>
@@ -23462,13 +24720,13 @@
               </a:spcAft>
             </a:pPr>
             <a:r>
-              <a:rPr sz="1500" b="0" i="0">
+              <a:rPr sz="1450" b="0" i="0">
                 <a:solidFill>
                   <a:srgbClr val="FFFFFF"/>
                 </a:solidFill>
                 <a:latin typeface="Malgun Gothic"/>
               </a:rPr>
-              <a:t>상한은 추정기가 아니라 정보: 21k = 백본(컷), 폭 26× 평평 → 다음은 데이터 레버 3종</a:t>
+              <a:t>비용은 연산자 수(2–3 µs/op)로 정해지며, 상한은 정보에 있다. 다음 단계는 데이터 레버 3종이다.</a:t>
             </a:r>
           </a:p>
         </p:txBody>
@@ -23783,7 +25041,7 @@
           <a:noFill/>
         </p:spPr>
         <p:txBody>
-          <a:bodyPr wrap="square" anchor="t" lIns="25400" rIns="25400" tIns="12700" bIns="12700">
+          <a:bodyPr wrap="square" anchor="ctr" lIns="25400" rIns="25400" tIns="12700" bIns="12700">
             <a:spAutoFit/>
           </a:bodyPr>
           <a:lstStyle/>
@@ -23806,7 +25064,7 @@
                 </a:solidFill>
                 <a:latin typeface="Malgun Gothic"/>
               </a:rPr>
-              <a:t>CES는 왜, 얼마나 비는가 — 그리고 무엇으로 채우나</a:t>
+              <a:t>CES 결측의 원인과 규모, 그리고 이를 채울 입력</a:t>
             </a:r>
           </a:p>
         </p:txBody>
@@ -23985,7 +25243,7 @@
                 </a:solidFill>
                 <a:latin typeface="Malgun Gothic"/>
               </a:rPr>
-              <a:t>CES는 pedestal 물리의 핵심량 Tᵢ · V_rot를 주지만 </a:t>
+              <a:t>CES는 페데스탈 물리의 핵심량 Tᵢ · V_rot를 제공하지만 </a:t>
             </a:r>
             <a:r>
               <a:rPr sz="1400" b="1" i="0">
@@ -23994,7 +25252,7 @@
                 </a:solidFill>
                 <a:latin typeface="Malgun Gothic"/>
               </a:rPr>
-              <a:t>광자 적분이 필요해 느리고 자주 빈다</a:t>
+              <a:t>광자 적분이 필요하여 느리고 자주 결측된다</a:t>
             </a:r>
             <a:r>
               <a:rPr sz="1400" b="0" i="0">
@@ -24003,7 +25261,7 @@
                 </a:solidFill>
                 <a:latin typeface="Malgun Gothic"/>
               </a:rPr>
-              <a:t>. 반면 빠른 진단은 같은 10 ms 격자에서 결측 없이 측정된다.</a:t>
+              <a:t>. 빠른 진단은 같은 10 ms 격자에서 결측 없이 측정된다.</a:t>
             </a:r>
           </a:p>
         </p:txBody>
@@ -24181,7 +25439,7 @@
                 </a:solidFill>
                 <a:latin typeface="Malgun Gothic"/>
               </a:rPr>
-              <a:t>CES (타겟) — Tᵢ · V_rot, 느리고 자주 결측</a:t>
+              <a:t>CES(타깃)는 Tᵢ · V_rot를 제공하며 느리고 자주 결측된다.</a:t>
             </a:r>
           </a:p>
           <a:p>
@@ -24203,7 +25461,7 @@
                 </a:solidFill>
                 <a:latin typeface="Malgun Gothic"/>
               </a:rPr>
-              <a:t>BES 9 ch — 밀도요동 nₑ 공간구조 → Tᵢ 단서</a:t>
+              <a:t>BES 9 ch는 밀도요동 nₑ의 공간 구조를 제공하여 Tᵢ의 단서가 된다.</a:t>
             </a:r>
           </a:p>
           <a:p>
@@ -24225,7 +25483,7 @@
                 </a:solidFill>
                 <a:latin typeface="Malgun Gothic"/>
               </a:rPr>
-              <a:t>ECEI 4 ch — 전자온도 Tₑ 2D 영상 → Tᵢ 단서</a:t>
+              <a:t>ECEI 4 ch는 전자온도 Tₑ의 2D 영상을 제공하여 Tᵢ의 단서가 된다.</a:t>
             </a:r>
           </a:p>
           <a:p>
@@ -24247,7 +25505,7 @@
                 </a:solidFill>
                 <a:latin typeface="Malgun Gothic"/>
               </a:rPr>
-              <a:t>   (물리 경로: 충돌 e–i 결합)</a:t>
+              <a:t>물리 경로는 충돌 e–i 결합이다.</a:t>
             </a:r>
           </a:p>
           <a:p>
@@ -24269,7 +25527,7 @@
                 </a:solidFill>
                 <a:latin typeface="Malgun Gothic"/>
               </a:rPr>
-              <a:t>Mirnov 2 ch — kHz dB/dt를 100 Hz로 데시메이트</a:t>
+              <a:t>Mirnov 2 ch는 kHz dB/dt를 100 Hz로 데시메이트한 신호이며,</a:t>
             </a:r>
           </a:p>
           <a:p>
@@ -24291,7 +25549,7 @@
                 </a:solidFill>
                 <a:latin typeface="Malgun Gothic"/>
               </a:rPr>
-              <a:t>   lag-1 자기상관 -0.009 (BES +0.568)</a:t>
+              <a:t>lag-1 자기상관이 -0.009(BES +0.568)로 이 격자에서 백색잡음이다.</a:t>
             </a:r>
           </a:p>
           <a:p>
@@ -24313,7 +25571,7 @@
                 </a:solidFill>
                 <a:latin typeface="Malgun Gothic"/>
               </a:rPr>
-              <a:t>→ 빠른 진단은 격자에서 항상 100% 측정된다</a:t>
+              <a:t>빠른 진단은 격자에서 100% 측정된다.</a:t>
             </a:r>
           </a:p>
         </p:txBody>
@@ -24671,7 +25929,7 @@
                 </a:solidFill>
                 <a:latin typeface="Malgun Gothic"/>
               </a:rPr>
-              <a:t>+ held(직전값 복사) CES_VT 41.1 %</a:t>
+              <a:t>held(직전값 복사) CES_VT 41.1 %가 더해진다</a:t>
             </a:r>
           </a:p>
           <a:p>
@@ -24693,7 +25951,7 @@
                 </a:solidFill>
                 <a:latin typeface="Malgun Gothic"/>
               </a:rPr>
-              <a:t>→ V_rot 실질 무정보 65.0 %</a:t>
+              <a:t>V_rot 실질 무정보 비율은 65.0 %이다</a:t>
             </a:r>
           </a:p>
         </p:txBody>
@@ -24722,26 +25980,26 @@
           <a:p>
             <a:pPr algn="l">
               <a:lnSpc>
-                <a:spcPct val="115000"/>
-              </a:lnSpc>
-              <a:spcBef>
-                <a:spcPts val="0"/>
-              </a:spcBef>
-              <a:spcAft>
-                <a:spcPts val="200"/>
-              </a:spcAft>
-            </a:pPr>
-            <a:r>
-              <a:rPr sz="1150" b="0" i="0">
+                <a:spcPct val="112000"/>
+              </a:lnSpc>
+              <a:spcBef>
+                <a:spcPts val="0"/>
+              </a:spcBef>
+              <a:spcAft>
+                <a:spcPts val="100"/>
+              </a:spcAft>
+            </a:pPr>
+            <a:r>
+              <a:rPr sz="1100" b="0" i="0">
                 <a:solidFill>
                   <a:srgbClr val="FFFFFF"/>
                 </a:solidFill>
                 <a:latin typeface="Malgun Gothic"/>
               </a:rPr>
-              <a:t>· 두 타겟이 </a:t>
-            </a:r>
-            <a:r>
-              <a:rPr sz="1150" b="1" i="0">
+              <a:t>· 두 타깃은 </a:t>
+            </a:r>
+            <a:r>
+              <a:rPr sz="1100" b="1" i="0">
                 <a:solidFill>
                   <a:srgbClr val="E8743B"/>
                 </a:solidFill>
@@ -24750,57 +26008,57 @@
               <a:t>독립적으로</a:t>
             </a:r>
             <a:r>
-              <a:rPr sz="1150" b="0" i="0">
+              <a:rPr sz="1100" b="0" i="0">
                 <a:solidFill>
                   <a:srgbClr val="FFFFFF"/>
                 </a:solidFill>
                 <a:latin typeface="Malgun Gothic"/>
               </a:rPr>
-              <a:t> 결측 → 타겟별 처리 필요</a:t>
-            </a:r>
-          </a:p>
-          <a:p>
-            <a:pPr algn="l">
-              <a:lnSpc>
-                <a:spcPct val="115000"/>
-              </a:lnSpc>
-              <a:spcBef>
-                <a:spcPts val="0"/>
-              </a:spcBef>
-              <a:spcAft>
-                <a:spcPts val="200"/>
-              </a:spcAft>
-            </a:pPr>
-            <a:r>
-              <a:rPr sz="1150" b="0" i="0">
+              <a:t> 결측된다(타깃별 처리).</a:t>
+            </a:r>
+          </a:p>
+          <a:p>
+            <a:pPr algn="l">
+              <a:lnSpc>
+                <a:spcPct val="112000"/>
+              </a:lnSpc>
+              <a:spcBef>
+                <a:spcPts val="0"/>
+              </a:spcBef>
+              <a:spcAft>
+                <a:spcPts val="100"/>
+              </a:spcAft>
+            </a:pPr>
+            <a:r>
+              <a:rPr sz="1100" b="0" i="0">
                 <a:solidFill>
                   <a:srgbClr val="FFFFFF"/>
                 </a:solidFill>
                 <a:latin typeface="Malgun Gothic"/>
               </a:rPr>
-              <a:t>· 결측은 저 SNR · ELM · 천이에 몰린다</a:t>
-            </a:r>
-          </a:p>
-          <a:p>
-            <a:pPr algn="l">
-              <a:lnSpc>
-                <a:spcPct val="115000"/>
-              </a:lnSpc>
-              <a:spcBef>
-                <a:spcPts val="0"/>
-              </a:spcBef>
-              <a:spcAft>
-                <a:spcPts val="200"/>
-              </a:spcAft>
-            </a:pPr>
-            <a:r>
-              <a:rPr sz="1150" b="0" i="0">
+              <a:t>· 결측은 저 SNR · ELM · 천이에 집중된다.</a:t>
+            </a:r>
+          </a:p>
+          <a:p>
+            <a:pPr algn="l">
+              <a:lnSpc>
+                <a:spcPct val="112000"/>
+              </a:lnSpc>
+              <a:spcBef>
+                <a:spcPts val="0"/>
+              </a:spcBef>
+              <a:spcAft>
+                <a:spcPts val="100"/>
+              </a:spcAft>
+            </a:pPr>
+            <a:r>
+              <a:rPr sz="1100" b="0" i="0">
                 <a:solidFill>
                   <a:srgbClr val="E8ECF1"/>
                 </a:solidFill>
                 <a:latin typeface="Malgun Gothic"/>
               </a:rPr>
-              <a:t>  → MNAR: 관측점 skill은 낙관적 상한</a:t>
+              <a:t>  MNAR이므로 관측점 skill은 낙관적 상한이다.</a:t>
             </a:r>
           </a:p>
         </p:txBody>
@@ -24935,7 +26193,7 @@
                 </a:solidFill>
                 <a:latin typeface="Malgun Gothic"/>
               </a:rPr>
-              <a:t>CES가 결측된 10 ms 시점에서, 동시각 빠른 진단 + 과거 CES 이력만으로 CES 자체의 시간 보간이 복원할 수 없는 정보를 회복할 수 있는가?</a:t>
+              <a:t>CES가 결측된 10 ms 시점에서, 동시각 빠른 진단과 과거 CES 이력만으로 CES 자체의 시간 보간이 복원할 수 없는 정보를 회복할 수 있는가를 묻는다.</a:t>
             </a:r>
           </a:p>
           <a:p>
@@ -24957,7 +26215,7 @@
                 </a:solidFill>
                 <a:latin typeface="Malgun Gothic"/>
               </a:rPr>
-              <a:t>핵심 비대칭(미리보기): 빠른 진단은 Tᵢ 정보는 운반하지만 V_rot 정보는 거의 운반하지 않는다 — 결과에서 그대로 확인된다.</a:t>
+              <a:t>핵심 비대칭의 예고: 빠른 진단은 Tᵢ 정보는 운반하지만 V_rot 정보는 거의 운반하지 않는다고 예측되었고, 결과에서 확인되었다.</a:t>
             </a:r>
           </a:p>
         </p:txBody>
@@ -25174,7 +26432,7 @@
           <a:noFill/>
         </p:spPr>
         <p:txBody>
-          <a:bodyPr wrap="square" anchor="t" lIns="25400" rIns="25400" tIns="12700" bIns="12700">
+          <a:bodyPr wrap="square" anchor="ctr" lIns="25400" rIns="25400" tIns="12700" bIns="12700">
             <a:spAutoFit/>
           </a:bodyPr>
           <a:lstStyle/>
@@ -25191,13 +26449,13 @@
               </a:spcAft>
             </a:pPr>
             <a:r>
-              <a:rPr sz="2700" b="1" i="0">
+              <a:rPr sz="2100" b="1" i="0">
                 <a:solidFill>
                   <a:srgbClr val="13335F"/>
                 </a:solidFill>
                 <a:latin typeface="Malgun Gothic"/>
               </a:rPr>
-              <a:t>결측 실측 집계: NaN 결측 + held(같은 값 padding)</a:t>
+              <a:t>결측 전수 집계: NaN 결측과 held(직전값 복사)를 합치면 V_rot의 65.0%가 무정보이다</a:t>
             </a:r>
           </a:p>
         </p:txBody>
@@ -25385,7 +26643,7 @@
                 </a:solidFill>
                 <a:latin typeface="Malgun Gothic"/>
               </a:rPr>
-              <a:t>직전 관측값을 그대로 복사한 held 행을 합치면 실질 무정보는 </a:t>
+              <a:t>직전 관측값을 그대로 복사한 held 행을 합치면 실질 무정보 비율은 </a:t>
             </a:r>
             <a:r>
               <a:rPr sz="1450" b="1" i="0">
@@ -25403,7 +26661,7 @@
                 </a:solidFill>
                 <a:latin typeface="Malgun Gothic"/>
               </a:rPr>
-              <a:t> — 전체 641 shot · 247,207 행 전수 집계.</a:t>
+              <a:t>로 나타났다(641 shot · 247,207행 전수 집계).</a:t>
             </a:r>
           </a:p>
         </p:txBody>
@@ -27279,7 +28537,7 @@
                 </a:solidFill>
                 <a:latin typeface="Malgun Gothic"/>
               </a:rPr>
-              <a:t>왜 중요한가: </a:t>
+              <a:t>의의: </a:t>
             </a:r>
             <a:r>
               <a:rPr sz="1200" b="0" i="0">
@@ -27288,7 +28546,7 @@
                 </a:solidFill>
                 <a:latin typeface="Malgun Gothic"/>
               </a:rPr>
-              <a:t>held 행은 baseline(persistence·보간)이 오차 ≈0으로 맞히는 ‘공짜 정답’이다.</a:t>
+              <a:t>held 행은 persistence와 보간이 오차 0에 가깝게 맞히는 행이므로, 남겨 두면 기준선의 점수가 부풀려진다.</a:t>
             </a:r>
           </a:p>
           <a:p>
@@ -27319,7 +28577,7 @@
                 </a:solidFill>
                 <a:latin typeface="Malgun Gothic"/>
               </a:rPr>
-              <a:t>지도 타겟·이력 입력·정규화 통계·모든 기준선의 보간 앵커에서 전부 제거 — 진짜 측정만 채점한다.</a:t>
+              <a:t>지도 타깃·이력 입력·정규화 통계·모든 기준선의 보간 앵커에서 held를 동일하게 제거하고 실제 측정만 채점하였다.</a:t>
             </a:r>
           </a:p>
           <a:p>
@@ -27350,7 +28608,7 @@
                 </a:solidFill>
                 <a:latin typeface="Malgun Gothic"/>
               </a:rPr>
-              <a:t>연속 블록 안에서 직전 관측값과 부동소수점까지 동일한 행. CES_TI는 226,991행 중 단 1행이다.</a:t>
+              <a:t>연속 블록 안에서 직전 관측값과 부동소수점까지 동일한 행으로 정의하였다. CES_TI는 226,991행 중 1행에 그쳤다.</a:t>
             </a:r>
           </a:p>
         </p:txBody>
@@ -27567,7 +28825,7 @@
           <a:noFill/>
         </p:spPr>
         <p:txBody>
-          <a:bodyPr wrap="square" anchor="t" lIns="25400" rIns="25400" tIns="12700" bIns="12700">
+          <a:bodyPr wrap="square" anchor="ctr" lIns="25400" rIns="25400" tIns="12700" bIns="12700">
             <a:spAutoFit/>
           </a:bodyPr>
           <a:lstStyle/>
@@ -27584,13 +28842,13 @@
               </a:spcAft>
             </a:pPr>
             <a:r>
-              <a:rPr sz="2700" b="1" i="0">
+              <a:rPr sz="2100" b="1" i="0">
                 <a:solidFill>
                   <a:srgbClr val="13335F"/>
                 </a:solidFill>
                 <a:latin typeface="Malgun Gothic"/>
               </a:rPr>
-              <a:t>데이터 품질 감사: Tᵢ 피팅 실패와 두 공동 1차 모집단</a:t>
+              <a:t>데이터 품질 감사: Tᵢ 피팅 실패의 처리 방식을 두 공동 1차 모집단으로 사전등록하였다</a:t>
             </a:r>
           </a:p>
         </p:txBody>
@@ -27763,16 +29021,16 @@
               </a:spcAft>
             </a:pPr>
             <a:r>
-              <a:rPr sz="1450" b="0" i="0">
+              <a:rPr sz="1400" b="0" i="0">
                 <a:solidFill>
                   <a:srgbClr val="222B35"/>
                 </a:solidFill>
                 <a:latin typeface="Malgun Gothic"/>
               </a:rPr>
-              <a:t>관측 Tᵢ의 p99 = 2,089 eV · p99.9 = 9,601 eV · 최대 14,984 eV. </a:t>
-            </a:r>
-            <a:r>
-              <a:rPr sz="1450" b="1" i="0">
+              <a:t>관측 Tᵢ의 p99는 2,089 eV, p99.9는 9,601 eV, 최대는 14,984 eV이다. </a:t>
+            </a:r>
+            <a:r>
+              <a:rPr sz="1400" b="1" i="0">
                 <a:solidFill>
                   <a:srgbClr val="C0392B"/>
                 </a:solidFill>
@@ -27911,7 +29169,7 @@
                 </a:solidFill>
                 <a:latin typeface="Malgun Gothic"/>
               </a:rPr>
-              <a:t>실측 — &gt;3 keV는 무엇인가</a:t>
+              <a:t>실측 — &gt; 3 keV 행의 구조</a:t>
             </a:r>
           </a:p>
         </p:txBody>
@@ -27956,7 +29214,7 @@
                 </a:solidFill>
                 <a:latin typeface="Malgun Gothic"/>
               </a:rPr>
-              <a:t>1,197행(0.53%) = 951 run / 274 방전</a:t>
+              <a:t>1,197행(0.53%)이 951개 run, 274개 방전에 분포한다.</a:t>
             </a:r>
           </a:p>
           <a:p>
@@ -27978,7 +29236,7 @@
                 </a:solidFill>
                 <a:latin typeface="Malgun Gothic"/>
               </a:rPr>
-              <a:t>run의 85%는 단일 행, 5행 이상 지속은 2%</a:t>
+              <a:t>run의 85%는 단일 행이고 5행 이상 지속은 2%에 그친다.</a:t>
             </a:r>
           </a:p>
           <a:p>
@@ -28000,7 +29258,7 @@
                 </a:solidFill>
                 <a:latin typeface="Malgun Gothic"/>
               </a:rPr>
-              <a:t>run 정점 = 관측 이웃 평균의 13× (IQR 6–26×)</a:t>
+              <a:t>run 정점은 관측 이웃 평균의 13배(IQR 6–26배)이다.</a:t>
             </a:r>
           </a:p>
           <a:p>
@@ -28022,7 +29280,7 @@
                 </a:solidFill>
                 <a:latin typeface="Malgun Gothic"/>
               </a:rPr>
-              <a:t>어떤 방법으로도 예측 불가 + 보간 앵커를 오염시킴</a:t>
+              <a:t>어떤 방법으로도 예측되지 않으며 보간 앵커를 오염시킨다.</a:t>
             </a:r>
           </a:p>
         </p:txBody>
@@ -28155,7 +29413,7 @@
                 </a:solidFill>
                 <a:latin typeface="Malgun Gothic"/>
               </a:rPr>
-              <a:t>대응 — 두 대응 모두 비판 가능하다</a:t>
+              <a:t>대응 — 두 처리 모두 비판이 가능하다</a:t>
             </a:r>
           </a:p>
         </p:txBody>
@@ -28200,7 +29458,7 @@
                 </a:solidFill>
                 <a:latin typeface="Malgun Gothic"/>
               </a:rPr>
-              <a:t>제거하면: “어려운 행을 없앴다”는 비판</a:t>
+              <a:t>제거하면 어려운 행을 없앴다는 비판을 받는다.</a:t>
             </a:r>
           </a:p>
           <a:p>
@@ -28222,7 +29480,7 @@
                 </a:solidFill>
                 <a:latin typeface="Malgun Gothic"/>
               </a:rPr>
-              <a:t>유지하면: 스파이크 앵커가 오프라인 기준선을 핸디캡</a:t>
+              <a:t>유지하면 스파이크 앵커가 오프라인 기준선을 불리하게 한다.</a:t>
             </a:r>
           </a:p>
           <a:p>
@@ -28244,7 +29502,7 @@
                 </a:solidFill>
                 <a:latin typeface="Malgun Gothic"/>
               </a:rPr>
-              <a:t>→ 두 공동 1차 모집단을 사전등록:</a:t>
+              <a:t>따라서 두 모집단을 공동 1차로 사전등록하였다.</a:t>
             </a:r>
           </a:p>
           <a:p>
@@ -28266,7 +29524,7 @@
                 </a:solidFill>
                 <a:latin typeface="Malgun Gothic"/>
               </a:rPr>
-              <a:t>   컷(적재 시 결측 처리, 전 arm 동일) / 포함(컷 없음)</a:t>
+              <a:t>컷(적재 시 결측 처리, 전 arm 동일) / 포함(컷 없음)이다.</a:t>
             </a:r>
           </a:p>
         </p:txBody>
@@ -28364,7 +29622,7 @@
                 </a:solidFill>
                 <a:latin typeface="Malgun Gothic"/>
               </a:rPr>
-              <a:t>무조건부 주장은 두 모집단 모두에서 성립할 때만 한다. 한쪽에서만 성립하면 모집단을 명시해 보고한다.</a:t>
+              <a:t>무조건부 주장은 두 모집단 모두에서 성립할 때만 한다. 한쪽에서만 성립하면 모집단을 명시하여 보고한다.</a:t>
             </a:r>
           </a:p>
         </p:txBody>
@@ -28409,7 +29667,7 @@
                 </a:solidFill>
                 <a:latin typeface="Malgun Gothic"/>
               </a:rPr>
-              <a:t>●  문턱은 무관하다: 2.5 / 3 / 4 keV 재학습 → Tᵢ +0.230 / +0.236 / +0.232, PR4 4/4 전부</a:t>
+              <a:t>●  문턱 민감도는 없었다. 2.5 / 3 / 4 keV로 재학습한 Tᵢ skill은 +0.230 / +0.236 / +0.232이며 PR4는 전부 4/4였다.</a:t>
             </a:r>
           </a:p>
           <a:p>
@@ -28431,7 +29689,7 @@
                 </a:solidFill>
                 <a:latin typeface="Malgun Gothic"/>
               </a:rPr>
-              <a:t>●  값 컷은 일방향 프록시 — 하향 dip 4,965행은 손대지 않고, ≥2× 상향 이상치의 19%만 제거</a:t>
+              <a:t>●  값 컷은 일방향 프록시이다. 하향 dip 4,965행은 손대지 않고, 2배 이상 상향 이상치의 19%만 제거한다.</a:t>
             </a:r>
           </a:p>
           <a:p>
@@ -28453,7 +29711,7 @@
                 </a:solidFill>
                 <a:latin typeface="Malgun Gothic"/>
               </a:rPr>
-              <a:t>●  V_rot 스파이크(&gt;1,000 km/s 119행 / 16 방전, 101행은 한 방전 한 블록)는 컷 없이 두되 SSE 비중을 병기</a:t>
+              <a:t>●  V_rot 스파이크(&gt; 1,000 km/s 119행 / 16 방전, 101행은 한 방전의 한 블록)는 컷 없이 두고 SSE 비중을 병기한다.</a:t>
             </a:r>
           </a:p>
         </p:txBody>
@@ -28670,7 +29928,7 @@
           <a:noFill/>
         </p:spPr>
         <p:txBody>
-          <a:bodyPr wrap="square" anchor="t" lIns="25400" rIns="25400" tIns="12700" bIns="12700">
+          <a:bodyPr wrap="square" anchor="ctr" lIns="25400" rIns="25400" tIns="12700" bIns="12700">
             <a:spAutoFit/>
           </a:bodyPr>
           <a:lstStyle/>
@@ -28687,13 +29945,13 @@
               </a:spcAft>
             </a:pPr>
             <a:r>
-              <a:rPr sz="2700" b="1" i="0">
+              <a:rPr sz="2100" b="1" i="0">
                 <a:solidFill>
                   <a:srgbClr val="13335F"/>
                 </a:solidFill>
                 <a:latin typeface="Malgun Gothic"/>
               </a:rPr>
-              <a:t>의도적으로 어려운 평가 bar: 미래를 보는 보간 + 인과 GP</a:t>
+              <a:t>평가 기준선: 미래를 읽는 오프라인 보간과 배치 가능한 최강 인과 기준선을 함께 두었다</a:t>
             </a:r>
           </a:p>
         </p:txBody>
@@ -28890,7 +30148,7 @@
                 </a:solidFill>
                 <a:latin typeface="Malgun Gothic"/>
               </a:rPr>
-              <a:t>과 비교한다 — 타겟 주변의 과거+미래 CES를 모두 사용한다.</a:t>
+              <a:t>과 비교하였다. 이 보간들은 타깃 주변의 과거와 미래 CES를 모두 사용한다.</a:t>
             </a:r>
           </a:p>
         </p:txBody>
@@ -29023,7 +30281,7 @@
                 </a:solidFill>
                 <a:latin typeface="Malgun Gothic"/>
               </a:rPr>
-              <a:t>우리 모델 (causal)</a:t>
+              <a:t>본 모델 (인과)</a:t>
             </a:r>
           </a:p>
         </p:txBody>
@@ -29068,7 +30326,7 @@
                 </a:solidFill>
                 <a:latin typeface="Malgun Gothic"/>
               </a:rPr>
-              <a:t>●  타겟 시점까지의 빠른 진단 (BES·ECEI·Mirnov)</a:t>
+              <a:t>●  타깃 시점까지의 빠른 진단(BES·ECEI·Mirnov)을 읽는다.</a:t>
             </a:r>
           </a:p>
           <a:p>
@@ -29090,7 +30348,7 @@
                 </a:solidFill>
                 <a:latin typeface="Malgun Gothic"/>
               </a:rPr>
-              <a:t>●  과거 CES 이력 — 도달거리는 세그먼트 전체</a:t>
+              <a:t>●  과거 CES 이력을 세그먼트 전체 범위에서 읽는다.</a:t>
             </a:r>
           </a:p>
           <a:p>
@@ -29112,7 +30370,7 @@
                 </a:solidFill>
                 <a:latin typeface="Malgun Gothic"/>
               </a:rPr>
-              <a:t>●  미래 CES는 전혀 보지 않음</a:t>
+              <a:t>●  미래 CES는 전혀 읽지 않는다.</a:t>
             </a:r>
           </a:p>
         </p:txBody>
@@ -29245,7 +30503,7 @@
                 </a:solidFill>
                 <a:latin typeface="Malgun Gothic"/>
               </a:rPr>
-              <a:t>보간 baseline (오프라인)</a:t>
+              <a:t>보간 기준선 (오프라인)</a:t>
             </a:r>
           </a:p>
         </p:txBody>
@@ -29290,7 +30548,7 @@
                 </a:solidFill>
                 <a:latin typeface="Malgun Gothic"/>
               </a:rPr>
-              <a:t>●  타겟 양쪽의 과거 + 미래 CES 이웃 사용</a:t>
+              <a:t>●  타깃 양쪽의 과거와 미래 CES 이웃을 사용한다.</a:t>
             </a:r>
           </a:p>
           <a:p>
@@ -29312,7 +30570,7 @@
                 </a:solidFill>
                 <a:latin typeface="Malgun Gothic"/>
               </a:rPr>
-              <a:t>●  PCHIP(단조 3차) = 사전등록 headline 기준선</a:t>
+              <a:t>●  PCHIP(단조 3차)이 사전등록된 headline 기준선이다.</a:t>
             </a:r>
           </a:p>
           <a:p>
@@ -29334,7 +30592,7 @@
                 </a:solidFill>
                 <a:latin typeface="Malgun Gothic"/>
               </a:rPr>
-              <a:t>●  세그먼트 경계는 넘지 않음 → persistence 폴백</a:t>
+              <a:t>●  세그먼트 경계를 넘지 않으며, 넘어야 하면 persistence로 대체한다.</a:t>
             </a:r>
           </a:p>
         </p:txBody>
@@ -29489,7 +30747,7 @@
                 </a:solidFill>
                 <a:latin typeface="Malgun Gothic"/>
               </a:rPr>
-              <a:t>같은 GP를 과거 이웃 16개로 제한(NaN 조건 동일 → 모집단 불변). seed 42·컷에서 Tᵢ RMSE 164.3 vs persistence 197.2 — “배치 가능한 모든 인과 방법을 이긴다”는 이 기준선으로 판정한다.</a:t>
+              <a:t>같은 GP를 과거 이웃 16개로 제한하였다(NaN 조건 동일, 모집단 불변). seed 42·컷에서 Tᵢ RMSE는 164.3으로 persistence 197.2보다 낮다. ‘배치 가능한 모든 인과 방법을 이긴다’는 주장은 이 기준선으로 판정한다.</a:t>
             </a:r>
           </a:p>
         </p:txBody>
@@ -29578,7 +30836,7 @@
                 </a:solidFill>
                 <a:latin typeface="Malgun Gothic"/>
               </a:rPr>
-              <a:t>왜 이 정보 비대칭이 핵심인가</a:t>
+              <a:t>정보 비대칭의 의미</a:t>
             </a:r>
           </a:p>
           <a:p>
@@ -29600,7 +30858,7 @@
                 </a:solidFill>
                 <a:latin typeface="Malgun Gothic"/>
               </a:rPr>
-              <a:t>미래까지 보는 보간을 인과 모델이 이긴다면, 빠른 진단이 시간 보간으로는 얻을 수 없는 CES 정보를 운반한다는 강력한 증거다.</a:t>
+              <a:t>미래까지 읽는 보간을 인과 모델이 이긴다면, 빠른 진단이 시간 보간으로는 얻을 수 없는 CES 정보를 운반한다는 강한 증거가 된다.</a:t>
             </a:r>
           </a:p>
         </p:txBody>
@@ -29817,7 +31075,7 @@
           <a:noFill/>
         </p:spPr>
         <p:txBody>
-          <a:bodyPr wrap="square" anchor="t" lIns="25400" rIns="25400" tIns="12700" bIns="12700">
+          <a:bodyPr wrap="square" anchor="ctr" lIns="25400" rIns="25400" tIns="12700" bIns="12700">
             <a:spAutoFit/>
           </a:bodyPr>
           <a:lstStyle/>
@@ -29840,7 +31098,7 @@
                 </a:solidFill>
                 <a:latin typeface="Malgun Gothic"/>
               </a:rPr>
-              <a:t>데이터 계약 — No-Fake-Data · held 전면 제거 · 누수 삼중 차단</a:t>
+              <a:t>데이터 계약: No-Fake-Data · held 전면 제거 · 누수 삼중 차단</a:t>
             </a:r>
           </a:p>
         </p:txBody>
@@ -30003,7 +31261,7 @@
           <a:p>
             <a:pPr algn="l">
               <a:lnSpc>
-                <a:spcPct val="114000"/>
+                <a:spcPct val="112000"/>
               </a:lnSpc>
               <a:spcBef>
                 <a:spcPts val="0"/>
@@ -30013,22 +31271,22 @@
               </a:spcAft>
             </a:pPr>
             <a:r>
-              <a:rPr sz="1300" b="0" i="0">
+              <a:rPr sz="1250" b="0" i="0">
                 <a:solidFill>
                   <a:srgbClr val="222B35"/>
                 </a:solidFill>
                 <a:latin typeface="Malgun Gothic"/>
               </a:rPr>
-              <a:t>641 방전(shot 30801–32751) · 10 ms 공통 격자 · 총 247,207행. 세그먼트는 ≥0.5 s 간극에서 분리되고 전형적 파일은 주 세그먼트 1개(중앙값 301행 ≈ 3.0 s) — 모델 입력도 보간도 이 경계를 넘지 않는다. </a:t>
-            </a:r>
-            <a:r>
-              <a:rPr sz="1300" b="1" i="0">
+              <a:t>641 방전(shot 30801–32751), 10 ms 격자, 247,207행이다. 세그먼트는 0.5 s 이상의 간극에서 분리되고 전형적 파일은 주 세그먼트 1개(중앙값 301행 ≈ 3.0 s)이며, 모델 입력도 보간도 이 경계를 넘지 않는다. </a:t>
+            </a:r>
+            <a:r>
+              <a:rPr sz="1250" b="1" i="0">
                 <a:solidFill>
                   <a:srgbClr val="13335F"/>
                 </a:solidFill>
                 <a:latin typeface="Malgun Gothic"/>
               </a:rPr>
-              <a:t>TEST(seed 42, 컷): Tᵢ 32,589행 / 96 방전 · V_rot 10,463행 / 60 방전 — 선택이 끝날 때까지 봉인.</a:t>
+              <a:t>TEST(seed 42, 컷)는 Tᵢ 32,589행 / 96 방전, V_rot 10,463행 / 60 방전이며 선택이 끝날 때까지 봉인되었다.</a:t>
             </a:r>
           </a:p>
         </p:txBody>
@@ -30206,7 +31464,7 @@
                 </a:solidFill>
                 <a:latin typeface="Malgun Gothic"/>
               </a:rPr>
-              <a:t>학습 행을 만들려고 타겟을 대체(impute)하지 않음</a:t>
+              <a:t>학습 행을 만들기 위해 타깃을 대체(impute)하지 않았다.</a:t>
             </a:r>
           </a:p>
           <a:p>
@@ -30228,7 +31486,7 @@
                 </a:solidFill>
                 <a:latin typeface="Malgun Gothic"/>
               </a:rPr>
-              <a:t>윈도: 진단 입력 완전 + 타겟 ≥1개 관측된 행만 사용</a:t>
+              <a:t>윈도는 진단 입력이 완전하고 타깃이 1개 이상 관측된 행만 쓴다.</a:t>
             </a:r>
           </a:p>
           <a:p>
@@ -30250,7 +31508,7 @@
                 </a:solidFill>
                 <a:latin typeface="Malgun Gothic"/>
               </a:rPr>
-              <a:t>시퀀스: 라벨 없는 행은 맥락으로만 기여</a:t>
+              <a:t>시퀀스는 라벨 없는 행을 맥락으로만 쓴다.</a:t>
             </a:r>
           </a:p>
           <a:p>
@@ -30272,7 +31530,7 @@
                 </a:solidFill>
                 <a:latin typeface="Malgun Gothic"/>
               </a:rPr>
-              <a:t>어느 프레이밍도 타겟 행 자신의 값을 읽지 않는다</a:t>
+              <a:t>어느 프레이밍도 타깃 행 자신의 값을 읽지 않는다.</a:t>
             </a:r>
           </a:p>
         </p:txBody>
@@ -30405,7 +31663,7 @@
                 </a:solidFill>
                 <a:latin typeface="Malgun Gothic"/>
               </a:rPr>
-              <a:t>② 타겟별 masked loss</a:t>
+              <a:t>② 타깃별 masked loss</a:t>
             </a:r>
           </a:p>
         </p:txBody>
@@ -30450,7 +31708,7 @@
                 </a:solidFill>
                 <a:latin typeface="Malgun Gothic"/>
               </a:rPr>
-              <a:t>L = Σ m·(예측 - 실측)² / Σ m   (m = 타겟별 관측 마스크)</a:t>
+              <a:t>L = Σ m·(예측 - 실측)² / Σ m 이며 m은 타깃별 관측 마스크이다.</a:t>
             </a:r>
           </a:p>
           <a:p>
@@ -30472,7 +31730,7 @@
                 </a:solidFill>
                 <a:latin typeface="Malgun Gothic"/>
               </a:rPr>
-              <a:t>한쪽 타겟만 관측된 행도 그 타겟은 학습에 기여</a:t>
+              <a:t>한쪽 타깃만 관측된 행도 그 타깃의 학습에 기여한다.</a:t>
             </a:r>
           </a:p>
           <a:p>
@@ -30494,7 +31752,7 @@
                 </a:solidFill>
                 <a:latin typeface="Malgun Gothic"/>
               </a:rPr>
-              <a:t>두-타겟-필수 필터는 라벨 행의 ≈28%를 조용히 버림</a:t>
+              <a:t>두 타깃 필수 필터는 라벨 행의 약 28%를 버렸었다.</a:t>
             </a:r>
           </a:p>
           <a:p>
@@ -30516,7 +31774,7 @@
                 </a:solidFill>
                 <a:latin typeface="Malgun Gothic"/>
               </a:rPr>
-              <a:t>→ 이를 제거한 것은 순수한 데이터 이득</a:t>
+              <a:t>이 필터의 제거는 순수한 데이터 이득이다.</a:t>
             </a:r>
           </a:p>
         </p:txBody>
@@ -30694,7 +31952,7 @@
                 </a:solidFill>
                 <a:latin typeface="Malgun Gothic"/>
               </a:rPr>
-              <a:t>파일(shot) 단위 분할 — 인접 행 자기상관 차단</a:t>
+              <a:t>파일(shot) 단위로 분할하여 인접 행의 자기상관 누수를 막았다.</a:t>
             </a:r>
           </a:p>
           <a:p>
@@ -30716,7 +31974,7 @@
                 </a:solidFill>
                 <a:latin typeface="Malgun Gothic"/>
               </a:rPr>
-              <a:t>학습 파일 전용 정규화 (희소 타겟은 NaN-인지)</a:t>
+              <a:t>정규화 통계는 학습 파일에서만 추정하였다(희소 타깃은 NaN 인지).</a:t>
             </a:r>
           </a:p>
           <a:p>
@@ -30738,7 +31996,7 @@
                 </a:solidFill>
                 <a:latin typeface="Malgun Gothic"/>
               </a:rPr>
-              <a:t>시퀀스 모델은 여기에 shot별 입력 표준화를 더함</a:t>
+              <a:t>시퀀스 모델은 shot별 입력 표준화를 추가로 적용하였다.</a:t>
             </a:r>
           </a:p>
           <a:p>
@@ -30760,7 +32018,7 @@
                 </a:solidFill>
                 <a:latin typeface="Malgun Gothic"/>
               </a:rPr>
-              <a:t>타겟 시점의 값·관측 flag는 입력에 결코 안 들어감</a:t>
+              <a:t>타깃 시점의 값과 관측 flag는 입력에 들어가지 않는다.</a:t>
             </a:r>
           </a:p>
         </p:txBody>
@@ -30938,7 +32196,7 @@
                 </a:solidFill>
                 <a:latin typeface="Malgun Gothic"/>
               </a:rPr>
-              <a:t>관측 V_rot의 54%가 계측기 유지값 (499/641 파일)</a:t>
+              <a:t>관측 V_rot의 54%는 계측기 유지값이다(499/641 파일).</a:t>
             </a:r>
           </a:p>
           <a:p>
@@ -30960,7 +32218,7 @@
                 </a:solidFill>
                 <a:latin typeface="Malgun Gothic"/>
               </a:rPr>
-              <a:t>지도 타겟·이력 입력·정규화 통계·보간 앵커에서 동일 제거</a:t>
+              <a:t>지도 타깃·이력 입력·정규화 통계·보간 앵커에서 동일하게 제거하였다.</a:t>
             </a:r>
           </a:p>
           <a:p>
@@ -30982,7 +32240,7 @@
                 </a:solidFill>
                 <a:latin typeface="Malgun Gothic"/>
               </a:rPr>
-              <a:t>대가 = PR2 폴백률 Tᵢ 0.3–0.4% · V_rot 40–44%</a:t>
+              <a:t>대가는 PR2 폴백률 Tᵢ 0.3–0.4%, V_rot 40–44%이다.</a:t>
             </a:r>
           </a:p>
           <a:p>
@@ -31004,7 +32262,7 @@
                 </a:solidFill>
                 <a:latin typeface="Malgun Gothic"/>
               </a:rPr>
-              <a:t>→ 어떤 arm도 forward-fill로 공짜 점수를 못 받음</a:t>
+              <a:t>따라서 어떤 arm도 forward-fill로 점수를 얻지 못한다.</a:t>
             </a:r>
           </a:p>
         </p:txBody>
@@ -31221,7 +32479,7 @@
           <a:noFill/>
         </p:spPr>
         <p:txBody>
-          <a:bodyPr wrap="square" anchor="t" lIns="25400" rIns="25400" tIns="12700" bIns="12700">
+          <a:bodyPr wrap="square" anchor="ctr" lIns="25400" rIns="25400" tIns="12700" bIns="12700">
             <a:spAutoFit/>
           </a:bodyPr>
           <a:lstStyle/>
@@ -31244,7 +32502,7 @@
                 </a:solidFill>
                 <a:latin typeface="Malgun Gothic"/>
               </a:rPr>
-              <a:t>학습 예제의 두 프레이밍: 윈도(대조군) vs 전체격자 시퀀스(주 모델)</a:t>
+              <a:t>학습 예제의 두 프레이밍: 윈도(대조군)와 전체격자 시퀀스(주 모델)</a:t>
             </a:r>
           </a:p>
         </p:txBody>
@@ -31556,7 +32814,7 @@
                 </a:solidFill>
                 <a:latin typeface="Malgun Gothic"/>
               </a:rPr>
-              <a:t>time delta ≥ 0.5 s = 세그먼트 경계</a:t>
+              <a:t>time delta 0.5 s 이상을 세그먼트 경계로 정의하였다.</a:t>
             </a:r>
           </a:p>
           <a:p>
@@ -31578,7 +32836,7 @@
                 </a:solidFill>
                 <a:latin typeface="Malgun Gothic"/>
               </a:rPr>
-              <a:t>전형 파일 = 주 세그먼트 1개 (중앙값 301행)</a:t>
+              <a:t>전형 파일은 주 세그먼트 1개(중앙값 301행)이다.</a:t>
             </a:r>
           </a:p>
           <a:p>
@@ -31600,7 +32858,7 @@
                 </a:solidFill>
                 <a:latin typeface="Malgun Gothic"/>
               </a:rPr>
-              <a:t>모델 입력·보간 모두 경계를 넘지 않음</a:t>
+              <a:t>모델 입력과 보간 모두 경계를 넘지 않는다.</a:t>
             </a:r>
           </a:p>
         </p:txBody>
@@ -31778,7 +33036,7 @@
                 </a:solidFill>
                 <a:latin typeface="Malgun Gothic"/>
               </a:rPr>
-              <a:t>타겟 t 앞 W=2행: bes(2,9)·ecei(2,4)·mc(2,2)</a:t>
+              <a:t>타깃 t 앞 W=2행의 bes(2,9)·ecei(2,4)·mc(2,2)를 읽는다.</a:t>
             </a:r>
           </a:p>
           <a:p>
@@ -31800,7 +33058,7 @@
                 </a:solidFill>
                 <a:latin typeface="Malgun Gothic"/>
               </a:rPr>
-              <a:t>  + time_features(2,4) + ces_history(2,4)</a:t>
+              <a:t>time_features(2,4)와 ces_history(2,4)를 더한다.</a:t>
             </a:r>
           </a:p>
           <a:p>
@@ -31822,7 +33080,7 @@
                 </a:solidFill>
                 <a:latin typeface="Malgun Gothic"/>
               </a:rPr>
-              <a:t>타겟 [Tᵢ, V_rot] + 타겟별 마스크 m ∈ {0,1}²</a:t>
+              <a:t>타깃 [Tᵢ, V_rot]와 타깃별 마스크 m ∈ {0,1}²를 가진다.</a:t>
             </a:r>
           </a:p>
           <a:p>
@@ -31844,7 +33102,7 @@
                 </a:solidFill>
                 <a:latin typeface="Malgun Gothic"/>
               </a:rPr>
-              <a:t>파일당 샘플 상한 500 (사전등록)</a:t>
+              <a:t>파일당 샘플 상한은 500으로 사전등록되었다.</a:t>
             </a:r>
           </a:p>
         </p:txBody>
@@ -32022,7 +33280,7 @@
                 </a:solidFill>
                 <a:latin typeface="Malgun Gothic"/>
               </a:rPr>
-              <a:t>세그먼트의 입력-완전 행 전부를 맥락으로 유지</a:t>
+              <a:t>세그먼트의 입력 완전 행 전부를 맥락으로 유지한다.</a:t>
             </a:r>
           </a:p>
           <a:p>
@@ -32044,7 +33302,7 @@
                 </a:solidFill>
                 <a:latin typeface="Malgun Gothic"/>
               </a:rPr>
-              <a:t>  (라벨 유무와 무관 — 희소성은 loss로)</a:t>
+              <a:t>라벨 유무와 무관하며 희소성은 loss가 처리한다.</a:t>
             </a:r>
           </a:p>
           <a:p>
@@ -32066,7 +33324,7 @@
                 </a:solidFill>
                 <a:latin typeface="Malgun Gothic"/>
               </a:rPr>
-              <a:t>스텝당 22채널 = z-score 빠른 채널 15 +</a:t>
+              <a:t>스텝당 22채널이며 z-score 빠른 채널 15와</a:t>
             </a:r>
           </a:p>
           <a:p>
@@ -32088,7 +33346,7 @@
                 </a:solidFill>
                 <a:latin typeface="Malgun Gothic"/>
               </a:rPr>
-              <a:t>  log1p(Δt) + 타겟별(이월값·신선도·flag) 3×2</a:t>
+              <a:t>log1p(Δt), 타깃별(이월값·신선도·flag) 3×2로 구성된다.</a:t>
             </a:r>
           </a:p>
         </p:txBody>
@@ -32266,7 +33524,7 @@
                 </a:solidFill>
                 <a:latin typeface="Malgun Gothic"/>
               </a:rPr>
-              <a:t>lookback 초 · 행간 delta 초 · 각각의 log1p</a:t>
+              <a:t>lookback 초, 행간 delta 초, 각각의 log1p이다.</a:t>
             </a:r>
           </a:p>
           <a:p>
@@ -32288,7 +33546,7 @@
                 </a:solidFill>
                 <a:latin typeface="Malgun Gothic"/>
               </a:rPr>
-              <a:t>불규칙 관측 패턴을 명시적으로 노출</a:t>
+              <a:t>불규칙 관측 패턴을 명시적으로 노출한다.</a:t>
             </a:r>
           </a:p>
           <a:p>
@@ -32332,7 +33590,7 @@
                 </a:solidFill>
                 <a:latin typeface="Malgun Gothic"/>
               </a:rPr>
-              <a:t>  200 ms 전인지에 강하게 의존한다</a:t>
+              <a:t>200 ms 전인지에 강하게 의존한다.</a:t>
             </a:r>
           </a:p>
         </p:txBody>
@@ -32377,7 +33635,7 @@
                 </a:solidFill>
                 <a:latin typeface="Malgun Gothic"/>
               </a:rPr>
-              <a:t>두 프레이밍의 결정적 차이 = 도달거리(reach): </a:t>
+              <a:t>두 프레이밍의 결정적 차이는 도달 범위(reach)이다. </a:t>
             </a:r>
             <a:r>
               <a:rPr sz="1250" b="0" i="0">
@@ -32386,7 +33644,7 @@
                 </a:solidFill>
                 <a:latin typeface="Malgun Gothic"/>
               </a:rPr>
-              <a:t>윈도는 과거 W-1개 관측, 시퀀스는 세그먼트 전체. 이 차이가 백본 관문(결과 ③)에서 측정된다.</a:t>
+              <a:t>윈도는 과거 W-1개 관측을, 시퀀스는 세그먼트 전체를 읽는다. 이 차이는 백본 관문(결과 ③)과 도달 범위 사다리(7장)에서 측정된다.</a:t>
             </a:r>
           </a:p>
         </p:txBody>
@@ -32603,7 +33861,7 @@
           <a:noFill/>
         </p:spPr>
         <p:txBody>
-          <a:bodyPr wrap="square" anchor="t" lIns="25400" rIns="25400" tIns="12700" bIns="12700">
+          <a:bodyPr wrap="square" anchor="ctr" lIns="25400" rIns="25400" tIns="12700" bIns="12700">
             <a:spAutoFit/>
           </a:bodyPr>
           <a:lstStyle/>
@@ -32838,7 +34096,7 @@
                 </a:solidFill>
                 <a:latin typeface="Malgun Gothic"/>
               </a:rPr>
-              <a:t>Tᵢ 분기(2층 160)는 22채널 전체 상태를, V_rot 분기(1층 64)는 비-빠른 7채널만 읽는다 · 총 357,570 파라미터.</a:t>
+              <a:t>Tᵢ 분기(2층 160)는 22채널 전체 상태를 읽고, V_rot 분기(1층 64)는 비-빠른 7채널만 읽는다. 총 파라미터는 357,570이다.</a:t>
             </a:r>
           </a:p>
         </p:txBody>

--- a/docs/presentation/KSTAR_CES_발표자료_20분.pptx
+++ b/docs/presentation/KSTAR_CES_발표자료_20분.pptx
@@ -22759,7 +22759,7 @@
                 </a:solidFill>
                 <a:latin typeface="Malgun Gothic"/>
               </a:rPr>
-              <a:t>상한은 추정기가 아니라 정보에 있으며, 남은 레버는 데이터이다</a:t>
+              <a:t>총합 손실의 상한은 추정기가 아니라 정보에 있으며, 남은 레버는 데이터이다</a:t>
             </a:r>
           </a:p>
         </p:txBody>
@@ -22804,7 +22804,7 @@
                 </a:solidFill>
                 <a:latin typeface="Malgun Gothic"/>
               </a:rPr>
-              <a:t>21,498 파라미터 b3k8이 컷에서 백본과 동급(+0.002)이고 폭 34k→879k는 평평하며, 1,808 파라미터 tcn2k도 인과 GP를 4/4로 이긴다. 남은 셋은 CES 피팅 품질 메타데이터, 원본 kHz Mirnov, NBI 토크 채널이다.</a:t>
+              <a:t>21,498 파라미터 b3k8이 컷에서 백본과 동급이고 폭 34k→879k는 평평하다. 다만 타깃 자신의 10 ms 재현성이 46~130 eV이므로 이 진술은 총합 MSE에 한정된다. 남은 레버는 CES 피팅 품질·원본 kHz Mirnov·NBI 토크이다.</a:t>
             </a:r>
           </a:p>
         </p:txBody>

--- a/docs/presentation/KSTAR_CES_발표자료_20분.pptx
+++ b/docs/presentation/KSTAR_CES_발표자료_20분.pptx
@@ -525,7 +525,7 @@
           <a:lstStyle/>
           <a:p>
             <a:r>
-              <a:t>⏱ 00:00–00:30  (30초)</a:t>
+              <a:t>⏱ 00:00–00:35  (35초)</a:t>
             </a:r>
           </a:p>
           <a:p/>
@@ -623,7 +623,7 @@
           <a:lstStyle/>
           <a:p>
             <a:r>
-              <a:t>⏱ 06:50–07:20  (30초)</a:t>
+              <a:t>⏱ 07:05–07:45  (40초)</a:t>
             </a:r>
           </a:p>
           <a:p/>
@@ -731,7 +731,18 @@
           <a:lstStyle/>
           <a:p>
             <a:r>
-              <a:t>⏱ 07:20–08:05  (45초)  ★ 통계 질문이 나오는 구간</a:t>
+              <a:t>PR3(TEST 하한 15 방전·3,000 Tᵢ 샘플)와 모집단 키의 bit-identical 검증은</a:t>
+            </a:r>
+          </a:p>
+          <a:p>
+            <a:r>
+              <a:t>슬라이드에서 내렸다. 둘 다 충족되었고, 물으면 답한다.</a:t>
+            </a:r>
+          </a:p>
+          <a:p/>
+          <a:p>
+            <a:r>
+              <a:t>⏱ 07:45–08:35  (50초)  ★ 통계 질문이 나오는 구간</a:t>
             </a:r>
           </a:p>
           <a:p/>
@@ -861,7 +872,7 @@
           <a:lstStyle/>
           <a:p>
             <a:r>
-              <a:t>⏱ 08:05–08:50  (45초)</a:t>
+              <a:t>⏱ 08:35–09:30  (55초)</a:t>
             </a:r>
           </a:p>
           <a:p/>
@@ -990,7 +1001,7 @@
           <a:lstStyle/>
           <a:p>
             <a:r>
-              <a:t>⏱ 08:50–09:25  (35초)</a:t>
+              <a:t>⏱ 09:30–09:55  (25초)</a:t>
             </a:r>
           </a:p>
           <a:p/>
@@ -1094,7 +1105,7 @@
           <a:lstStyle/>
           <a:p>
             <a:r>
-              <a:t>⏱ 09:25–10:30  (65초)  ★ headline 결과</a:t>
+              <a:t>⏱ 09:55–10:50  (55초)  ★ headline 결과</a:t>
             </a:r>
           </a:p>
           <a:p/>
@@ -1213,7 +1224,7 @@
           <a:lstStyle/>
           <a:p>
             <a:r>
-              <a:t>⏱ 10:30–11:15  (45초)</a:t>
+              <a:t>⏱ 10:50–11:35  (45초)</a:t>
             </a:r>
           </a:p>
           <a:p/>
@@ -1326,7 +1337,7 @@
           <a:lstStyle/>
           <a:p>
             <a:r>
-              <a:t>⏱ 11:15–12:20  (65초)  ★ 배치 주장을 가르는 슬라이드</a:t>
+              <a:t>⏱ 11:35–12:40  (65초)  ★ 배치 주장을 가르는 슬라이드</a:t>
             </a:r>
           </a:p>
           <a:p/>
@@ -1454,7 +1465,7 @@
           <a:lstStyle/>
           <a:p>
             <a:r>
-              <a:t>⏱ 12:20–13:15  (55초)  ★ 과학적 발견</a:t>
+              <a:t>⏱ 12:40–13:25  (45초)  ★ 과학적 발견</a:t>
             </a:r>
           </a:p>
           <a:p/>
@@ -1605,7 +1616,7 @@
           <a:lstStyle/>
           <a:p>
             <a:r>
-              <a:t>⏱ 13:15–14:00  (45초)</a:t>
+              <a:t>⏱ 13:25–14:15  (50초)</a:t>
             </a:r>
           </a:p>
           <a:p/>
@@ -1718,7 +1729,7 @@
           <a:lstStyle/>
           <a:p>
             <a:r>
-              <a:t>⏱ 14:00–14:40  (40초)</a:t>
+              <a:t>⏱ 14:15–14:50  (35초)</a:t>
             </a:r>
           </a:p>
           <a:p/>
@@ -1832,7 +1843,7 @@
           <a:lstStyle/>
           <a:p>
             <a:r>
-              <a:t>⏱ 00:30–01:15  (45초)</a:t>
+              <a:t>⏱ 00:35–01:20  (45초)</a:t>
             </a:r>
           </a:p>
           <a:p/>
@@ -1950,7 +1961,7 @@
           <a:lstStyle/>
           <a:p>
             <a:r>
-              <a:t>⏱ 14:40–15:15  (35초)</a:t>
+              <a:t>⏱ 14:50–15:25  (35초)</a:t>
             </a:r>
           </a:p>
           <a:p/>
@@ -2069,7 +2080,7 @@
           <a:lstStyle/>
           <a:p>
             <a:r>
-              <a:t>⏱ 15:15–16:45  (90초)  ★ 2026-08-16 이후 추가된 결과</a:t>
+              <a:t>⏱ 15:25–16:40  (75초)  ★ 2026-08-16 이후 추가된 결과</a:t>
             </a:r>
           </a:p>
           <a:p/>
@@ -2209,7 +2220,7 @@
           <a:lstStyle/>
           <a:p>
             <a:r>
-              <a:t>⏱ 16:45–17:55  (70초)</a:t>
+              <a:t>⏱ 16:40–17:45  (65초)</a:t>
             </a:r>
           </a:p>
           <a:p/>
@@ -2350,7 +2361,7 @@
           <a:lstStyle/>
           <a:p>
             <a:r>
-              <a:t>⏱ 17:55–18:50  (55초)</a:t>
+              <a:t>⏱ 17:45–18:50  (65초)</a:t>
             </a:r>
           </a:p>
           <a:p/>
@@ -2697,7 +2708,7 @@
           <a:lstStyle/>
           <a:p>
             <a:r>
-              <a:t>⏱ 01:15–02:10  (55초)</a:t>
+              <a:t>⏱ 01:20–02:15  (55초)</a:t>
             </a:r>
           </a:p>
           <a:p/>
@@ -2825,7 +2836,7 @@
           <a:lstStyle/>
           <a:p>
             <a:r>
-              <a:t>⏱ 02:10–02:45  (35초)</a:t>
+              <a:t>⏱ 02:15–03:05  (50초)</a:t>
             </a:r>
           </a:p>
           <a:p/>
@@ -2939,7 +2950,7 @@
           <a:lstStyle/>
           <a:p>
             <a:r>
-              <a:t>⏱ 02:45–03:25  (40초)</a:t>
+              <a:t>⏱ 03:05–03:50  (45초)</a:t>
             </a:r>
           </a:p>
           <a:p/>
@@ -3057,7 +3068,7 @@
           <a:lstStyle/>
           <a:p>
             <a:r>
-              <a:t>⏱ 03:25–04:30  (65초)  ★ 이 발표에서 가장 중요한 슬라이드</a:t>
+              <a:t>⏱ 03:50–04:50  (60초)  ★ 이 발표에서 가장 중요한 슬라이드</a:t>
             </a:r>
           </a:p>
           <a:p/>
@@ -3186,7 +3197,7 @@
           <a:lstStyle/>
           <a:p>
             <a:r>
-              <a:t>⏱ 04:30–05:15  (45초)</a:t>
+              <a:t>⏱ 04:50–05:40  (50초)</a:t>
             </a:r>
           </a:p>
           <a:p/>
@@ -3309,7 +3320,7 @@
           <a:lstStyle/>
           <a:p>
             <a:r>
-              <a:t>⏱ 05:15–05:55  (40초)</a:t>
+              <a:t>⏱ 05:40–06:25  (45초)</a:t>
             </a:r>
           </a:p>
           <a:p/>
@@ -3428,7 +3439,7 @@
           <a:lstStyle/>
           <a:p>
             <a:r>
-              <a:t>⏱ 05:55–06:50  (55초)</a:t>
+              <a:t>⏱ 06:25–07:05  (40초)</a:t>
             </a:r>
           </a:p>
           <a:p/>
@@ -8325,50 +8336,6 @@
                 </a:solidFill>
                 <a:latin typeface="Malgun Gothic"/>
               </a:rPr>
-              <a:t>전 arm이 동일한 (file, row) 집합과 마스크로 채점된다.</a:t>
-            </a:r>
-          </a:p>
-          <a:p>
-            <a:pPr algn="l">
-              <a:lnSpc>
-                <a:spcPct val="110000"/>
-              </a:lnSpc>
-              <a:spcBef>
-                <a:spcPts val="0"/>
-              </a:spcBef>
-              <a:spcAft>
-                <a:spcPts val="300"/>
-              </a:spcAft>
-            </a:pPr>
-            <a:r>
-              <a:rPr sz="1200" b="0" i="0">
-                <a:solidFill>
-                  <a:srgbClr val="222B35"/>
-                </a:solidFill>
-                <a:latin typeface="Malgun Gothic"/>
-              </a:rPr>
-              <a:t>짝지은 비교 전에 모집단 키가 bit-identical임을 검증한다.</a:t>
-            </a:r>
-          </a:p>
-          <a:p>
-            <a:pPr algn="l">
-              <a:lnSpc>
-                <a:spcPct val="110000"/>
-              </a:lnSpc>
-              <a:spcBef>
-                <a:spcPts val="0"/>
-              </a:spcBef>
-              <a:spcAft>
-                <a:spcPts val="300"/>
-              </a:spcAft>
-            </a:pPr>
-            <a:r>
-              <a:rPr sz="1200" b="0" i="0">
-                <a:solidFill>
-                  <a:srgbClr val="222B35"/>
-                </a:solidFill>
-                <a:latin typeface="Malgun Gothic"/>
-              </a:rPr>
               <a:t>보간은 타깃 자신의 값을 제외하고 이웃만 읽는다.</a:t>
             </a:r>
           </a:p>
@@ -8591,7 +8558,7 @@
                 </a:solidFill>
                 <a:latin typeface="Malgun Gothic"/>
               </a:rPr>
-              <a:t>PR3: TEST 하한은 15 방전·3,000 Tᵢ 샘플 이상이다(충족).</a:t>
+              <a:t>PR4: shot 군집 bootstrap 95% CI가 0을 제외하면 PASS이다.</a:t>
             </a:r>
           </a:p>
           <a:p>
@@ -8613,51 +8580,7 @@
                 </a:solidFill>
                 <a:latin typeface="Malgun Gothic"/>
               </a:rPr>
-              <a:t>PR4: shot 군집 bootstrap 95% CI가 0을 제외하면 PASS이다.</a:t>
-            </a:r>
-          </a:p>
-          <a:p>
-            <a:pPr algn="l">
-              <a:lnSpc>
-                <a:spcPct val="110000"/>
-              </a:lnSpc>
-              <a:spcBef>
-                <a:spcPts val="0"/>
-              </a:spcBef>
-              <a:spcAft>
-                <a:spcPts val="300"/>
-              </a:spcAft>
-            </a:pPr>
-            <a:r>
-              <a:rPr sz="1200" b="0" i="0">
-                <a:solidFill>
-                  <a:srgbClr val="222B35"/>
-                </a:solidFill>
-                <a:latin typeface="Malgun Gothic"/>
-              </a:rPr>
-              <a:t>추가: held-free · W=2 · 파일당 500 · 두 모집단 ·</a:t>
-            </a:r>
-          </a:p>
-          <a:p>
-            <a:pPr algn="l">
-              <a:lnSpc>
-                <a:spcPct val="110000"/>
-              </a:lnSpc>
-              <a:spcBef>
-                <a:spcPts val="0"/>
-              </a:spcBef>
-              <a:spcAft>
-                <a:spcPts val="300"/>
-              </a:spcAft>
-            </a:pPr>
-            <a:r>
-              <a:rPr sz="1200" b="0" i="0">
-                <a:solidFill>
-                  <a:srgbClr val="222B35"/>
-                </a:solidFill>
-                <a:latin typeface="Malgun Gothic"/>
-              </a:rPr>
-              <a:t>TEST 채점 전 결정 규칙 커밋 · 문턱 민감도이다.</a:t>
+              <a:t>추가: held-free · W=2 · 파일당 500 · 두 모집단 · 규칙 선커밋이다.</a:t>
             </a:r>
           </a:p>
         </p:txBody>
@@ -9864,7 +9787,7 @@
                 </a:solidFill>
                 <a:latin typeface="Malgun Gothic"/>
               </a:rPr>
-              <a:t>* PR1 headline. </a:t>
+              <a:t>* PR1 headline. 보간도 모델도 세그먼트 경계를 넘지 않으며, 경계 밖 이웃이 필요하면 보간은 persistence로 후퇴한다.</a:t>
             </a:r>
             <a:r>
               <a:rPr sz="1150" b="0" i="0">
@@ -9873,7 +9796,7 @@
                 </a:solidFill>
                 <a:latin typeface="Malgun Gothic"/>
               </a:rPr>
-              <a:t>보간과 모델 모두 세그먼트 경계를 넘지 않으며, 경계 밖 이웃이 필요하면 보간은 persistence 값을 대신 예측한다(모집단 축소 없음).</a:t>
+              <a:t/>
             </a:r>
           </a:p>
         </p:txBody>
@@ -10314,7 +10237,7 @@
                 </a:solidFill>
                 <a:latin typeface="Malgun Gothic"/>
               </a:rPr>
-              <a:t>–  개별 샘플을 독립으로 보면 불확실성이 크게 과소평가된다.</a:t>
+              <a:t>–  샘플을 독립으로 보면 불확실성이 크게 과소평가된다.</a:t>
             </a:r>
           </a:p>
           <a:p>
@@ -10336,11 +10259,11 @@
                 </a:solidFill>
                 <a:latin typeface="Malgun Gothic"/>
               </a:rPr>
-              <a:t>●  PR4 검정은 샘플별 짝지은 오차 (SE_model - SE_pchip)를</a:t>
-            </a:r>
-          </a:p>
-          <a:p>
-            <a:pPr algn="l" lvl="1">
+              <a:t>●  PR4는 짝지은 오차를 shot으로 묶어 재추출한다(B = 10,000).</a:t>
+            </a:r>
+          </a:p>
+          <a:p>
+            <a:pPr algn="l">
               <a:lnSpc>
                 <a:spcPct val="108000"/>
               </a:lnSpc>
@@ -10352,13 +10275,13 @@
               </a:spcAft>
             </a:pPr>
             <a:r>
-              <a:rPr sz="1100" b="0" i="0">
-                <a:solidFill>
-                  <a:srgbClr val="222B35"/>
-                </a:solidFill>
-                <a:latin typeface="Malgun Gothic"/>
-              </a:rPr>
-              <a:t>–  shot 단위로 묶고 shot 전체를 복원추출한다(B = 10,000).</a:t>
+              <a:rPr sz="1300" b="1" i="0">
+                <a:solidFill>
+                  <a:srgbClr val="2E9E5B"/>
+                </a:solidFill>
+                <a:latin typeface="Malgun Gothic"/>
+              </a:rPr>
+              <a:t>●  95% CI가 0을 제외하면 PASS이며, 이는 ‘새로운 방전에서도 이기는가’에 답한다.</a:t>
             </a:r>
           </a:p>
           <a:p>
@@ -10376,77 +10299,11 @@
             <a:r>
               <a:rPr sz="1300" b="1" i="0">
                 <a:solidFill>
-                  <a:srgbClr val="2E9E5B"/>
-                </a:solidFill>
-                <a:latin typeface="Malgun Gothic"/>
-              </a:rPr>
-              <a:t>●  95% CI가 0을 제외하면 PASS이다.</a:t>
-            </a:r>
-          </a:p>
-          <a:p>
-            <a:pPr algn="l" lvl="1">
-              <a:lnSpc>
-                <a:spcPct val="108000"/>
-              </a:lnSpc>
-              <a:spcBef>
-                <a:spcPts val="0"/>
-              </a:spcBef>
-              <a:spcAft>
-                <a:spcPts val="700"/>
-              </a:spcAft>
-            </a:pPr>
-            <a:r>
-              <a:rPr sz="1100" b="0" i="0">
-                <a:solidFill>
-                  <a:srgbClr val="222B35"/>
-                </a:solidFill>
-                <a:latin typeface="Malgun Gothic"/>
-              </a:rPr>
-              <a:t>–  이 CI는 ‘새로운 방전에서도 이기는가’에 답한다.</a:t>
-            </a:r>
-          </a:p>
-          <a:p>
-            <a:pPr algn="l">
-              <a:lnSpc>
-                <a:spcPct val="108000"/>
-              </a:lnSpc>
-              <a:spcBef>
-                <a:spcPts val="0"/>
-              </a:spcBef>
-              <a:spcAft>
-                <a:spcPts val="700"/>
-              </a:spcAft>
-            </a:pPr>
-            <a:r>
-              <a:rPr sz="1300" b="1" i="0">
-                <a:solidFill>
                   <a:srgbClr val="13335F"/>
                 </a:solidFill>
                 <a:latin typeface="Malgun Gothic"/>
               </a:rPr>
-              <a:t>●  유효 표본은 방전 수(Tᵢ ≈96 · V_rot 60–66)이며 검정력의 상한이다.</a:t>
-            </a:r>
-          </a:p>
-          <a:p>
-            <a:pPr algn="l">
-              <a:lnSpc>
-                <a:spcPct val="108000"/>
-              </a:lnSpc>
-              <a:spcBef>
-                <a:spcPts val="0"/>
-              </a:spcBef>
-              <a:spcAft>
-                <a:spcPts val="700"/>
-              </a:spcAft>
-            </a:pPr>
-            <a:r>
-              <a:rPr sz="1300" b="1" i="0">
-                <a:solidFill>
-                  <a:srgbClr val="13335F"/>
-                </a:solidFill>
-                <a:latin typeface="Malgun Gothic"/>
-              </a:rPr>
-              <a:t>●  모델 대 모델 비교도 같은 행 위에서 같은 paired bootstrap으로 한다.</a:t>
+              <a:t>●  유효 표본은 방전 수(Tᵢ ≈96)이며 검정력의 상한이다.</a:t>
             </a:r>
           </a:p>
         </p:txBody>
@@ -10690,7 +10547,7 @@
                 </a:solidFill>
                 <a:latin typeface="Malgun Gothic"/>
               </a:rPr>
-              <a:t>컷은 Tᵢ &gt; 3 keV(피팅 실패)를 결측 처리한 모집단, 포함은 컷 없음이다. 전 arm에 동일 적용한다.</a:t>
+              <a:t>컷은 Tᵢ &gt; 3 keV(피팅 실패)를 결측 처리한 모집단, 포함은 컷 없음이며 전 arm에 동일 적용한다.</a:t>
             </a:r>
           </a:p>
           <a:p>
@@ -10726,7 +10583,7 @@
         <p:spPr>
           <a:xfrm>
             <a:off x="502920" y="4297680"/>
-            <a:ext cx="11201400" cy="1828800"/>
+            <a:ext cx="11201400" cy="1627632"/>
           </a:xfrm>
           <a:prstGeom prst="roundRect">
             <a:avLst/>
@@ -10815,7 +10672,7 @@
         <p:spPr>
           <a:xfrm>
             <a:off x="777240" y="4846320"/>
-            <a:ext cx="10698480" cy="1234440"/>
+            <a:ext cx="10698480" cy="960120"/>
           </a:xfrm>
           <a:prstGeom prst="rect">
             <a:avLst/>
@@ -10846,7 +10703,7 @@
                 </a:solidFill>
                 <a:latin typeface="Malgun Gothic"/>
               </a:rPr>
-              <a:t>●  백본 관문은 4조건(4 분할 부호 유지 · 통합 CI 0 제외 · 예산 균등화 · V_rot 손실 없음)을 먼저 고정하고 그다음 충족 여부를 판정하였다.</a:t>
+              <a:t>●  백본 관문의 4조건(부호 유지 · 통합 CI 0 제외 · 예산 균등화 · V_rot 손실 없음)을 먼저 고정한 뒤 충족 여부를 판정하였다.</a:t>
             </a:r>
           </a:p>
           <a:p>
@@ -10868,51 +10725,7 @@
                 </a:solidFill>
                 <a:latin typeface="Malgun Gothic"/>
               </a:rPr>
-              <a:t>●  유일한 아키텍처 후보(seq_v2 + 관측마스킹 인과 attention)는 4/4 양수(+0.009/+0.013/+0.033/+0.020)였으나 유의 1/4로 승격되지 않았다.</a:t>
-            </a:r>
-          </a:p>
-          <a:p>
-            <a:pPr algn="l" lvl="1">
-              <a:lnSpc>
-                <a:spcPct val="108000"/>
-              </a:lnSpc>
-              <a:spcBef>
-                <a:spcPts val="0"/>
-              </a:spcBef>
-              <a:spcAft>
-                <a:spcPts val="600"/>
-              </a:spcAft>
-            </a:pPr>
-            <a:r>
-              <a:rPr sz="1050" b="1" i="0">
-                <a:solidFill>
-                  <a:srgbClr val="C0392B"/>
-                </a:solidFill>
-                <a:latin typeface="Malgun Gothic"/>
-              </a:rPr>
-              <a:t>–  val에서는 2/2 유의였으며, 이것이 승격 bar를 TEST에 두는 이유이다. 스윕 위에서 백본을 재선정하는 것은 구성상 금지된다.</a:t>
-            </a:r>
-          </a:p>
-          <a:p>
-            <a:pPr algn="l">
-              <a:lnSpc>
-                <a:spcPct val="108000"/>
-              </a:lnSpc>
-              <a:spcBef>
-                <a:spcPts val="0"/>
-              </a:spcBef>
-              <a:spcAft>
-                <a:spcPts val="600"/>
-              </a:spcAft>
-            </a:pPr>
-            <a:r>
-              <a:rPr sz="1250" b="1" i="0">
-                <a:solidFill>
-                  <a:srgbClr val="13335F"/>
-                </a:solidFill>
-                <a:latin typeface="Malgun Gothic"/>
-              </a:rPr>
-              <a:t>●  사다리 칸·폭 스윕의 판정 규칙도 TEST 채점 전에 문서화되었고, TEST는 결정마다 한 번만 채점되었다.</a:t>
+              <a:t>●  유일한 후보는 4/4 양수였으나 유의 1/4로 승격되지 않았다. val에서는 2/2 유의였으며, 이것이 승격 bar를 TEST에 두는 이유이다.</a:t>
             </a:r>
           </a:p>
         </p:txBody>
@@ -13603,7 +13416,7 @@
                 </a:solidFill>
                 <a:latin typeface="Malgun Gothic"/>
               </a:rPr>
-              <a:t>관측점 skill은 낙관적 상한이고 무작위 분할은 시간 이동을 검사하지 않는다. 배치 주장을 가르는 두 스트레스를 사전에 정해 두고 통과 여부를 측정하였다.</a:t>
+              <a:t>배치 주장을 가르는 두 스트레스를 사전에 정해 두고 통과 여부를 측정하였다.</a:t>
             </a:r>
           </a:p>
         </p:txBody>
@@ -13781,7 +13594,7 @@
                 </a:solidFill>
                 <a:latin typeface="Malgun Gothic"/>
               </a:rPr>
-              <a:t>층은 Δt(15/25/45 ms) × 입력만의 활동 flag이며,</a:t>
+              <a:t>층은 Δt(15/25/45 ms) × 입력만의 활동 flag이며, 결측 행의</a:t>
             </a:r>
           </a:p>
           <a:p>
@@ -13803,7 +13616,7 @@
                 </a:solidFill>
                 <a:latin typeface="Malgun Gothic"/>
               </a:rPr>
-              <a:t>결측 행의 층 분포로 채점 지점을 재가중하였다.</a:t>
+              <a:t>층 분포로 채점 지점을 재가중하였다.</a:t>
             </a:r>
           </a:p>
           <a:p>
@@ -13825,7 +13638,7 @@
                 </a:solidFill>
                 <a:latin typeface="Malgun Gothic"/>
               </a:rPr>
-              <a:t>도달: 결측 Tᵢ의 54–68%가 in-domain이고 V_rot은 4–6%이다.</a:t>
+              <a:t>도달은 결측 Tᵢ의 54–68%, V_rot은 4–6%(결측 질량의 1/20)이므로</a:t>
             </a:r>
           </a:p>
           <a:p>
@@ -13847,51 +13660,7 @@
                 </a:solidFill>
                 <a:latin typeface="Malgun Gothic"/>
               </a:rPr>
-              <a:t>따라서 재가중 V_rot은 결론을 내지 않는다(결측 질량의 1/20).</a:t>
-            </a:r>
-          </a:p>
-          <a:p>
-            <a:pPr algn="l">
-              <a:lnSpc>
-                <a:spcPct val="110000"/>
-              </a:lnSpc>
-              <a:spcBef>
-                <a:spcPts val="0"/>
-              </a:spcBef>
-              <a:spcAft>
-                <a:spcPts val="300"/>
-              </a:spcAft>
-            </a:pPr>
-            <a:r>
-              <a:rPr sz="1200" b="0" i="0">
-                <a:solidFill>
-                  <a:srgbClr val="222B35"/>
-                </a:solidFill>
-                <a:latin typeface="Malgun Gothic"/>
-              </a:rPr>
-              <a:t>Tᵢ vs persistence: 컷 4/4 · 포함 4/4 (+0.28~+0.44)이다.</a:t>
-            </a:r>
-          </a:p>
-          <a:p>
-            <a:pPr algn="l">
-              <a:lnSpc>
-                <a:spcPct val="110000"/>
-              </a:lnSpc>
-              <a:spcBef>
-                <a:spcPts val="0"/>
-              </a:spcBef>
-              <a:spcAft>
-                <a:spcPts val="300"/>
-              </a:spcAft>
-            </a:pPr>
-            <a:r>
-              <a:rPr sz="1200" b="0" i="0">
-                <a:solidFill>
-                  <a:srgbClr val="222B35"/>
-                </a:solidFill>
-                <a:latin typeface="Malgun Gothic"/>
-              </a:rPr>
-              <a:t>Tᵢ vs PCHIP: 컷 2/4 · 포함 4/4 (점추정 +0.14~+0.28)이다.</a:t>
+              <a:t>재가중 V_rot은 결론을 내지 않는다.</a:t>
             </a:r>
           </a:p>
         </p:txBody>
@@ -14069,7 +13838,7 @@
                 </a:solidFill>
                 <a:latin typeface="Malgun Gothic"/>
               </a:rPr>
-              <a:t>train 416 (30801–31991) / val 128 (32002–32310) /</a:t>
+              <a:t>train 416 / val 128 / test 97(32312–32751)을 shot 번호로</a:t>
             </a:r>
           </a:p>
           <a:p>
@@ -14091,7 +13860,7 @@
                 </a:solidFill>
                 <a:latin typeface="Malgun Gothic"/>
               </a:rPr>
-              <a:t>test 97 (32312–32751)이며 초기화 seed 4개이다.</a:t>
+              <a:t>자르고 초기화 seed 4개를 돌렸다.</a:t>
             </a:r>
           </a:p>
           <a:p>
@@ -14135,51 +13904,7 @@
                 </a:solidFill>
                 <a:latin typeface="Malgun Gothic"/>
               </a:rPr>
-              <a:t>seq_v2 컷은 +0.187/+0.174/+0.181/+0.177로 4/4이다.</a:t>
-            </a:r>
-          </a:p>
-          <a:p>
-            <a:pPr algn="l">
-              <a:lnSpc>
-                <a:spcPct val="110000"/>
-              </a:lnSpc>
-              <a:spcBef>
-                <a:spcPts val="0"/>
-              </a:spcBef>
-              <a:spcAft>
-                <a:spcPts val="300"/>
-              </a:spcAft>
-            </a:pPr>
-            <a:r>
-              <a:rPr sz="1200" b="0" i="0">
-                <a:solidFill>
-                  <a:srgbClr val="222B35"/>
-                </a:solidFill>
-                <a:latin typeface="Malgun Gothic"/>
-              </a:rPr>
-              <a:t>seq_v2 포함은 +0.173/+0.202/+0.198/+0.184로 4/4이다.</a:t>
-            </a:r>
-          </a:p>
-          <a:p>
-            <a:pPr algn="l">
-              <a:lnSpc>
-                <a:spcPct val="110000"/>
-              </a:lnSpc>
-              <a:spcBef>
-                <a:spcPts val="0"/>
-              </a:spcBef>
-              <a:spcAft>
-                <a:spcPts val="300"/>
-              </a:spcAft>
-            </a:pPr>
-            <a:r>
-              <a:rPr sz="1200" b="0" i="0">
-                <a:solidFill>
-                  <a:srgbClr val="222B35"/>
-                </a:solidFill>
-                <a:latin typeface="Malgun Gothic"/>
-              </a:rPr>
-              <a:t>원인은 측정되었다: 드리프트 BES 1.22σ·ECEI 0.53σ vs 타깃 0.115σ.</a:t>
+              <a:t>원인은 측정되었다: 드리프트 BES 1.22σ vs 타깃 0.115σ.</a:t>
             </a:r>
           </a:p>
         </p:txBody>
@@ -14993,7 +14718,7 @@
                 </a:solidFill>
                 <a:latin typeface="Malgun Gothic"/>
               </a:rPr>
-              <a:t>실제 결측 시점에서 나우캐스터는 모든 인과 CES-only 방법보다 유의하게 낫고, 오프라인 보간보다는 모집단 조건부로 낫다.</a:t>
+              <a:t>실제 결측 시점에서 모든 인과 방법보다 유의하게 낫고, 오프라인 보간보다는 모집단 조건부로 낫다.</a:t>
             </a:r>
           </a:p>
         </p:txBody>
@@ -16007,7 +15732,7 @@
                 </a:solidFill>
                 <a:latin typeface="Malgun Gothic"/>
               </a:rPr>
-              <a:t>복잡도 사다리와 크기 축: 상한은 추정기가 아니라 정보에 있다</a:t>
+              <a:t>복잡도 사다리와 크기 축: 총합 손실의 상한은 정보에 있다</a:t>
             </a:r>
           </a:p>
         </p:txBody>
@@ -17196,7 +16921,7 @@
                 </a:solidFill>
                 <a:latin typeface="Malgun Gothic"/>
               </a:rPr>
-              <a:t>b3 - seq_v2 평균 +0.002(CI 전부 0 포함), PR4 4/4, 인과 GP 4/4이다.</a:t>
+              <a:t>b3 - seq_v2 평균 +0.002(CI 전부 0 포함), PR4 4/4, 인과 GP 4/4이다. 다만 타깃 자신의 10 ms 재현성이 46~130 eV이므로 이 진술은 총합 MSE에 한정된다.</a:t>
             </a:r>
           </a:p>
           <a:p>
@@ -17218,73 +16943,7 @@
                 </a:solidFill>
                 <a:latin typeface="Malgun Gothic"/>
               </a:rPr>
-              <a:t>probe 결과 latent은 직전 Tᵢ(R² 0.47–0.75)와 ECEI Tₑ(0.31–0.48)를</a:t>
-            </a:r>
-          </a:p>
-          <a:p>
-            <a:pPr algn="l">
-              <a:lnSpc>
-                <a:spcPct val="110000"/>
-              </a:lnSpc>
-              <a:spcBef>
-                <a:spcPts val="0"/>
-              </a:spcBef>
-              <a:spcAft>
-                <a:spcPts val="300"/>
-              </a:spcAft>
-            </a:pPr>
-            <a:r>
-              <a:rPr sz="1150" b="0" i="0">
-                <a:solidFill>
-                  <a:srgbClr val="222B35"/>
-                </a:solidFill>
-                <a:latin typeface="Malgun Gothic"/>
-              </a:rPr>
-              <a:t>분산 부호화하며 보정은 예측 분산의 25–39%이다.</a:t>
-            </a:r>
-          </a:p>
-          <a:p>
-            <a:pPr algn="l">
-              <a:lnSpc>
-                <a:spcPct val="110000"/>
-              </a:lnSpc>
-              <a:spcBef>
-                <a:spcPts val="0"/>
-              </a:spcBef>
-              <a:spcAft>
-                <a:spcPts val="300"/>
-              </a:spcAft>
-            </a:pPr>
-            <a:r>
-              <a:rPr sz="1150" b="0" i="0">
-                <a:solidFill>
-                  <a:srgbClr val="222B35"/>
-                </a:solidFill>
-                <a:latin typeface="Malgun Gothic"/>
-              </a:rPr>
-              <a:t>포함에서는 -0.194(4/4 유의)이다. 유계 보정으로는 스파이크 앵커를</a:t>
-            </a:r>
-          </a:p>
-          <a:p>
-            <a:pPr algn="l">
-              <a:lnSpc>
-                <a:spcPct val="110000"/>
-              </a:lnSpc>
-              <a:spcBef>
-                <a:spcPts val="0"/>
-              </a:spcBef>
-              <a:spcAft>
-                <a:spcPts val="300"/>
-              </a:spcAft>
-            </a:pPr>
-            <a:r>
-              <a:rPr sz="1150" b="0" i="0">
-                <a:solidFill>
-                  <a:srgbClr val="222B35"/>
-                </a:solidFill>
-                <a:latin typeface="Malgun Gothic"/>
-              </a:rPr>
-              <a:t>살리지 못하며, ≈1% 행이 모든 arm SSE의 70–83%를 차지한다.</a:t>
+              <a:t>포함에서는 -0.194(4/4 유의)이며, ≈1% 행이 모든 arm SSE의 70–83%를 차지한다.</a:t>
             </a:r>
           </a:p>
         </p:txBody>
@@ -17529,28 +17188,6 @@
                 <a:latin typeface="Malgun Gothic"/>
               </a:rPr>
               <a:t>160 대비 ±0.008이며 최대 폭의 유의 우세는 1/4, V_rot는 불변이다.</a:t>
-            </a:r>
-          </a:p>
-          <a:p>
-            <a:pPr algn="l">
-              <a:lnSpc>
-                <a:spcPct val="110000"/>
-              </a:lnSpc>
-              <a:spcBef>
-                <a:spcPts val="0"/>
-              </a:spcBef>
-              <a:spcAft>
-                <a:spcPts val="300"/>
-              </a:spcAft>
-            </a:pPr>
-            <a:r>
-              <a:rPr sz="1150" b="0" i="0">
-                <a:solidFill>
-                  <a:srgbClr val="222B35"/>
-                </a:solidFill>
-                <a:latin typeface="Malgun Gothic"/>
-              </a:rPr>
-              <a:t>따라서 남은 분산은 모델 크기가 아니라 분할 분산이다.</a:t>
             </a:r>
           </a:p>
         </p:txBody>
@@ -18667,8 +18304,8 @@
         </p:nvSpPr>
         <p:spPr>
           <a:xfrm>
-            <a:off x="548640" y="1371600"/>
-            <a:ext cx="11155680" cy="1517904"/>
+            <a:off x="548640" y="1298448"/>
+            <a:ext cx="11155680" cy="1572768"/>
           </a:xfrm>
           <a:prstGeom prst="roundRect">
             <a:avLst/>
@@ -18711,8 +18348,8 @@
         </p:nvSpPr>
         <p:spPr>
           <a:xfrm>
-            <a:off x="658368" y="1673352"/>
-            <a:ext cx="822960" cy="822960"/>
+            <a:off x="658368" y="1627631"/>
+            <a:ext cx="914400" cy="914400"/>
           </a:xfrm>
           <a:prstGeom prst="roundRect">
             <a:avLst/>
@@ -18755,8 +18392,8 @@
         </p:nvSpPr>
         <p:spPr>
           <a:xfrm>
-            <a:off x="658368" y="1673352"/>
-            <a:ext cx="822960" cy="822960"/>
+            <a:off x="658368" y="1627631"/>
+            <a:ext cx="914400" cy="914400"/>
           </a:xfrm>
           <a:prstGeom prst="rect">
             <a:avLst/>
@@ -18781,7 +18418,7 @@
               </a:spcAft>
             </a:pPr>
             <a:r>
-              <a:rPr sz="2800" b="1" i="0">
+              <a:rPr sz="3000" b="1" i="0">
                 <a:solidFill>
                   <a:srgbClr val="FFFFFF"/>
                 </a:solidFill>
@@ -18800,8 +18437,8 @@
         </p:nvSpPr>
         <p:spPr>
           <a:xfrm>
-            <a:off x="1664208" y="1499616"/>
-            <a:ext cx="9875520" cy="411480"/>
+            <a:off x="1783080" y="1444751"/>
+            <a:ext cx="9784080" cy="438912"/>
           </a:xfrm>
           <a:prstGeom prst="rect">
             <a:avLst/>
@@ -18826,7 +18463,7 @@
               </a:spcAft>
             </a:pPr>
             <a:r>
-              <a:rPr sz="1650" b="1" i="0">
+              <a:rPr sz="1750" b="1" i="0">
                 <a:solidFill>
                   <a:srgbClr val="13335F"/>
                 </a:solidFill>
@@ -18845,8 +18482,8 @@
         </p:nvSpPr>
         <p:spPr>
           <a:xfrm>
-            <a:off x="1664208" y="1920240"/>
-            <a:ext cx="9875520" cy="914400"/>
+            <a:off x="1783080" y="1920240"/>
+            <a:ext cx="9784080" cy="841248"/>
           </a:xfrm>
           <a:prstGeom prst="rect">
             <a:avLst/>
@@ -18861,7 +18498,7 @@
           <a:p>
             <a:pPr algn="l">
               <a:lnSpc>
-                <a:spcPct val="112000"/>
+                <a:spcPct val="118000"/>
               </a:lnSpc>
               <a:spcBef>
                 <a:spcPts val="0"/>
@@ -18871,19 +18508,19 @@
               </a:spcAft>
             </a:pPr>
             <a:r>
-              <a:rPr sz="1150" b="0" i="0">
+              <a:rPr sz="1300" b="0" i="0">
                 <a:solidFill>
                   <a:srgbClr val="222B35"/>
                 </a:solidFill>
                 <a:latin typeface="Malgun Gothic"/>
               </a:rPr>
-              <a:t>과거만 읽는 인과 모델이 미래까지 읽는 오프라인 보간(PCHIP)을 Tᵢ에서 유의하게 능가하였다.</a:t>
+              <a:t>과거만 읽는 인과 모델이 미래까지 읽는 오프라인 보간(PCHIP)을 Tᵢ에서 능가하였다(컷 +0.17~+0.26, 포함 +0.23~+0.32).</a:t>
             </a:r>
           </a:p>
           <a:p>
             <a:pPr algn="l">
               <a:lnSpc>
-                <a:spcPct val="112000"/>
+                <a:spcPct val="118000"/>
               </a:lnSpc>
               <a:spcBef>
                 <a:spcPts val="0"/>
@@ -18893,35 +18530,13 @@
               </a:spcAft>
             </a:pPr>
             <a:r>
-              <a:rPr sz="1150" b="0" i="0">
+              <a:rPr sz="1300" b="0" i="0">
                 <a:solidFill>
                   <a:srgbClr val="222B35"/>
                 </a:solidFill>
                 <a:latin typeface="Malgun Gothic"/>
               </a:rPr>
-              <a:t>컷 +0.17~+0.26, 포함 +0.23~+0.32로 두 모집단 × 4개 독립 분할 전부 PASS(4/4 + 4/4)였다.</a:t>
-            </a:r>
-          </a:p>
-          <a:p>
-            <a:pPr algn="l">
-              <a:lnSpc>
-                <a:spcPct val="112000"/>
-              </a:lnSpc>
-              <a:spcBef>
-                <a:spcPts val="0"/>
-              </a:spcBef>
-              <a:spcAft>
-                <a:spcPts val="400"/>
-              </a:spcAft>
-            </a:pPr>
-            <a:r>
-              <a:rPr sz="1150" b="0" i="0">
-                <a:solidFill>
-                  <a:srgbClr val="222B35"/>
-                </a:solidFill>
-                <a:latin typeface="Malgun Gothic"/>
-              </a:rPr>
-              <a:t>배치 가능한 최강 인과 기준선(인과 GP)도 8개 셀 전부에서 이겼고, 두 스트레스를 생존하였다.</a:t>
+              <a:t>두 모집단 × 4개 독립 분할 전부 PASS이고, 인과 GP도 8/8에서 이겼으며 두 스트레스를 생존하였다.</a:t>
             </a:r>
           </a:p>
         </p:txBody>
@@ -18935,7 +18550,7 @@
         <p:spPr>
           <a:xfrm>
             <a:off x="548640" y="2999232"/>
-            <a:ext cx="11155680" cy="1517904"/>
+            <a:ext cx="11155680" cy="1572768"/>
           </a:xfrm>
           <a:prstGeom prst="roundRect">
             <a:avLst/>
@@ -18978,8 +18593,8 @@
         </p:nvSpPr>
         <p:spPr>
           <a:xfrm>
-            <a:off x="658368" y="3300984"/>
-            <a:ext cx="822960" cy="822960"/>
+            <a:off x="658368" y="3328416"/>
+            <a:ext cx="914400" cy="914400"/>
           </a:xfrm>
           <a:prstGeom prst="roundRect">
             <a:avLst/>
@@ -19022,8 +18637,8 @@
         </p:nvSpPr>
         <p:spPr>
           <a:xfrm>
-            <a:off x="658368" y="3300984"/>
-            <a:ext cx="822960" cy="822960"/>
+            <a:off x="658368" y="3328416"/>
+            <a:ext cx="914400" cy="914400"/>
           </a:xfrm>
           <a:prstGeom prst="rect">
             <a:avLst/>
@@ -19048,7 +18663,7 @@
               </a:spcAft>
             </a:pPr>
             <a:r>
-              <a:rPr sz="2800" b="1" i="0">
+              <a:rPr sz="3000" b="1" i="0">
                 <a:solidFill>
                   <a:srgbClr val="FFFFFF"/>
                 </a:solidFill>
@@ -19067,8 +18682,8 @@
         </p:nvSpPr>
         <p:spPr>
           <a:xfrm>
-            <a:off x="1664208" y="3127248"/>
-            <a:ext cx="9875520" cy="411480"/>
+            <a:off x="1783080" y="3145536"/>
+            <a:ext cx="9784080" cy="438912"/>
           </a:xfrm>
           <a:prstGeom prst="rect">
             <a:avLst/>
@@ -19093,7 +18708,7 @@
               </a:spcAft>
             </a:pPr>
             <a:r>
-              <a:rPr sz="1650" b="1" i="0">
+              <a:rPr sz="1750" b="1" i="0">
                 <a:solidFill>
                   <a:srgbClr val="13335F"/>
                 </a:solidFill>
@@ -19112,8 +18727,8 @@
         </p:nvSpPr>
         <p:spPr>
           <a:xfrm>
-            <a:off x="1664208" y="3547872"/>
-            <a:ext cx="9875520" cy="914400"/>
+            <a:off x="1783080" y="3621024"/>
+            <a:ext cx="9784080" cy="841248"/>
           </a:xfrm>
           <a:prstGeom prst="rect">
             <a:avLst/>
@@ -19128,7 +18743,7 @@
           <a:p>
             <a:pPr algn="l">
               <a:lnSpc>
-                <a:spcPct val="112000"/>
+                <a:spcPct val="118000"/>
               </a:lnSpc>
               <a:spcBef>
                 <a:spcPts val="0"/>
@@ -19138,19 +18753,19 @@
               </a:spcAft>
             </a:pPr>
             <a:r>
-              <a:rPr sz="1150" b="0" i="0">
+              <a:rPr sz="1300" b="0" i="0">
                 <a:solidFill>
                   <a:srgbClr val="222B35"/>
                 </a:solidFill>
                 <a:latin typeface="Malgun Gothic"/>
               </a:rPr>
-              <a:t>PR4 통과는 컷 1/4, 포함 2/4로 잡음 수준이므로 회전의 승리를 주장하지 않는다.</a:t>
+              <a:t>PR4 통과가 컷 1/4 · 포함 2/4이므로 회전의 승리를 주장하지 않는다.</a:t>
             </a:r>
           </a:p>
           <a:p>
             <a:pPr algn="l">
               <a:lnSpc>
-                <a:spcPct val="112000"/>
+                <a:spcPct val="118000"/>
               </a:lnSpc>
               <a:spcBef>
                 <a:spcPts val="0"/>
@@ -19160,35 +18775,13 @@
               </a:spcAft>
             </a:pPr>
             <a:r>
-              <a:rPr sz="1150" b="0" i="0">
+              <a:rPr sz="1300" b="0" i="0">
                 <a:solidFill>
                   <a:srgbClr val="222B35"/>
                 </a:solidFill>
                 <a:latin typeface="Malgun Gothic"/>
               </a:rPr>
-              <a:t>빠른 채널을 전부 0으로 두어도 출력이 bit-identical이므로 회전 정보는 입력에 없다.</a:t>
-            </a:r>
-          </a:p>
-          <a:p>
-            <a:pPr algn="l">
-              <a:lnSpc>
-                <a:spcPct val="112000"/>
-              </a:lnSpc>
-              <a:spcBef>
-                <a:spcPts val="0"/>
-              </a:spcBef>
-              <a:spcAft>
-                <a:spcPts val="400"/>
-              </a:spcAft>
-            </a:pPr>
-            <a:r>
-              <a:rPr sz="1150" b="0" i="0">
-                <a:solidFill>
-                  <a:srgbClr val="222B35"/>
-                </a:solidFill>
-                <a:latin typeface="Malgun Gothic"/>
-              </a:rPr>
-              <a:t>우위는 회전이 실제로 변하는 방전에 집중되며(승률 34% → 55%), 구동 변수 NBI 토크가 미관측이다.</a:t>
+              <a:t>우위는 회전이 변하는 방전에 집중되며(승률 34% → 55%), 구동 변수 NBI 토크가 미관측이다.</a:t>
             </a:r>
           </a:p>
         </p:txBody>
@@ -19201,8 +18794,8 @@
         </p:nvSpPr>
         <p:spPr>
           <a:xfrm>
-            <a:off x="548640" y="4626864"/>
-            <a:ext cx="11155680" cy="1517904"/>
+            <a:off x="548640" y="4700016"/>
+            <a:ext cx="11155680" cy="1572768"/>
           </a:xfrm>
           <a:prstGeom prst="roundRect">
             <a:avLst/>
@@ -19245,8 +18838,8 @@
         </p:nvSpPr>
         <p:spPr>
           <a:xfrm>
-            <a:off x="658368" y="4928616"/>
-            <a:ext cx="822960" cy="822960"/>
+            <a:off x="658368" y="5029200"/>
+            <a:ext cx="914400" cy="914400"/>
           </a:xfrm>
           <a:prstGeom prst="roundRect">
             <a:avLst/>
@@ -19289,8 +18882,8 @@
         </p:nvSpPr>
         <p:spPr>
           <a:xfrm>
-            <a:off x="658368" y="4928616"/>
-            <a:ext cx="822960" cy="822960"/>
+            <a:off x="658368" y="5029200"/>
+            <a:ext cx="914400" cy="914400"/>
           </a:xfrm>
           <a:prstGeom prst="rect">
             <a:avLst/>
@@ -19315,7 +18908,7 @@
               </a:spcAft>
             </a:pPr>
             <a:r>
-              <a:rPr sz="2800" b="1" i="0">
+              <a:rPr sz="3000" b="1" i="0">
                 <a:solidFill>
                   <a:srgbClr val="FFFFFF"/>
                 </a:solidFill>
@@ -19334,8 +18927,8 @@
         </p:nvSpPr>
         <p:spPr>
           <a:xfrm>
-            <a:off x="1664208" y="4754880"/>
-            <a:ext cx="9875520" cy="411480"/>
+            <a:off x="1783080" y="4846320"/>
+            <a:ext cx="9784080" cy="438912"/>
           </a:xfrm>
           <a:prstGeom prst="rect">
             <a:avLst/>
@@ -19360,7 +18953,7 @@
               </a:spcAft>
             </a:pPr>
             <a:r>
-              <a:rPr sz="1650" b="1" i="0">
+              <a:rPr sz="1750" b="1" i="0">
                 <a:solidFill>
                   <a:srgbClr val="13335F"/>
                 </a:solidFill>
@@ -19379,8 +18972,8 @@
         </p:nvSpPr>
         <p:spPr>
           <a:xfrm>
-            <a:off x="1664208" y="5175504"/>
-            <a:ext cx="9875520" cy="914400"/>
+            <a:off x="1783080" y="5321808"/>
+            <a:ext cx="9784080" cy="841248"/>
           </a:xfrm>
           <a:prstGeom prst="rect">
             <a:avLst/>
@@ -19395,7 +18988,7 @@
           <a:p>
             <a:pPr algn="l">
               <a:lnSpc>
-                <a:spcPct val="112000"/>
+                <a:spcPct val="118000"/>
               </a:lnSpc>
               <a:spcBef>
                 <a:spcPts val="0"/>
@@ -19405,19 +18998,19 @@
               </a:spcAft>
             </a:pPr>
             <a:r>
-              <a:rPr sz="1150" b="0" i="0">
+              <a:rPr sz="1300" b="0" i="0">
                 <a:solidFill>
                   <a:srgbClr val="222B35"/>
                 </a:solidFill>
                 <a:latin typeface="Malgun Gothic"/>
               </a:rPr>
-              <a:t>연속 인과 문맥 약 50 ms에서 skill이 포화하고 승리 방전 비율이 0.52에서 0.66으로 올랐다.</a:t>
+              <a:t>약 50 ms의 연속 인과 문맥에서 skill이 포화하고 승리 방전 비율이 0.52에서 0.66으로 올랐다.</a:t>
             </a:r>
           </a:p>
           <a:p>
             <a:pPr algn="l">
               <a:lnSpc>
-                <a:spcPct val="112000"/>
+                <a:spcPct val="118000"/>
               </a:lnSpc>
               <a:spcBef>
                 <a:spcPts val="0"/>
@@ -19427,35 +19020,13 @@
               </a:spcAft>
             </a:pPr>
             <a:r>
-              <a:rPr sz="1150" b="0" i="0">
+              <a:rPr sz="1300" b="0" i="0">
                 <a:solidFill>
                   <a:srgbClr val="222B35"/>
                 </a:solidFill>
                 <a:latin typeface="Malgun Gothic"/>
               </a:rPr>
-              <a:t>순환·확장 합성곱·attention은 같은 문맥에서 0.023 이내로 동률이므로 비용(연산자 수)으로 선택한다.</a:t>
-            </a:r>
-          </a:p>
-          <a:p>
-            <a:pPr algn="l">
-              <a:lnSpc>
-                <a:spcPct val="112000"/>
-              </a:lnSpc>
-              <a:spcBef>
-                <a:spcPts val="0"/>
-              </a:spcBef>
-              <a:spcAft>
-                <a:spcPts val="400"/>
-              </a:spcAft>
-            </a:pPr>
-            <a:r>
-              <a:rPr sz="1150" b="0" i="0">
-                <a:solidFill>
-                  <a:srgbClr val="222B35"/>
-                </a:solidFill>
-                <a:latin typeface="Malgun Gothic"/>
-              </a:rPr>
-              <a:t>21,498 파라미터 모델이 백본과 동급(컷)이고 폭 26배 스윕이 평평하므로, 남은 레버는 데이터이다.</a:t>
+              <a:t>세 계열은 0.023 이내로 동률이므로 아키텍처는 비용으로 정하며, 남은 레버는 데이터이다.</a:t>
             </a:r>
           </a:p>
         </p:txBody>
@@ -21912,7 +21483,7 @@
                 </a:solidFill>
                 <a:latin typeface="Malgun Gothic"/>
               </a:rPr>
-              <a:t>skill_vs_pchip 컷 +0.17~+0.26, 포함 +0.23~+0.32로 4개 독립 분할 전부 shot 군집 95% CI가 0을 제외하였다(4/4+4/4). 인과 GP는 8/8 셀에서 이겼고, 최강 오프라인 평활기(GP)와는 동률이며 이를 상한으로 보고한다.</a:t>
+              <a:t>컷 +0.17~+0.26, 포함 +0.23~+0.32로 4개 분할 전부 CI가 0을 제외하였다(4/4+4/4). 인과 GP는 8/8, 오프라인 GP와는 동률이다.</a:t>
             </a:r>
           </a:p>
         </p:txBody>
@@ -22135,7 +21706,7 @@
                 </a:solidFill>
                 <a:latin typeface="Malgun Gothic"/>
               </a:rPr>
-              <a:t>실제 결측 in-domain 시점에서 인과 방법 대비 8/8 생존, 캠페인 경계 너머 PCHIP·인과 GP 대비 4/4+4/4이다. 대체된 윈도 대조군은 오프라인 우위를 잃었고(2/4·0/4) 그 원인은 드리프트로 측정되었다.</a:t>
+              <a:t>결측 재가중에서 인과 방법 대비 8/8, 캠페인 분할에서 PCHIP·인과 GP 대비 4/4+4/4이다. 윈도 대조군은 2/4·0/4로 붕괴하였다.</a:t>
             </a:r>
           </a:p>
         </p:txBody>
@@ -22358,7 +21929,7 @@
                 </a:solidFill>
                 <a:latin typeface="Malgun Gothic"/>
               </a:rPr>
-              <a:t>20 ms에서도 인과 GP를 이기지만 승리 방전 비율은 0.52이며 50–70 ms에서 0.66으로 평평해진다. 세 계열은 같은 문맥에서 0.023 이내로 동률이므로 아키텍처는 비용(연산자 수: 순환 O(1), 합성곱 O(log R), attention 4.3배 상수)으로 선택한다.</a:t>
+              <a:t>20 ms에서도 인과 GP를 이기나 승리 방전 비율이 0.52이며 50–70 ms에서 0.66으로 평평해진다. 세 계열은 0.023 이내로 동률이다.</a:t>
             </a:r>
           </a:p>
         </p:txBody>
@@ -22581,7 +22152,7 @@
                 </a:solidFill>
                 <a:latin typeface="Malgun Gothic"/>
               </a:rPr>
-              <a:t>PCHIP 대비 1/4·2/4이나 &gt; 15 ms 간극과 peak 층에서는 이겼다. 빠른 채널을 0으로 두어도 출력이 동일하고, 승률은 조용한 방전 34%·변동 방전 55%로 구동 변수(NBI 토크)의 부재를 가리킨다. 검정력 문제가 아니다.</a:t>
+              <a:t>PCHIP 대비 1/4·2/4이나 &gt; 15 ms 간극과 peak 층에서는 이겼다. 승률은 조용한 방전 34% · 변동 방전 55%로 구동 변수의 부재를 가리킨다.</a:t>
             </a:r>
           </a:p>
         </p:txBody>
@@ -23192,7 +22763,7 @@
         <p:spPr>
           <a:xfrm>
             <a:off x="502920" y="1371600"/>
-            <a:ext cx="5486400" cy="3566160"/>
+            <a:ext cx="5486400" cy="3246120"/>
           </a:xfrm>
           <a:prstGeom prst="roundRect">
             <a:avLst/>
@@ -23236,7 +22807,7 @@
         <p:spPr>
           <a:xfrm>
             <a:off x="502920" y="1371600"/>
-            <a:ext cx="109728" cy="3566160"/>
+            <a:ext cx="109728" cy="3246120"/>
           </a:xfrm>
           <a:prstGeom prst="rect">
             <a:avLst/>
@@ -23325,7 +22896,7 @@
         <p:spPr>
           <a:xfrm>
             <a:off x="731520" y="1938528"/>
-            <a:ext cx="5074920" cy="2834640"/>
+            <a:ext cx="5074920" cy="2560320"/>
           </a:xfrm>
           <a:prstGeom prst="rect">
             <a:avLst/>
@@ -23346,17 +22917,17 @@
                 <a:spcPts val="0"/>
               </a:spcBef>
               <a:spcAft>
-                <a:spcPts val="500"/>
-              </a:spcAft>
-            </a:pPr>
-            <a:r>
-              <a:rPr sz="1150" b="1" i="0">
+                <a:spcPts val="900"/>
+              </a:spcAft>
+            </a:pPr>
+            <a:r>
+              <a:rPr sz="1250" b="1" i="0">
                 <a:solidFill>
                   <a:srgbClr val="13335F"/>
                 </a:solidFill>
                 <a:latin typeface="Malgun Gothic"/>
               </a:rPr>
-              <a:t>●  검정력: test 방전 96(Tᵢ) / 60–66(V_rot)이 유의성의 구속조건이다.</a:t>
+              <a:t>●  검정력: test 방전 96(Tᵢ) · 60–66(V_rot)이 유의성을 구속한다.</a:t>
             </a:r>
           </a:p>
           <a:p>
@@ -23368,17 +22939,17 @@
                 <a:spcPts val="0"/>
               </a:spcBef>
               <a:spcAft>
-                <a:spcPts val="500"/>
-              </a:spcAft>
-            </a:pPr>
-            <a:r>
-              <a:rPr sz="950" b="0" i="0">
+                <a:spcPts val="900"/>
+              </a:spcAft>
+            </a:pPr>
+            <a:r>
+              <a:rPr sz="1050" b="0" i="0">
                 <a:solidFill>
                   <a:srgbClr val="222B35"/>
                 </a:solidFill>
                 <a:latin typeface="Malgun Gothic"/>
               </a:rPr>
-              <a:t>–  포함 모집단에서는 ≈1% 행이 SSE의 70–83%를 차지한다.</a:t>
+              <a:t>–  ≈1% 행이 SSE의 70–83%를 차지한다(손실은 꼬리 통계이다).</a:t>
             </a:r>
           </a:p>
           <a:p>
@@ -23390,11 +22961,11 @@
                 <a:spcPts val="0"/>
               </a:spcBef>
               <a:spcAft>
-                <a:spcPts val="500"/>
-              </a:spcAft>
-            </a:pPr>
-            <a:r>
-              <a:rPr sz="1150" b="1" i="0">
+                <a:spcPts val="900"/>
+              </a:spcAft>
+            </a:pPr>
+            <a:r>
+              <a:rPr sz="1250" b="1" i="0">
                 <a:solidFill>
                   <a:srgbClr val="13335F"/>
                 </a:solidFill>
@@ -23412,11 +22983,11 @@
                 <a:spcPts val="0"/>
               </a:spcBef>
               <a:spcAft>
-                <a:spcPts val="500"/>
-              </a:spcAft>
-            </a:pPr>
-            <a:r>
-              <a:rPr sz="1150" b="1" i="0">
+                <a:spcPts val="900"/>
+              </a:spcAft>
+            </a:pPr>
+            <a:r>
+              <a:rPr sz="1250" b="1" i="0">
                 <a:solidFill>
                   <a:srgbClr val="13335F"/>
                 </a:solidFill>
@@ -23434,11 +23005,11 @@
                 <a:spcPts val="0"/>
               </a:spcBef>
               <a:spcAft>
-                <a:spcPts val="500"/>
-              </a:spcAft>
-            </a:pPr>
-            <a:r>
-              <a:rPr sz="1150" b="1" i="0">
+                <a:spcPts val="900"/>
+              </a:spcAft>
+            </a:pPr>
+            <a:r>
+              <a:rPr sz="1250" b="1" i="0">
                 <a:solidFill>
                   <a:srgbClr val="13335F"/>
                 </a:solidFill>
@@ -23456,83 +23027,17 @@
                 <a:spcPts val="0"/>
               </a:spcBef>
               <a:spcAft>
-                <a:spcPts val="500"/>
-              </a:spcAft>
-            </a:pPr>
-            <a:r>
-              <a:rPr sz="1150" b="1" i="0">
+                <a:spcPts val="900"/>
+              </a:spcAft>
+            </a:pPr>
+            <a:r>
+              <a:rPr sz="1250" b="1" i="0">
                 <a:solidFill>
                   <a:srgbClr val="13335F"/>
                 </a:solidFill>
                 <a:latin typeface="Malgun Gothic"/>
               </a:rPr>
-              <a:t>●  캠페인은 한 시간 블록 위 초기화 4개이며 컷 run 2/4가 상한 종료였다.</a:t>
-            </a:r>
-          </a:p>
-          <a:p>
-            <a:pPr algn="l">
-              <a:lnSpc>
-                <a:spcPct val="108000"/>
-              </a:lnSpc>
-              <a:spcBef>
-                <a:spcPts val="0"/>
-              </a:spcBef>
-              <a:spcAft>
-                <a:spcPts val="500"/>
-              </a:spcAft>
-            </a:pPr>
-            <a:r>
-              <a:rPr sz="1150" b="1" i="0">
-                <a:solidFill>
-                  <a:srgbClr val="13335F"/>
-                </a:solidFill>
-                <a:latin typeface="Malgun Gothic"/>
-              </a:rPr>
-              <a:t>●  통합 재채점은 방법의 기대 skill이며 단일 체크포인트의 주장이 아니다.</a:t>
-            </a:r>
-          </a:p>
-          <a:p>
-            <a:pPr algn="l">
-              <a:lnSpc>
-                <a:spcPct val="108000"/>
-              </a:lnSpc>
-              <a:spcBef>
-                <a:spcPts val="0"/>
-              </a:spcBef>
-              <a:spcAft>
-                <a:spcPts val="500"/>
-              </a:spcAft>
-            </a:pPr>
-            <a:r>
-              <a:rPr sz="1150" b="1" i="0">
-                <a:solidFill>
-                  <a:srgbClr val="13335F"/>
-                </a:solidFill>
-                <a:latin typeface="Malgun Gothic"/>
-              </a:rPr>
-              <a:t>●  지연 절댓값은 기계 종속이며 1 ms 판정은 보류되었다.</a:t>
-            </a:r>
-          </a:p>
-          <a:p>
-            <a:pPr algn="l" lvl="1">
-              <a:lnSpc>
-                <a:spcPct val="108000"/>
-              </a:lnSpc>
-              <a:spcBef>
-                <a:spcPts val="0"/>
-              </a:spcBef>
-              <a:spcAft>
-                <a:spcPts val="500"/>
-              </a:spcAft>
-            </a:pPr>
-            <a:r>
-              <a:rPr sz="950" b="0" i="0">
-                <a:solidFill>
-                  <a:srgbClr val="222B35"/>
-                </a:solidFill>
-                <a:latin typeface="Malgun Gothic"/>
-              </a:rPr>
-              <a:t>–  단일 장치 · conformal은 marginal · 승패 공변량 분석은 탐색적이다.</a:t>
+              <a:t>●  단일 장치 · 캠페인은 한 시간 블록 · 1 ms 판정은 보류되었다.</a:t>
             </a:r>
           </a:p>
         </p:txBody>
@@ -23546,7 +23051,7 @@
         <p:spPr>
           <a:xfrm>
             <a:off x="6217920" y="1371600"/>
-            <a:ext cx="5486400" cy="3566160"/>
+            <a:ext cx="5486400" cy="3246120"/>
           </a:xfrm>
           <a:prstGeom prst="roundRect">
             <a:avLst/>
@@ -23590,7 +23095,7 @@
         <p:spPr>
           <a:xfrm>
             <a:off x="6217920" y="1371600"/>
-            <a:ext cx="109728" cy="3566160"/>
+            <a:ext cx="109728" cy="3246120"/>
           </a:xfrm>
           <a:prstGeom prst="rect">
             <a:avLst/>
@@ -23679,7 +23184,7 @@
         <p:spPr>
           <a:xfrm>
             <a:off x="6446520" y="1938528"/>
-            <a:ext cx="5074920" cy="2834640"/>
+            <a:ext cx="5074920" cy="2560320"/>
           </a:xfrm>
           <a:prstGeom prst="rect">
             <a:avLst/>
@@ -23700,17 +23205,17 @@
                 <a:spcPts val="0"/>
               </a:spcBef>
               <a:spcAft>
-                <a:spcPts val="600"/>
-              </a:spcAft>
-            </a:pPr>
-            <a:r>
-              <a:rPr sz="1200" b="1" i="0">
+                <a:spcPts val="900"/>
+              </a:spcAft>
+            </a:pPr>
+            <a:r>
+              <a:rPr sz="1250" b="1" i="0">
                 <a:solidFill>
                   <a:srgbClr val="13335F"/>
                 </a:solidFill>
                 <a:latin typeface="Malgun Gothic"/>
               </a:rPr>
-              <a:t>●  음성 결과는 그것을 뒤집을 측정을 지목할 때만 결론으로 인정한다.</a:t>
+              <a:t>●  음성 결과는 뒤집을 측정을 지목할 때만 결론으로 인정한다.</a:t>
             </a:r>
           </a:p>
           <a:p>
@@ -23722,11 +23227,11 @@
                 <a:spcPts val="0"/>
               </a:spcBef>
               <a:spcAft>
-                <a:spcPts val="600"/>
-              </a:spcAft>
-            </a:pPr>
-            <a:r>
-              <a:rPr sz="1200" b="1" i="0">
+                <a:spcPts val="900"/>
+              </a:spcAft>
+            </a:pPr>
+            <a:r>
+              <a:rPr sz="1250" b="1" i="0">
                 <a:solidFill>
                   <a:srgbClr val="E8743B"/>
                 </a:solidFill>
@@ -23744,11 +23249,11 @@
                 <a:spcPts val="0"/>
               </a:spcBef>
               <a:spcAft>
-                <a:spcPts val="600"/>
-              </a:spcAft>
-            </a:pPr>
-            <a:r>
-              <a:rPr sz="1000" b="0" i="0">
+                <a:spcPts val="900"/>
+              </a:spcAft>
+            </a:pPr>
+            <a:r>
+              <a:rPr sz="1050" b="0" i="0">
                 <a:solidFill>
                   <a:srgbClr val="222B35"/>
                 </a:solidFill>
@@ -23766,11 +23271,11 @@
                 <a:spcPts val="0"/>
               </a:spcBef>
               <a:spcAft>
-                <a:spcPts val="600"/>
-              </a:spcAft>
-            </a:pPr>
-            <a:r>
-              <a:rPr sz="1200" b="1" i="0">
+                <a:spcPts val="900"/>
+              </a:spcAft>
+            </a:pPr>
+            <a:r>
+              <a:rPr sz="1250" b="1" i="0">
                 <a:solidFill>
                   <a:srgbClr val="E8743B"/>
                 </a:solidFill>
@@ -23788,17 +23293,39 @@
                 <a:spcPts val="0"/>
               </a:spcBef>
               <a:spcAft>
-                <a:spcPts val="600"/>
-              </a:spcAft>
-            </a:pPr>
-            <a:r>
-              <a:rPr sz="1000" b="0" i="0">
+                <a:spcPts val="900"/>
+              </a:spcAft>
+            </a:pPr>
+            <a:r>
+              <a:rPr sz="1050" b="0" i="0">
                 <a:solidFill>
                   <a:srgbClr val="222B35"/>
                 </a:solidFill>
                 <a:latin typeface="Malgun Gothic"/>
               </a:rPr>
-              <a:t>–  B.6 shot 집합(test 4 · pool 6 · companion 2)이 동결되어 있다.</a:t>
+              <a:t>–  B.6 shot 집합이 동결되어 있으며, 변동 3분위의 승률이 먼저 올라야 한다.</a:t>
+            </a:r>
+          </a:p>
+          <a:p>
+            <a:pPr algn="l">
+              <a:lnSpc>
+                <a:spcPct val="108000"/>
+              </a:lnSpc>
+              <a:spcBef>
+                <a:spcPts val="0"/>
+              </a:spcBef>
+              <a:spcAft>
+                <a:spcPts val="900"/>
+              </a:spcAft>
+            </a:pPr>
+            <a:r>
+              <a:rPr sz="1250" b="1" i="0">
+                <a:solidFill>
+                  <a:srgbClr val="E8743B"/>
+                </a:solidFill>
+                <a:latin typeface="Malgun Gothic"/>
+              </a:rPr>
+              <a:t>●  ③ NBI 토크 채널을 확보한다(회전의 원인 변수).</a:t>
             </a:r>
           </a:p>
           <a:p>
@@ -23810,83 +23337,17 @@
                 <a:spcPts val="0"/>
               </a:spcBef>
               <a:spcAft>
-                <a:spcPts val="600"/>
-              </a:spcAft>
-            </a:pPr>
-            <a:r>
-              <a:rPr sz="1000" b="0" i="0">
+                <a:spcPts val="900"/>
+              </a:spcAft>
+            </a:pPr>
+            <a:r>
+              <a:rPr sz="1050" b="0" i="0">
                 <a:solidFill>
                   <a:srgbClr val="222B35"/>
                 </a:solidFill>
                 <a:latin typeface="Malgun Gothic"/>
               </a:rPr>
-              <a:t>–  예측: 변동 3분위의 V_rot 승률이 먼저 올라야 메커니즘이 맞다.</a:t>
-            </a:r>
-          </a:p>
-          <a:p>
-            <a:pPr algn="l">
-              <a:lnSpc>
-                <a:spcPct val="108000"/>
-              </a:lnSpc>
-              <a:spcBef>
-                <a:spcPts val="0"/>
-              </a:spcBef>
-              <a:spcAft>
-                <a:spcPts val="600"/>
-              </a:spcAft>
-            </a:pPr>
-            <a:r>
-              <a:rPr sz="1200" b="1" i="0">
-                <a:solidFill>
-                  <a:srgbClr val="E8743B"/>
-                </a:solidFill>
-                <a:latin typeface="Malgun Gothic"/>
-              </a:rPr>
-              <a:t>●  ③ NBI 토크 채널을 확보한다(회전의 원인 변수).</a:t>
-            </a:r>
-          </a:p>
-          <a:p>
-            <a:pPr algn="l" lvl="1">
-              <a:lnSpc>
-                <a:spcPct val="108000"/>
-              </a:lnSpc>
-              <a:spcBef>
-                <a:spcPts val="0"/>
-              </a:spcBef>
-              <a:spcAft>
-                <a:spcPts val="600"/>
-              </a:spcAft>
-            </a:pPr>
-            <a:r>
-              <a:rPr sz="1000" b="0" i="0">
-                <a:solidFill>
-                  <a:srgbClr val="222B35"/>
-                </a:solidFill>
-                <a:latin typeface="Malgun Gothic"/>
-              </a:rPr>
               <a:t>–  Tₑ~Tᵢ r = +0.353 vs Tₑ~V_rot r = +0.024이므로 power ≠ torque이다.</a:t>
-            </a:r>
-          </a:p>
-          <a:p>
-            <a:pPr algn="l">
-              <a:lnSpc>
-                <a:spcPct val="108000"/>
-              </a:lnSpc>
-              <a:spcBef>
-                <a:spcPts val="0"/>
-              </a:spcBef>
-              <a:spcAft>
-                <a:spcPts val="600"/>
-              </a:spcAft>
-            </a:pPr>
-            <a:r>
-              <a:rPr sz="1200" b="1" i="0">
-                <a:solidFill>
-                  <a:srgbClr val="5B6670"/>
-                </a:solidFill>
-                <a:latin typeface="Malgun Gothic"/>
-              </a:rPr>
-              <a:t>●  크기·문맥·계열 축은 닫혔다: 21k = 백본(컷), 폭 26배 평평, 계열 동률.</a:t>
             </a:r>
           </a:p>
         </p:txBody>
@@ -23899,8 +23360,8 @@
         </p:nvSpPr>
         <p:spPr>
           <a:xfrm>
-            <a:off x="502920" y="5084064"/>
-            <a:ext cx="11201400" cy="859536"/>
+            <a:off x="502920" y="4846320"/>
+            <a:ext cx="11201400" cy="1097280"/>
           </a:xfrm>
           <a:prstGeom prst="roundRect">
             <a:avLst/>
@@ -23943,8 +23404,8 @@
         </p:nvSpPr>
         <p:spPr>
           <a:xfrm>
-            <a:off x="777240" y="5166360"/>
-            <a:ext cx="10698480" cy="749808"/>
+            <a:off x="777240" y="4983480"/>
+            <a:ext cx="10698480" cy="868680"/>
           </a:xfrm>
           <a:prstGeom prst="rect">
             <a:avLst/>
@@ -23969,7 +23430,7 @@
               </a:spcAft>
             </a:pPr>
             <a:r>
-              <a:rPr sz="1250" b="1" i="0">
+              <a:rPr sz="1350" b="1" i="0">
                 <a:solidFill>
                   <a:srgbClr val="E8743B"/>
                 </a:solidFill>
@@ -23991,13 +23452,13 @@
               </a:spcAft>
             </a:pPr>
             <a:r>
-              <a:rPr sz="1250" b="0" i="0">
+              <a:rPr sz="1350" b="0" i="0">
                 <a:solidFill>
                   <a:srgbClr val="FFFFFF"/>
                 </a:solidFill>
                 <a:latin typeface="Malgun Gothic"/>
               </a:rPr>
-              <a:t>① 두 모집단 공동 1차 유지 ② V_rot 프로토콜 불변(재학습 없음, anchored 비교엔 SSE 비중 병기) ③ B.6 μs shot 집합 동결(test 4 / pool 6 / companion 2) ④ 양자 가지는 하드웨어 검증 후 음성으로 종결.</a:t>
+              <a:t>① 두 모집단 공동 1차 유지 ② V_rot 프로토콜 불변 ③ B.6 μs shot 집합 동결 ④ 양자 가지는 하드웨어 검증 후 음성으로 종결.</a:t>
             </a:r>
           </a:p>
         </p:txBody>
@@ -25461,7 +24922,7 @@
                 </a:solidFill>
                 <a:latin typeface="Malgun Gothic"/>
               </a:rPr>
-              <a:t>BES 9 ch는 밀도요동 nₑ의 공간 구조를 제공하여 Tᵢ의 단서가 된다.</a:t>
+              <a:t>BES 9 ch(밀도요동 nₑ)와 ECEI 4 ch(전자온도 Tₑ)는 충돌 e–i 결합을</a:t>
             </a:r>
           </a:p>
           <a:p>
@@ -25483,7 +24944,7 @@
                 </a:solidFill>
                 <a:latin typeface="Malgun Gothic"/>
               </a:rPr>
-              <a:t>ECEI 4 ch는 전자온도 Tₑ의 2D 영상을 제공하여 Tᵢ의 단서가 된다.</a:t>
+              <a:t>통해 Tᵢ의 단서가 되며, 같은 격자에서 100% 측정된다.</a:t>
             </a:r>
           </a:p>
           <a:p>
@@ -25505,7 +24966,7 @@
                 </a:solidFill>
                 <a:latin typeface="Malgun Gothic"/>
               </a:rPr>
-              <a:t>물리 경로는 충돌 e–i 결합이다.</a:t>
+              <a:t>Mirnov 2 ch는 kHz dB/dt를 100 Hz로 데시메이트한 신호이며,</a:t>
             </a:r>
           </a:p>
           <a:p>
@@ -25527,51 +24988,7 @@
                 </a:solidFill>
                 <a:latin typeface="Malgun Gothic"/>
               </a:rPr>
-              <a:t>Mirnov 2 ch는 kHz dB/dt를 100 Hz로 데시메이트한 신호이며,</a:t>
-            </a:r>
-          </a:p>
-          <a:p>
-            <a:pPr algn="l">
-              <a:lnSpc>
-                <a:spcPct val="110000"/>
-              </a:lnSpc>
-              <a:spcBef>
-                <a:spcPts val="0"/>
-              </a:spcBef>
-              <a:spcAft>
-                <a:spcPts val="300"/>
-              </a:spcAft>
-            </a:pPr>
-            <a:r>
-              <a:rPr sz="1250" b="0" i="0">
-                <a:solidFill>
-                  <a:srgbClr val="222B35"/>
-                </a:solidFill>
-                <a:latin typeface="Malgun Gothic"/>
-              </a:rPr>
-              <a:t>lag-1 자기상관이 -0.009(BES +0.568)로 이 격자에서 백색잡음이다.</a:t>
-            </a:r>
-          </a:p>
-          <a:p>
-            <a:pPr algn="l">
-              <a:lnSpc>
-                <a:spcPct val="110000"/>
-              </a:lnSpc>
-              <a:spcBef>
-                <a:spcPts val="0"/>
-              </a:spcBef>
-              <a:spcAft>
-                <a:spcPts val="300"/>
-              </a:spcAft>
-            </a:pPr>
-            <a:r>
-              <a:rPr sz="1250" b="0" i="0">
-                <a:solidFill>
-                  <a:srgbClr val="222B35"/>
-                </a:solidFill>
-                <a:latin typeface="Malgun Gothic"/>
-              </a:rPr>
-              <a:t>빠른 진단은 격자에서 100% 측정된다.</a:t>
+              <a:t>lag-1 자기상관이 -0.009로 이 격자에서 백색잡음이다.</a:t>
             </a:r>
           </a:p>
         </p:txBody>
@@ -26036,7 +25453,7 @@
                 </a:solidFill>
                 <a:latin typeface="Malgun Gothic"/>
               </a:rPr>
-              <a:t>· 결측은 저 SNR · ELM · 천이에 집중된다.</a:t>
+              <a:t>· 결측은 저 SNR · ELM · 천이에 집중되므로 MNAR이며,</a:t>
             </a:r>
           </a:p>
           <a:p>
@@ -26058,7 +25475,7 @@
                 </a:solidFill>
                 <a:latin typeface="Malgun Gothic"/>
               </a:rPr>
-              <a:t>  MNAR이므로 관측점 skill은 낙관적 상한이다.</a:t>
+              <a:t>  관측점 skill은 낙관적 상한이다.</a:t>
             </a:r>
           </a:p>
         </p:txBody>
@@ -26194,28 +25611,6 @@
                 <a:latin typeface="Malgun Gothic"/>
               </a:rPr>
               <a:t>CES가 결측된 10 ms 시점에서, 동시각 빠른 진단과 과거 CES 이력만으로 CES 자체의 시간 보간이 복원할 수 없는 정보를 회복할 수 있는가를 묻는다.</a:t>
-            </a:r>
-          </a:p>
-          <a:p>
-            <a:pPr algn="l">
-              <a:lnSpc>
-                <a:spcPct val="114000"/>
-              </a:lnSpc>
-              <a:spcBef>
-                <a:spcPts val="0"/>
-              </a:spcBef>
-              <a:spcAft>
-                <a:spcPts val="300"/>
-              </a:spcAft>
-            </a:pPr>
-            <a:r>
-              <a:rPr sz="1200" b="0" i="0">
-                <a:solidFill>
-                  <a:srgbClr val="E8ECF1"/>
-                </a:solidFill>
-                <a:latin typeface="Malgun Gothic"/>
-              </a:rPr>
-              <a:t>핵심 비대칭의 예고: 빠른 진단은 Tᵢ 정보는 운반하지만 V_rot 정보는 거의 운반하지 않는다고 예측되었고, 결과에서 확인되었다.</a:t>
             </a:r>
           </a:p>
         </p:txBody>
@@ -26634,7 +26029,7 @@
                 </a:solidFill>
                 <a:latin typeface="Malgun Gothic"/>
               </a:rPr>
-              <a:t>‘V_rot 결측 24%’는 NaN만 센 값이다. </a:t>
+              <a:t>‘V_rot 결측 24%’는 NaN만 센 값이다. 직전 관측값을 그대로 복사한 held 행을 합치면 실질 무정보 비율은 65.0%이다(641 shot 전수).</a:t>
             </a:r>
             <a:r>
               <a:rPr sz="1450" b="0" i="0">
@@ -26643,7 +26038,7 @@
                 </a:solidFill>
                 <a:latin typeface="Malgun Gothic"/>
               </a:rPr>
-              <a:t>직전 관측값을 그대로 복사한 held 행을 합치면 실질 무정보 비율은 </a:t>
+              <a:t/>
             </a:r>
             <a:r>
               <a:rPr sz="1450" b="1" i="0">
@@ -26652,7 +26047,7 @@
                 </a:solidFill>
                 <a:latin typeface="Malgun Gothic"/>
               </a:rPr>
-              <a:t>65.0%</a:t>
+              <a:t/>
             </a:r>
             <a:r>
               <a:rPr sz="1450" b="0" i="0">
@@ -26661,7 +26056,7 @@
                 </a:solidFill>
                 <a:latin typeface="Malgun Gothic"/>
               </a:rPr>
-              <a:t>로 나타났다(641 shot · 247,207행 전수 집계).</a:t>
+              <a:t/>
             </a:r>
           </a:p>
         </p:txBody>
@@ -28568,7 +27963,7 @@
                 </a:solidFill>
                 <a:latin typeface="Malgun Gothic"/>
               </a:rPr>
-              <a:t>확정 프로토콜: </a:t>
+              <a:t>확정 프로토콜: 지도 타깃·이력 입력·정규화 통계·모든 보간 앵커에서 held를 제거하고 실제 측정만 채점하였다.</a:t>
             </a:r>
             <a:r>
               <a:rPr sz="1200" b="0" i="0">
@@ -28577,38 +27972,7 @@
                 </a:solidFill>
                 <a:latin typeface="Malgun Gothic"/>
               </a:rPr>
-              <a:t>지도 타깃·이력 입력·정규화 통계·모든 기준선의 보간 앵커에서 held를 동일하게 제거하고 실제 측정만 채점하였다.</a:t>
-            </a:r>
-          </a:p>
-          <a:p>
-            <a:pPr algn="l">
-              <a:lnSpc>
-                <a:spcPct val="112000"/>
-              </a:lnSpc>
-              <a:spcBef>
-                <a:spcPts val="0"/>
-              </a:spcBef>
-              <a:spcAft>
-                <a:spcPts val="200"/>
-              </a:spcAft>
-            </a:pPr>
-            <a:r>
-              <a:rPr sz="1200" b="1" i="0">
-                <a:solidFill>
-                  <a:srgbClr val="13335F"/>
-                </a:solidFill>
-                <a:latin typeface="Malgun Gothic"/>
-              </a:rPr>
-              <a:t>판정 기준: </a:t>
-            </a:r>
-            <a:r>
-              <a:rPr sz="1200" b="0" i="0">
-                <a:solidFill>
-                  <a:srgbClr val="222B35"/>
-                </a:solidFill>
-                <a:latin typeface="Malgun Gothic"/>
-              </a:rPr>
-              <a:t>연속 블록 안에서 직전 관측값과 부동소수점까지 동일한 행으로 정의하였다. CES_TI는 226,991행 중 1행에 그쳤다.</a:t>
+              <a:t/>
             </a:r>
           </a:p>
         </p:txBody>
@@ -29258,28 +28622,6 @@
                 </a:solidFill>
                 <a:latin typeface="Malgun Gothic"/>
               </a:rPr>
-              <a:t>run 정점은 관측 이웃 평균의 13배(IQR 6–26배)이다.</a:t>
-            </a:r>
-          </a:p>
-          <a:p>
-            <a:pPr algn="l">
-              <a:lnSpc>
-                <a:spcPct val="110000"/>
-              </a:lnSpc>
-              <a:spcBef>
-                <a:spcPts val="0"/>
-              </a:spcBef>
-              <a:spcAft>
-                <a:spcPts val="300"/>
-              </a:spcAft>
-            </a:pPr>
-            <a:r>
-              <a:rPr sz="1250" b="0" i="0">
-                <a:solidFill>
-                  <a:srgbClr val="222B35"/>
-                </a:solidFill>
-                <a:latin typeface="Malgun Gothic"/>
-              </a:rPr>
               <a:t>어떤 방법으로도 예측되지 않으며 보간 앵커를 오염시킨다.</a:t>
             </a:r>
           </a:p>
@@ -29689,29 +29031,7 @@
                 </a:solidFill>
                 <a:latin typeface="Malgun Gothic"/>
               </a:rPr>
-              <a:t>●  값 컷은 일방향 프록시이다. 하향 dip 4,965행은 손대지 않고, 2배 이상 상향 이상치의 19%만 제거한다.</a:t>
-            </a:r>
-          </a:p>
-          <a:p>
-            <a:pPr algn="l">
-              <a:lnSpc>
-                <a:spcPct val="108000"/>
-              </a:lnSpc>
-              <a:spcBef>
-                <a:spcPts val="0"/>
-              </a:spcBef>
-              <a:spcAft>
-                <a:spcPts val="600"/>
-              </a:spcAft>
-            </a:pPr>
-            <a:r>
-              <a:rPr sz="1300" b="1" i="0">
-                <a:solidFill>
-                  <a:srgbClr val="13335F"/>
-                </a:solidFill>
-                <a:latin typeface="Malgun Gothic"/>
-              </a:rPr>
-              <a:t>●  V_rot 스파이크(&gt; 1,000 km/s 119행 / 16 방전, 101행은 한 방전의 한 블록)는 컷 없이 두고 SSE 비중을 병기한다.</a:t>
+              <a:t>●  값 컷은 일방향 프록시이며, V_rot 스파이크는 컷 없이 SSE 비중을 병기한다.</a:t>
             </a:r>
           </a:p>
         </p:txBody>
@@ -31277,7 +30597,7 @@
                 </a:solidFill>
                 <a:latin typeface="Malgun Gothic"/>
               </a:rPr>
-              <a:t>641 방전(shot 30801–32751), 10 ms 격자, 247,207행이다. 세그먼트는 0.5 s 이상의 간극에서 분리되고 전형적 파일은 주 세그먼트 1개(중앙값 301행 ≈ 3.0 s)이며, 모델 입력도 보간도 이 경계를 넘지 않는다. </a:t>
+              <a:t>641 방전 · 10 ms 격자 · 247,207행이며, 모델 입력도 보간도 세그먼트 경계를 넘지 않는다. </a:t>
             </a:r>
             <a:r>
               <a:rPr sz="1250" b="1" i="0">
@@ -31286,7 +30606,7 @@
                 </a:solidFill>
                 <a:latin typeface="Malgun Gothic"/>
               </a:rPr>
-              <a:t>TEST(seed 42, 컷)는 Tᵢ 32,589행 / 96 방전, V_rot 10,463행 / 60 방전이며 선택이 끝날 때까지 봉인되었다.</a:t>
+              <a:t>TEST(seed 42, 컷)는 Tᵢ 32,589행 / 96 방전이며 선택이 끝날 때까지 봉인되었다.</a:t>
             </a:r>
           </a:p>
         </p:txBody>
@@ -31486,7 +30806,7 @@
                 </a:solidFill>
                 <a:latin typeface="Malgun Gothic"/>
               </a:rPr>
-              <a:t>윈도는 진단 입력이 완전하고 타깃이 1개 이상 관측된 행만 쓴다.</a:t>
+              <a:t>윈도는 타깃이 1개 이상 관측된 행만, 시퀀스는 라벨 없는 행을</a:t>
             </a:r>
           </a:p>
           <a:p>
@@ -31508,29 +30828,7 @@
                 </a:solidFill>
                 <a:latin typeface="Malgun Gothic"/>
               </a:rPr>
-              <a:t>시퀀스는 라벨 없는 행을 맥락으로만 쓴다.</a:t>
-            </a:r>
-          </a:p>
-          <a:p>
-            <a:pPr algn="l">
-              <a:lnSpc>
-                <a:spcPct val="110000"/>
-              </a:lnSpc>
-              <a:spcBef>
-                <a:spcPts val="0"/>
-              </a:spcBef>
-              <a:spcAft>
-                <a:spcPts val="300"/>
-              </a:spcAft>
-            </a:pPr>
-            <a:r>
-              <a:rPr sz="1200" b="0" i="0">
-                <a:solidFill>
-                  <a:srgbClr val="222B35"/>
-                </a:solidFill>
-                <a:latin typeface="Malgun Gothic"/>
-              </a:rPr>
-              <a:t>어느 프레이밍도 타깃 행 자신의 값을 읽지 않는다.</a:t>
+              <a:t>맥락으로만 쓴다. 어느 쪽도 타깃 행 자신의 값을 읽지 않는다.</a:t>
             </a:r>
           </a:p>
         </p:txBody>
@@ -31752,29 +31050,7 @@
                 </a:solidFill>
                 <a:latin typeface="Malgun Gothic"/>
               </a:rPr>
-              <a:t>두 타깃 필수 필터는 라벨 행의 약 28%를 버렸었다.</a:t>
-            </a:r>
-          </a:p>
-          <a:p>
-            <a:pPr algn="l">
-              <a:lnSpc>
-                <a:spcPct val="110000"/>
-              </a:lnSpc>
-              <a:spcBef>
-                <a:spcPts val="0"/>
-              </a:spcBef>
-              <a:spcAft>
-                <a:spcPts val="300"/>
-              </a:spcAft>
-            </a:pPr>
-            <a:r>
-              <a:rPr sz="1200" b="0" i="0">
-                <a:solidFill>
-                  <a:srgbClr val="222B35"/>
-                </a:solidFill>
-                <a:latin typeface="Malgun Gothic"/>
-              </a:rPr>
-              <a:t>이 필터의 제거는 순수한 데이터 이득이다.</a:t>
+              <a:t>두 타깃 필수 필터는 라벨의 약 28%를 버렸었다.</a:t>
             </a:r>
           </a:p>
         </p:txBody>
@@ -31974,29 +31250,7 @@
                 </a:solidFill>
                 <a:latin typeface="Malgun Gothic"/>
               </a:rPr>
-              <a:t>정규화 통계는 학습 파일에서만 추정하였다(희소 타깃은 NaN 인지).</a:t>
-            </a:r>
-          </a:p>
-          <a:p>
-            <a:pPr algn="l">
-              <a:lnSpc>
-                <a:spcPct val="110000"/>
-              </a:lnSpc>
-              <a:spcBef>
-                <a:spcPts val="0"/>
-              </a:spcBef>
-              <a:spcAft>
-                <a:spcPts val="300"/>
-              </a:spcAft>
-            </a:pPr>
-            <a:r>
-              <a:rPr sz="1200" b="0" i="0">
-                <a:solidFill>
-                  <a:srgbClr val="222B35"/>
-                </a:solidFill>
-                <a:latin typeface="Malgun Gothic"/>
-              </a:rPr>
-              <a:t>시퀀스 모델은 shot별 입력 표준화를 추가로 적용하였다.</a:t>
+              <a:t>정규화 통계는 학습 파일에서만 추정하였다.</a:t>
             </a:r>
           </a:p>
           <a:p>
@@ -32218,7 +31472,7 @@
                 </a:solidFill>
                 <a:latin typeface="Malgun Gothic"/>
               </a:rPr>
-              <a:t>지도 타깃·이력 입력·정규화 통계·보간 앵커에서 동일하게 제거하였다.</a:t>
+              <a:t>지도 타깃·이력·정규화·보간 앵커에서 동일하게 제거하였다.</a:t>
             </a:r>
           </a:p>
           <a:p>
@@ -32240,7 +31494,7 @@
                 </a:solidFill>
                 <a:latin typeface="Malgun Gothic"/>
               </a:rPr>
-              <a:t>대가는 PR2 폴백률 Tᵢ 0.3–0.4%, V_rot 40–44%이다.</a:t>
+              <a:t>대가는 PR2 폴백률 V_rot 40–44%이며, 어떤 arm도 forward-fill로</a:t>
             </a:r>
           </a:p>
           <a:p>
@@ -32262,7 +31516,7 @@
                 </a:solidFill>
                 <a:latin typeface="Malgun Gothic"/>
               </a:rPr>
-              <a:t>따라서 어떤 arm도 forward-fill로 점수를 얻지 못한다.</a:t>
+              <a:t>점수를 얻지 못한다.</a:t>
             </a:r>
           </a:p>
         </p:txBody>
@@ -33083,28 +32337,6 @@
               <a:t>타깃 [Tᵢ, V_rot]와 타깃별 마스크 m ∈ {0,1}²를 가진다.</a:t>
             </a:r>
           </a:p>
-          <a:p>
-            <a:pPr algn="l">
-              <a:lnSpc>
-                <a:spcPct val="110000"/>
-              </a:lnSpc>
-              <a:spcBef>
-                <a:spcPts val="0"/>
-              </a:spcBef>
-              <a:spcAft>
-                <a:spcPts val="300"/>
-              </a:spcAft>
-            </a:pPr>
-            <a:r>
-              <a:rPr sz="1250" b="0" i="0">
-                <a:solidFill>
-                  <a:srgbClr val="222B35"/>
-                </a:solidFill>
-                <a:latin typeface="Malgun Gothic"/>
-              </a:rPr>
-              <a:t>파일당 샘플 상한은 500으로 사전등록되었다.</a:t>
-            </a:r>
-          </a:p>
         </p:txBody>
       </p:sp>
       <p:sp>
@@ -33302,51 +32534,7 @@
                 </a:solidFill>
                 <a:latin typeface="Malgun Gothic"/>
               </a:rPr>
-              <a:t>라벨 유무와 무관하며 희소성은 loss가 처리한다.</a:t>
-            </a:r>
-          </a:p>
-          <a:p>
-            <a:pPr algn="l">
-              <a:lnSpc>
-                <a:spcPct val="110000"/>
-              </a:lnSpc>
-              <a:spcBef>
-                <a:spcPts val="0"/>
-              </a:spcBef>
-              <a:spcAft>
-                <a:spcPts val="300"/>
-              </a:spcAft>
-            </a:pPr>
-            <a:r>
-              <a:rPr sz="1250" b="0" i="0">
-                <a:solidFill>
-                  <a:srgbClr val="222B35"/>
-                </a:solidFill>
-                <a:latin typeface="Malgun Gothic"/>
-              </a:rPr>
               <a:t>스텝당 22채널이며 z-score 빠른 채널 15와</a:t>
-            </a:r>
-          </a:p>
-          <a:p>
-            <a:pPr algn="l">
-              <a:lnSpc>
-                <a:spcPct val="110000"/>
-              </a:lnSpc>
-              <a:spcBef>
-                <a:spcPts val="0"/>
-              </a:spcBef>
-              <a:spcAft>
-                <a:spcPts val="300"/>
-              </a:spcAft>
-            </a:pPr>
-            <a:r>
-              <a:rPr sz="1250" b="0" i="0">
-                <a:solidFill>
-                  <a:srgbClr val="222B35"/>
-                </a:solidFill>
-                <a:latin typeface="Malgun Gothic"/>
-              </a:rPr>
-              <a:t>log1p(Δt), 타깃별(이월값·신선도·flag) 3×2로 구성된다.</a:t>
             </a:r>
           </a:p>
         </p:txBody>
@@ -33547,50 +32735,6 @@
                 <a:latin typeface="Malgun Gothic"/>
               </a:rPr>
               <a:t>불규칙 관측 패턴을 명시적으로 노출한다.</a:t>
-            </a:r>
-          </a:p>
-          <a:p>
-            <a:pPr algn="l">
-              <a:lnSpc>
-                <a:spcPct val="110000"/>
-              </a:lnSpc>
-              <a:spcBef>
-                <a:spcPts val="0"/>
-              </a:spcBef>
-              <a:spcAft>
-                <a:spcPts val="300"/>
-              </a:spcAft>
-            </a:pPr>
-            <a:r>
-              <a:rPr sz="1250" b="0" i="0">
-                <a:solidFill>
-                  <a:srgbClr val="222B35"/>
-                </a:solidFill>
-                <a:latin typeface="Malgun Gothic"/>
-              </a:rPr>
-              <a:t>과거 CES 값의 신뢰도는 10 ms 전인지</a:t>
-            </a:r>
-          </a:p>
-          <a:p>
-            <a:pPr algn="l">
-              <a:lnSpc>
-                <a:spcPct val="110000"/>
-              </a:lnSpc>
-              <a:spcBef>
-                <a:spcPts val="0"/>
-              </a:spcBef>
-              <a:spcAft>
-                <a:spcPts val="300"/>
-              </a:spcAft>
-            </a:pPr>
-            <a:r>
-              <a:rPr sz="1250" b="0" i="0">
-                <a:solidFill>
-                  <a:srgbClr val="222B35"/>
-                </a:solidFill>
-                <a:latin typeface="Malgun Gothic"/>
-              </a:rPr>
-              <a:t>200 ms 전인지에 강하게 의존한다.</a:t>
             </a:r>
           </a:p>
         </p:txBody>
